--- a/presentation/dsfs_ft_35_Projet_REnergies_efficiency_prediction.pptx
+++ b/presentation/dsfs_ft_35_Projet_REnergies_efficiency_prediction.pptx
@@ -6,42 +6,41 @@
     <p:sldMasterId id="2147483660" r:id="rId2"/>
   </p:sldMasterIdLst>
   <p:notesMasterIdLst>
-    <p:notesMasterId r:id="rId12"/>
+    <p:notesMasterId r:id="rId11"/>
   </p:notesMasterIdLst>
   <p:sldIdLst>
     <p:sldId id="256" r:id="rId3"/>
     <p:sldId id="263" r:id="rId4"/>
     <p:sldId id="286" r:id="rId5"/>
-    <p:sldId id="272" r:id="rId6"/>
+    <p:sldId id="274" r:id="rId6"/>
     <p:sldId id="270" r:id="rId7"/>
     <p:sldId id="273" r:id="rId8"/>
-    <p:sldId id="274" r:id="rId9"/>
-    <p:sldId id="275" r:id="rId10"/>
-    <p:sldId id="271" r:id="rId11"/>
+    <p:sldId id="275" r:id="rId9"/>
+    <p:sldId id="271" r:id="rId10"/>
   </p:sldIdLst>
   <p:sldSz cx="9144000" cy="5143500" type="screen16x9"/>
   <p:notesSz cx="6858000" cy="9144000"/>
   <p:embeddedFontLst>
     <p:embeddedFont>
       <p:font typeface="Inter" panose="020B0604020202020204" charset="0"/>
-      <p:regular r:id="rId13"/>
-      <p:bold r:id="rId14"/>
-      <p:italic r:id="rId15"/>
-      <p:boldItalic r:id="rId16"/>
+      <p:regular r:id="rId12"/>
+      <p:bold r:id="rId13"/>
+      <p:italic r:id="rId14"/>
+      <p:boldItalic r:id="rId15"/>
     </p:embeddedFont>
     <p:embeddedFont>
       <p:font typeface="Inter Medium" panose="020B0604020202020204" charset="0"/>
-      <p:regular r:id="rId17"/>
-      <p:bold r:id="rId18"/>
-      <p:italic r:id="rId19"/>
-      <p:boldItalic r:id="rId20"/>
+      <p:regular r:id="rId16"/>
+      <p:bold r:id="rId17"/>
+      <p:italic r:id="rId18"/>
+      <p:boldItalic r:id="rId19"/>
     </p:embeddedFont>
     <p:embeddedFont>
       <p:font typeface="Inter SemiBold" panose="020B0604020202020204" charset="0"/>
-      <p:regular r:id="rId21"/>
-      <p:bold r:id="rId22"/>
-      <p:italic r:id="rId23"/>
-      <p:boldItalic r:id="rId24"/>
+      <p:regular r:id="rId20"/>
+      <p:bold r:id="rId21"/>
+      <p:italic r:id="rId22"/>
+      <p:boldItalic r:id="rId23"/>
     </p:embeddedFont>
   </p:embeddedFontLst>
   <p:defaultTextStyle>
@@ -284,7 +283,7 @@
 <file path=ppt/revisionInfo.xml><?xml version="1.0" encoding="utf-8"?>
 <p1510:revInfo xmlns:a="http://schemas.openxmlformats.org/drawingml/2006/main" xmlns:r="http://schemas.openxmlformats.org/officeDocument/2006/relationships" xmlns:p1510="http://schemas.microsoft.com/office/powerpoint/2015/10/main">
   <p1510:revLst>
-    <p1510:client id="{2EB72A00-7F79-4813-B4C2-C6564860F3F6}" v="18" dt="2025-11-19T11:01:06.060"/>
+    <p1510:client id="{2EB72A00-7F79-4813-B4C2-C6564860F3F6}" v="61" dt="2025-11-19T15:31:23.621"/>
   </p1510:revLst>
 </p1510:revInfo>
 </file>
@@ -294,7 +293,7 @@
   <pc:docChgLst>
     <pc:chgData name="Jean-Yves Vuillequez" userId="e7fac481abea6bd0" providerId="LiveId" clId="{79E365E8-22BC-4EC2-9606-9A9AC6CD1D22}"/>
     <pc:docChg chg="undo custSel addSld delSld modSld sldOrd">
-      <pc:chgData name="Jean-Yves Vuillequez" userId="e7fac481abea6bd0" providerId="LiveId" clId="{79E365E8-22BC-4EC2-9606-9A9AC6CD1D22}" dt="2025-11-19T11:06:52.762" v="118"/>
+      <pc:chgData name="Jean-Yves Vuillequez" userId="e7fac481abea6bd0" providerId="LiveId" clId="{79E365E8-22BC-4EC2-9606-9A9AC6CD1D22}" dt="2025-11-19T15:31:23.550" v="194" actId="1076"/>
       <pc:docMkLst>
         <pc:docMk/>
       </pc:docMkLst>
@@ -373,11 +372,27 @@
         </pc:sldMkLst>
       </pc:sldChg>
       <pc:sldChg chg="addSp delSp modSp mod">
-        <pc:chgData name="Jean-Yves Vuillequez" userId="e7fac481abea6bd0" providerId="LiveId" clId="{79E365E8-22BC-4EC2-9606-9A9AC6CD1D22}" dt="2025-11-19T11:04:20.428" v="92" actId="22"/>
+        <pc:chgData name="Jean-Yves Vuillequez" userId="e7fac481abea6bd0" providerId="LiveId" clId="{79E365E8-22BC-4EC2-9606-9A9AC6CD1D22}" dt="2025-11-19T15:27:31.625" v="178" actId="22"/>
         <pc:sldMkLst>
           <pc:docMk/>
           <pc:sldMk cId="0" sldId="270"/>
         </pc:sldMkLst>
+        <pc:spChg chg="add del">
+          <ac:chgData name="Jean-Yves Vuillequez" userId="e7fac481abea6bd0" providerId="LiveId" clId="{79E365E8-22BC-4EC2-9606-9A9AC6CD1D22}" dt="2025-11-19T15:27:31.625" v="178" actId="22"/>
+          <ac:spMkLst>
+            <pc:docMk/>
+            <pc:sldMk cId="0" sldId="270"/>
+            <ac:spMk id="5" creationId="{CFDEE9DF-9D18-D97C-5C14-CA1236A83E99}"/>
+          </ac:spMkLst>
+        </pc:spChg>
+        <pc:spChg chg="mod">
+          <ac:chgData name="Jean-Yves Vuillequez" userId="e7fac481abea6bd0" providerId="LiveId" clId="{79E365E8-22BC-4EC2-9606-9A9AC6CD1D22}" dt="2025-11-19T14:03:00.878" v="125" actId="108"/>
+          <ac:spMkLst>
+            <pc:docMk/>
+            <pc:sldMk cId="0" sldId="270"/>
+            <ac:spMk id="178" creationId="{00000000-0000-0000-0000-000000000000}"/>
+          </ac:spMkLst>
+        </pc:spChg>
         <pc:spChg chg="mod">
           <ac:chgData name="Jean-Yves Vuillequez" userId="e7fac481abea6bd0" providerId="LiveId" clId="{79E365E8-22BC-4EC2-9606-9A9AC6CD1D22}" dt="2025-11-19T11:00:50.475" v="83" actId="14100"/>
           <ac:spMkLst>
@@ -403,19 +418,34 @@
           </ac:picMkLst>
         </pc:picChg>
       </pc:sldChg>
-      <pc:sldChg chg="add">
-        <pc:chgData name="Jean-Yves Vuillequez" userId="e7fac481abea6bd0" providerId="LiveId" clId="{79E365E8-22BC-4EC2-9606-9A9AC6CD1D22}" dt="2025-11-19T11:00:33.442" v="74"/>
+      <pc:sldChg chg="del">
+        <pc:chgData name="Jean-Yves Vuillequez" userId="e7fac481abea6bd0" providerId="LiveId" clId="{79E365E8-22BC-4EC2-9606-9A9AC6CD1D22}" dt="2025-11-19T14:02:01.719" v="119" actId="47"/>
+        <pc:sldMkLst>
+          <pc:docMk/>
+          <pc:sldMk cId="2182015625" sldId="272"/>
+        </pc:sldMkLst>
+      </pc:sldChg>
+      <pc:sldChg chg="add del">
+        <pc:chgData name="Jean-Yves Vuillequez" userId="e7fac481abea6bd0" providerId="LiveId" clId="{79E365E8-22BC-4EC2-9606-9A9AC6CD1D22}" dt="2025-11-19T14:02:17.709" v="121" actId="47"/>
         <pc:sldMkLst>
           <pc:docMk/>
           <pc:sldMk cId="1023234914" sldId="273"/>
         </pc:sldMkLst>
       </pc:sldChg>
-      <pc:sldChg chg="del">
-        <pc:chgData name="Jean-Yves Vuillequez" userId="e7fac481abea6bd0" providerId="LiveId" clId="{79E365E8-22BC-4EC2-9606-9A9AC6CD1D22}" dt="2025-11-19T11:00:27.703" v="73" actId="2696"/>
+      <pc:sldChg chg="modSp add del mod">
+        <pc:chgData name="Jean-Yves Vuillequez" userId="e7fac481abea6bd0" providerId="LiveId" clId="{79E365E8-22BC-4EC2-9606-9A9AC6CD1D22}" dt="2025-11-19T14:03:57.617" v="139" actId="20577"/>
         <pc:sldMkLst>
           <pc:docMk/>
           <pc:sldMk cId="1558646683" sldId="273"/>
         </pc:sldMkLst>
+        <pc:spChg chg="mod">
+          <ac:chgData name="Jean-Yves Vuillequez" userId="e7fac481abea6bd0" providerId="LiveId" clId="{79E365E8-22BC-4EC2-9606-9A9AC6CD1D22}" dt="2025-11-19T14:03:57.617" v="139" actId="20577"/>
+          <ac:spMkLst>
+            <pc:docMk/>
+            <pc:sldMk cId="1558646683" sldId="273"/>
+            <ac:spMk id="62" creationId="{1465D56F-7913-AD4E-8248-AEC9AC3FBC16}"/>
+          </ac:spMkLst>
+        </pc:spChg>
       </pc:sldChg>
       <pc:sldChg chg="delSp modSp del mod delAnim">
         <pc:chgData name="Jean-Yves Vuillequez" userId="e7fac481abea6bd0" providerId="LiveId" clId="{79E365E8-22BC-4EC2-9606-9A9AC6CD1D22}" dt="2025-11-19T11:00:27.703" v="73" actId="2696"/>
@@ -536,18 +566,98 @@
           </ac:spMkLst>
         </pc:spChg>
       </pc:sldChg>
-      <pc:sldChg chg="addSp modSp add mod">
-        <pc:chgData name="Jean-Yves Vuillequez" userId="e7fac481abea6bd0" providerId="LiveId" clId="{79E365E8-22BC-4EC2-9606-9A9AC6CD1D22}" dt="2025-11-19T11:04:39.897" v="116" actId="1037"/>
+      <pc:sldChg chg="addSp delSp modSp add mod ord">
+        <pc:chgData name="Jean-Yves Vuillequez" userId="e7fac481abea6bd0" providerId="LiveId" clId="{79E365E8-22BC-4EC2-9606-9A9AC6CD1D22}" dt="2025-11-19T15:31:23.550" v="194" actId="1076"/>
         <pc:sldMkLst>
           <pc:docMk/>
           <pc:sldMk cId="1821755839" sldId="274"/>
         </pc:sldMkLst>
+        <pc:spChg chg="add del">
+          <ac:chgData name="Jean-Yves Vuillequez" userId="e7fac481abea6bd0" providerId="LiveId" clId="{79E365E8-22BC-4EC2-9606-9A9AC6CD1D22}" dt="2025-11-19T15:21:25.434" v="149" actId="22"/>
+          <ac:spMkLst>
+            <pc:docMk/>
+            <pc:sldMk cId="1821755839" sldId="274"/>
+            <ac:spMk id="5" creationId="{42ECEDB8-E4FE-DAD1-959E-CE1C852FF3B7}"/>
+          </ac:spMkLst>
+        </pc:spChg>
+        <pc:spChg chg="add del">
+          <ac:chgData name="Jean-Yves Vuillequez" userId="e7fac481abea6bd0" providerId="LiveId" clId="{79E365E8-22BC-4EC2-9606-9A9AC6CD1D22}" dt="2025-11-19T15:25:59.512" v="172" actId="22"/>
+          <ac:spMkLst>
+            <pc:docMk/>
+            <pc:sldMk cId="1821755839" sldId="274"/>
+            <ac:spMk id="7" creationId="{A1088045-42F5-FD97-ED83-6AEF73316F36}"/>
+          </ac:spMkLst>
+        </pc:spChg>
+        <pc:spChg chg="add del">
+          <ac:chgData name="Jean-Yves Vuillequez" userId="e7fac481abea6bd0" providerId="LiveId" clId="{79E365E8-22BC-4EC2-9606-9A9AC6CD1D22}" dt="2025-11-19T15:31:05.378" v="184" actId="22"/>
+          <ac:spMkLst>
+            <pc:docMk/>
+            <pc:sldMk cId="1821755839" sldId="274"/>
+            <ac:spMk id="9" creationId="{C85936DC-7A36-C7FD-89BC-2AF218A582C2}"/>
+          </ac:spMkLst>
+        </pc:spChg>
         <pc:picChg chg="add mod">
-          <ac:chgData name="Jean-Yves Vuillequez" userId="e7fac481abea6bd0" providerId="LiveId" clId="{79E365E8-22BC-4EC2-9606-9A9AC6CD1D22}" dt="2025-11-19T11:04:39.897" v="116" actId="1037"/>
+          <ac:chgData name="Jean-Yves Vuillequez" userId="e7fac481abea6bd0" providerId="LiveId" clId="{79E365E8-22BC-4EC2-9606-9A9AC6CD1D22}" dt="2025-11-19T15:07:19.367" v="147" actId="1076"/>
           <ac:picMkLst>
             <pc:docMk/>
             <pc:sldMk cId="1821755839" sldId="274"/>
             <ac:picMk id="3" creationId="{B2469126-D060-A3A0-24FE-3940B83EED58}"/>
+          </ac:picMkLst>
+        </pc:picChg>
+        <pc:picChg chg="add mod">
+          <ac:chgData name="Jean-Yves Vuillequez" userId="e7fac481abea6bd0" providerId="LiveId" clId="{79E365E8-22BC-4EC2-9606-9A9AC6CD1D22}" dt="2025-11-19T15:31:23.550" v="194" actId="1076"/>
+          <ac:picMkLst>
+            <pc:docMk/>
+            <pc:sldMk cId="1821755839" sldId="274"/>
+            <ac:picMk id="1026" creationId="{923FE2F2-F305-A7CE-975B-2A2BA912E4B7}"/>
+          </ac:picMkLst>
+        </pc:picChg>
+        <pc:picChg chg="add mod">
+          <ac:chgData name="Jean-Yves Vuillequez" userId="e7fac481abea6bd0" providerId="LiveId" clId="{79E365E8-22BC-4EC2-9606-9A9AC6CD1D22}" dt="2025-11-19T15:31:22.560" v="193" actId="1076"/>
+          <ac:picMkLst>
+            <pc:docMk/>
+            <pc:sldMk cId="1821755839" sldId="274"/>
+            <ac:picMk id="1028" creationId="{D0C03EA7-EAD6-1A33-21AE-920B9121582F}"/>
+          </ac:picMkLst>
+        </pc:picChg>
+        <pc:picChg chg="add mod">
+          <ac:chgData name="Jean-Yves Vuillequez" userId="e7fac481abea6bd0" providerId="LiveId" clId="{79E365E8-22BC-4EC2-9606-9A9AC6CD1D22}" dt="2025-11-19T15:31:21.682" v="192" actId="1076"/>
+          <ac:picMkLst>
+            <pc:docMk/>
+            <pc:sldMk cId="1821755839" sldId="274"/>
+            <ac:picMk id="1030" creationId="{2941D76B-6840-C572-907F-F3680B66EBF7}"/>
+          </ac:picMkLst>
+        </pc:picChg>
+        <pc:picChg chg="add mod">
+          <ac:chgData name="Jean-Yves Vuillequez" userId="e7fac481abea6bd0" providerId="LiveId" clId="{79E365E8-22BC-4EC2-9606-9A9AC6CD1D22}" dt="2025-11-19T15:31:20.951" v="191" actId="1076"/>
+          <ac:picMkLst>
+            <pc:docMk/>
+            <pc:sldMk cId="1821755839" sldId="274"/>
+            <ac:picMk id="1032" creationId="{0AA62D0C-7533-F64F-5205-AC2C6EB164FE}"/>
+          </ac:picMkLst>
+        </pc:picChg>
+        <pc:picChg chg="add mod">
+          <ac:chgData name="Jean-Yves Vuillequez" userId="e7fac481abea6bd0" providerId="LiveId" clId="{79E365E8-22BC-4EC2-9606-9A9AC6CD1D22}" dt="2025-11-19T15:31:20.132" v="190" actId="1076"/>
+          <ac:picMkLst>
+            <pc:docMk/>
+            <pc:sldMk cId="1821755839" sldId="274"/>
+            <ac:picMk id="1034" creationId="{748B16F9-6C53-91C1-4712-424BF6CE8989}"/>
+          </ac:picMkLst>
+        </pc:picChg>
+        <pc:picChg chg="add mod">
+          <ac:chgData name="Jean-Yves Vuillequez" userId="e7fac481abea6bd0" providerId="LiveId" clId="{79E365E8-22BC-4EC2-9606-9A9AC6CD1D22}" dt="2025-11-19T15:31:19.120" v="189" actId="1076"/>
+          <ac:picMkLst>
+            <pc:docMk/>
+            <pc:sldMk cId="1821755839" sldId="274"/>
+            <ac:picMk id="1036" creationId="{135630BC-F5F0-17C1-438A-A312C16997F8}"/>
+          </ac:picMkLst>
+        </pc:picChg>
+        <pc:picChg chg="add mod">
+          <ac:chgData name="Jean-Yves Vuillequez" userId="e7fac481abea6bd0" providerId="LiveId" clId="{79E365E8-22BC-4EC2-9606-9A9AC6CD1D22}" dt="2025-11-19T15:31:17.953" v="188" actId="1076"/>
+          <ac:picMkLst>
+            <pc:docMk/>
+            <pc:sldMk cId="1821755839" sldId="274"/>
+            <ac:picMk id="1038" creationId="{1B3822DD-A0E9-A37F-0DE9-40781F1C3DF4}"/>
           </ac:picMkLst>
         </pc:picChg>
       </pc:sldChg>
@@ -575,7 +685,7 @@
         </pc:graphicFrameChg>
       </pc:sldChg>
       <pc:sldChg chg="addSp delSp modSp add mod ord">
-        <pc:chgData name="Jean-Yves Vuillequez" userId="e7fac481abea6bd0" providerId="LiveId" clId="{79E365E8-22BC-4EC2-9606-9A9AC6CD1D22}" dt="2025-11-19T11:06:52.762" v="118"/>
+        <pc:chgData name="Jean-Yves Vuillequez" userId="e7fac481abea6bd0" providerId="LiveId" clId="{79E365E8-22BC-4EC2-9606-9A9AC6CD1D22}" dt="2025-11-19T14:03:15.846" v="127"/>
         <pc:sldMkLst>
           <pc:docMk/>
           <pc:sldMk cId="4088050223" sldId="275"/>
@@ -654,46 +764,70 @@
           <pc:sldMk cId="2602082869" sldId="285"/>
         </pc:sldMkLst>
       </pc:sldChg>
-      <pc:sldChg chg="delSp modSp mod delAnim">
-        <pc:chgData name="Jean-Yves Vuillequez" userId="e7fac481abea6bd0" providerId="LiveId" clId="{79E365E8-22BC-4EC2-9606-9A9AC6CD1D22}" dt="2025-11-19T10:59:24.012" v="72" actId="1076"/>
+      <pc:sldChg chg="addSp delSp modSp mod delAnim">
+        <pc:chgData name="Jean-Yves Vuillequez" userId="e7fac481abea6bd0" providerId="LiveId" clId="{79E365E8-22BC-4EC2-9606-9A9AC6CD1D22}" dt="2025-11-19T15:04:11.263" v="144"/>
         <pc:sldMkLst>
           <pc:docMk/>
           <pc:sldMk cId="406580661" sldId="286"/>
         </pc:sldMkLst>
-        <pc:spChg chg="mod">
-          <ac:chgData name="Jean-Yves Vuillequez" userId="e7fac481abea6bd0" providerId="LiveId" clId="{79E365E8-22BC-4EC2-9606-9A9AC6CD1D22}" dt="2025-11-19T10:59:01.978" v="55" actId="20577"/>
+        <pc:spChg chg="add del mod">
+          <ac:chgData name="Jean-Yves Vuillequez" userId="e7fac481abea6bd0" providerId="LiveId" clId="{79E365E8-22BC-4EC2-9606-9A9AC6CD1D22}" dt="2025-11-19T15:04:10.897" v="143" actId="478"/>
+          <ac:spMkLst>
+            <pc:docMk/>
+            <pc:sldMk cId="406580661" sldId="286"/>
+            <ac:spMk id="3" creationId="{C43968D4-0691-98E3-02E7-DB654E7392F3}"/>
+          </ac:spMkLst>
+        </pc:spChg>
+        <pc:spChg chg="add mod">
+          <ac:chgData name="Jean-Yves Vuillequez" userId="e7fac481abea6bd0" providerId="LiveId" clId="{79E365E8-22BC-4EC2-9606-9A9AC6CD1D22}" dt="2025-11-19T15:04:11.263" v="144"/>
+          <ac:spMkLst>
+            <pc:docMk/>
+            <pc:sldMk cId="406580661" sldId="286"/>
+            <ac:spMk id="4" creationId="{0649B650-4A2A-7387-5E59-6EEF0B39EF13}"/>
+          </ac:spMkLst>
+        </pc:spChg>
+        <pc:spChg chg="del">
+          <ac:chgData name="Jean-Yves Vuillequez" userId="e7fac481abea6bd0" providerId="LiveId" clId="{79E365E8-22BC-4EC2-9606-9A9AC6CD1D22}" dt="2025-11-19T15:03:54.191" v="140" actId="478"/>
+          <ac:spMkLst>
+            <pc:docMk/>
+            <pc:sldMk cId="406580661" sldId="286"/>
+            <ac:spMk id="69" creationId="{2DFE67F9-5520-F4B8-B6C5-40C9605525B6}"/>
+          </ac:spMkLst>
+        </pc:spChg>
+        <pc:spChg chg="del mod">
+          <ac:chgData name="Jean-Yves Vuillequez" userId="e7fac481abea6bd0" providerId="LiveId" clId="{79E365E8-22BC-4EC2-9606-9A9AC6CD1D22}" dt="2025-11-19T15:04:08.497" v="142" actId="478"/>
           <ac:spMkLst>
             <pc:docMk/>
             <pc:sldMk cId="406580661" sldId="286"/>
             <ac:spMk id="73" creationId="{1362DE8B-B008-E6AB-C9CD-6095A12B8D39}"/>
           </ac:spMkLst>
         </pc:spChg>
-        <pc:spChg chg="mod">
-          <ac:chgData name="Jean-Yves Vuillequez" userId="e7fac481abea6bd0" providerId="LiveId" clId="{79E365E8-22BC-4EC2-9606-9A9AC6CD1D22}" dt="2025-11-19T10:59:24.012" v="72" actId="1076"/>
+        <pc:spChg chg="del mod">
+          <ac:chgData name="Jean-Yves Vuillequez" userId="e7fac481abea6bd0" providerId="LiveId" clId="{79E365E8-22BC-4EC2-9606-9A9AC6CD1D22}" dt="2025-11-19T15:03:54.191" v="140" actId="478"/>
           <ac:spMkLst>
             <pc:docMk/>
             <pc:sldMk cId="406580661" sldId="286"/>
             <ac:spMk id="74" creationId="{594EF5A4-95A8-DB9E-307C-92C5044EEF3F}"/>
           </ac:spMkLst>
         </pc:spChg>
-        <pc:spChg chg="mod">
-          <ac:chgData name="Jean-Yves Vuillequez" userId="e7fac481abea6bd0" providerId="LiveId" clId="{79E365E8-22BC-4EC2-9606-9A9AC6CD1D22}" dt="2025-11-19T10:59:24.012" v="72" actId="1076"/>
+        <pc:spChg chg="del mod">
+          <ac:chgData name="Jean-Yves Vuillequez" userId="e7fac481abea6bd0" providerId="LiveId" clId="{79E365E8-22BC-4EC2-9606-9A9AC6CD1D22}" dt="2025-11-19T15:03:57.484" v="141" actId="478"/>
           <ac:spMkLst>
             <pc:docMk/>
             <pc:sldMk cId="406580661" sldId="286"/>
             <ac:spMk id="75" creationId="{2DA76B5D-5507-C433-3A50-BA24AFDD5759}"/>
           </ac:spMkLst>
         </pc:spChg>
-        <pc:spChg chg="mod">
-          <ac:chgData name="Jean-Yves Vuillequez" userId="e7fac481abea6bd0" providerId="LiveId" clId="{79E365E8-22BC-4EC2-9606-9A9AC6CD1D22}" dt="2025-11-19T10:59:24.012" v="72" actId="1076"/>
+        <pc:spChg chg="del mod">
+          <ac:chgData name="Jean-Yves Vuillequez" userId="e7fac481abea6bd0" providerId="LiveId" clId="{79E365E8-22BC-4EC2-9606-9A9AC6CD1D22}" dt="2025-11-19T15:03:57.484" v="141" actId="478"/>
           <ac:spMkLst>
             <pc:docMk/>
             <pc:sldMk cId="406580661" sldId="286"/>
             <ac:spMk id="76" creationId="{0D0BEA13-407D-BB40-EDD4-89543044A7D8}"/>
           </ac:spMkLst>
         </pc:spChg>
-        <pc:spChg chg="mod">
-          <ac:chgData name="Jean-Yves Vuillequez" userId="e7fac481abea6bd0" providerId="LiveId" clId="{79E365E8-22BC-4EC2-9606-9A9AC6CD1D22}" dt="2025-11-19T10:59:24.012" v="72" actId="1076"/>
+        <pc:spChg chg="del mod">
+          <ac:chgData name="Jean-Yves Vuillequez" userId="e7fac481abea6bd0" providerId="LiveId" clId="{79E365E8-22BC-4EC2-9606-9A9AC6CD1D22}" dt="2025-11-19T15:03:57.484" v="141" actId="478"/>
           <ac:spMkLst>
             <pc:docMk/>
             <pc:sldMk cId="406580661" sldId="286"/>
@@ -1517,7 +1651,7 @@
               <a:buSzPts val="1100"/>
               <a:buNone/>
             </a:pPr>
-            <a:endParaRPr/>
+            <a:endParaRPr dirty="0"/>
           </a:p>
         </p:txBody>
       </p:sp>
@@ -1539,10 +1673,10 @@
   <p:cSld>
     <p:spTree>
       <p:nvGrpSpPr>
-        <p:cNvPr id="1" name="Shape 58">
+        <p:cNvPr id="1" name="Shape 92">
           <a:extLst>
             <a:ext uri="{FF2B5EF4-FFF2-40B4-BE49-F238E27FC236}">
-              <a16:creationId xmlns:a16="http://schemas.microsoft.com/office/drawing/2014/main" id="{5FD8F731-0B60-9E58-BF85-C6F39AAA128F}"/>
+              <a16:creationId xmlns:a16="http://schemas.microsoft.com/office/drawing/2014/main" id="{601F1211-8719-8070-13C6-DFAABBD5A0A6}"/>
             </a:ext>
           </a:extLst>
         </p:cNvPr>
@@ -1559,10 +1693,10 @@
       </p:grpSpPr>
       <p:sp>
         <p:nvSpPr>
-          <p:cNvPr id="59" name="Google Shape;59;g3bc3b886ea_0_1:notes">
+          <p:cNvPr id="93" name="Google Shape;93;p5:notes">
             <a:extLst>
               <a:ext uri="{FF2B5EF4-FFF2-40B4-BE49-F238E27FC236}">
-                <a16:creationId xmlns:a16="http://schemas.microsoft.com/office/drawing/2014/main" id="{3CEB66D1-BECD-566A-52EE-E59E3C893DFC}"/>
+                <a16:creationId xmlns:a16="http://schemas.microsoft.com/office/drawing/2014/main" id="{24E1F0BF-E30D-AAB8-17C4-1E198C29A80F}"/>
               </a:ext>
             </a:extLst>
           </p:cNvPr>
@@ -1602,14 +1736,24 @@
               </a:path>
             </a:pathLst>
           </a:custGeom>
+          <a:noFill/>
+          <a:ln w="9525" cap="flat" cmpd="sng">
+            <a:solidFill>
+              <a:srgbClr val="000000"/>
+            </a:solidFill>
+            <a:prstDash val="solid"/>
+            <a:round/>
+            <a:headEnd type="none" w="sm" len="sm"/>
+            <a:tailEnd type="none" w="sm" len="sm"/>
+          </a:ln>
         </p:spPr>
       </p:sp>
       <p:sp>
         <p:nvSpPr>
-          <p:cNvPr id="60" name="Google Shape;60;g3bc3b886ea_0_1:notes">
+          <p:cNvPr id="94" name="Google Shape;94;p5:notes">
             <a:extLst>
               <a:ext uri="{FF2B5EF4-FFF2-40B4-BE49-F238E27FC236}">
-                <a16:creationId xmlns:a16="http://schemas.microsoft.com/office/drawing/2014/main" id="{BD88C69A-BD09-8A38-E0BB-3A883E1BF525}"/>
+                <a16:creationId xmlns:a16="http://schemas.microsoft.com/office/drawing/2014/main" id="{FAE7E81C-5300-A69F-6961-16DCBFE11F25}"/>
               </a:ext>
             </a:extLst>
           </p:cNvPr>
@@ -1628,6 +1772,10 @@
           <a:prstGeom prst="rect">
             <a:avLst/>
           </a:prstGeom>
+          <a:noFill/>
+          <a:ln>
+            <a:noFill/>
+          </a:ln>
         </p:spPr>
         <p:txBody>
           <a:bodyPr spcFirstLastPara="1" wrap="square" lIns="91425" tIns="91425" rIns="91425" bIns="91425" anchor="t" anchorCtr="0">
@@ -1635,23 +1783,162 @@
           </a:bodyPr>
           <a:lstStyle/>
           <a:p>
+            <a:r>
+              <a:rPr lang="fr-FR" b="1" dirty="0"/>
+              <a:t>Collecte des données</a:t>
+            </a:r>
+          </a:p>
+          <a:p>
+            <a:r>
+              <a:rPr lang="fr-FR" dirty="0"/>
+              <a:t>Données météo </a:t>
+            </a:r>
+            <a:r>
+              <a:rPr lang="fr-FR" dirty="0" err="1"/>
+              <a:t>OpenWeather</a:t>
+            </a:r>
+            <a:r>
+              <a:rPr lang="fr-FR" dirty="0"/>
+              <a:t> (API)</a:t>
+            </a:r>
+          </a:p>
+          <a:p>
+            <a:r>
+              <a:rPr lang="fr-FR" dirty="0"/>
+              <a:t>Données satellite Landsat (USGS)</a:t>
+            </a:r>
+          </a:p>
+          <a:p>
+            <a:r>
+              <a:rPr lang="fr-FR" dirty="0"/>
+              <a:t>Historique RTE</a:t>
+            </a:r>
+          </a:p>
+          <a:p>
+            <a:r>
+              <a:rPr lang="fr-FR" dirty="0"/>
+              <a:t>Données solaires locales</a:t>
+            </a:r>
+          </a:p>
+          <a:p>
+            <a:r>
+              <a:rPr lang="fr-FR" b="1" dirty="0"/>
+              <a:t>2. Préparation &amp; nettoyage</a:t>
+            </a:r>
+          </a:p>
+          <a:p>
+            <a:r>
+              <a:rPr lang="fr-FR" dirty="0"/>
+              <a:t>Standardisation</a:t>
+            </a:r>
+          </a:p>
+          <a:p>
+            <a:r>
+              <a:rPr lang="fr-FR" dirty="0"/>
+              <a:t>Alignement temporel</a:t>
+            </a:r>
+          </a:p>
+          <a:p>
+            <a:r>
+              <a:rPr lang="fr-FR" dirty="0"/>
+              <a:t>Filtrage géographique Rhône-Alpes</a:t>
+            </a:r>
+          </a:p>
+          <a:p>
+            <a:r>
+              <a:rPr lang="fr-FR" dirty="0"/>
+              <a:t>Mise en qualité</a:t>
+            </a:r>
+          </a:p>
+          <a:p>
+            <a:r>
+              <a:rPr lang="fr-FR" b="1" dirty="0"/>
+              <a:t>3. Entraînement &amp; suivi du modèle</a:t>
+            </a:r>
+          </a:p>
+          <a:p>
+            <a:r>
+              <a:rPr lang="fr-FR" dirty="0"/>
+              <a:t>Entraînement local</a:t>
+            </a:r>
+          </a:p>
+          <a:p>
+            <a:r>
+              <a:rPr lang="fr-FR" dirty="0"/>
+              <a:t>Suivi via </a:t>
+            </a:r>
+            <a:r>
+              <a:rPr lang="fr-FR" dirty="0" err="1"/>
+              <a:t>MLflow</a:t>
+            </a:r>
+            <a:endParaRPr lang="fr-FR" dirty="0"/>
+          </a:p>
+          <a:p>
+            <a:r>
+              <a:rPr lang="fr-FR" dirty="0" err="1"/>
+              <a:t>Versionning</a:t>
+            </a:r>
+            <a:r>
+              <a:rPr lang="fr-FR" dirty="0"/>
+              <a:t> dans Model </a:t>
+            </a:r>
+            <a:r>
+              <a:rPr lang="fr-FR" dirty="0" err="1"/>
+              <a:t>Registry</a:t>
+            </a:r>
+            <a:endParaRPr lang="fr-FR" dirty="0"/>
+          </a:p>
+          <a:p>
+            <a:r>
+              <a:rPr lang="fr-FR" b="1" dirty="0"/>
+              <a:t>4. API &amp; Application</a:t>
+            </a:r>
+          </a:p>
+          <a:p>
+            <a:r>
+              <a:rPr lang="fr-FR" dirty="0"/>
+              <a:t>Modèle servi via une API</a:t>
+            </a:r>
+          </a:p>
+          <a:p>
+            <a:r>
+              <a:rPr lang="fr-FR" dirty="0"/>
+              <a:t>Dashboard </a:t>
+            </a:r>
+            <a:r>
+              <a:rPr lang="fr-FR" dirty="0" err="1"/>
+              <a:t>Streamlit</a:t>
+            </a:r>
+            <a:endParaRPr lang="fr-FR" dirty="0"/>
+          </a:p>
+          <a:p>
+            <a:r>
+              <a:rPr lang="fr-FR" dirty="0"/>
+              <a:t>EDA + prévisions 7 jours accessibles à l’utilisateur</a:t>
+            </a:r>
+          </a:p>
+          <a:p>
             <a:pPr marL="0" lvl="0" indent="0" algn="l" rtl="0">
-              <a:spcBef>
-                <a:spcPts val="0"/>
-              </a:spcBef>
-              <a:spcAft>
-                <a:spcPts val="0"/>
-              </a:spcAft>
+              <a:lnSpc>
+                <a:spcPct val="100000"/>
+              </a:lnSpc>
+              <a:spcBef>
+                <a:spcPts val="0"/>
+              </a:spcBef>
+              <a:spcAft>
+                <a:spcPts val="0"/>
+              </a:spcAft>
+              <a:buSzPts val="1100"/>
               <a:buNone/>
             </a:pPr>
-            <a:endParaRPr/>
+            <a:endParaRPr dirty="0"/>
           </a:p>
         </p:txBody>
       </p:sp>
     </p:spTree>
     <p:extLst>
       <p:ext uri="{BB962C8B-B14F-4D97-AF65-F5344CB8AC3E}">
-        <p14:creationId xmlns:p14="http://schemas.microsoft.com/office/powerpoint/2010/main" val="3461525251"/>
+        <p14:creationId xmlns:p14="http://schemas.microsoft.com/office/powerpoint/2010/main" val="1960619631"/>
       </p:ext>
     </p:extLst>
   </p:cSld>
@@ -1899,7 +2186,7 @@
     </p:spTree>
     <p:extLst>
       <p:ext uri="{BB962C8B-B14F-4D97-AF65-F5344CB8AC3E}">
-        <p14:creationId xmlns:p14="http://schemas.microsoft.com/office/powerpoint/2010/main" val="1623490249"/>
+        <p14:creationId xmlns:p14="http://schemas.microsoft.com/office/powerpoint/2010/main" val="2693613996"/>
       </p:ext>
     </p:extLst>
   </p:cSld>
@@ -1910,151 +2197,6 @@
 </file>
 
 <file path=ppt/notesSlides/notesSlide7.xml><?xml version="1.0" encoding="utf-8"?>
-<p:notes xmlns:a="http://schemas.openxmlformats.org/drawingml/2006/main" xmlns:r="http://schemas.openxmlformats.org/officeDocument/2006/relationships" xmlns:p="http://schemas.openxmlformats.org/presentationml/2006/main" showMasterSp="0" showMasterPhAnim="0">
-  <p:cSld>
-    <p:spTree>
-      <p:nvGrpSpPr>
-        <p:cNvPr id="1" name="Shape 92">
-          <a:extLst>
-            <a:ext uri="{FF2B5EF4-FFF2-40B4-BE49-F238E27FC236}">
-              <a16:creationId xmlns:a16="http://schemas.microsoft.com/office/drawing/2014/main" id="{601F1211-8719-8070-13C6-DFAABBD5A0A6}"/>
-            </a:ext>
-          </a:extLst>
-        </p:cNvPr>
-        <p:cNvGrpSpPr/>
-        <p:nvPr/>
-      </p:nvGrpSpPr>
-      <p:grpSpPr>
-        <a:xfrm>
-          <a:off x="0" y="0"/>
-          <a:ext cx="0" cy="0"/>
-          <a:chOff x="0" y="0"/>
-          <a:chExt cx="0" cy="0"/>
-        </a:xfrm>
-      </p:grpSpPr>
-      <p:sp>
-        <p:nvSpPr>
-          <p:cNvPr id="93" name="Google Shape;93;p5:notes">
-            <a:extLst>
-              <a:ext uri="{FF2B5EF4-FFF2-40B4-BE49-F238E27FC236}">
-                <a16:creationId xmlns:a16="http://schemas.microsoft.com/office/drawing/2014/main" id="{24E1F0BF-E30D-AAB8-17C4-1E198C29A80F}"/>
-              </a:ext>
-            </a:extLst>
-          </p:cNvPr>
-          <p:cNvSpPr>
-            <a:spLocks noGrp="1" noRot="1" noChangeAspect="1"/>
-          </p:cNvSpPr>
-          <p:nvPr>
-            <p:ph type="sldImg" idx="2"/>
-          </p:nvPr>
-        </p:nvSpPr>
-        <p:spPr>
-          <a:xfrm>
-            <a:off x="381000" y="685800"/>
-            <a:ext cx="6096000" cy="3429000"/>
-          </a:xfrm>
-          <a:custGeom>
-            <a:avLst/>
-            <a:gdLst/>
-            <a:ahLst/>
-            <a:cxnLst/>
-            <a:rect l="l" t="t" r="r" b="b"/>
-            <a:pathLst>
-              <a:path w="120000" h="120000" extrusionOk="0">
-                <a:moveTo>
-                  <a:pt x="0" y="0"/>
-                </a:moveTo>
-                <a:lnTo>
-                  <a:pt x="120000" y="0"/>
-                </a:lnTo>
-                <a:lnTo>
-                  <a:pt x="120000" y="120000"/>
-                </a:lnTo>
-                <a:lnTo>
-                  <a:pt x="0" y="120000"/>
-                </a:lnTo>
-                <a:close/>
-              </a:path>
-            </a:pathLst>
-          </a:custGeom>
-          <a:noFill/>
-          <a:ln w="9525" cap="flat" cmpd="sng">
-            <a:solidFill>
-              <a:srgbClr val="000000"/>
-            </a:solidFill>
-            <a:prstDash val="solid"/>
-            <a:round/>
-            <a:headEnd type="none" w="sm" len="sm"/>
-            <a:tailEnd type="none" w="sm" len="sm"/>
-          </a:ln>
-        </p:spPr>
-      </p:sp>
-      <p:sp>
-        <p:nvSpPr>
-          <p:cNvPr id="94" name="Google Shape;94;p5:notes">
-            <a:extLst>
-              <a:ext uri="{FF2B5EF4-FFF2-40B4-BE49-F238E27FC236}">
-                <a16:creationId xmlns:a16="http://schemas.microsoft.com/office/drawing/2014/main" id="{FAE7E81C-5300-A69F-6961-16DCBFE11F25}"/>
-              </a:ext>
-            </a:extLst>
-          </p:cNvPr>
-          <p:cNvSpPr txBox="1">
-            <a:spLocks noGrp="1"/>
-          </p:cNvSpPr>
-          <p:nvPr>
-            <p:ph type="body" idx="1"/>
-          </p:nvPr>
-        </p:nvSpPr>
-        <p:spPr>
-          <a:xfrm>
-            <a:off x="685800" y="4343400"/>
-            <a:ext cx="5486400" cy="4114800"/>
-          </a:xfrm>
-          <a:prstGeom prst="rect">
-            <a:avLst/>
-          </a:prstGeom>
-          <a:noFill/>
-          <a:ln>
-            <a:noFill/>
-          </a:ln>
-        </p:spPr>
-        <p:txBody>
-          <a:bodyPr spcFirstLastPara="1" wrap="square" lIns="91425" tIns="91425" rIns="91425" bIns="91425" anchor="t" anchorCtr="0">
-            <a:noAutofit/>
-          </a:bodyPr>
-          <a:lstStyle/>
-          <a:p>
-            <a:pPr marL="0" lvl="0" indent="0" algn="l" rtl="0">
-              <a:lnSpc>
-                <a:spcPct val="100000"/>
-              </a:lnSpc>
-              <a:spcBef>
-                <a:spcPts val="0"/>
-              </a:spcBef>
-              <a:spcAft>
-                <a:spcPts val="0"/>
-              </a:spcAft>
-              <a:buSzPts val="1100"/>
-              <a:buNone/>
-            </a:pPr>
-            <a:endParaRPr/>
-          </a:p>
-        </p:txBody>
-      </p:sp>
-    </p:spTree>
-    <p:extLst>
-      <p:ext uri="{BB962C8B-B14F-4D97-AF65-F5344CB8AC3E}">
-        <p14:creationId xmlns:p14="http://schemas.microsoft.com/office/powerpoint/2010/main" val="1960619631"/>
-      </p:ext>
-    </p:extLst>
-  </p:cSld>
-  <p:clrMapOvr>
-    <a:masterClrMapping/>
-  </p:clrMapOvr>
-</p:notes>
-</file>
-
-<file path=ppt/notesSlides/notesSlide8.xml><?xml version="1.0" encoding="utf-8"?>
 <p:notes xmlns:a="http://schemas.openxmlformats.org/drawingml/2006/main" xmlns:r="http://schemas.openxmlformats.org/officeDocument/2006/relationships" xmlns:p="http://schemas.openxmlformats.org/presentationml/2006/main" showMasterSp="0" showMasterPhAnim="0">
   <p:cSld>
     <p:spTree>
@@ -2199,7 +2341,7 @@
 </p:notes>
 </file>
 
-<file path=ppt/notesSlides/notesSlide9.xml><?xml version="1.0" encoding="utf-8"?>
+<file path=ppt/notesSlides/notesSlide8.xml><?xml version="1.0" encoding="utf-8"?>
 <p:notes xmlns:a="http://schemas.openxmlformats.org/drawingml/2006/main" xmlns:r="http://schemas.openxmlformats.org/officeDocument/2006/relationships" xmlns:p="http://schemas.openxmlformats.org/presentationml/2006/main" showMasterSp="0" showMasterPhAnim="0">
   <p:cSld>
     <p:spTree>
@@ -15434,68 +15576,6 @@
       </p:grpSpPr>
       <p:sp>
         <p:nvSpPr>
-          <p:cNvPr id="69" name="Google Shape;69;p3">
-            <a:extLst>
-              <a:ext uri="{FF2B5EF4-FFF2-40B4-BE49-F238E27FC236}">
-                <a16:creationId xmlns:a16="http://schemas.microsoft.com/office/drawing/2014/main" id="{2DFE67F9-5520-F4B8-B6C5-40C9605525B6}"/>
-              </a:ext>
-            </a:extLst>
-          </p:cNvPr>
-          <p:cNvSpPr/>
-          <p:nvPr/>
-        </p:nvSpPr>
-        <p:spPr>
-          <a:xfrm>
-            <a:off x="311700" y="920082"/>
-            <a:ext cx="8399163" cy="939281"/>
-          </a:xfrm>
-          <a:prstGeom prst="rect">
-            <a:avLst/>
-          </a:prstGeom>
-          <a:solidFill>
-            <a:srgbClr val="3FDAD2"/>
-          </a:solidFill>
-          <a:ln>
-            <a:noFill/>
-          </a:ln>
-        </p:spPr>
-        <p:txBody>
-          <a:bodyPr spcFirstLastPara="1" wrap="square" lIns="91425" tIns="45700" rIns="91425" bIns="45700" anchor="ctr" anchorCtr="0">
-            <a:noAutofit/>
-          </a:bodyPr>
-          <a:lstStyle/>
-          <a:p>
-            <a:pPr marL="0" marR="0" lvl="0" indent="0" algn="ctr" rtl="0">
-              <a:lnSpc>
-                <a:spcPct val="100000"/>
-              </a:lnSpc>
-              <a:spcBef>
-                <a:spcPts val="0"/>
-              </a:spcBef>
-              <a:spcAft>
-                <a:spcPts val="0"/>
-              </a:spcAft>
-              <a:buClr>
-                <a:srgbClr val="000000"/>
-              </a:buClr>
-              <a:buSzPts val="1400"/>
-              <a:buFont typeface="Arial"/>
-              <a:buNone/>
-            </a:pPr>
-            <a:endParaRPr sz="1400" b="0" i="0" u="none" strike="noStrike" cap="none">
-              <a:solidFill>
-                <a:schemeClr val="lt1"/>
-              </a:solidFill>
-              <a:latin typeface="Arial"/>
-              <a:ea typeface="Arial"/>
-              <a:cs typeface="Arial"/>
-              <a:sym typeface="Arial"/>
-            </a:endParaRPr>
-          </a:p>
-        </p:txBody>
-      </p:sp>
-      <p:sp>
-        <p:nvSpPr>
           <p:cNvPr id="70" name="Google Shape;70;p3">
             <a:extLst>
               <a:ext uri="{FF2B5EF4-FFF2-40B4-BE49-F238E27FC236}">
@@ -15547,7 +15627,7 @@
               <a:buNone/>
             </a:pPr>
             <a:r>
-              <a:rPr lang="fr" sz="2500" b="1" i="0" u="none" strike="noStrike" cap="none">
+              <a:rPr lang="fr" sz="2500" b="1" i="0" u="none" strike="noStrike" cap="none" dirty="0">
                 <a:solidFill>
                   <a:srgbClr val="0E3449"/>
                 </a:solidFill>
@@ -15558,7 +15638,7 @@
               </a:rPr>
               <a:t>Pitch</a:t>
             </a:r>
-            <a:endParaRPr sz="2500" b="1" i="0" u="none" strike="noStrike" cap="none">
+            <a:endParaRPr sz="2500" b="1" i="0" u="none" strike="noStrike" cap="none" dirty="0">
               <a:solidFill>
                 <a:srgbClr val="0E3449"/>
               </a:solidFill>
@@ -15667,904 +15747,13 @@
       </p:pic>
       <p:sp>
         <p:nvSpPr>
-          <p:cNvPr id="73" name="Google Shape;73;p3">
+          <p:cNvPr id="4" name="Google Shape;181;p8">
             <a:extLst>
               <a:ext uri="{FF2B5EF4-FFF2-40B4-BE49-F238E27FC236}">
-                <a16:creationId xmlns:a16="http://schemas.microsoft.com/office/drawing/2014/main" id="{1362DE8B-B008-E6AB-C9CD-6095A12B8D39}"/>
+                <a16:creationId xmlns:a16="http://schemas.microsoft.com/office/drawing/2014/main" id="{0649B650-4A2A-7387-5E59-6EEF0B39EF13}"/>
               </a:ext>
             </a:extLst>
           </p:cNvPr>
-          <p:cNvSpPr txBox="1">
-            <a:spLocks noGrp="1"/>
-          </p:cNvSpPr>
-          <p:nvPr>
-            <p:ph type="body" idx="1"/>
-          </p:nvPr>
-        </p:nvSpPr>
-        <p:spPr>
-          <a:xfrm>
-            <a:off x="311700" y="914104"/>
-            <a:ext cx="8520600" cy="989387"/>
-          </a:xfrm>
-          <a:prstGeom prst="rect">
-            <a:avLst/>
-          </a:prstGeom>
-          <a:noFill/>
-          <a:ln>
-            <a:noFill/>
-          </a:ln>
-        </p:spPr>
-        <p:txBody>
-          <a:bodyPr spcFirstLastPara="1" wrap="square" lIns="91425" tIns="91425" rIns="91425" bIns="91425" anchor="t" anchorCtr="0">
-            <a:noAutofit/>
-          </a:bodyPr>
-          <a:lstStyle/>
-          <a:p>
-            <a:pPr marL="114300" lvl="0" indent="0" algn="l" rtl="0">
-              <a:lnSpc>
-                <a:spcPct val="115000"/>
-              </a:lnSpc>
-              <a:spcBef>
-                <a:spcPts val="0"/>
-              </a:spcBef>
-              <a:spcAft>
-                <a:spcPts val="0"/>
-              </a:spcAft>
-              <a:buSzPts val="1800"/>
-              <a:buNone/>
-            </a:pPr>
-            <a:r>
-              <a:rPr lang="fr-FR" sz="1100" dirty="0" err="1">
-                <a:solidFill>
-                  <a:srgbClr val="41545E"/>
-                </a:solidFill>
-              </a:rPr>
-              <a:t>xxxxx</a:t>
-            </a:r>
-            <a:endParaRPr lang="fr-FR" sz="1100" b="1" dirty="0">
-              <a:solidFill>
-                <a:srgbClr val="41545E"/>
-              </a:solidFill>
-            </a:endParaRPr>
-          </a:p>
-        </p:txBody>
-      </p:sp>
-      <p:sp>
-        <p:nvSpPr>
-          <p:cNvPr id="74" name="Google Shape;74;p3">
-            <a:extLst>
-              <a:ext uri="{FF2B5EF4-FFF2-40B4-BE49-F238E27FC236}">
-                <a16:creationId xmlns:a16="http://schemas.microsoft.com/office/drawing/2014/main" id="{594EF5A4-95A8-DB9E-307C-92C5044EEF3F}"/>
-              </a:ext>
-            </a:extLst>
-          </p:cNvPr>
-          <p:cNvSpPr/>
-          <p:nvPr/>
-        </p:nvSpPr>
-        <p:spPr>
-          <a:xfrm>
-            <a:off x="3361455" y="2527339"/>
-            <a:ext cx="2102852" cy="1812804"/>
-          </a:xfrm>
-          <a:prstGeom prst="triangle">
-            <a:avLst>
-              <a:gd name="adj" fmla="val 50000"/>
-            </a:avLst>
-          </a:prstGeom>
-          <a:solidFill>
-            <a:srgbClr val="3FDAD2"/>
-          </a:solidFill>
-          <a:ln>
-            <a:noFill/>
-          </a:ln>
-        </p:spPr>
-        <p:txBody>
-          <a:bodyPr spcFirstLastPara="1" wrap="square" lIns="91425" tIns="45700" rIns="91425" bIns="45700" anchor="ctr" anchorCtr="0">
-            <a:noAutofit/>
-          </a:bodyPr>
-          <a:lstStyle/>
-          <a:p>
-            <a:pPr marL="0" marR="0" lvl="0" indent="0" algn="ctr" rtl="0">
-              <a:lnSpc>
-                <a:spcPct val="100000"/>
-              </a:lnSpc>
-              <a:spcBef>
-                <a:spcPts val="0"/>
-              </a:spcBef>
-              <a:spcAft>
-                <a:spcPts val="0"/>
-              </a:spcAft>
-              <a:buClr>
-                <a:srgbClr val="000000"/>
-              </a:buClr>
-              <a:buSzPts val="1400"/>
-              <a:buFont typeface="Arial"/>
-              <a:buNone/>
-            </a:pPr>
-            <a:endParaRPr sz="1400" b="0" i="0" u="none" strike="noStrike" cap="none">
-              <a:solidFill>
-                <a:schemeClr val="lt1"/>
-              </a:solidFill>
-              <a:latin typeface="Arial"/>
-              <a:ea typeface="Arial"/>
-              <a:cs typeface="Arial"/>
-              <a:sym typeface="Arial"/>
-            </a:endParaRPr>
-          </a:p>
-        </p:txBody>
-      </p:sp>
-      <p:sp>
-        <p:nvSpPr>
-          <p:cNvPr id="75" name="Google Shape;75;p3">
-            <a:extLst>
-              <a:ext uri="{FF2B5EF4-FFF2-40B4-BE49-F238E27FC236}">
-                <a16:creationId xmlns:a16="http://schemas.microsoft.com/office/drawing/2014/main" id="{2DA76B5D-5507-C433-3A50-BA24AFDD5759}"/>
-              </a:ext>
-            </a:extLst>
-          </p:cNvPr>
-          <p:cNvSpPr txBox="1"/>
-          <p:nvPr/>
-        </p:nvSpPr>
-        <p:spPr>
-          <a:xfrm>
-            <a:off x="3071360" y="2046717"/>
-            <a:ext cx="2683042" cy="307736"/>
-          </a:xfrm>
-          <a:prstGeom prst="rect">
-            <a:avLst/>
-          </a:prstGeom>
-          <a:noFill/>
-          <a:ln>
-            <a:noFill/>
-          </a:ln>
-        </p:spPr>
-        <p:txBody>
-          <a:bodyPr spcFirstLastPara="1" wrap="square" lIns="91425" tIns="45700" rIns="91425" bIns="45700" anchor="t" anchorCtr="0">
-            <a:spAutoFit/>
-          </a:bodyPr>
-          <a:lstStyle/>
-          <a:p>
-            <a:pPr marL="0" marR="0" lvl="0" indent="0" algn="ctr" rtl="0">
-              <a:lnSpc>
-                <a:spcPct val="100000"/>
-              </a:lnSpc>
-              <a:spcBef>
-                <a:spcPts val="0"/>
-              </a:spcBef>
-              <a:spcAft>
-                <a:spcPts val="0"/>
-              </a:spcAft>
-              <a:buClr>
-                <a:srgbClr val="000000"/>
-              </a:buClr>
-              <a:buSzPts val="1400"/>
-              <a:buFont typeface="Arial"/>
-              <a:buNone/>
-            </a:pPr>
-            <a:r>
-              <a:rPr lang="fr-FR" sz="1400" b="1" i="0" u="none" strike="noStrike" cap="none" dirty="0" err="1">
-                <a:solidFill>
-                  <a:srgbClr val="41545E"/>
-                </a:solidFill>
-                <a:latin typeface="Arial"/>
-                <a:ea typeface="Arial"/>
-                <a:cs typeface="Arial"/>
-                <a:sym typeface="Arial"/>
-              </a:rPr>
-              <a:t>xxxx</a:t>
-            </a:r>
-            <a:endParaRPr sz="1400" b="1" i="0" u="none" strike="noStrike" cap="none" dirty="0">
-              <a:solidFill>
-                <a:srgbClr val="41545E"/>
-              </a:solidFill>
-              <a:latin typeface="Arial"/>
-              <a:ea typeface="Arial"/>
-              <a:cs typeface="Arial"/>
-              <a:sym typeface="Arial"/>
-            </a:endParaRPr>
-          </a:p>
-        </p:txBody>
-      </p:sp>
-      <p:sp>
-        <p:nvSpPr>
-          <p:cNvPr id="76" name="Google Shape;76;p3">
-            <a:extLst>
-              <a:ext uri="{FF2B5EF4-FFF2-40B4-BE49-F238E27FC236}">
-                <a16:creationId xmlns:a16="http://schemas.microsoft.com/office/drawing/2014/main" id="{0D0BEA13-407D-BB40-EDD4-89543044A7D8}"/>
-              </a:ext>
-            </a:extLst>
-          </p:cNvPr>
-          <p:cNvSpPr txBox="1"/>
-          <p:nvPr/>
-        </p:nvSpPr>
-        <p:spPr>
-          <a:xfrm>
-            <a:off x="4310613" y="4416423"/>
-            <a:ext cx="2683042" cy="307736"/>
-          </a:xfrm>
-          <a:prstGeom prst="rect">
-            <a:avLst/>
-          </a:prstGeom>
-          <a:noFill/>
-          <a:ln>
-            <a:noFill/>
-          </a:ln>
-        </p:spPr>
-        <p:txBody>
-          <a:bodyPr spcFirstLastPara="1" wrap="square" lIns="91425" tIns="45700" rIns="91425" bIns="45700" anchor="t" anchorCtr="0">
-            <a:spAutoFit/>
-          </a:bodyPr>
-          <a:lstStyle/>
-          <a:p>
-            <a:pPr marL="0" marR="0" lvl="0" indent="0" algn="ctr" rtl="0">
-              <a:lnSpc>
-                <a:spcPct val="100000"/>
-              </a:lnSpc>
-              <a:spcBef>
-                <a:spcPts val="0"/>
-              </a:spcBef>
-              <a:spcAft>
-                <a:spcPts val="0"/>
-              </a:spcAft>
-              <a:buClr>
-                <a:srgbClr val="000000"/>
-              </a:buClr>
-              <a:buSzPts val="1400"/>
-              <a:buFont typeface="Arial"/>
-              <a:buNone/>
-            </a:pPr>
-            <a:r>
-              <a:rPr lang="fr-FR" sz="1400" b="1" i="0" u="none" strike="noStrike" cap="none" dirty="0">
-                <a:solidFill>
-                  <a:srgbClr val="41545E"/>
-                </a:solidFill>
-                <a:latin typeface="Arial"/>
-                <a:ea typeface="Arial"/>
-                <a:cs typeface="Arial"/>
-                <a:sym typeface="Arial"/>
-              </a:rPr>
-              <a:t>xxx</a:t>
-            </a:r>
-            <a:endParaRPr sz="1400" b="0" i="0" u="none" strike="noStrike" cap="none" dirty="0">
-              <a:solidFill>
-                <a:srgbClr val="41545E"/>
-              </a:solidFill>
-              <a:latin typeface="Arial"/>
-              <a:ea typeface="Arial"/>
-              <a:cs typeface="Arial"/>
-              <a:sym typeface="Arial"/>
-            </a:endParaRPr>
-          </a:p>
-        </p:txBody>
-      </p:sp>
-      <p:sp>
-        <p:nvSpPr>
-          <p:cNvPr id="77" name="Google Shape;77;p3">
-            <a:extLst>
-              <a:ext uri="{FF2B5EF4-FFF2-40B4-BE49-F238E27FC236}">
-                <a16:creationId xmlns:a16="http://schemas.microsoft.com/office/drawing/2014/main" id="{4B2D55FD-E6CB-F70B-1A6D-C59E9EAB43E2}"/>
-              </a:ext>
-            </a:extLst>
-          </p:cNvPr>
-          <p:cNvSpPr txBox="1"/>
-          <p:nvPr/>
-        </p:nvSpPr>
-        <p:spPr>
-          <a:xfrm>
-            <a:off x="1695081" y="4432455"/>
-            <a:ext cx="2683042" cy="307736"/>
-          </a:xfrm>
-          <a:prstGeom prst="rect">
-            <a:avLst/>
-          </a:prstGeom>
-          <a:noFill/>
-          <a:ln>
-            <a:noFill/>
-          </a:ln>
-        </p:spPr>
-        <p:txBody>
-          <a:bodyPr spcFirstLastPara="1" wrap="square" lIns="91425" tIns="45700" rIns="91425" bIns="45700" anchor="t" anchorCtr="0">
-            <a:spAutoFit/>
-          </a:bodyPr>
-          <a:lstStyle/>
-          <a:p>
-            <a:pPr marL="0" marR="0" lvl="0" indent="0" algn="ctr" rtl="0">
-              <a:lnSpc>
-                <a:spcPct val="100000"/>
-              </a:lnSpc>
-              <a:spcBef>
-                <a:spcPts val="0"/>
-              </a:spcBef>
-              <a:spcAft>
-                <a:spcPts val="0"/>
-              </a:spcAft>
-              <a:buClr>
-                <a:srgbClr val="000000"/>
-              </a:buClr>
-              <a:buSzPts val="1400"/>
-              <a:buFont typeface="Arial"/>
-              <a:buNone/>
-            </a:pPr>
-            <a:r>
-              <a:rPr lang="fr-FR" sz="1400" b="1" i="0" u="none" strike="noStrike" cap="none" dirty="0" err="1">
-                <a:solidFill>
-                  <a:srgbClr val="41545E"/>
-                </a:solidFill>
-                <a:latin typeface="Arial"/>
-                <a:ea typeface="Arial"/>
-                <a:cs typeface="Arial"/>
-                <a:sym typeface="Arial"/>
-              </a:rPr>
-              <a:t>xxxx</a:t>
-            </a:r>
-            <a:endParaRPr sz="1400" b="0" i="0" u="none" strike="noStrike" cap="none" dirty="0">
-              <a:solidFill>
-                <a:srgbClr val="41545E"/>
-              </a:solidFill>
-              <a:latin typeface="Arial"/>
-              <a:ea typeface="Arial"/>
-              <a:cs typeface="Arial"/>
-              <a:sym typeface="Arial"/>
-            </a:endParaRPr>
-          </a:p>
-        </p:txBody>
-      </p:sp>
-    </p:spTree>
-    <p:extLst>
-      <p:ext uri="{BB962C8B-B14F-4D97-AF65-F5344CB8AC3E}">
-        <p14:creationId xmlns:p14="http://schemas.microsoft.com/office/powerpoint/2010/main" val="406580661"/>
-      </p:ext>
-    </p:extLst>
-  </p:cSld>
-  <p:clrMapOvr>
-    <a:masterClrMapping/>
-  </p:clrMapOvr>
-  <p:timing>
-    <p:tnLst>
-      <p:par>
-        <p:cTn id="1" dur="indefinite" restart="never" nodeType="tmRoot">
-          <p:childTnLst>
-            <p:seq concurrent="1" nextAc="seek">
-              <p:cTn id="2" dur="indefinite" nodeType="mainSeq">
-                <p:childTnLst>
-                  <p:par>
-                    <p:cTn id="3" fill="hold">
-                      <p:stCondLst>
-                        <p:cond delay="indefinite"/>
-                      </p:stCondLst>
-                      <p:childTnLst>
-                        <p:par>
-                          <p:cTn id="4" fill="hold">
-                            <p:stCondLst>
-                              <p:cond delay="0"/>
-                            </p:stCondLst>
-                            <p:childTnLst>
-                              <p:par>
-                                <p:cTn id="5" presetID="1" presetClass="entr" presetSubtype="0" fill="hold" grpId="0" nodeType="clickEffect">
-                                  <p:stCondLst>
-                                    <p:cond delay="0"/>
-                                  </p:stCondLst>
-                                  <p:childTnLst>
-                                    <p:set>
-                                      <p:cBhvr>
-                                        <p:cTn id="6" dur="1" fill="hold">
-                                          <p:stCondLst>
-                                            <p:cond delay="0"/>
-                                          </p:stCondLst>
-                                        </p:cTn>
-                                        <p:tgtEl>
-                                          <p:spTgt spid="74"/>
-                                        </p:tgtEl>
-                                        <p:attrNameLst>
-                                          <p:attrName>style.visibility</p:attrName>
-                                        </p:attrNameLst>
-                                      </p:cBhvr>
-                                      <p:to>
-                                        <p:strVal val="visible"/>
-                                      </p:to>
-                                    </p:set>
-                                  </p:childTnLst>
-                                </p:cTn>
-                              </p:par>
-                            </p:childTnLst>
-                          </p:cTn>
-                        </p:par>
-                      </p:childTnLst>
-                    </p:cTn>
-                  </p:par>
-                  <p:par>
-                    <p:cTn id="7" fill="hold">
-                      <p:stCondLst>
-                        <p:cond delay="indefinite"/>
-                      </p:stCondLst>
-                      <p:childTnLst>
-                        <p:par>
-                          <p:cTn id="8" fill="hold">
-                            <p:stCondLst>
-                              <p:cond delay="0"/>
-                            </p:stCondLst>
-                            <p:childTnLst>
-                              <p:par>
-                                <p:cTn id="9" presetID="1" presetClass="entr" presetSubtype="0" fill="hold" grpId="0" nodeType="clickEffect">
-                                  <p:stCondLst>
-                                    <p:cond delay="0"/>
-                                  </p:stCondLst>
-                                  <p:childTnLst>
-                                    <p:set>
-                                      <p:cBhvr>
-                                        <p:cTn id="10" dur="1" fill="hold">
-                                          <p:stCondLst>
-                                            <p:cond delay="0"/>
-                                          </p:stCondLst>
-                                        </p:cTn>
-                                        <p:tgtEl>
-                                          <p:spTgt spid="75"/>
-                                        </p:tgtEl>
-                                        <p:attrNameLst>
-                                          <p:attrName>style.visibility</p:attrName>
-                                        </p:attrNameLst>
-                                      </p:cBhvr>
-                                      <p:to>
-                                        <p:strVal val="visible"/>
-                                      </p:to>
-                                    </p:set>
-                                  </p:childTnLst>
-                                </p:cTn>
-                              </p:par>
-                            </p:childTnLst>
-                          </p:cTn>
-                        </p:par>
-                      </p:childTnLst>
-                    </p:cTn>
-                  </p:par>
-                  <p:par>
-                    <p:cTn id="11" fill="hold">
-                      <p:stCondLst>
-                        <p:cond delay="indefinite"/>
-                      </p:stCondLst>
-                      <p:childTnLst>
-                        <p:par>
-                          <p:cTn id="12" fill="hold">
-                            <p:stCondLst>
-                              <p:cond delay="0"/>
-                            </p:stCondLst>
-                            <p:childTnLst>
-                              <p:par>
-                                <p:cTn id="13" presetID="1" presetClass="entr" presetSubtype="0" fill="hold" grpId="0" nodeType="clickEffect">
-                                  <p:stCondLst>
-                                    <p:cond delay="0"/>
-                                  </p:stCondLst>
-                                  <p:childTnLst>
-                                    <p:set>
-                                      <p:cBhvr>
-                                        <p:cTn id="14" dur="1" fill="hold">
-                                          <p:stCondLst>
-                                            <p:cond delay="0"/>
-                                          </p:stCondLst>
-                                        </p:cTn>
-                                        <p:tgtEl>
-                                          <p:spTgt spid="77"/>
-                                        </p:tgtEl>
-                                        <p:attrNameLst>
-                                          <p:attrName>style.visibility</p:attrName>
-                                        </p:attrNameLst>
-                                      </p:cBhvr>
-                                      <p:to>
-                                        <p:strVal val="visible"/>
-                                      </p:to>
-                                    </p:set>
-                                  </p:childTnLst>
-                                </p:cTn>
-                              </p:par>
-                            </p:childTnLst>
-                          </p:cTn>
-                        </p:par>
-                      </p:childTnLst>
-                    </p:cTn>
-                  </p:par>
-                  <p:par>
-                    <p:cTn id="15" fill="hold">
-                      <p:stCondLst>
-                        <p:cond delay="indefinite"/>
-                      </p:stCondLst>
-                      <p:childTnLst>
-                        <p:par>
-                          <p:cTn id="16" fill="hold">
-                            <p:stCondLst>
-                              <p:cond delay="0"/>
-                            </p:stCondLst>
-                            <p:childTnLst>
-                              <p:par>
-                                <p:cTn id="17" presetID="1" presetClass="entr" presetSubtype="0" fill="hold" grpId="0" nodeType="clickEffect">
-                                  <p:stCondLst>
-                                    <p:cond delay="0"/>
-                                  </p:stCondLst>
-                                  <p:childTnLst>
-                                    <p:set>
-                                      <p:cBhvr>
-                                        <p:cTn id="18" dur="1" fill="hold">
-                                          <p:stCondLst>
-                                            <p:cond delay="0"/>
-                                          </p:stCondLst>
-                                        </p:cTn>
-                                        <p:tgtEl>
-                                          <p:spTgt spid="76"/>
-                                        </p:tgtEl>
-                                        <p:attrNameLst>
-                                          <p:attrName>style.visibility</p:attrName>
-                                        </p:attrNameLst>
-                                      </p:cBhvr>
-                                      <p:to>
-                                        <p:strVal val="visible"/>
-                                      </p:to>
-                                    </p:set>
-                                  </p:childTnLst>
-                                </p:cTn>
-                              </p:par>
-                            </p:childTnLst>
-                          </p:cTn>
-                        </p:par>
-                      </p:childTnLst>
-                    </p:cTn>
-                  </p:par>
-                </p:childTnLst>
-              </p:cTn>
-              <p:prevCondLst>
-                <p:cond evt="onPrev" delay="0">
-                  <p:tgtEl>
-                    <p:sldTgt/>
-                  </p:tgtEl>
-                </p:cond>
-              </p:prevCondLst>
-              <p:nextCondLst>
-                <p:cond evt="onNext" delay="0">
-                  <p:tgtEl>
-                    <p:sldTgt/>
-                  </p:tgtEl>
-                </p:cond>
-              </p:nextCondLst>
-            </p:seq>
-          </p:childTnLst>
-        </p:cTn>
-      </p:par>
-    </p:tnLst>
-    <p:bldLst>
-      <p:bldP spid="74" grpId="0" animBg="1"/>
-      <p:bldP spid="75" grpId="0"/>
-      <p:bldP spid="76" grpId="0"/>
-      <p:bldP spid="77" grpId="0"/>
-    </p:bldLst>
-  </p:timing>
-</p:sld>
-</file>
-
-<file path=ppt/slides/slide4.xml><?xml version="1.0" encoding="utf-8"?>
-<p:sld xmlns:a="http://schemas.openxmlformats.org/drawingml/2006/main" xmlns:r="http://schemas.openxmlformats.org/officeDocument/2006/relationships" xmlns:p="http://schemas.openxmlformats.org/presentationml/2006/main">
-  <p:cSld>
-    <p:spTree>
-      <p:nvGrpSpPr>
-        <p:cNvPr id="1" name="Shape 61">
-          <a:extLst>
-            <a:ext uri="{FF2B5EF4-FFF2-40B4-BE49-F238E27FC236}">
-              <a16:creationId xmlns:a16="http://schemas.microsoft.com/office/drawing/2014/main" id="{F8D5020C-5B29-41DB-36D0-3BA79EF327F5}"/>
-            </a:ext>
-          </a:extLst>
-        </p:cNvPr>
-        <p:cNvGrpSpPr/>
-        <p:nvPr/>
-      </p:nvGrpSpPr>
-      <p:grpSpPr>
-        <a:xfrm>
-          <a:off x="0" y="0"/>
-          <a:ext cx="0" cy="0"/>
-          <a:chOff x="0" y="0"/>
-          <a:chExt cx="0" cy="0"/>
-        </a:xfrm>
-      </p:grpSpPr>
-      <p:sp>
-        <p:nvSpPr>
-          <p:cNvPr id="62" name="Google Shape;62;p14">
-            <a:extLst>
-              <a:ext uri="{FF2B5EF4-FFF2-40B4-BE49-F238E27FC236}">
-                <a16:creationId xmlns:a16="http://schemas.microsoft.com/office/drawing/2014/main" id="{3343F25C-A672-5C3E-15CC-80C8FC016888}"/>
-              </a:ext>
-            </a:extLst>
-          </p:cNvPr>
-          <p:cNvSpPr txBox="1">
-            <a:spLocks noGrp="1"/>
-          </p:cNvSpPr>
-          <p:nvPr>
-            <p:ph type="ctrTitle" idx="4294967295"/>
-          </p:nvPr>
-        </p:nvSpPr>
-        <p:spPr>
-          <a:xfrm>
-            <a:off x="1040272" y="1702750"/>
-            <a:ext cx="5315100" cy="1398600"/>
-          </a:xfrm>
-          <a:prstGeom prst="rect">
-            <a:avLst/>
-          </a:prstGeom>
-        </p:spPr>
-        <p:txBody>
-          <a:bodyPr spcFirstLastPara="1" wrap="square" lIns="91425" tIns="91425" rIns="91425" bIns="91425" anchor="t" anchorCtr="0">
-            <a:noAutofit/>
-          </a:bodyPr>
-          <a:lstStyle/>
-          <a:p>
-            <a:pPr marL="0" lvl="0" indent="0" algn="l" rtl="0">
-              <a:spcBef>
-                <a:spcPts val="0"/>
-              </a:spcBef>
-              <a:spcAft>
-                <a:spcPts val="0"/>
-              </a:spcAft>
-              <a:buNone/>
-            </a:pPr>
-            <a:r>
-              <a:rPr lang="fr-FR" sz="4500" b="1">
-                <a:solidFill>
-                  <a:srgbClr val="0E3449"/>
-                </a:solidFill>
-                <a:latin typeface="Inter"/>
-                <a:ea typeface="Inter"/>
-                <a:cs typeface="Inter"/>
-                <a:sym typeface="Inter"/>
-              </a:rPr>
-              <a:t>Analyse </a:t>
-            </a:r>
-            <a:endParaRPr sz="4500" b="1">
-              <a:solidFill>
-                <a:srgbClr val="0E3449"/>
-              </a:solidFill>
-              <a:latin typeface="Inter"/>
-              <a:ea typeface="Inter"/>
-              <a:cs typeface="Inter"/>
-              <a:sym typeface="Inter"/>
-            </a:endParaRPr>
-          </a:p>
-          <a:p>
-            <a:pPr marL="0" lvl="0" indent="0" algn="l" rtl="0">
-              <a:spcBef>
-                <a:spcPts val="0"/>
-              </a:spcBef>
-              <a:spcAft>
-                <a:spcPts val="0"/>
-              </a:spcAft>
-              <a:buNone/>
-            </a:pPr>
-            <a:endParaRPr sz="4500" b="1">
-              <a:solidFill>
-                <a:srgbClr val="0E3449"/>
-              </a:solidFill>
-              <a:latin typeface="Inter"/>
-              <a:ea typeface="Inter"/>
-              <a:cs typeface="Inter"/>
-              <a:sym typeface="Inter"/>
-            </a:endParaRPr>
-          </a:p>
-        </p:txBody>
-      </p:sp>
-      <p:pic>
-        <p:nvPicPr>
-          <p:cNvPr id="63" name="Google Shape;63;p14">
-            <a:extLst>
-              <a:ext uri="{FF2B5EF4-FFF2-40B4-BE49-F238E27FC236}">
-                <a16:creationId xmlns:a16="http://schemas.microsoft.com/office/drawing/2014/main" id="{10954D65-2EBB-F688-894B-D880BCEA986F}"/>
-              </a:ext>
-            </a:extLst>
-          </p:cNvPr>
-          <p:cNvPicPr preferRelativeResize="0"/>
-          <p:nvPr/>
-        </p:nvPicPr>
-        <p:blipFill>
-          <a:blip r:embed="rId3">
-            <a:alphaModFix/>
-          </a:blip>
-          <a:stretch>
-            <a:fillRect/>
-          </a:stretch>
-        </p:blipFill>
-        <p:spPr>
-          <a:xfrm>
-            <a:off x="463375" y="482852"/>
-            <a:ext cx="576900" cy="385904"/>
-          </a:xfrm>
-          <a:prstGeom prst="rect">
-            <a:avLst/>
-          </a:prstGeom>
-          <a:noFill/>
-          <a:ln>
-            <a:noFill/>
-          </a:ln>
-        </p:spPr>
-      </p:pic>
-    </p:spTree>
-    <p:extLst>
-      <p:ext uri="{BB962C8B-B14F-4D97-AF65-F5344CB8AC3E}">
-        <p14:creationId xmlns:p14="http://schemas.microsoft.com/office/powerpoint/2010/main" val="2182015625"/>
-      </p:ext>
-    </p:extLst>
-  </p:cSld>
-  <p:clrMapOvr>
-    <a:masterClrMapping/>
-  </p:clrMapOvr>
-</p:sld>
-</file>
-
-<file path=ppt/slides/slide5.xml><?xml version="1.0" encoding="utf-8"?>
-<p:sld xmlns:a="http://schemas.openxmlformats.org/drawingml/2006/main" xmlns:r="http://schemas.openxmlformats.org/officeDocument/2006/relationships" xmlns:p="http://schemas.openxmlformats.org/presentationml/2006/main">
-  <p:cSld>
-    <p:spTree>
-      <p:nvGrpSpPr>
-        <p:cNvPr id="1" name="Shape 177"/>
-        <p:cNvGrpSpPr/>
-        <p:nvPr/>
-      </p:nvGrpSpPr>
-      <p:grpSpPr>
-        <a:xfrm>
-          <a:off x="0" y="0"/>
-          <a:ext cx="0" cy="0"/>
-          <a:chOff x="0" y="0"/>
-          <a:chExt cx="0" cy="0"/>
-        </a:xfrm>
-      </p:grpSpPr>
-      <p:sp>
-        <p:nvSpPr>
-          <p:cNvPr id="178" name="Google Shape;178;p8"/>
-          <p:cNvSpPr txBox="1">
-            <a:spLocks noGrp="1"/>
-          </p:cNvSpPr>
-          <p:nvPr>
-            <p:ph type="ctrTitle" idx="4294967295"/>
-          </p:nvPr>
-        </p:nvSpPr>
-        <p:spPr>
-          <a:xfrm>
-            <a:off x="1192664" y="403309"/>
-            <a:ext cx="5315100" cy="533100"/>
-          </a:xfrm>
-          <a:prstGeom prst="rect">
-            <a:avLst/>
-          </a:prstGeom>
-          <a:noFill/>
-          <a:ln>
-            <a:noFill/>
-          </a:ln>
-        </p:spPr>
-        <p:txBody>
-          <a:bodyPr spcFirstLastPara="1" wrap="square" lIns="91425" tIns="91425" rIns="91425" bIns="91425" anchor="t" anchorCtr="0">
-            <a:noAutofit/>
-          </a:bodyPr>
-          <a:lstStyle/>
-          <a:p>
-            <a:pPr marL="0" marR="0" lvl="0" indent="0" algn="l" rtl="0">
-              <a:lnSpc>
-                <a:spcPct val="100000"/>
-              </a:lnSpc>
-              <a:spcBef>
-                <a:spcPts val="0"/>
-              </a:spcBef>
-              <a:spcAft>
-                <a:spcPts val="0"/>
-              </a:spcAft>
-              <a:buClr>
-                <a:schemeClr val="dk1"/>
-              </a:buClr>
-              <a:buSzPts val="2800"/>
-              <a:buFont typeface="Arial"/>
-              <a:buNone/>
-            </a:pPr>
-            <a:r>
-              <a:rPr lang="fr" sz="2500" b="0" i="0" u="none" strike="noStrike" cap="none">
-                <a:solidFill>
-                  <a:srgbClr val="0E3449"/>
-                </a:solidFill>
-                <a:latin typeface="Inter SemiBold"/>
-                <a:ea typeface="Inter SemiBold"/>
-                <a:cs typeface="Inter SemiBold"/>
-                <a:sym typeface="Inter SemiBold"/>
-              </a:rPr>
-              <a:t>What’s next? </a:t>
-            </a:r>
-            <a:endParaRPr sz="2500" b="0" i="0" u="none" strike="noStrike" cap="none">
-              <a:solidFill>
-                <a:srgbClr val="0E3449"/>
-              </a:solidFill>
-              <a:latin typeface="Inter SemiBold"/>
-              <a:ea typeface="Inter SemiBold"/>
-              <a:cs typeface="Inter SemiBold"/>
-              <a:sym typeface="Inter SemiBold"/>
-            </a:endParaRPr>
-          </a:p>
-        </p:txBody>
-      </p:sp>
-      <p:pic>
-        <p:nvPicPr>
-          <p:cNvPr id="179" name="Google Shape;179;p8"/>
-          <p:cNvPicPr preferRelativeResize="0"/>
-          <p:nvPr/>
-        </p:nvPicPr>
-        <p:blipFill rotWithShape="1">
-          <a:blip r:embed="rId3">
-            <a:alphaModFix/>
-          </a:blip>
-          <a:srcRect/>
-          <a:stretch/>
-        </p:blipFill>
-        <p:spPr>
-          <a:xfrm>
-            <a:off x="463375" y="482852"/>
-            <a:ext cx="576900" cy="385904"/>
-          </a:xfrm>
-          <a:prstGeom prst="rect">
-            <a:avLst/>
-          </a:prstGeom>
-          <a:noFill/>
-          <a:ln>
-            <a:noFill/>
-          </a:ln>
-        </p:spPr>
-      </p:pic>
-      <p:sp>
-        <p:nvSpPr>
-          <p:cNvPr id="180" name="Google Shape;180;p8"/>
-          <p:cNvSpPr/>
-          <p:nvPr/>
-        </p:nvSpPr>
-        <p:spPr>
-          <a:xfrm>
-            <a:off x="10225" y="4892025"/>
-            <a:ext cx="9144000" cy="251400"/>
-          </a:xfrm>
-          <a:prstGeom prst="rect">
-            <a:avLst/>
-          </a:prstGeom>
-          <a:solidFill>
-            <a:srgbClr val="C3FFFC"/>
-          </a:solidFill>
-          <a:ln>
-            <a:noFill/>
-          </a:ln>
-        </p:spPr>
-        <p:txBody>
-          <a:bodyPr spcFirstLastPara="1" wrap="square" lIns="91425" tIns="91425" rIns="91425" bIns="91425" anchor="ctr" anchorCtr="0">
-            <a:noAutofit/>
-          </a:bodyPr>
-          <a:lstStyle/>
-          <a:p>
-            <a:pPr marL="0" marR="0" lvl="0" indent="0" algn="l" rtl="0">
-              <a:lnSpc>
-                <a:spcPct val="100000"/>
-              </a:lnSpc>
-              <a:spcBef>
-                <a:spcPts val="0"/>
-              </a:spcBef>
-              <a:spcAft>
-                <a:spcPts val="0"/>
-              </a:spcAft>
-              <a:buClr>
-                <a:srgbClr val="000000"/>
-              </a:buClr>
-              <a:buSzPts val="1400"/>
-              <a:buFont typeface="Arial"/>
-              <a:buNone/>
-            </a:pPr>
-            <a:endParaRPr sz="1400" b="0" i="0" u="none" strike="noStrike" cap="none">
-              <a:solidFill>
-                <a:srgbClr val="000000"/>
-              </a:solidFill>
-              <a:latin typeface="Arial"/>
-              <a:ea typeface="Arial"/>
-              <a:cs typeface="Arial"/>
-              <a:sym typeface="Arial"/>
-            </a:endParaRPr>
-          </a:p>
-        </p:txBody>
-      </p:sp>
-      <p:sp>
-        <p:nvSpPr>
-          <p:cNvPr id="181" name="Google Shape;181;p8"/>
           <p:cNvSpPr txBox="1">
             <a:spLocks noGrp="1"/>
           </p:cNvSpPr>
@@ -16613,158 +15802,9 @@
         </p:txBody>
       </p:sp>
     </p:spTree>
-  </p:cSld>
-  <p:clrMapOvr>
-    <a:masterClrMapping/>
-  </p:clrMapOvr>
-</p:sld>
-</file>
-
-<file path=ppt/slides/slide6.xml><?xml version="1.0" encoding="utf-8"?>
-<p:sld xmlns:a="http://schemas.openxmlformats.org/drawingml/2006/main" xmlns:r="http://schemas.openxmlformats.org/officeDocument/2006/relationships" xmlns:p="http://schemas.openxmlformats.org/presentationml/2006/main">
-  <p:cSld>
-    <p:spTree>
-      <p:nvGrpSpPr>
-        <p:cNvPr id="1" name="Shape 61">
-          <a:extLst>
-            <a:ext uri="{FF2B5EF4-FFF2-40B4-BE49-F238E27FC236}">
-              <a16:creationId xmlns:a16="http://schemas.microsoft.com/office/drawing/2014/main" id="{3BCB29B3-B3D2-DE90-1424-FBF05B3033AA}"/>
-            </a:ext>
-          </a:extLst>
-        </p:cNvPr>
-        <p:cNvGrpSpPr/>
-        <p:nvPr/>
-      </p:nvGrpSpPr>
-      <p:grpSpPr>
-        <a:xfrm>
-          <a:off x="0" y="0"/>
-          <a:ext cx="0" cy="0"/>
-          <a:chOff x="0" y="0"/>
-          <a:chExt cx="0" cy="0"/>
-        </a:xfrm>
-      </p:grpSpPr>
-      <p:sp>
-        <p:nvSpPr>
-          <p:cNvPr id="62" name="Google Shape;62;p14">
-            <a:extLst>
-              <a:ext uri="{FF2B5EF4-FFF2-40B4-BE49-F238E27FC236}">
-                <a16:creationId xmlns:a16="http://schemas.microsoft.com/office/drawing/2014/main" id="{1465D56F-7913-AD4E-8248-AEC9AC3FBC16}"/>
-              </a:ext>
-            </a:extLst>
-          </p:cNvPr>
-          <p:cNvSpPr txBox="1">
-            <a:spLocks noGrp="1"/>
-          </p:cNvSpPr>
-          <p:nvPr>
-            <p:ph type="ctrTitle" idx="4294967295"/>
-          </p:nvPr>
-        </p:nvSpPr>
-        <p:spPr>
-          <a:xfrm>
-            <a:off x="1040272" y="1702750"/>
-            <a:ext cx="5315100" cy="1398600"/>
-          </a:xfrm>
-          <a:prstGeom prst="rect">
-            <a:avLst/>
-          </a:prstGeom>
-        </p:spPr>
-        <p:txBody>
-          <a:bodyPr spcFirstLastPara="1" wrap="square" lIns="91425" tIns="91425" rIns="91425" bIns="91425" anchor="t" anchorCtr="0">
-            <a:noAutofit/>
-          </a:bodyPr>
-          <a:lstStyle/>
-          <a:p>
-            <a:pPr marL="0" lvl="0" indent="0" algn="l" rtl="0">
-              <a:spcBef>
-                <a:spcPts val="0"/>
-              </a:spcBef>
-              <a:spcAft>
-                <a:spcPts val="0"/>
-              </a:spcAft>
-              <a:buNone/>
-            </a:pPr>
-            <a:r>
-              <a:rPr lang="fr-FR" sz="4500" b="1">
-                <a:solidFill>
-                  <a:srgbClr val="0E3449"/>
-                </a:solidFill>
-                <a:latin typeface="Inter"/>
-                <a:ea typeface="Inter"/>
-                <a:cs typeface="Inter"/>
-                <a:sym typeface="Inter"/>
-              </a:rPr>
-              <a:t>Eléments méthodologiques</a:t>
-            </a:r>
-            <a:endParaRPr sz="4500" b="1">
-              <a:solidFill>
-                <a:srgbClr val="0E3449"/>
-              </a:solidFill>
-              <a:latin typeface="Inter"/>
-              <a:ea typeface="Inter"/>
-              <a:cs typeface="Inter"/>
-              <a:sym typeface="Inter"/>
-            </a:endParaRPr>
-          </a:p>
-          <a:p>
-            <a:pPr marL="0" lvl="0" indent="0" algn="l" rtl="0">
-              <a:spcBef>
-                <a:spcPts val="0"/>
-              </a:spcBef>
-              <a:spcAft>
-                <a:spcPts val="0"/>
-              </a:spcAft>
-              <a:buNone/>
-            </a:pPr>
-            <a:endParaRPr sz="4500" b="1">
-              <a:solidFill>
-                <a:srgbClr val="0E3449"/>
-              </a:solidFill>
-              <a:latin typeface="Inter"/>
-              <a:ea typeface="Inter"/>
-              <a:cs typeface="Inter"/>
-              <a:sym typeface="Inter"/>
-            </a:endParaRPr>
-          </a:p>
-        </p:txBody>
-      </p:sp>
-      <p:pic>
-        <p:nvPicPr>
-          <p:cNvPr id="63" name="Google Shape;63;p14">
-            <a:extLst>
-              <a:ext uri="{FF2B5EF4-FFF2-40B4-BE49-F238E27FC236}">
-                <a16:creationId xmlns:a16="http://schemas.microsoft.com/office/drawing/2014/main" id="{0E69C9FD-1E2B-ED3F-EE4F-0F766FA3F0C0}"/>
-              </a:ext>
-            </a:extLst>
-          </p:cNvPr>
-          <p:cNvPicPr preferRelativeResize="0"/>
-          <p:nvPr/>
-        </p:nvPicPr>
-        <p:blipFill>
-          <a:blip r:embed="rId3">
-            <a:alphaModFix/>
-          </a:blip>
-          <a:stretch>
-            <a:fillRect/>
-          </a:stretch>
-        </p:blipFill>
-        <p:spPr>
-          <a:xfrm>
-            <a:off x="463375" y="482852"/>
-            <a:ext cx="576900" cy="385904"/>
-          </a:xfrm>
-          <a:prstGeom prst="rect">
-            <a:avLst/>
-          </a:prstGeom>
-          <a:noFill/>
-          <a:ln>
-            <a:noFill/>
-          </a:ln>
-        </p:spPr>
-      </p:pic>
-    </p:spTree>
     <p:extLst>
       <p:ext uri="{BB962C8B-B14F-4D97-AF65-F5344CB8AC3E}">
-        <p14:creationId xmlns:p14="http://schemas.microsoft.com/office/powerpoint/2010/main" val="1023234914"/>
+        <p14:creationId xmlns:p14="http://schemas.microsoft.com/office/powerpoint/2010/main" val="406580661"/>
       </p:ext>
     </p:extLst>
   </p:cSld>
@@ -16774,7 +15814,7 @@
 </p:sld>
 </file>
 
-<file path=ppt/slides/slide7.xml><?xml version="1.0" encoding="utf-8"?>
+<file path=ppt/slides/slide4.xml><?xml version="1.0" encoding="utf-8"?>
 <p:sld xmlns:a="http://schemas.openxmlformats.org/drawingml/2006/main" xmlns:r="http://schemas.openxmlformats.org/officeDocument/2006/relationships" xmlns:p="http://schemas.openxmlformats.org/presentationml/2006/main">
   <p:cSld>
     <p:spTree>
@@ -16850,7 +15890,7 @@
               <a:buNone/>
             </a:pPr>
             <a:r>
-              <a:rPr lang="it-IT" sz="2500" b="1" i="0" u="none" strike="noStrike" cap="none">
+              <a:rPr lang="it-IT" sz="2500" b="1" i="0" u="none" strike="noStrike" cap="none" dirty="0">
                 <a:solidFill>
                   <a:srgbClr val="0E3449"/>
                 </a:solidFill>
@@ -16861,7 +15901,7 @@
               </a:rPr>
               <a:t>Pipeline data</a:t>
             </a:r>
-            <a:endParaRPr lang="it-IT" sz="2500" b="0" i="0" u="none" strike="noStrike" cap="none">
+            <a:endParaRPr lang="it-IT" sz="2500" b="0" i="0" u="none" strike="noStrike" cap="none" dirty="0">
               <a:solidFill>
                 <a:srgbClr val="0E3449"/>
               </a:solidFill>
@@ -16990,12 +16030,341 @@
         </p:blipFill>
         <p:spPr>
           <a:xfrm>
-            <a:off x="1192664" y="948632"/>
+            <a:off x="1040275" y="868756"/>
             <a:ext cx="7355393" cy="3933854"/>
           </a:xfrm>
           <a:prstGeom prst="rect">
             <a:avLst/>
           </a:prstGeom>
+        </p:spPr>
+      </p:pic>
+      <p:pic>
+        <p:nvPicPr>
+          <p:cNvPr id="1026" name="Picture 2">
+            <a:extLst>
+              <a:ext uri="{FF2B5EF4-FFF2-40B4-BE49-F238E27FC236}">
+                <a16:creationId xmlns:a16="http://schemas.microsoft.com/office/drawing/2014/main" id="{923FE2F2-F305-A7CE-975B-2A2BA912E4B7}"/>
+              </a:ext>
+            </a:extLst>
+          </p:cNvPr>
+          <p:cNvPicPr>
+            <a:picLocks noChangeAspect="1" noChangeArrowheads="1"/>
+          </p:cNvPicPr>
+          <p:nvPr/>
+        </p:nvPicPr>
+        <p:blipFill>
+          <a:blip r:embed="rId5">
+            <a:extLst>
+              <a:ext uri="{28A0092B-C50C-407E-A947-70E740481C1C}">
+                <a14:useLocalDpi xmlns:a14="http://schemas.microsoft.com/office/drawing/2010/main" val="0"/>
+              </a:ext>
+            </a:extLst>
+          </a:blip>
+          <a:srcRect/>
+          <a:stretch>
+            <a:fillRect/>
+          </a:stretch>
+        </p:blipFill>
+        <p:spPr bwMode="auto">
+          <a:xfrm>
+            <a:off x="9381968" y="3152805"/>
+            <a:ext cx="1080840" cy="1080840"/>
+          </a:xfrm>
+          <a:prstGeom prst="rect">
+            <a:avLst/>
+          </a:prstGeom>
+          <a:noFill/>
+          <a:extLst>
+            <a:ext uri="{909E8E84-426E-40DD-AFC4-6F175D3DCCD1}">
+              <a14:hiddenFill xmlns:a14="http://schemas.microsoft.com/office/drawing/2010/main">
+                <a:solidFill>
+                  <a:srgbClr val="FFFFFF"/>
+                </a:solidFill>
+              </a14:hiddenFill>
+            </a:ext>
+          </a:extLst>
+        </p:spPr>
+      </p:pic>
+      <p:pic>
+        <p:nvPicPr>
+          <p:cNvPr id="1028" name="Picture 4">
+            <a:extLst>
+              <a:ext uri="{FF2B5EF4-FFF2-40B4-BE49-F238E27FC236}">
+                <a16:creationId xmlns:a16="http://schemas.microsoft.com/office/drawing/2014/main" id="{D0C03EA7-EAD6-1A33-21AE-920B9121582F}"/>
+              </a:ext>
+            </a:extLst>
+          </p:cNvPr>
+          <p:cNvPicPr>
+            <a:picLocks noChangeAspect="1" noChangeArrowheads="1"/>
+          </p:cNvPicPr>
+          <p:nvPr/>
+        </p:nvPicPr>
+        <p:blipFill>
+          <a:blip r:embed="rId6">
+            <a:extLst>
+              <a:ext uri="{28A0092B-C50C-407E-A947-70E740481C1C}">
+                <a14:useLocalDpi xmlns:a14="http://schemas.microsoft.com/office/drawing/2010/main" val="0"/>
+              </a:ext>
+            </a:extLst>
+          </a:blip>
+          <a:srcRect/>
+          <a:stretch>
+            <a:fillRect/>
+          </a:stretch>
+        </p:blipFill>
+        <p:spPr bwMode="auto">
+          <a:xfrm>
+            <a:off x="9461911" y="2285310"/>
+            <a:ext cx="1470313" cy="840179"/>
+          </a:xfrm>
+          <a:prstGeom prst="rect">
+            <a:avLst/>
+          </a:prstGeom>
+          <a:noFill/>
+          <a:extLst>
+            <a:ext uri="{909E8E84-426E-40DD-AFC4-6F175D3DCCD1}">
+              <a14:hiddenFill xmlns:a14="http://schemas.microsoft.com/office/drawing/2010/main">
+                <a:solidFill>
+                  <a:srgbClr val="FFFFFF"/>
+                </a:solidFill>
+              </a14:hiddenFill>
+            </a:ext>
+          </a:extLst>
+        </p:spPr>
+      </p:pic>
+      <p:pic>
+        <p:nvPicPr>
+          <p:cNvPr id="1030" name="Picture 6">
+            <a:extLst>
+              <a:ext uri="{FF2B5EF4-FFF2-40B4-BE49-F238E27FC236}">
+                <a16:creationId xmlns:a16="http://schemas.microsoft.com/office/drawing/2014/main" id="{2941D76B-6840-C572-907F-F3680B66EBF7}"/>
+              </a:ext>
+            </a:extLst>
+          </p:cNvPr>
+          <p:cNvPicPr>
+            <a:picLocks noChangeAspect="1" noChangeArrowheads="1"/>
+          </p:cNvPicPr>
+          <p:nvPr/>
+        </p:nvPicPr>
+        <p:blipFill>
+          <a:blip r:embed="rId7">
+            <a:extLst>
+              <a:ext uri="{28A0092B-C50C-407E-A947-70E740481C1C}">
+                <a14:useLocalDpi xmlns:a14="http://schemas.microsoft.com/office/drawing/2010/main" val="0"/>
+              </a:ext>
+            </a:extLst>
+          </a:blip>
+          <a:srcRect/>
+          <a:stretch>
+            <a:fillRect/>
+          </a:stretch>
+        </p:blipFill>
+        <p:spPr bwMode="auto">
+          <a:xfrm>
+            <a:off x="9381968" y="1643023"/>
+            <a:ext cx="1008072" cy="736668"/>
+          </a:xfrm>
+          <a:prstGeom prst="rect">
+            <a:avLst/>
+          </a:prstGeom>
+          <a:noFill/>
+          <a:extLst>
+            <a:ext uri="{909E8E84-426E-40DD-AFC4-6F175D3DCCD1}">
+              <a14:hiddenFill xmlns:a14="http://schemas.microsoft.com/office/drawing/2010/main">
+                <a:solidFill>
+                  <a:srgbClr val="FFFFFF"/>
+                </a:solidFill>
+              </a14:hiddenFill>
+            </a:ext>
+          </a:extLst>
+        </p:spPr>
+      </p:pic>
+      <p:pic>
+        <p:nvPicPr>
+          <p:cNvPr id="1032" name="Picture 8">
+            <a:extLst>
+              <a:ext uri="{FF2B5EF4-FFF2-40B4-BE49-F238E27FC236}">
+                <a16:creationId xmlns:a16="http://schemas.microsoft.com/office/drawing/2014/main" id="{0AA62D0C-7533-F64F-5205-AC2C6EB164FE}"/>
+              </a:ext>
+            </a:extLst>
+          </p:cNvPr>
+          <p:cNvPicPr>
+            <a:picLocks noChangeAspect="1" noChangeArrowheads="1"/>
+          </p:cNvPicPr>
+          <p:nvPr/>
+        </p:nvPicPr>
+        <p:blipFill>
+          <a:blip r:embed="rId8">
+            <a:extLst>
+              <a:ext uri="{28A0092B-C50C-407E-A947-70E740481C1C}">
+                <a14:useLocalDpi xmlns:a14="http://schemas.microsoft.com/office/drawing/2010/main" val="0"/>
+              </a:ext>
+            </a:extLst>
+          </a:blip>
+          <a:srcRect/>
+          <a:stretch>
+            <a:fillRect/>
+          </a:stretch>
+        </p:blipFill>
+        <p:spPr bwMode="auto">
+          <a:xfrm>
+            <a:off x="9886004" y="1117302"/>
+            <a:ext cx="485958" cy="485958"/>
+          </a:xfrm>
+          <a:prstGeom prst="rect">
+            <a:avLst/>
+          </a:prstGeom>
+          <a:noFill/>
+          <a:extLst>
+            <a:ext uri="{909E8E84-426E-40DD-AFC4-6F175D3DCCD1}">
+              <a14:hiddenFill xmlns:a14="http://schemas.microsoft.com/office/drawing/2010/main">
+                <a:solidFill>
+                  <a:srgbClr val="FFFFFF"/>
+                </a:solidFill>
+              </a14:hiddenFill>
+            </a:ext>
+          </a:extLst>
+        </p:spPr>
+      </p:pic>
+      <p:pic>
+        <p:nvPicPr>
+          <p:cNvPr id="1034" name="Picture 10">
+            <a:extLst>
+              <a:ext uri="{FF2B5EF4-FFF2-40B4-BE49-F238E27FC236}">
+                <a16:creationId xmlns:a16="http://schemas.microsoft.com/office/drawing/2014/main" id="{748B16F9-6C53-91C1-4712-424BF6CE8989}"/>
+              </a:ext>
+            </a:extLst>
+          </p:cNvPr>
+          <p:cNvPicPr>
+            <a:picLocks noChangeAspect="1" noChangeArrowheads="1"/>
+          </p:cNvPicPr>
+          <p:nvPr/>
+        </p:nvPicPr>
+        <p:blipFill>
+          <a:blip r:embed="rId9">
+            <a:extLst>
+              <a:ext uri="{28A0092B-C50C-407E-A947-70E740481C1C}">
+                <a14:useLocalDpi xmlns:a14="http://schemas.microsoft.com/office/drawing/2010/main" val="0"/>
+              </a:ext>
+            </a:extLst>
+          </a:blip>
+          <a:srcRect/>
+          <a:stretch>
+            <a:fillRect/>
+          </a:stretch>
+        </p:blipFill>
+        <p:spPr bwMode="auto">
+          <a:xfrm>
+            <a:off x="9557987" y="499821"/>
+            <a:ext cx="656034" cy="656034"/>
+          </a:xfrm>
+          <a:prstGeom prst="rect">
+            <a:avLst/>
+          </a:prstGeom>
+          <a:noFill/>
+          <a:extLst>
+            <a:ext uri="{909E8E84-426E-40DD-AFC4-6F175D3DCCD1}">
+              <a14:hiddenFill xmlns:a14="http://schemas.microsoft.com/office/drawing/2010/main">
+                <a:solidFill>
+                  <a:srgbClr val="FFFFFF"/>
+                </a:solidFill>
+              </a14:hiddenFill>
+            </a:ext>
+          </a:extLst>
+        </p:spPr>
+      </p:pic>
+      <p:pic>
+        <p:nvPicPr>
+          <p:cNvPr id="1036" name="Picture 12">
+            <a:extLst>
+              <a:ext uri="{FF2B5EF4-FFF2-40B4-BE49-F238E27FC236}">
+                <a16:creationId xmlns:a16="http://schemas.microsoft.com/office/drawing/2014/main" id="{135630BC-F5F0-17C1-438A-A312C16997F8}"/>
+              </a:ext>
+            </a:extLst>
+          </p:cNvPr>
+          <p:cNvPicPr>
+            <a:picLocks noChangeAspect="1" noChangeArrowheads="1"/>
+          </p:cNvPicPr>
+          <p:nvPr/>
+        </p:nvPicPr>
+        <p:blipFill>
+          <a:blip r:embed="rId10">
+            <a:extLst>
+              <a:ext uri="{28A0092B-C50C-407E-A947-70E740481C1C}">
+                <a14:useLocalDpi xmlns:a14="http://schemas.microsoft.com/office/drawing/2010/main" val="0"/>
+              </a:ext>
+            </a:extLst>
+          </a:blip>
+          <a:srcRect/>
+          <a:stretch>
+            <a:fillRect/>
+          </a:stretch>
+        </p:blipFill>
+        <p:spPr bwMode="auto">
+          <a:xfrm>
+            <a:off x="9645557" y="-23982"/>
+            <a:ext cx="905699" cy="654116"/>
+          </a:xfrm>
+          <a:prstGeom prst="rect">
+            <a:avLst/>
+          </a:prstGeom>
+          <a:noFill/>
+          <a:extLst>
+            <a:ext uri="{909E8E84-426E-40DD-AFC4-6F175D3DCCD1}">
+              <a14:hiddenFill xmlns:a14="http://schemas.microsoft.com/office/drawing/2010/main">
+                <a:solidFill>
+                  <a:srgbClr val="FFFFFF"/>
+                </a:solidFill>
+              </a14:hiddenFill>
+            </a:ext>
+          </a:extLst>
+        </p:spPr>
+      </p:pic>
+      <p:pic>
+        <p:nvPicPr>
+          <p:cNvPr id="1038" name="Picture 14">
+            <a:extLst>
+              <a:ext uri="{FF2B5EF4-FFF2-40B4-BE49-F238E27FC236}">
+                <a16:creationId xmlns:a16="http://schemas.microsoft.com/office/drawing/2014/main" id="{1B3822DD-A0E9-A37F-0DE9-40781F1C3DF4}"/>
+              </a:ext>
+            </a:extLst>
+          </p:cNvPr>
+          <p:cNvPicPr>
+            <a:picLocks noChangeAspect="1" noChangeArrowheads="1"/>
+          </p:cNvPicPr>
+          <p:nvPr/>
+        </p:nvPicPr>
+        <p:blipFill>
+          <a:blip r:embed="rId11">
+            <a:extLst>
+              <a:ext uri="{28A0092B-C50C-407E-A947-70E740481C1C}">
+                <a14:useLocalDpi xmlns:a14="http://schemas.microsoft.com/office/drawing/2010/main" val="0"/>
+              </a:ext>
+            </a:extLst>
+          </a:blip>
+          <a:srcRect/>
+          <a:stretch>
+            <a:fillRect/>
+          </a:stretch>
+        </p:blipFill>
+        <p:spPr bwMode="auto">
+          <a:xfrm>
+            <a:off x="9179213" y="-560638"/>
+            <a:ext cx="1783953" cy="654116"/>
+          </a:xfrm>
+          <a:prstGeom prst="rect">
+            <a:avLst/>
+          </a:prstGeom>
+          <a:noFill/>
+          <a:extLst>
+            <a:ext uri="{909E8E84-426E-40DD-AFC4-6F175D3DCCD1}">
+              <a14:hiddenFill xmlns:a14="http://schemas.microsoft.com/office/drawing/2010/main">
+                <a:solidFill>
+                  <a:srgbClr val="FFFFFF"/>
+                </a:solidFill>
+              </a14:hiddenFill>
+            </a:ext>
+          </a:extLst>
         </p:spPr>
       </p:pic>
     </p:spTree>
@@ -17011,7 +16380,349 @@
 </p:sld>
 </file>
 
-<file path=ppt/slides/slide8.xml><?xml version="1.0" encoding="utf-8"?>
+<file path=ppt/slides/slide5.xml><?xml version="1.0" encoding="utf-8"?>
+<p:sld xmlns:a="http://schemas.openxmlformats.org/drawingml/2006/main" xmlns:r="http://schemas.openxmlformats.org/officeDocument/2006/relationships" xmlns:p="http://schemas.openxmlformats.org/presentationml/2006/main">
+  <p:cSld>
+    <p:spTree>
+      <p:nvGrpSpPr>
+        <p:cNvPr id="1" name="Shape 177"/>
+        <p:cNvGrpSpPr/>
+        <p:nvPr/>
+      </p:nvGrpSpPr>
+      <p:grpSpPr>
+        <a:xfrm>
+          <a:off x="0" y="0"/>
+          <a:ext cx="0" cy="0"/>
+          <a:chOff x="0" y="0"/>
+          <a:chExt cx="0" cy="0"/>
+        </a:xfrm>
+      </p:grpSpPr>
+      <p:sp>
+        <p:nvSpPr>
+          <p:cNvPr id="178" name="Google Shape;178;p8"/>
+          <p:cNvSpPr txBox="1">
+            <a:spLocks noGrp="1"/>
+          </p:cNvSpPr>
+          <p:nvPr>
+            <p:ph type="ctrTitle" idx="4294967295"/>
+          </p:nvPr>
+        </p:nvSpPr>
+        <p:spPr>
+          <a:xfrm>
+            <a:off x="1192664" y="403309"/>
+            <a:ext cx="5315100" cy="533100"/>
+          </a:xfrm>
+          <a:prstGeom prst="rect">
+            <a:avLst/>
+          </a:prstGeom>
+          <a:noFill/>
+          <a:ln>
+            <a:noFill/>
+          </a:ln>
+        </p:spPr>
+        <p:txBody>
+          <a:bodyPr spcFirstLastPara="1" wrap="square" lIns="91425" tIns="91425" rIns="91425" bIns="91425" anchor="t" anchorCtr="0">
+            <a:noAutofit/>
+          </a:bodyPr>
+          <a:lstStyle/>
+          <a:p>
+            <a:r>
+              <a:rPr lang="fr-FR" sz="2500" b="1" dirty="0">
+                <a:solidFill>
+                  <a:srgbClr val="0E3449"/>
+                </a:solidFill>
+                <a:latin typeface="Inter SemiBold"/>
+                <a:ea typeface="Inter SemiBold"/>
+              </a:rPr>
+              <a:t>Synthèse finale</a:t>
+            </a:r>
+            <a:endParaRPr sz="2500" b="1" dirty="0">
+              <a:solidFill>
+                <a:srgbClr val="0E3449"/>
+              </a:solidFill>
+              <a:latin typeface="Inter SemiBold"/>
+              <a:ea typeface="Inter SemiBold"/>
+              <a:sym typeface="Inter SemiBold"/>
+            </a:endParaRPr>
+          </a:p>
+        </p:txBody>
+      </p:sp>
+      <p:pic>
+        <p:nvPicPr>
+          <p:cNvPr id="179" name="Google Shape;179;p8"/>
+          <p:cNvPicPr preferRelativeResize="0"/>
+          <p:nvPr/>
+        </p:nvPicPr>
+        <p:blipFill rotWithShape="1">
+          <a:blip r:embed="rId3">
+            <a:alphaModFix/>
+          </a:blip>
+          <a:srcRect/>
+          <a:stretch/>
+        </p:blipFill>
+        <p:spPr>
+          <a:xfrm>
+            <a:off x="463375" y="482852"/>
+            <a:ext cx="576900" cy="385904"/>
+          </a:xfrm>
+          <a:prstGeom prst="rect">
+            <a:avLst/>
+          </a:prstGeom>
+          <a:noFill/>
+          <a:ln>
+            <a:noFill/>
+          </a:ln>
+        </p:spPr>
+      </p:pic>
+      <p:sp>
+        <p:nvSpPr>
+          <p:cNvPr id="180" name="Google Shape;180;p8"/>
+          <p:cNvSpPr/>
+          <p:nvPr/>
+        </p:nvSpPr>
+        <p:spPr>
+          <a:xfrm>
+            <a:off x="10225" y="4892025"/>
+            <a:ext cx="9144000" cy="251400"/>
+          </a:xfrm>
+          <a:prstGeom prst="rect">
+            <a:avLst/>
+          </a:prstGeom>
+          <a:solidFill>
+            <a:srgbClr val="C3FFFC"/>
+          </a:solidFill>
+          <a:ln>
+            <a:noFill/>
+          </a:ln>
+        </p:spPr>
+        <p:txBody>
+          <a:bodyPr spcFirstLastPara="1" wrap="square" lIns="91425" tIns="91425" rIns="91425" bIns="91425" anchor="ctr" anchorCtr="0">
+            <a:noAutofit/>
+          </a:bodyPr>
+          <a:lstStyle/>
+          <a:p>
+            <a:pPr marL="0" marR="0" lvl="0" indent="0" algn="l" rtl="0">
+              <a:lnSpc>
+                <a:spcPct val="100000"/>
+              </a:lnSpc>
+              <a:spcBef>
+                <a:spcPts val="0"/>
+              </a:spcBef>
+              <a:spcAft>
+                <a:spcPts val="0"/>
+              </a:spcAft>
+              <a:buClr>
+                <a:srgbClr val="000000"/>
+              </a:buClr>
+              <a:buSzPts val="1400"/>
+              <a:buFont typeface="Arial"/>
+              <a:buNone/>
+            </a:pPr>
+            <a:endParaRPr sz="1400" b="0" i="0" u="none" strike="noStrike" cap="none">
+              <a:solidFill>
+                <a:srgbClr val="000000"/>
+              </a:solidFill>
+              <a:latin typeface="Arial"/>
+              <a:ea typeface="Arial"/>
+              <a:cs typeface="Arial"/>
+              <a:sym typeface="Arial"/>
+            </a:endParaRPr>
+          </a:p>
+        </p:txBody>
+      </p:sp>
+      <p:sp>
+        <p:nvSpPr>
+          <p:cNvPr id="181" name="Google Shape;181;p8"/>
+          <p:cNvSpPr txBox="1">
+            <a:spLocks noGrp="1"/>
+          </p:cNvSpPr>
+          <p:nvPr>
+            <p:ph type="body" idx="1"/>
+          </p:nvPr>
+        </p:nvSpPr>
+        <p:spPr>
+          <a:xfrm>
+            <a:off x="311700" y="1155049"/>
+            <a:ext cx="8520600" cy="3585142"/>
+          </a:xfrm>
+          <a:prstGeom prst="rect">
+            <a:avLst/>
+          </a:prstGeom>
+          <a:noFill/>
+          <a:ln>
+            <a:noFill/>
+          </a:ln>
+        </p:spPr>
+        <p:txBody>
+          <a:bodyPr spcFirstLastPara="1" wrap="square" lIns="91425" tIns="91425" rIns="91425" bIns="91425" anchor="t" anchorCtr="0">
+            <a:noAutofit/>
+          </a:bodyPr>
+          <a:lstStyle/>
+          <a:p>
+            <a:pPr marL="114300" lvl="0" indent="0" algn="l" rtl="0">
+              <a:lnSpc>
+                <a:spcPct val="115000"/>
+              </a:lnSpc>
+              <a:spcBef>
+                <a:spcPts val="0"/>
+              </a:spcBef>
+              <a:spcAft>
+                <a:spcPts val="0"/>
+              </a:spcAft>
+              <a:buSzPts val="1800"/>
+              <a:buNone/>
+            </a:pPr>
+            <a:r>
+              <a:rPr lang="fr-FR" sz="1400" dirty="0" err="1"/>
+              <a:t>wwwww</a:t>
+            </a:r>
+            <a:endParaRPr sz="1400" dirty="0"/>
+          </a:p>
+        </p:txBody>
+      </p:sp>
+    </p:spTree>
+  </p:cSld>
+  <p:clrMapOvr>
+    <a:masterClrMapping/>
+  </p:clrMapOvr>
+</p:sld>
+</file>
+
+<file path=ppt/slides/slide6.xml><?xml version="1.0" encoding="utf-8"?>
+<p:sld xmlns:a="http://schemas.openxmlformats.org/drawingml/2006/main" xmlns:r="http://schemas.openxmlformats.org/officeDocument/2006/relationships" xmlns:p="http://schemas.openxmlformats.org/presentationml/2006/main">
+  <p:cSld>
+    <p:spTree>
+      <p:nvGrpSpPr>
+        <p:cNvPr id="1" name="Shape 61">
+          <a:extLst>
+            <a:ext uri="{FF2B5EF4-FFF2-40B4-BE49-F238E27FC236}">
+              <a16:creationId xmlns:a16="http://schemas.microsoft.com/office/drawing/2014/main" id="{3BCB29B3-B3D2-DE90-1424-FBF05B3033AA}"/>
+            </a:ext>
+          </a:extLst>
+        </p:cNvPr>
+        <p:cNvGrpSpPr/>
+        <p:nvPr/>
+      </p:nvGrpSpPr>
+      <p:grpSpPr>
+        <a:xfrm>
+          <a:off x="0" y="0"/>
+          <a:ext cx="0" cy="0"/>
+          <a:chOff x="0" y="0"/>
+          <a:chExt cx="0" cy="0"/>
+        </a:xfrm>
+      </p:grpSpPr>
+      <p:sp>
+        <p:nvSpPr>
+          <p:cNvPr id="62" name="Google Shape;62;p14">
+            <a:extLst>
+              <a:ext uri="{FF2B5EF4-FFF2-40B4-BE49-F238E27FC236}">
+                <a16:creationId xmlns:a16="http://schemas.microsoft.com/office/drawing/2014/main" id="{1465D56F-7913-AD4E-8248-AEC9AC3FBC16}"/>
+              </a:ext>
+            </a:extLst>
+          </p:cNvPr>
+          <p:cNvSpPr txBox="1">
+            <a:spLocks noGrp="1"/>
+          </p:cNvSpPr>
+          <p:nvPr>
+            <p:ph type="ctrTitle" idx="4294967295"/>
+          </p:nvPr>
+        </p:nvSpPr>
+        <p:spPr>
+          <a:xfrm>
+            <a:off x="1040272" y="1702750"/>
+            <a:ext cx="5315100" cy="1398600"/>
+          </a:xfrm>
+          <a:prstGeom prst="rect">
+            <a:avLst/>
+          </a:prstGeom>
+        </p:spPr>
+        <p:txBody>
+          <a:bodyPr spcFirstLastPara="1" wrap="square" lIns="91425" tIns="91425" rIns="91425" bIns="91425" anchor="t" anchorCtr="0">
+            <a:noAutofit/>
+          </a:bodyPr>
+          <a:lstStyle/>
+          <a:p>
+            <a:pPr marL="0" lvl="0" indent="0" algn="l" rtl="0">
+              <a:spcBef>
+                <a:spcPts val="0"/>
+              </a:spcBef>
+              <a:spcAft>
+                <a:spcPts val="0"/>
+              </a:spcAft>
+              <a:buNone/>
+            </a:pPr>
+            <a:r>
+              <a:rPr lang="fr-FR" sz="4500" b="1" dirty="0">
+                <a:solidFill>
+                  <a:srgbClr val="0E3449"/>
+                </a:solidFill>
+                <a:latin typeface="Inter"/>
+                <a:ea typeface="Inter"/>
+                <a:cs typeface="Inter"/>
+                <a:sym typeface="Inter"/>
+              </a:rPr>
+              <a:t>Annexes</a:t>
+            </a:r>
+            <a:endParaRPr sz="4500" b="1" dirty="0">
+              <a:solidFill>
+                <a:srgbClr val="0E3449"/>
+              </a:solidFill>
+              <a:latin typeface="Inter"/>
+              <a:ea typeface="Inter"/>
+              <a:cs typeface="Inter"/>
+              <a:sym typeface="Inter"/>
+            </a:endParaRPr>
+          </a:p>
+        </p:txBody>
+      </p:sp>
+      <p:pic>
+        <p:nvPicPr>
+          <p:cNvPr id="63" name="Google Shape;63;p14">
+            <a:extLst>
+              <a:ext uri="{FF2B5EF4-FFF2-40B4-BE49-F238E27FC236}">
+                <a16:creationId xmlns:a16="http://schemas.microsoft.com/office/drawing/2014/main" id="{0E69C9FD-1E2B-ED3F-EE4F-0F766FA3F0C0}"/>
+              </a:ext>
+            </a:extLst>
+          </p:cNvPr>
+          <p:cNvPicPr preferRelativeResize="0"/>
+          <p:nvPr/>
+        </p:nvPicPr>
+        <p:blipFill>
+          <a:blip r:embed="rId3">
+            <a:alphaModFix/>
+          </a:blip>
+          <a:stretch>
+            <a:fillRect/>
+          </a:stretch>
+        </p:blipFill>
+        <p:spPr>
+          <a:xfrm>
+            <a:off x="463375" y="482852"/>
+            <a:ext cx="576900" cy="385904"/>
+          </a:xfrm>
+          <a:prstGeom prst="rect">
+            <a:avLst/>
+          </a:prstGeom>
+          <a:noFill/>
+          <a:ln>
+            <a:noFill/>
+          </a:ln>
+        </p:spPr>
+      </p:pic>
+    </p:spTree>
+    <p:extLst>
+      <p:ext uri="{BB962C8B-B14F-4D97-AF65-F5344CB8AC3E}">
+        <p14:creationId xmlns:p14="http://schemas.microsoft.com/office/powerpoint/2010/main" val="1558646683"/>
+      </p:ext>
+    </p:extLst>
+  </p:cSld>
+  <p:clrMapOvr>
+    <a:masterClrMapping/>
+  </p:clrMapOvr>
+</p:sld>
+</file>
+
+<file path=ppt/slides/slide7.xml><?xml version="1.0" encoding="utf-8"?>
 <p:sld xmlns:a="http://schemas.openxmlformats.org/drawingml/2006/main" xmlns:r="http://schemas.openxmlformats.org/officeDocument/2006/relationships" xmlns:p="http://schemas.openxmlformats.org/presentationml/2006/main">
   <p:cSld>
     <p:spTree>
@@ -18047,7 +17758,7 @@
 </p:sld>
 </file>
 
-<file path=ppt/slides/slide9.xml><?xml version="1.0" encoding="utf-8"?>
+<file path=ppt/slides/slide8.xml><?xml version="1.0" encoding="utf-8"?>
 <p:sld xmlns:a="http://schemas.openxmlformats.org/drawingml/2006/main" xmlns:r="http://schemas.openxmlformats.org/officeDocument/2006/relationships" xmlns:p="http://schemas.openxmlformats.org/presentationml/2006/main">
   <p:cSld>
     <p:bg>

--- a/presentation/dsfs_ft_35_Projet_REnergies_efficiency_prediction.pptx
+++ b/presentation/dsfs_ft_35_Projet_REnergies_efficiency_prediction.pptx
@@ -6,41 +6,46 @@
     <p:sldMasterId id="2147483660" r:id="rId2"/>
   </p:sldMasterIdLst>
   <p:notesMasterIdLst>
-    <p:notesMasterId r:id="rId11"/>
+    <p:notesMasterId r:id="rId16"/>
   </p:notesMasterIdLst>
   <p:sldIdLst>
     <p:sldId id="256" r:id="rId3"/>
     <p:sldId id="263" r:id="rId4"/>
     <p:sldId id="286" r:id="rId5"/>
-    <p:sldId id="274" r:id="rId6"/>
-    <p:sldId id="270" r:id="rId7"/>
-    <p:sldId id="273" r:id="rId8"/>
-    <p:sldId id="275" r:id="rId9"/>
-    <p:sldId id="271" r:id="rId10"/>
+    <p:sldId id="287" r:id="rId6"/>
+    <p:sldId id="274" r:id="rId7"/>
+    <p:sldId id="270" r:id="rId8"/>
+    <p:sldId id="289" r:id="rId9"/>
+    <p:sldId id="291" r:id="rId10"/>
+    <p:sldId id="292" r:id="rId11"/>
+    <p:sldId id="273" r:id="rId12"/>
+    <p:sldId id="275" r:id="rId13"/>
+    <p:sldId id="288" r:id="rId14"/>
+    <p:sldId id="271" r:id="rId15"/>
   </p:sldIdLst>
   <p:sldSz cx="9144000" cy="5143500" type="screen16x9"/>
   <p:notesSz cx="6858000" cy="9144000"/>
   <p:embeddedFontLst>
     <p:embeddedFont>
       <p:font typeface="Inter" panose="020B0604020202020204" charset="0"/>
-      <p:regular r:id="rId12"/>
-      <p:bold r:id="rId13"/>
-      <p:italic r:id="rId14"/>
-      <p:boldItalic r:id="rId15"/>
+      <p:regular r:id="rId17"/>
+      <p:bold r:id="rId18"/>
+      <p:italic r:id="rId19"/>
+      <p:boldItalic r:id="rId20"/>
     </p:embeddedFont>
     <p:embeddedFont>
       <p:font typeface="Inter Medium" panose="020B0604020202020204" charset="0"/>
-      <p:regular r:id="rId16"/>
-      <p:bold r:id="rId17"/>
-      <p:italic r:id="rId18"/>
-      <p:boldItalic r:id="rId19"/>
+      <p:regular r:id="rId21"/>
+      <p:bold r:id="rId22"/>
+      <p:italic r:id="rId23"/>
+      <p:boldItalic r:id="rId24"/>
     </p:embeddedFont>
     <p:embeddedFont>
       <p:font typeface="Inter SemiBold" panose="020B0604020202020204" charset="0"/>
-      <p:regular r:id="rId20"/>
-      <p:bold r:id="rId21"/>
-      <p:italic r:id="rId22"/>
-      <p:boldItalic r:id="rId23"/>
+      <p:regular r:id="rId25"/>
+      <p:bold r:id="rId26"/>
+      <p:italic r:id="rId27"/>
+      <p:boldItalic r:id="rId28"/>
     </p:embeddedFont>
   </p:embeddedFontLst>
   <p:defaultTextStyle>
@@ -283,7 +288,7 @@
 <file path=ppt/revisionInfo.xml><?xml version="1.0" encoding="utf-8"?>
 <p1510:revInfo xmlns:a="http://schemas.openxmlformats.org/drawingml/2006/main" xmlns:r="http://schemas.openxmlformats.org/officeDocument/2006/relationships" xmlns:p1510="http://schemas.microsoft.com/office/powerpoint/2015/10/main">
   <p1510:revLst>
-    <p1510:client id="{2EB72A00-7F79-4813-B4C2-C6564860F3F6}" v="61" dt="2025-11-19T15:31:23.621"/>
+    <p1510:client id="{2EB72A00-7F79-4813-B4C2-C6564860F3F6}" v="79" dt="2025-11-19T19:00:19.863"/>
   </p1510:revLst>
 </p1510:revInfo>
 </file>
@@ -293,7 +298,7 @@
   <pc:docChgLst>
     <pc:chgData name="Jean-Yves Vuillequez" userId="e7fac481abea6bd0" providerId="LiveId" clId="{79E365E8-22BC-4EC2-9606-9A9AC6CD1D22}"/>
     <pc:docChg chg="undo custSel addSld delSld modSld sldOrd">
-      <pc:chgData name="Jean-Yves Vuillequez" userId="e7fac481abea6bd0" providerId="LiveId" clId="{79E365E8-22BC-4EC2-9606-9A9AC6CD1D22}" dt="2025-11-19T15:31:23.550" v="194" actId="1076"/>
+      <pc:chgData name="Jean-Yves Vuillequez" userId="e7fac481abea6bd0" providerId="LiveId" clId="{79E365E8-22BC-4EC2-9606-9A9AC6CD1D22}" dt="2025-11-19T19:00:56.492" v="316"/>
       <pc:docMkLst>
         <pc:docMk/>
       </pc:docMkLst>
@@ -372,11 +377,19 @@
         </pc:sldMkLst>
       </pc:sldChg>
       <pc:sldChg chg="addSp delSp modSp mod">
-        <pc:chgData name="Jean-Yves Vuillequez" userId="e7fac481abea6bd0" providerId="LiveId" clId="{79E365E8-22BC-4EC2-9606-9A9AC6CD1D22}" dt="2025-11-19T15:27:31.625" v="178" actId="22"/>
+        <pc:chgData name="Jean-Yves Vuillequez" userId="e7fac481abea6bd0" providerId="LiveId" clId="{79E365E8-22BC-4EC2-9606-9A9AC6CD1D22}" dt="2025-11-19T18:54:38.216" v="275" actId="20577"/>
         <pc:sldMkLst>
           <pc:docMk/>
           <pc:sldMk cId="0" sldId="270"/>
         </pc:sldMkLst>
+        <pc:spChg chg="add mod">
+          <ac:chgData name="Jean-Yves Vuillequez" userId="e7fac481abea6bd0" providerId="LiveId" clId="{79E365E8-22BC-4EC2-9606-9A9AC6CD1D22}" dt="2025-11-19T18:53:34.471" v="259" actId="404"/>
+          <ac:spMkLst>
+            <pc:docMk/>
+            <pc:sldMk cId="0" sldId="270"/>
+            <ac:spMk id="2" creationId="{A8AF3C33-4A88-5872-EAED-84B597DDCB98}"/>
+          </ac:spMkLst>
+        </pc:spChg>
         <pc:spChg chg="add del">
           <ac:chgData name="Jean-Yves Vuillequez" userId="e7fac481abea6bd0" providerId="LiveId" clId="{79E365E8-22BC-4EC2-9606-9A9AC6CD1D22}" dt="2025-11-19T15:27:31.625" v="178" actId="22"/>
           <ac:spMkLst>
@@ -386,7 +399,7 @@
           </ac:spMkLst>
         </pc:spChg>
         <pc:spChg chg="mod">
-          <ac:chgData name="Jean-Yves Vuillequez" userId="e7fac481abea6bd0" providerId="LiveId" clId="{79E365E8-22BC-4EC2-9606-9A9AC6CD1D22}" dt="2025-11-19T14:03:00.878" v="125" actId="108"/>
+          <ac:chgData name="Jean-Yves Vuillequez" userId="e7fac481abea6bd0" providerId="LiveId" clId="{79E365E8-22BC-4EC2-9606-9A9AC6CD1D22}" dt="2025-11-19T18:54:38.216" v="275" actId="20577"/>
           <ac:spMkLst>
             <pc:docMk/>
             <pc:sldMk cId="0" sldId="270"/>
@@ -567,7 +580,7 @@
         </pc:spChg>
       </pc:sldChg>
       <pc:sldChg chg="addSp delSp modSp add mod ord">
-        <pc:chgData name="Jean-Yves Vuillequez" userId="e7fac481abea6bd0" providerId="LiveId" clId="{79E365E8-22BC-4EC2-9606-9A9AC6CD1D22}" dt="2025-11-19T15:31:23.550" v="194" actId="1076"/>
+        <pc:chgData name="Jean-Yves Vuillequez" userId="e7fac481abea6bd0" providerId="LiveId" clId="{79E365E8-22BC-4EC2-9606-9A9AC6CD1D22}" dt="2025-11-19T18:14:49.805" v="213" actId="1076"/>
         <pc:sldMkLst>
           <pc:docMk/>
           <pc:sldMk cId="1821755839" sldId="274"/>
@@ -596,8 +609,16 @@
             <ac:spMk id="9" creationId="{C85936DC-7A36-C7FD-89BC-2AF218A582C2}"/>
           </ac:spMkLst>
         </pc:spChg>
+        <pc:spChg chg="mod">
+          <ac:chgData name="Jean-Yves Vuillequez" userId="e7fac481abea6bd0" providerId="LiveId" clId="{79E365E8-22BC-4EC2-9606-9A9AC6CD1D22}" dt="2025-11-19T18:14:44.682" v="212" actId="20577"/>
+          <ac:spMkLst>
+            <pc:docMk/>
+            <pc:sldMk cId="1821755839" sldId="274"/>
+            <ac:spMk id="96" creationId="{E0E7B8E7-F933-D99A-FC55-A7E0AFDF3556}"/>
+          </ac:spMkLst>
+        </pc:spChg>
         <pc:picChg chg="add mod">
-          <ac:chgData name="Jean-Yves Vuillequez" userId="e7fac481abea6bd0" providerId="LiveId" clId="{79E365E8-22BC-4EC2-9606-9A9AC6CD1D22}" dt="2025-11-19T15:07:19.367" v="147" actId="1076"/>
+          <ac:chgData name="Jean-Yves Vuillequez" userId="e7fac481abea6bd0" providerId="LiveId" clId="{79E365E8-22BC-4EC2-9606-9A9AC6CD1D22}" dt="2025-11-19T18:14:49.805" v="213" actId="1076"/>
           <ac:picMkLst>
             <pc:docMk/>
             <pc:sldMk cId="1821755839" sldId="274"/>
@@ -765,7 +786,7 @@
         </pc:sldMkLst>
       </pc:sldChg>
       <pc:sldChg chg="addSp delSp modSp mod delAnim">
-        <pc:chgData name="Jean-Yves Vuillequez" userId="e7fac481abea6bd0" providerId="LiveId" clId="{79E365E8-22BC-4EC2-9606-9A9AC6CD1D22}" dt="2025-11-19T15:04:11.263" v="144"/>
+        <pc:chgData name="Jean-Yves Vuillequez" userId="e7fac481abea6bd0" providerId="LiveId" clId="{79E365E8-22BC-4EC2-9606-9A9AC6CD1D22}" dt="2025-11-19T18:14:17.398" v="198"/>
         <pc:sldMkLst>
           <pc:docMk/>
           <pc:sldMk cId="406580661" sldId="286"/>
@@ -792,6 +813,14 @@
             <pc:docMk/>
             <pc:sldMk cId="406580661" sldId="286"/>
             <ac:spMk id="69" creationId="{2DFE67F9-5520-F4B8-B6C5-40C9605525B6}"/>
+          </ac:spMkLst>
+        </pc:spChg>
+        <pc:spChg chg="mod">
+          <ac:chgData name="Jean-Yves Vuillequez" userId="e7fac481abea6bd0" providerId="LiveId" clId="{79E365E8-22BC-4EC2-9606-9A9AC6CD1D22}" dt="2025-11-19T18:14:17.398" v="198"/>
+          <ac:spMkLst>
+            <pc:docMk/>
+            <pc:sldMk cId="406580661" sldId="286"/>
+            <ac:spMk id="70" creationId="{6C332C7A-0C1B-7002-DD8F-E4EB26F3199D}"/>
           </ac:spMkLst>
         </pc:spChg>
         <pc:spChg chg="del mod">
@@ -848,6 +877,103 @@
             <pc:docMk/>
             <pc:sldMk cId="406580661" sldId="286"/>
             <ac:spMk id="79" creationId="{9872CB08-4753-4C4E-189F-43C9459E961D}"/>
+          </ac:spMkLst>
+        </pc:spChg>
+      </pc:sldChg>
+      <pc:sldChg chg="add">
+        <pc:chgData name="Jean-Yves Vuillequez" userId="e7fac481abea6bd0" providerId="LiveId" clId="{79E365E8-22BC-4EC2-9606-9A9AC6CD1D22}" dt="2025-11-19T18:13:59.246" v="195"/>
+        <pc:sldMkLst>
+          <pc:docMk/>
+          <pc:sldMk cId="3647836335" sldId="287"/>
+        </pc:sldMkLst>
+      </pc:sldChg>
+      <pc:sldChg chg="add del">
+        <pc:chgData name="Jean-Yves Vuillequez" userId="e7fac481abea6bd0" providerId="LiveId" clId="{79E365E8-22BC-4EC2-9606-9A9AC6CD1D22}" dt="2025-11-19T18:14:09.212" v="197"/>
+        <pc:sldMkLst>
+          <pc:docMk/>
+          <pc:sldMk cId="919858653" sldId="288"/>
+        </pc:sldMkLst>
+      </pc:sldChg>
+      <pc:sldChg chg="modSp add mod">
+        <pc:chgData name="Jean-Yves Vuillequez" userId="e7fac481abea6bd0" providerId="LiveId" clId="{79E365E8-22BC-4EC2-9606-9A9AC6CD1D22}" dt="2025-11-19T18:55:15.393" v="295" actId="20577"/>
+        <pc:sldMkLst>
+          <pc:docMk/>
+          <pc:sldMk cId="4156271710" sldId="288"/>
+        </pc:sldMkLst>
+        <pc:spChg chg="mod">
+          <ac:chgData name="Jean-Yves Vuillequez" userId="e7fac481abea6bd0" providerId="LiveId" clId="{79E365E8-22BC-4EC2-9606-9A9AC6CD1D22}" dt="2025-11-19T18:55:15.393" v="295" actId="20577"/>
+          <ac:spMkLst>
+            <pc:docMk/>
+            <pc:sldMk cId="4156271710" sldId="288"/>
+            <ac:spMk id="96" creationId="{9496F4BA-6570-B121-53B0-E4B792AFAF9D}"/>
+          </ac:spMkLst>
+        </pc:spChg>
+      </pc:sldChg>
+      <pc:sldChg chg="modSp add mod">
+        <pc:chgData name="Jean-Yves Vuillequez" userId="e7fac481abea6bd0" providerId="LiveId" clId="{79E365E8-22BC-4EC2-9606-9A9AC6CD1D22}" dt="2025-11-19T18:58:26.595" v="299" actId="20577"/>
+        <pc:sldMkLst>
+          <pc:docMk/>
+          <pc:sldMk cId="2290935718" sldId="289"/>
+        </pc:sldMkLst>
+        <pc:spChg chg="mod">
+          <ac:chgData name="Jean-Yves Vuillequez" userId="e7fac481abea6bd0" providerId="LiveId" clId="{79E365E8-22BC-4EC2-9606-9A9AC6CD1D22}" dt="2025-11-19T18:58:26.595" v="299" actId="20577"/>
+          <ac:spMkLst>
+            <pc:docMk/>
+            <pc:sldMk cId="2290935718" sldId="289"/>
+            <ac:spMk id="2" creationId="{EBF06A3A-1FD1-62CC-FA82-868DA8F80F0D}"/>
+          </ac:spMkLst>
+        </pc:spChg>
+      </pc:sldChg>
+      <pc:sldChg chg="modSp add del">
+        <pc:chgData name="Jean-Yves Vuillequez" userId="e7fac481abea6bd0" providerId="LiveId" clId="{79E365E8-22BC-4EC2-9606-9A9AC6CD1D22}" dt="2025-11-19T18:59:08.937" v="303" actId="47"/>
+        <pc:sldMkLst>
+          <pc:docMk/>
+          <pc:sldMk cId="3738511160" sldId="290"/>
+        </pc:sldMkLst>
+        <pc:spChg chg="mod">
+          <ac:chgData name="Jean-Yves Vuillequez" userId="e7fac481abea6bd0" providerId="LiveId" clId="{79E365E8-22BC-4EC2-9606-9A9AC6CD1D22}" dt="2025-11-19T18:59:02.352" v="301"/>
+          <ac:spMkLst>
+            <pc:docMk/>
+            <pc:sldMk cId="3738511160" sldId="290"/>
+            <ac:spMk id="70" creationId="{4B63368A-49D0-EF4C-D66D-6EEF2743BE0B}"/>
+          </ac:spMkLst>
+        </pc:spChg>
+      </pc:sldChg>
+      <pc:sldChg chg="modSp add mod">
+        <pc:chgData name="Jean-Yves Vuillequez" userId="e7fac481abea6bd0" providerId="LiveId" clId="{79E365E8-22BC-4EC2-9606-9A9AC6CD1D22}" dt="2025-11-19T18:59:44.002" v="310" actId="20577"/>
+        <pc:sldMkLst>
+          <pc:docMk/>
+          <pc:sldMk cId="3332770" sldId="291"/>
+        </pc:sldMkLst>
+        <pc:spChg chg="mod">
+          <ac:chgData name="Jean-Yves Vuillequez" userId="e7fac481abea6bd0" providerId="LiveId" clId="{79E365E8-22BC-4EC2-9606-9A9AC6CD1D22}" dt="2025-11-19T18:59:44.002" v="310" actId="20577"/>
+          <ac:spMkLst>
+            <pc:docMk/>
+            <pc:sldMk cId="3332770" sldId="291"/>
+            <ac:spMk id="2" creationId="{010F41C2-7624-67DE-B008-1F392C11A870}"/>
+          </ac:spMkLst>
+        </pc:spChg>
+        <pc:spChg chg="mod">
+          <ac:chgData name="Jean-Yves Vuillequez" userId="e7fac481abea6bd0" providerId="LiveId" clId="{79E365E8-22BC-4EC2-9606-9A9AC6CD1D22}" dt="2025-11-19T18:59:32.221" v="307" actId="20577"/>
+          <ac:spMkLst>
+            <pc:docMk/>
+            <pc:sldMk cId="3332770" sldId="291"/>
+            <ac:spMk id="178" creationId="{1DE246AA-5B17-33A5-5EF2-125E8EA81EFC}"/>
+          </ac:spMkLst>
+        </pc:spChg>
+      </pc:sldChg>
+      <pc:sldChg chg="modSp add mod ord">
+        <pc:chgData name="Jean-Yves Vuillequez" userId="e7fac481abea6bd0" providerId="LiveId" clId="{79E365E8-22BC-4EC2-9606-9A9AC6CD1D22}" dt="2025-11-19T19:00:56.492" v="316"/>
+        <pc:sldMkLst>
+          <pc:docMk/>
+          <pc:sldMk cId="3315518580" sldId="292"/>
+        </pc:sldMkLst>
+        <pc:spChg chg="mod">
+          <ac:chgData name="Jean-Yves Vuillequez" userId="e7fac481abea6bd0" providerId="LiveId" clId="{79E365E8-22BC-4EC2-9606-9A9AC6CD1D22}" dt="2025-11-19T19:00:56.492" v="316"/>
+          <ac:spMkLst>
+            <pc:docMk/>
+            <pc:sldMk cId="3315518580" sldId="292"/>
+            <ac:spMk id="70" creationId="{C70766F9-707C-9B0E-5A17-F03AA1792E9A}"/>
           </ac:spMkLst>
         </pc:spChg>
       </pc:sldChg>
@@ -1401,6 +1527,545 @@
 </p:notes>
 </file>
 
+<file path=ppt/notesSlides/notesSlide10.xml><?xml version="1.0" encoding="utf-8"?>
+<p:notes xmlns:a="http://schemas.openxmlformats.org/drawingml/2006/main" xmlns:r="http://schemas.openxmlformats.org/officeDocument/2006/relationships" xmlns:p="http://schemas.openxmlformats.org/presentationml/2006/main" showMasterSp="0" showMasterPhAnim="0">
+  <p:cSld>
+    <p:spTree>
+      <p:nvGrpSpPr>
+        <p:cNvPr id="1" name="Shape 58">
+          <a:extLst>
+            <a:ext uri="{FF2B5EF4-FFF2-40B4-BE49-F238E27FC236}">
+              <a16:creationId xmlns:a16="http://schemas.microsoft.com/office/drawing/2014/main" id="{A2A17C4A-7811-F8FB-393C-7F4C3C6D3E5F}"/>
+            </a:ext>
+          </a:extLst>
+        </p:cNvPr>
+        <p:cNvGrpSpPr/>
+        <p:nvPr/>
+      </p:nvGrpSpPr>
+      <p:grpSpPr>
+        <a:xfrm>
+          <a:off x="0" y="0"/>
+          <a:ext cx="0" cy="0"/>
+          <a:chOff x="0" y="0"/>
+          <a:chExt cx="0" cy="0"/>
+        </a:xfrm>
+      </p:grpSpPr>
+      <p:sp>
+        <p:nvSpPr>
+          <p:cNvPr id="59" name="Google Shape;59;g3bc3b886ea_0_1:notes">
+            <a:extLst>
+              <a:ext uri="{FF2B5EF4-FFF2-40B4-BE49-F238E27FC236}">
+                <a16:creationId xmlns:a16="http://schemas.microsoft.com/office/drawing/2014/main" id="{83FEA280-02EF-46EB-0B69-15B1DA0DC2FF}"/>
+              </a:ext>
+            </a:extLst>
+          </p:cNvPr>
+          <p:cNvSpPr>
+            <a:spLocks noGrp="1" noRot="1" noChangeAspect="1"/>
+          </p:cNvSpPr>
+          <p:nvPr>
+            <p:ph type="sldImg" idx="2"/>
+          </p:nvPr>
+        </p:nvSpPr>
+        <p:spPr>
+          <a:xfrm>
+            <a:off x="381000" y="685800"/>
+            <a:ext cx="6096000" cy="3429000"/>
+          </a:xfrm>
+          <a:custGeom>
+            <a:avLst/>
+            <a:gdLst/>
+            <a:ahLst/>
+            <a:cxnLst/>
+            <a:rect l="l" t="t" r="r" b="b"/>
+            <a:pathLst>
+              <a:path w="120000" h="120000" extrusionOk="0">
+                <a:moveTo>
+                  <a:pt x="0" y="0"/>
+                </a:moveTo>
+                <a:lnTo>
+                  <a:pt x="120000" y="0"/>
+                </a:lnTo>
+                <a:lnTo>
+                  <a:pt x="120000" y="120000"/>
+                </a:lnTo>
+                <a:lnTo>
+                  <a:pt x="0" y="120000"/>
+                </a:lnTo>
+                <a:close/>
+              </a:path>
+            </a:pathLst>
+          </a:custGeom>
+        </p:spPr>
+      </p:sp>
+      <p:sp>
+        <p:nvSpPr>
+          <p:cNvPr id="60" name="Google Shape;60;g3bc3b886ea_0_1:notes">
+            <a:extLst>
+              <a:ext uri="{FF2B5EF4-FFF2-40B4-BE49-F238E27FC236}">
+                <a16:creationId xmlns:a16="http://schemas.microsoft.com/office/drawing/2014/main" id="{F956A9E6-7C2B-75B0-CA20-8D14F2C070B5}"/>
+              </a:ext>
+            </a:extLst>
+          </p:cNvPr>
+          <p:cNvSpPr txBox="1">
+            <a:spLocks noGrp="1"/>
+          </p:cNvSpPr>
+          <p:nvPr>
+            <p:ph type="body" idx="1"/>
+          </p:nvPr>
+        </p:nvSpPr>
+        <p:spPr>
+          <a:xfrm>
+            <a:off x="685800" y="4343400"/>
+            <a:ext cx="5486400" cy="4114800"/>
+          </a:xfrm>
+          <a:prstGeom prst="rect">
+            <a:avLst/>
+          </a:prstGeom>
+        </p:spPr>
+        <p:txBody>
+          <a:bodyPr spcFirstLastPara="1" wrap="square" lIns="91425" tIns="91425" rIns="91425" bIns="91425" anchor="t" anchorCtr="0">
+            <a:noAutofit/>
+          </a:bodyPr>
+          <a:lstStyle/>
+          <a:p>
+            <a:pPr marL="0" lvl="0" indent="0" algn="l" rtl="0">
+              <a:spcBef>
+                <a:spcPts val="0"/>
+              </a:spcBef>
+              <a:spcAft>
+                <a:spcPts val="0"/>
+              </a:spcAft>
+              <a:buNone/>
+            </a:pPr>
+            <a:endParaRPr/>
+          </a:p>
+        </p:txBody>
+      </p:sp>
+    </p:spTree>
+    <p:extLst>
+      <p:ext uri="{BB962C8B-B14F-4D97-AF65-F5344CB8AC3E}">
+        <p14:creationId xmlns:p14="http://schemas.microsoft.com/office/powerpoint/2010/main" val="2693613996"/>
+      </p:ext>
+    </p:extLst>
+  </p:cSld>
+  <p:clrMapOvr>
+    <a:masterClrMapping/>
+  </p:clrMapOvr>
+</p:notes>
+</file>
+
+<file path=ppt/notesSlides/notesSlide11.xml><?xml version="1.0" encoding="utf-8"?>
+<p:notes xmlns:a="http://schemas.openxmlformats.org/drawingml/2006/main" xmlns:r="http://schemas.openxmlformats.org/officeDocument/2006/relationships" xmlns:p="http://schemas.openxmlformats.org/presentationml/2006/main" showMasterSp="0" showMasterPhAnim="0">
+  <p:cSld>
+    <p:spTree>
+      <p:nvGrpSpPr>
+        <p:cNvPr id="1" name="Shape 92">
+          <a:extLst>
+            <a:ext uri="{FF2B5EF4-FFF2-40B4-BE49-F238E27FC236}">
+              <a16:creationId xmlns:a16="http://schemas.microsoft.com/office/drawing/2014/main" id="{F7CC36C7-11D0-8ADD-0BBF-ADF4FC60E857}"/>
+            </a:ext>
+          </a:extLst>
+        </p:cNvPr>
+        <p:cNvGrpSpPr/>
+        <p:nvPr/>
+      </p:nvGrpSpPr>
+      <p:grpSpPr>
+        <a:xfrm>
+          <a:off x="0" y="0"/>
+          <a:ext cx="0" cy="0"/>
+          <a:chOff x="0" y="0"/>
+          <a:chExt cx="0" cy="0"/>
+        </a:xfrm>
+      </p:grpSpPr>
+      <p:sp>
+        <p:nvSpPr>
+          <p:cNvPr id="93" name="Google Shape;93;p5:notes">
+            <a:extLst>
+              <a:ext uri="{FF2B5EF4-FFF2-40B4-BE49-F238E27FC236}">
+                <a16:creationId xmlns:a16="http://schemas.microsoft.com/office/drawing/2014/main" id="{F8C541B7-831D-4518-0FB6-DDC6BE367837}"/>
+              </a:ext>
+            </a:extLst>
+          </p:cNvPr>
+          <p:cNvSpPr>
+            <a:spLocks noGrp="1" noRot="1" noChangeAspect="1"/>
+          </p:cNvSpPr>
+          <p:nvPr>
+            <p:ph type="sldImg" idx="2"/>
+          </p:nvPr>
+        </p:nvSpPr>
+        <p:spPr>
+          <a:xfrm>
+            <a:off x="381000" y="685800"/>
+            <a:ext cx="6096000" cy="3429000"/>
+          </a:xfrm>
+          <a:custGeom>
+            <a:avLst/>
+            <a:gdLst/>
+            <a:ahLst/>
+            <a:cxnLst/>
+            <a:rect l="l" t="t" r="r" b="b"/>
+            <a:pathLst>
+              <a:path w="120000" h="120000" extrusionOk="0">
+                <a:moveTo>
+                  <a:pt x="0" y="0"/>
+                </a:moveTo>
+                <a:lnTo>
+                  <a:pt x="120000" y="0"/>
+                </a:lnTo>
+                <a:lnTo>
+                  <a:pt x="120000" y="120000"/>
+                </a:lnTo>
+                <a:lnTo>
+                  <a:pt x="0" y="120000"/>
+                </a:lnTo>
+                <a:close/>
+              </a:path>
+            </a:pathLst>
+          </a:custGeom>
+          <a:noFill/>
+          <a:ln w="9525" cap="flat" cmpd="sng">
+            <a:solidFill>
+              <a:srgbClr val="000000"/>
+            </a:solidFill>
+            <a:prstDash val="solid"/>
+            <a:round/>
+            <a:headEnd type="none" w="sm" len="sm"/>
+            <a:tailEnd type="none" w="sm" len="sm"/>
+          </a:ln>
+        </p:spPr>
+      </p:sp>
+      <p:sp>
+        <p:nvSpPr>
+          <p:cNvPr id="94" name="Google Shape;94;p5:notes">
+            <a:extLst>
+              <a:ext uri="{FF2B5EF4-FFF2-40B4-BE49-F238E27FC236}">
+                <a16:creationId xmlns:a16="http://schemas.microsoft.com/office/drawing/2014/main" id="{3E1EB232-82F4-15BE-8BDF-5A53894E2A2C}"/>
+              </a:ext>
+            </a:extLst>
+          </p:cNvPr>
+          <p:cNvSpPr txBox="1">
+            <a:spLocks noGrp="1"/>
+          </p:cNvSpPr>
+          <p:nvPr>
+            <p:ph type="body" idx="1"/>
+          </p:nvPr>
+        </p:nvSpPr>
+        <p:spPr>
+          <a:xfrm>
+            <a:off x="685800" y="4343400"/>
+            <a:ext cx="5486400" cy="4114800"/>
+          </a:xfrm>
+          <a:prstGeom prst="rect">
+            <a:avLst/>
+          </a:prstGeom>
+          <a:noFill/>
+          <a:ln>
+            <a:noFill/>
+          </a:ln>
+        </p:spPr>
+        <p:txBody>
+          <a:bodyPr spcFirstLastPara="1" wrap="square" lIns="91425" tIns="91425" rIns="91425" bIns="91425" anchor="t" anchorCtr="0">
+            <a:noAutofit/>
+          </a:bodyPr>
+          <a:lstStyle/>
+          <a:p>
+            <a:pPr marL="0" lvl="0" indent="0" algn="l" rtl="0">
+              <a:lnSpc>
+                <a:spcPct val="100000"/>
+              </a:lnSpc>
+              <a:spcBef>
+                <a:spcPts val="0"/>
+              </a:spcBef>
+              <a:spcAft>
+                <a:spcPts val="0"/>
+              </a:spcAft>
+              <a:buSzPts val="1100"/>
+              <a:buNone/>
+            </a:pPr>
+            <a:endParaRPr/>
+          </a:p>
+        </p:txBody>
+      </p:sp>
+    </p:spTree>
+    <p:extLst>
+      <p:ext uri="{BB962C8B-B14F-4D97-AF65-F5344CB8AC3E}">
+        <p14:creationId xmlns:p14="http://schemas.microsoft.com/office/powerpoint/2010/main" val="78784355"/>
+      </p:ext>
+    </p:extLst>
+  </p:cSld>
+  <p:clrMapOvr>
+    <a:masterClrMapping/>
+  </p:clrMapOvr>
+</p:notes>
+</file>
+
+<file path=ppt/notesSlides/notesSlide12.xml><?xml version="1.0" encoding="utf-8"?>
+<p:notes xmlns:a="http://schemas.openxmlformats.org/drawingml/2006/main" xmlns:r="http://schemas.openxmlformats.org/officeDocument/2006/relationships" xmlns:p="http://schemas.openxmlformats.org/presentationml/2006/main" showMasterSp="0" showMasterPhAnim="0">
+  <p:cSld>
+    <p:spTree>
+      <p:nvGrpSpPr>
+        <p:cNvPr id="1" name="Shape 92">
+          <a:extLst>
+            <a:ext uri="{FF2B5EF4-FFF2-40B4-BE49-F238E27FC236}">
+              <a16:creationId xmlns:a16="http://schemas.microsoft.com/office/drawing/2014/main" id="{6CE63EF6-BA38-E777-7277-94A78FCC7413}"/>
+            </a:ext>
+          </a:extLst>
+        </p:cNvPr>
+        <p:cNvGrpSpPr/>
+        <p:nvPr/>
+      </p:nvGrpSpPr>
+      <p:grpSpPr>
+        <a:xfrm>
+          <a:off x="0" y="0"/>
+          <a:ext cx="0" cy="0"/>
+          <a:chOff x="0" y="0"/>
+          <a:chExt cx="0" cy="0"/>
+        </a:xfrm>
+      </p:grpSpPr>
+      <p:sp>
+        <p:nvSpPr>
+          <p:cNvPr id="93" name="Google Shape;93;p5:notes">
+            <a:extLst>
+              <a:ext uri="{FF2B5EF4-FFF2-40B4-BE49-F238E27FC236}">
+                <a16:creationId xmlns:a16="http://schemas.microsoft.com/office/drawing/2014/main" id="{EDFA7591-57EE-39C3-396E-41983A0C66A2}"/>
+              </a:ext>
+            </a:extLst>
+          </p:cNvPr>
+          <p:cNvSpPr>
+            <a:spLocks noGrp="1" noRot="1" noChangeAspect="1"/>
+          </p:cNvSpPr>
+          <p:nvPr>
+            <p:ph type="sldImg" idx="2"/>
+          </p:nvPr>
+        </p:nvSpPr>
+        <p:spPr>
+          <a:xfrm>
+            <a:off x="381000" y="685800"/>
+            <a:ext cx="6096000" cy="3429000"/>
+          </a:xfrm>
+          <a:custGeom>
+            <a:avLst/>
+            <a:gdLst/>
+            <a:ahLst/>
+            <a:cxnLst/>
+            <a:rect l="l" t="t" r="r" b="b"/>
+            <a:pathLst>
+              <a:path w="120000" h="120000" extrusionOk="0">
+                <a:moveTo>
+                  <a:pt x="0" y="0"/>
+                </a:moveTo>
+                <a:lnTo>
+                  <a:pt x="120000" y="0"/>
+                </a:lnTo>
+                <a:lnTo>
+                  <a:pt x="120000" y="120000"/>
+                </a:lnTo>
+                <a:lnTo>
+                  <a:pt x="0" y="120000"/>
+                </a:lnTo>
+                <a:close/>
+              </a:path>
+            </a:pathLst>
+          </a:custGeom>
+          <a:noFill/>
+          <a:ln w="9525" cap="flat" cmpd="sng">
+            <a:solidFill>
+              <a:srgbClr val="000000"/>
+            </a:solidFill>
+            <a:prstDash val="solid"/>
+            <a:round/>
+            <a:headEnd type="none" w="sm" len="sm"/>
+            <a:tailEnd type="none" w="sm" len="sm"/>
+          </a:ln>
+        </p:spPr>
+      </p:sp>
+      <p:sp>
+        <p:nvSpPr>
+          <p:cNvPr id="94" name="Google Shape;94;p5:notes">
+            <a:extLst>
+              <a:ext uri="{FF2B5EF4-FFF2-40B4-BE49-F238E27FC236}">
+                <a16:creationId xmlns:a16="http://schemas.microsoft.com/office/drawing/2014/main" id="{797F6B80-C15B-74BE-046E-487BB7806069}"/>
+              </a:ext>
+            </a:extLst>
+          </p:cNvPr>
+          <p:cNvSpPr txBox="1">
+            <a:spLocks noGrp="1"/>
+          </p:cNvSpPr>
+          <p:nvPr>
+            <p:ph type="body" idx="1"/>
+          </p:nvPr>
+        </p:nvSpPr>
+        <p:spPr>
+          <a:xfrm>
+            <a:off x="685800" y="4343400"/>
+            <a:ext cx="5486400" cy="4114800"/>
+          </a:xfrm>
+          <a:prstGeom prst="rect">
+            <a:avLst/>
+          </a:prstGeom>
+          <a:noFill/>
+          <a:ln>
+            <a:noFill/>
+          </a:ln>
+        </p:spPr>
+        <p:txBody>
+          <a:bodyPr spcFirstLastPara="1" wrap="square" lIns="91425" tIns="91425" rIns="91425" bIns="91425" anchor="t" anchorCtr="0">
+            <a:noAutofit/>
+          </a:bodyPr>
+          <a:lstStyle/>
+          <a:p>
+            <a:pPr marL="0" lvl="0" indent="0" algn="l" rtl="0">
+              <a:lnSpc>
+                <a:spcPct val="100000"/>
+              </a:lnSpc>
+              <a:spcBef>
+                <a:spcPts val="0"/>
+              </a:spcBef>
+              <a:spcAft>
+                <a:spcPts val="0"/>
+              </a:spcAft>
+              <a:buSzPts val="1100"/>
+              <a:buNone/>
+            </a:pPr>
+            <a:endParaRPr/>
+          </a:p>
+        </p:txBody>
+      </p:sp>
+    </p:spTree>
+    <p:extLst>
+      <p:ext uri="{BB962C8B-B14F-4D97-AF65-F5344CB8AC3E}">
+        <p14:creationId xmlns:p14="http://schemas.microsoft.com/office/powerpoint/2010/main" val="470897677"/>
+      </p:ext>
+    </p:extLst>
+  </p:cSld>
+  <p:clrMapOvr>
+    <a:masterClrMapping/>
+  </p:clrMapOvr>
+</p:notes>
+</file>
+
+<file path=ppt/notesSlides/notesSlide13.xml><?xml version="1.0" encoding="utf-8"?>
+<p:notes xmlns:a="http://schemas.openxmlformats.org/drawingml/2006/main" xmlns:r="http://schemas.openxmlformats.org/officeDocument/2006/relationships" xmlns:p="http://schemas.openxmlformats.org/presentationml/2006/main" showMasterSp="0" showMasterPhAnim="0">
+  <p:cSld>
+    <p:spTree>
+      <p:nvGrpSpPr>
+        <p:cNvPr id="1" name="Shape 183"/>
+        <p:cNvGrpSpPr/>
+        <p:nvPr/>
+      </p:nvGrpSpPr>
+      <p:grpSpPr>
+        <a:xfrm>
+          <a:off x="0" y="0"/>
+          <a:ext cx="0" cy="0"/>
+          <a:chOff x="0" y="0"/>
+          <a:chExt cx="0" cy="0"/>
+        </a:xfrm>
+      </p:grpSpPr>
+      <p:sp>
+        <p:nvSpPr>
+          <p:cNvPr id="184" name="Google Shape;184;p9:notes"/>
+          <p:cNvSpPr>
+            <a:spLocks noGrp="1" noRot="1" noChangeAspect="1"/>
+          </p:cNvSpPr>
+          <p:nvPr>
+            <p:ph type="sldImg" idx="2"/>
+          </p:nvPr>
+        </p:nvSpPr>
+        <p:spPr>
+          <a:xfrm>
+            <a:off x="381000" y="685800"/>
+            <a:ext cx="6096000" cy="3429000"/>
+          </a:xfrm>
+          <a:custGeom>
+            <a:avLst/>
+            <a:gdLst/>
+            <a:ahLst/>
+            <a:cxnLst/>
+            <a:rect l="l" t="t" r="r" b="b"/>
+            <a:pathLst>
+              <a:path w="120000" h="120000" extrusionOk="0">
+                <a:moveTo>
+                  <a:pt x="0" y="0"/>
+                </a:moveTo>
+                <a:lnTo>
+                  <a:pt x="120000" y="0"/>
+                </a:lnTo>
+                <a:lnTo>
+                  <a:pt x="120000" y="120000"/>
+                </a:lnTo>
+                <a:lnTo>
+                  <a:pt x="0" y="120000"/>
+                </a:lnTo>
+                <a:close/>
+              </a:path>
+            </a:pathLst>
+          </a:custGeom>
+          <a:noFill/>
+          <a:ln w="9525" cap="flat" cmpd="sng">
+            <a:solidFill>
+              <a:srgbClr val="000000"/>
+            </a:solidFill>
+            <a:prstDash val="solid"/>
+            <a:round/>
+            <a:headEnd type="none" w="sm" len="sm"/>
+            <a:tailEnd type="none" w="sm" len="sm"/>
+          </a:ln>
+        </p:spPr>
+      </p:sp>
+      <p:sp>
+        <p:nvSpPr>
+          <p:cNvPr id="185" name="Google Shape;185;p9:notes"/>
+          <p:cNvSpPr txBox="1">
+            <a:spLocks noGrp="1"/>
+          </p:cNvSpPr>
+          <p:nvPr>
+            <p:ph type="body" idx="1"/>
+          </p:nvPr>
+        </p:nvSpPr>
+        <p:spPr>
+          <a:xfrm>
+            <a:off x="685800" y="4343400"/>
+            <a:ext cx="5486400" cy="4114800"/>
+          </a:xfrm>
+          <a:prstGeom prst="rect">
+            <a:avLst/>
+          </a:prstGeom>
+          <a:noFill/>
+          <a:ln>
+            <a:noFill/>
+          </a:ln>
+        </p:spPr>
+        <p:txBody>
+          <a:bodyPr spcFirstLastPara="1" wrap="square" lIns="91425" tIns="91425" rIns="91425" bIns="91425" anchor="t" anchorCtr="0">
+            <a:noAutofit/>
+          </a:bodyPr>
+          <a:lstStyle/>
+          <a:p>
+            <a:pPr marL="0" lvl="0" indent="0" algn="l" rtl="0">
+              <a:lnSpc>
+                <a:spcPct val="100000"/>
+              </a:lnSpc>
+              <a:spcBef>
+                <a:spcPts val="0"/>
+              </a:spcBef>
+              <a:spcAft>
+                <a:spcPts val="0"/>
+              </a:spcAft>
+              <a:buSzPts val="1100"/>
+              <a:buNone/>
+            </a:pPr>
+            <a:endParaRPr/>
+          </a:p>
+        </p:txBody>
+      </p:sp>
+    </p:spTree>
+  </p:cSld>
+  <p:clrMapOvr>
+    <a:masterClrMapping/>
+  </p:clrMapOvr>
+</p:notes>
+</file>
+
 <file path=ppt/notesSlides/notesSlide2.xml><?xml version="1.0" encoding="utf-8"?>
 <p:notes xmlns:a="http://schemas.openxmlformats.org/drawingml/2006/main" xmlns:r="http://schemas.openxmlformats.org/officeDocument/2006/relationships" xmlns:p="http://schemas.openxmlformats.org/presentationml/2006/main" showMasterSp="0" showMasterPhAnim="0">
   <p:cSld>
@@ -1669,6 +2334,151 @@
 </file>
 
 <file path=ppt/notesSlides/notesSlide4.xml><?xml version="1.0" encoding="utf-8"?>
+<p:notes xmlns:a="http://schemas.openxmlformats.org/drawingml/2006/main" xmlns:r="http://schemas.openxmlformats.org/officeDocument/2006/relationships" xmlns:p="http://schemas.openxmlformats.org/presentationml/2006/main" showMasterSp="0" showMasterPhAnim="0">
+  <p:cSld>
+    <p:spTree>
+      <p:nvGrpSpPr>
+        <p:cNvPr id="1" name="Shape 65">
+          <a:extLst>
+            <a:ext uri="{FF2B5EF4-FFF2-40B4-BE49-F238E27FC236}">
+              <a16:creationId xmlns:a16="http://schemas.microsoft.com/office/drawing/2014/main" id="{1A4785B2-8F17-33C3-0864-3BD612B20B26}"/>
+            </a:ext>
+          </a:extLst>
+        </p:cNvPr>
+        <p:cNvGrpSpPr/>
+        <p:nvPr/>
+      </p:nvGrpSpPr>
+      <p:grpSpPr>
+        <a:xfrm>
+          <a:off x="0" y="0"/>
+          <a:ext cx="0" cy="0"/>
+          <a:chOff x="0" y="0"/>
+          <a:chExt cx="0" cy="0"/>
+        </a:xfrm>
+      </p:grpSpPr>
+      <p:sp>
+        <p:nvSpPr>
+          <p:cNvPr id="66" name="Google Shape;66;p3:notes">
+            <a:extLst>
+              <a:ext uri="{FF2B5EF4-FFF2-40B4-BE49-F238E27FC236}">
+                <a16:creationId xmlns:a16="http://schemas.microsoft.com/office/drawing/2014/main" id="{0781B227-E974-82F2-3989-A9DC4A9E9EAC}"/>
+              </a:ext>
+            </a:extLst>
+          </p:cNvPr>
+          <p:cNvSpPr>
+            <a:spLocks noGrp="1" noRot="1" noChangeAspect="1"/>
+          </p:cNvSpPr>
+          <p:nvPr>
+            <p:ph type="sldImg" idx="2"/>
+          </p:nvPr>
+        </p:nvSpPr>
+        <p:spPr>
+          <a:xfrm>
+            <a:off x="381000" y="685800"/>
+            <a:ext cx="6096000" cy="3429000"/>
+          </a:xfrm>
+          <a:custGeom>
+            <a:avLst/>
+            <a:gdLst/>
+            <a:ahLst/>
+            <a:cxnLst/>
+            <a:rect l="l" t="t" r="r" b="b"/>
+            <a:pathLst>
+              <a:path w="120000" h="120000" extrusionOk="0">
+                <a:moveTo>
+                  <a:pt x="0" y="0"/>
+                </a:moveTo>
+                <a:lnTo>
+                  <a:pt x="120000" y="0"/>
+                </a:lnTo>
+                <a:lnTo>
+                  <a:pt x="120000" y="120000"/>
+                </a:lnTo>
+                <a:lnTo>
+                  <a:pt x="0" y="120000"/>
+                </a:lnTo>
+                <a:close/>
+              </a:path>
+            </a:pathLst>
+          </a:custGeom>
+          <a:noFill/>
+          <a:ln w="9525" cap="flat" cmpd="sng">
+            <a:solidFill>
+              <a:srgbClr val="000000"/>
+            </a:solidFill>
+            <a:prstDash val="solid"/>
+            <a:round/>
+            <a:headEnd type="none" w="sm" len="sm"/>
+            <a:tailEnd type="none" w="sm" len="sm"/>
+          </a:ln>
+        </p:spPr>
+      </p:sp>
+      <p:sp>
+        <p:nvSpPr>
+          <p:cNvPr id="67" name="Google Shape;67;p3:notes">
+            <a:extLst>
+              <a:ext uri="{FF2B5EF4-FFF2-40B4-BE49-F238E27FC236}">
+                <a16:creationId xmlns:a16="http://schemas.microsoft.com/office/drawing/2014/main" id="{6D115578-447D-6633-C283-FF03BB874D3B}"/>
+              </a:ext>
+            </a:extLst>
+          </p:cNvPr>
+          <p:cNvSpPr txBox="1">
+            <a:spLocks noGrp="1"/>
+          </p:cNvSpPr>
+          <p:nvPr>
+            <p:ph type="body" idx="1"/>
+          </p:nvPr>
+        </p:nvSpPr>
+        <p:spPr>
+          <a:xfrm>
+            <a:off x="685800" y="4343400"/>
+            <a:ext cx="5486400" cy="4114800"/>
+          </a:xfrm>
+          <a:prstGeom prst="rect">
+            <a:avLst/>
+          </a:prstGeom>
+          <a:noFill/>
+          <a:ln>
+            <a:noFill/>
+          </a:ln>
+        </p:spPr>
+        <p:txBody>
+          <a:bodyPr spcFirstLastPara="1" wrap="square" lIns="91425" tIns="91425" rIns="91425" bIns="91425" anchor="t" anchorCtr="0">
+            <a:noAutofit/>
+          </a:bodyPr>
+          <a:lstStyle/>
+          <a:p>
+            <a:pPr marL="0" lvl="0" indent="0" algn="l" rtl="0">
+              <a:lnSpc>
+                <a:spcPct val="100000"/>
+              </a:lnSpc>
+              <a:spcBef>
+                <a:spcPts val="0"/>
+              </a:spcBef>
+              <a:spcAft>
+                <a:spcPts val="0"/>
+              </a:spcAft>
+              <a:buSzPts val="1100"/>
+              <a:buNone/>
+            </a:pPr>
+            <a:endParaRPr dirty="0"/>
+          </a:p>
+        </p:txBody>
+      </p:sp>
+    </p:spTree>
+    <p:extLst>
+      <p:ext uri="{BB962C8B-B14F-4D97-AF65-F5344CB8AC3E}">
+        <p14:creationId xmlns:p14="http://schemas.microsoft.com/office/powerpoint/2010/main" val="1111243433"/>
+      </p:ext>
+    </p:extLst>
+  </p:cSld>
+  <p:clrMapOvr>
+    <a:masterClrMapping/>
+  </p:clrMapOvr>
+</p:notes>
+</file>
+
+<file path=ppt/notesSlides/notesSlide5.xml><?xml version="1.0" encoding="utf-8"?>
 <p:notes xmlns:a="http://schemas.openxmlformats.org/drawingml/2006/main" xmlns:r="http://schemas.openxmlformats.org/officeDocument/2006/relationships" xmlns:p="http://schemas.openxmlformats.org/presentationml/2006/main" showMasterSp="0" showMasterPhAnim="0">
   <p:cSld>
     <p:spTree>
@@ -1948,7 +2758,7 @@
 </p:notes>
 </file>
 
-<file path=ppt/notesSlides/notesSlide5.xml><?xml version="1.0" encoding="utf-8"?>
+<file path=ppt/notesSlides/notesSlide6.xml><?xml version="1.0" encoding="utf-8"?>
 <p:notes xmlns:a="http://schemas.openxmlformats.org/drawingml/2006/main" xmlns:r="http://schemas.openxmlformats.org/officeDocument/2006/relationships" xmlns:p="http://schemas.openxmlformats.org/presentationml/2006/main" showMasterSp="0" showMasterPhAnim="0">
   <p:cSld>
     <p:spTree>
@@ -2069,15 +2879,15 @@
 </p:notes>
 </file>
 
-<file path=ppt/notesSlides/notesSlide6.xml><?xml version="1.0" encoding="utf-8"?>
+<file path=ppt/notesSlides/notesSlide7.xml><?xml version="1.0" encoding="utf-8"?>
 <p:notes xmlns:a="http://schemas.openxmlformats.org/drawingml/2006/main" xmlns:r="http://schemas.openxmlformats.org/officeDocument/2006/relationships" xmlns:p="http://schemas.openxmlformats.org/presentationml/2006/main" showMasterSp="0" showMasterPhAnim="0">
   <p:cSld>
     <p:spTree>
       <p:nvGrpSpPr>
-        <p:cNvPr id="1" name="Shape 58">
+        <p:cNvPr id="1" name="Shape 174">
           <a:extLst>
             <a:ext uri="{FF2B5EF4-FFF2-40B4-BE49-F238E27FC236}">
-              <a16:creationId xmlns:a16="http://schemas.microsoft.com/office/drawing/2014/main" id="{A2A17C4A-7811-F8FB-393C-7F4C3C6D3E5F}"/>
+              <a16:creationId xmlns:a16="http://schemas.microsoft.com/office/drawing/2014/main" id="{A44C09A2-3C59-433A-6EA4-18E5E3C986A2}"/>
             </a:ext>
           </a:extLst>
         </p:cNvPr>
@@ -2094,137 +2904,10 @@
       </p:grpSpPr>
       <p:sp>
         <p:nvSpPr>
-          <p:cNvPr id="59" name="Google Shape;59;g3bc3b886ea_0_1:notes">
+          <p:cNvPr id="175" name="Google Shape;175;p8:notes">
             <a:extLst>
               <a:ext uri="{FF2B5EF4-FFF2-40B4-BE49-F238E27FC236}">
-                <a16:creationId xmlns:a16="http://schemas.microsoft.com/office/drawing/2014/main" id="{83FEA280-02EF-46EB-0B69-15B1DA0DC2FF}"/>
-              </a:ext>
-            </a:extLst>
-          </p:cNvPr>
-          <p:cNvSpPr>
-            <a:spLocks noGrp="1" noRot="1" noChangeAspect="1"/>
-          </p:cNvSpPr>
-          <p:nvPr>
-            <p:ph type="sldImg" idx="2"/>
-          </p:nvPr>
-        </p:nvSpPr>
-        <p:spPr>
-          <a:xfrm>
-            <a:off x="381000" y="685800"/>
-            <a:ext cx="6096000" cy="3429000"/>
-          </a:xfrm>
-          <a:custGeom>
-            <a:avLst/>
-            <a:gdLst/>
-            <a:ahLst/>
-            <a:cxnLst/>
-            <a:rect l="l" t="t" r="r" b="b"/>
-            <a:pathLst>
-              <a:path w="120000" h="120000" extrusionOk="0">
-                <a:moveTo>
-                  <a:pt x="0" y="0"/>
-                </a:moveTo>
-                <a:lnTo>
-                  <a:pt x="120000" y="0"/>
-                </a:lnTo>
-                <a:lnTo>
-                  <a:pt x="120000" y="120000"/>
-                </a:lnTo>
-                <a:lnTo>
-                  <a:pt x="0" y="120000"/>
-                </a:lnTo>
-                <a:close/>
-              </a:path>
-            </a:pathLst>
-          </a:custGeom>
-        </p:spPr>
-      </p:sp>
-      <p:sp>
-        <p:nvSpPr>
-          <p:cNvPr id="60" name="Google Shape;60;g3bc3b886ea_0_1:notes">
-            <a:extLst>
-              <a:ext uri="{FF2B5EF4-FFF2-40B4-BE49-F238E27FC236}">
-                <a16:creationId xmlns:a16="http://schemas.microsoft.com/office/drawing/2014/main" id="{F956A9E6-7C2B-75B0-CA20-8D14F2C070B5}"/>
-              </a:ext>
-            </a:extLst>
-          </p:cNvPr>
-          <p:cNvSpPr txBox="1">
-            <a:spLocks noGrp="1"/>
-          </p:cNvSpPr>
-          <p:nvPr>
-            <p:ph type="body" idx="1"/>
-          </p:nvPr>
-        </p:nvSpPr>
-        <p:spPr>
-          <a:xfrm>
-            <a:off x="685800" y="4343400"/>
-            <a:ext cx="5486400" cy="4114800"/>
-          </a:xfrm>
-          <a:prstGeom prst="rect">
-            <a:avLst/>
-          </a:prstGeom>
-        </p:spPr>
-        <p:txBody>
-          <a:bodyPr spcFirstLastPara="1" wrap="square" lIns="91425" tIns="91425" rIns="91425" bIns="91425" anchor="t" anchorCtr="0">
-            <a:noAutofit/>
-          </a:bodyPr>
-          <a:lstStyle/>
-          <a:p>
-            <a:pPr marL="0" lvl="0" indent="0" algn="l" rtl="0">
-              <a:spcBef>
-                <a:spcPts val="0"/>
-              </a:spcBef>
-              <a:spcAft>
-                <a:spcPts val="0"/>
-              </a:spcAft>
-              <a:buNone/>
-            </a:pPr>
-            <a:endParaRPr/>
-          </a:p>
-        </p:txBody>
-      </p:sp>
-    </p:spTree>
-    <p:extLst>
-      <p:ext uri="{BB962C8B-B14F-4D97-AF65-F5344CB8AC3E}">
-        <p14:creationId xmlns:p14="http://schemas.microsoft.com/office/powerpoint/2010/main" val="2693613996"/>
-      </p:ext>
-    </p:extLst>
-  </p:cSld>
-  <p:clrMapOvr>
-    <a:masterClrMapping/>
-  </p:clrMapOvr>
-</p:notes>
-</file>
-
-<file path=ppt/notesSlides/notesSlide7.xml><?xml version="1.0" encoding="utf-8"?>
-<p:notes xmlns:a="http://schemas.openxmlformats.org/drawingml/2006/main" xmlns:r="http://schemas.openxmlformats.org/officeDocument/2006/relationships" xmlns:p="http://schemas.openxmlformats.org/presentationml/2006/main" showMasterSp="0" showMasterPhAnim="0">
-  <p:cSld>
-    <p:spTree>
-      <p:nvGrpSpPr>
-        <p:cNvPr id="1" name="Shape 92">
-          <a:extLst>
-            <a:ext uri="{FF2B5EF4-FFF2-40B4-BE49-F238E27FC236}">
-              <a16:creationId xmlns:a16="http://schemas.microsoft.com/office/drawing/2014/main" id="{F7CC36C7-11D0-8ADD-0BBF-ADF4FC60E857}"/>
-            </a:ext>
-          </a:extLst>
-        </p:cNvPr>
-        <p:cNvGrpSpPr/>
-        <p:nvPr/>
-      </p:nvGrpSpPr>
-      <p:grpSpPr>
-        <a:xfrm>
-          <a:off x="0" y="0"/>
-          <a:ext cx="0" cy="0"/>
-          <a:chOff x="0" y="0"/>
-          <a:chExt cx="0" cy="0"/>
-        </a:xfrm>
-      </p:grpSpPr>
-      <p:sp>
-        <p:nvSpPr>
-          <p:cNvPr id="93" name="Google Shape;93;p5:notes">
-            <a:extLst>
-              <a:ext uri="{FF2B5EF4-FFF2-40B4-BE49-F238E27FC236}">
-                <a16:creationId xmlns:a16="http://schemas.microsoft.com/office/drawing/2014/main" id="{F8C541B7-831D-4518-0FB6-DDC6BE367837}"/>
+                <a16:creationId xmlns:a16="http://schemas.microsoft.com/office/drawing/2014/main" id="{C470FBF4-CF9E-6771-FC94-E6FEA7D06606}"/>
               </a:ext>
             </a:extLst>
           </p:cNvPr>
@@ -2278,10 +2961,10 @@
       </p:sp>
       <p:sp>
         <p:nvSpPr>
-          <p:cNvPr id="94" name="Google Shape;94;p5:notes">
+          <p:cNvPr id="176" name="Google Shape;176;p8:notes">
             <a:extLst>
               <a:ext uri="{FF2B5EF4-FFF2-40B4-BE49-F238E27FC236}">
-                <a16:creationId xmlns:a16="http://schemas.microsoft.com/office/drawing/2014/main" id="{3E1EB232-82F4-15BE-8BDF-5A53894E2A2C}"/>
+                <a16:creationId xmlns:a16="http://schemas.microsoft.com/office/drawing/2014/main" id="{3BAC5E97-E8AD-62FA-0CA0-869DF0CA267D}"/>
               </a:ext>
             </a:extLst>
           </p:cNvPr>
@@ -2311,17 +2994,16 @@
           </a:bodyPr>
           <a:lstStyle/>
           <a:p>
-            <a:pPr marL="0" lvl="0" indent="0" algn="l" rtl="0">
-              <a:lnSpc>
-                <a:spcPct val="100000"/>
-              </a:lnSpc>
-              <a:spcBef>
-                <a:spcPts val="0"/>
-              </a:spcBef>
-              <a:spcAft>
-                <a:spcPts val="0"/>
-              </a:spcAft>
-              <a:buSzPts val="1100"/>
+            <a:pPr marL="457200" lvl="0" indent="0" algn="l" rtl="0">
+              <a:lnSpc>
+                <a:spcPct val="115000"/>
+              </a:lnSpc>
+              <a:spcBef>
+                <a:spcPts val="0"/>
+              </a:spcBef>
+              <a:spcAft>
+                <a:spcPts val="0"/>
+              </a:spcAft>
               <a:buNone/>
             </a:pPr>
             <a:endParaRPr/>
@@ -2331,7 +3013,7 @@
     </p:spTree>
     <p:extLst>
       <p:ext uri="{BB962C8B-B14F-4D97-AF65-F5344CB8AC3E}">
-        <p14:creationId xmlns:p14="http://schemas.microsoft.com/office/powerpoint/2010/main" val="78784355"/>
+        <p14:creationId xmlns:p14="http://schemas.microsoft.com/office/powerpoint/2010/main" val="2501015266"/>
       </p:ext>
     </p:extLst>
   </p:cSld>
@@ -2346,7 +3028,13 @@
   <p:cSld>
     <p:spTree>
       <p:nvGrpSpPr>
-        <p:cNvPr id="1" name="Shape 183"/>
+        <p:cNvPr id="1" name="Shape 174">
+          <a:extLst>
+            <a:ext uri="{FF2B5EF4-FFF2-40B4-BE49-F238E27FC236}">
+              <a16:creationId xmlns:a16="http://schemas.microsoft.com/office/drawing/2014/main" id="{8422C4C4-ACE3-1D1D-6CE8-F4388EDA18CD}"/>
+            </a:ext>
+          </a:extLst>
+        </p:cNvPr>
         <p:cNvGrpSpPr/>
         <p:nvPr/>
       </p:nvGrpSpPr>
@@ -2360,7 +3048,13 @@
       </p:grpSpPr>
       <p:sp>
         <p:nvSpPr>
-          <p:cNvPr id="184" name="Google Shape;184;p9:notes"/>
+          <p:cNvPr id="175" name="Google Shape;175;p8:notes">
+            <a:extLst>
+              <a:ext uri="{FF2B5EF4-FFF2-40B4-BE49-F238E27FC236}">
+                <a16:creationId xmlns:a16="http://schemas.microsoft.com/office/drawing/2014/main" id="{EDA65F32-2626-DA27-4EFA-F86C12B29A9F}"/>
+              </a:ext>
+            </a:extLst>
+          </p:cNvPr>
           <p:cNvSpPr>
             <a:spLocks noGrp="1" noRot="1" noChangeAspect="1"/>
           </p:cNvSpPr>
@@ -2411,7 +3105,157 @@
       </p:sp>
       <p:sp>
         <p:nvSpPr>
-          <p:cNvPr id="185" name="Google Shape;185;p9:notes"/>
+          <p:cNvPr id="176" name="Google Shape;176;p8:notes">
+            <a:extLst>
+              <a:ext uri="{FF2B5EF4-FFF2-40B4-BE49-F238E27FC236}">
+                <a16:creationId xmlns:a16="http://schemas.microsoft.com/office/drawing/2014/main" id="{5B160CE0-54E8-5F62-A7F9-C0C3C0BE0FA3}"/>
+              </a:ext>
+            </a:extLst>
+          </p:cNvPr>
+          <p:cNvSpPr txBox="1">
+            <a:spLocks noGrp="1"/>
+          </p:cNvSpPr>
+          <p:nvPr>
+            <p:ph type="body" idx="1"/>
+          </p:nvPr>
+        </p:nvSpPr>
+        <p:spPr>
+          <a:xfrm>
+            <a:off x="685800" y="4343400"/>
+            <a:ext cx="5486400" cy="4114800"/>
+          </a:xfrm>
+          <a:prstGeom prst="rect">
+            <a:avLst/>
+          </a:prstGeom>
+          <a:noFill/>
+          <a:ln>
+            <a:noFill/>
+          </a:ln>
+        </p:spPr>
+        <p:txBody>
+          <a:bodyPr spcFirstLastPara="1" wrap="square" lIns="91425" tIns="91425" rIns="91425" bIns="91425" anchor="t" anchorCtr="0">
+            <a:noAutofit/>
+          </a:bodyPr>
+          <a:lstStyle/>
+          <a:p>
+            <a:pPr marL="457200" lvl="0" indent="0" algn="l" rtl="0">
+              <a:lnSpc>
+                <a:spcPct val="115000"/>
+              </a:lnSpc>
+              <a:spcBef>
+                <a:spcPts val="0"/>
+              </a:spcBef>
+              <a:spcAft>
+                <a:spcPts val="0"/>
+              </a:spcAft>
+              <a:buNone/>
+            </a:pPr>
+            <a:endParaRPr/>
+          </a:p>
+        </p:txBody>
+      </p:sp>
+    </p:spTree>
+    <p:extLst>
+      <p:ext uri="{BB962C8B-B14F-4D97-AF65-F5344CB8AC3E}">
+        <p14:creationId xmlns:p14="http://schemas.microsoft.com/office/powerpoint/2010/main" val="1099141733"/>
+      </p:ext>
+    </p:extLst>
+  </p:cSld>
+  <p:clrMapOvr>
+    <a:masterClrMapping/>
+  </p:clrMapOvr>
+</p:notes>
+</file>
+
+<file path=ppt/notesSlides/notesSlide9.xml><?xml version="1.0" encoding="utf-8"?>
+<p:notes xmlns:a="http://schemas.openxmlformats.org/drawingml/2006/main" xmlns:r="http://schemas.openxmlformats.org/officeDocument/2006/relationships" xmlns:p="http://schemas.openxmlformats.org/presentationml/2006/main" showMasterSp="0" showMasterPhAnim="0">
+  <p:cSld>
+    <p:spTree>
+      <p:nvGrpSpPr>
+        <p:cNvPr id="1" name="Shape 65">
+          <a:extLst>
+            <a:ext uri="{FF2B5EF4-FFF2-40B4-BE49-F238E27FC236}">
+              <a16:creationId xmlns:a16="http://schemas.microsoft.com/office/drawing/2014/main" id="{85E50127-A3B0-46FB-F615-71F7C6F5F7C9}"/>
+            </a:ext>
+          </a:extLst>
+        </p:cNvPr>
+        <p:cNvGrpSpPr/>
+        <p:nvPr/>
+      </p:nvGrpSpPr>
+      <p:grpSpPr>
+        <a:xfrm>
+          <a:off x="0" y="0"/>
+          <a:ext cx="0" cy="0"/>
+          <a:chOff x="0" y="0"/>
+          <a:chExt cx="0" cy="0"/>
+        </a:xfrm>
+      </p:grpSpPr>
+      <p:sp>
+        <p:nvSpPr>
+          <p:cNvPr id="66" name="Google Shape;66;p3:notes">
+            <a:extLst>
+              <a:ext uri="{FF2B5EF4-FFF2-40B4-BE49-F238E27FC236}">
+                <a16:creationId xmlns:a16="http://schemas.microsoft.com/office/drawing/2014/main" id="{0DF42E9D-780F-4C30-DC09-8120C0C56B4A}"/>
+              </a:ext>
+            </a:extLst>
+          </p:cNvPr>
+          <p:cNvSpPr>
+            <a:spLocks noGrp="1" noRot="1" noChangeAspect="1"/>
+          </p:cNvSpPr>
+          <p:nvPr>
+            <p:ph type="sldImg" idx="2"/>
+          </p:nvPr>
+        </p:nvSpPr>
+        <p:spPr>
+          <a:xfrm>
+            <a:off x="381000" y="685800"/>
+            <a:ext cx="6096000" cy="3429000"/>
+          </a:xfrm>
+          <a:custGeom>
+            <a:avLst/>
+            <a:gdLst/>
+            <a:ahLst/>
+            <a:cxnLst/>
+            <a:rect l="l" t="t" r="r" b="b"/>
+            <a:pathLst>
+              <a:path w="120000" h="120000" extrusionOk="0">
+                <a:moveTo>
+                  <a:pt x="0" y="0"/>
+                </a:moveTo>
+                <a:lnTo>
+                  <a:pt x="120000" y="0"/>
+                </a:lnTo>
+                <a:lnTo>
+                  <a:pt x="120000" y="120000"/>
+                </a:lnTo>
+                <a:lnTo>
+                  <a:pt x="0" y="120000"/>
+                </a:lnTo>
+                <a:close/>
+              </a:path>
+            </a:pathLst>
+          </a:custGeom>
+          <a:noFill/>
+          <a:ln w="9525" cap="flat" cmpd="sng">
+            <a:solidFill>
+              <a:srgbClr val="000000"/>
+            </a:solidFill>
+            <a:prstDash val="solid"/>
+            <a:round/>
+            <a:headEnd type="none" w="sm" len="sm"/>
+            <a:tailEnd type="none" w="sm" len="sm"/>
+          </a:ln>
+        </p:spPr>
+      </p:sp>
+      <p:sp>
+        <p:nvSpPr>
+          <p:cNvPr id="67" name="Google Shape;67;p3:notes">
+            <a:extLst>
+              <a:ext uri="{FF2B5EF4-FFF2-40B4-BE49-F238E27FC236}">
+                <a16:creationId xmlns:a16="http://schemas.microsoft.com/office/drawing/2014/main" id="{FC8C8838-4F83-A125-5A86-A5D759CF114C}"/>
+              </a:ext>
+            </a:extLst>
+          </p:cNvPr>
           <p:cNvSpPr txBox="1">
             <a:spLocks noGrp="1"/>
           </p:cNvSpPr>
@@ -2451,11 +3295,16 @@
               <a:buSzPts val="1100"/>
               <a:buNone/>
             </a:pPr>
-            <a:endParaRPr/>
+            <a:endParaRPr dirty="0"/>
           </a:p>
         </p:txBody>
       </p:sp>
     </p:spTree>
+    <p:extLst>
+      <p:ext uri="{BB962C8B-B14F-4D97-AF65-F5344CB8AC3E}">
+        <p14:creationId xmlns:p14="http://schemas.microsoft.com/office/powerpoint/2010/main" val="40341755"/>
+      </p:ext>
+    </p:extLst>
   </p:cSld>
   <p:clrMapOvr>
     <a:masterClrMapping/>
@@ -15220,1375 +16069,7 @@
 </p:sld>
 </file>
 
-<file path=ppt/slides/slide2.xml><?xml version="1.0" encoding="utf-8"?>
-<p:sld xmlns:a="http://schemas.openxmlformats.org/drawingml/2006/main" xmlns:r="http://schemas.openxmlformats.org/officeDocument/2006/relationships" xmlns:p="http://schemas.openxmlformats.org/presentationml/2006/main">
-  <p:cSld>
-    <p:spTree>
-      <p:nvGrpSpPr>
-        <p:cNvPr id="1" name="Shape 60"/>
-        <p:cNvGrpSpPr/>
-        <p:nvPr/>
-      </p:nvGrpSpPr>
-      <p:grpSpPr>
-        <a:xfrm>
-          <a:off x="0" y="0"/>
-          <a:ext cx="0" cy="0"/>
-          <a:chOff x="0" y="0"/>
-          <a:chExt cx="0" cy="0"/>
-        </a:xfrm>
-      </p:grpSpPr>
-      <p:sp>
-        <p:nvSpPr>
-          <p:cNvPr id="61" name="Google Shape;61;p2"/>
-          <p:cNvSpPr/>
-          <p:nvPr/>
-        </p:nvSpPr>
-        <p:spPr>
-          <a:xfrm>
-            <a:off x="5500" y="-17775"/>
-            <a:ext cx="3335400" cy="5161200"/>
-          </a:xfrm>
-          <a:prstGeom prst="rect">
-            <a:avLst/>
-          </a:prstGeom>
-          <a:solidFill>
-            <a:srgbClr val="C3FFFC"/>
-          </a:solidFill>
-          <a:ln>
-            <a:noFill/>
-          </a:ln>
-        </p:spPr>
-        <p:txBody>
-          <a:bodyPr spcFirstLastPara="1" wrap="square" lIns="91425" tIns="91425" rIns="91425" bIns="91425" anchor="ctr" anchorCtr="0">
-            <a:noAutofit/>
-          </a:bodyPr>
-          <a:lstStyle/>
-          <a:p>
-            <a:pPr marL="0" marR="0" lvl="0" indent="0" algn="l" rtl="0">
-              <a:lnSpc>
-                <a:spcPct val="200000"/>
-              </a:lnSpc>
-              <a:spcBef>
-                <a:spcPts val="0"/>
-              </a:spcBef>
-              <a:spcAft>
-                <a:spcPts val="0"/>
-              </a:spcAft>
-              <a:buClr>
-                <a:srgbClr val="000000"/>
-              </a:buClr>
-              <a:buSzPts val="1400"/>
-              <a:buFont typeface="Arial"/>
-              <a:buNone/>
-            </a:pPr>
-            <a:endParaRPr lang="fr-FR" sz="1400" b="0" i="0" u="none" strike="noStrike" cap="none" dirty="0">
-              <a:solidFill>
-                <a:srgbClr val="000000"/>
-              </a:solidFill>
-              <a:latin typeface="Arial"/>
-              <a:ea typeface="Arial"/>
-              <a:cs typeface="Arial"/>
-              <a:sym typeface="Arial"/>
-            </a:endParaRPr>
-          </a:p>
-          <a:p>
-            <a:pPr marL="0" marR="0" lvl="0" indent="0" algn="l" rtl="0">
-              <a:lnSpc>
-                <a:spcPct val="200000"/>
-              </a:lnSpc>
-              <a:spcBef>
-                <a:spcPts val="0"/>
-              </a:spcBef>
-              <a:spcAft>
-                <a:spcPts val="0"/>
-              </a:spcAft>
-              <a:buClr>
-                <a:srgbClr val="000000"/>
-              </a:buClr>
-              <a:buSzPts val="1400"/>
-              <a:buFont typeface="Arial"/>
-              <a:buNone/>
-            </a:pPr>
-            <a:endParaRPr lang="fr-FR" dirty="0"/>
-          </a:p>
-          <a:p>
-            <a:pPr marL="0" marR="0" lvl="0" indent="0" algn="l" rtl="0">
-              <a:lnSpc>
-                <a:spcPct val="200000"/>
-              </a:lnSpc>
-              <a:spcBef>
-                <a:spcPts val="0"/>
-              </a:spcBef>
-              <a:spcAft>
-                <a:spcPts val="0"/>
-              </a:spcAft>
-              <a:buClr>
-                <a:srgbClr val="000000"/>
-              </a:buClr>
-              <a:buSzPts val="1400"/>
-              <a:buFont typeface="Arial"/>
-              <a:buNone/>
-            </a:pPr>
-            <a:endParaRPr lang="fr-FR" sz="1400" b="0" i="0" u="none" strike="noStrike" cap="none" dirty="0">
-              <a:solidFill>
-                <a:srgbClr val="000000"/>
-              </a:solidFill>
-              <a:latin typeface="Arial"/>
-              <a:ea typeface="Arial"/>
-              <a:cs typeface="Arial"/>
-              <a:sym typeface="Arial"/>
-            </a:endParaRPr>
-          </a:p>
-          <a:p>
-            <a:pPr marL="0" marR="0" lvl="0" indent="0" algn="l" rtl="0">
-              <a:lnSpc>
-                <a:spcPct val="200000"/>
-              </a:lnSpc>
-              <a:spcBef>
-                <a:spcPts val="0"/>
-              </a:spcBef>
-              <a:spcAft>
-                <a:spcPts val="0"/>
-              </a:spcAft>
-              <a:buClr>
-                <a:srgbClr val="000000"/>
-              </a:buClr>
-              <a:buSzPts val="1400"/>
-              <a:buFont typeface="Arial"/>
-              <a:buNone/>
-            </a:pPr>
-            <a:r>
-              <a:rPr lang="fr-FR" sz="1400" b="0" i="0" u="none" strike="noStrike" cap="none" dirty="0" err="1">
-                <a:solidFill>
-                  <a:srgbClr val="000000"/>
-                </a:solidFill>
-                <a:latin typeface="Arial"/>
-                <a:ea typeface="Arial"/>
-                <a:cs typeface="Arial"/>
-                <a:sym typeface="Arial"/>
-              </a:rPr>
-              <a:t>Xxxxxxx</a:t>
-            </a:r>
-            <a:r>
-              <a:rPr lang="fr-FR" sz="1400" b="0" i="0" u="none" strike="noStrike" cap="none" dirty="0">
-                <a:solidFill>
-                  <a:srgbClr val="000000"/>
-                </a:solidFill>
-                <a:latin typeface="Arial"/>
-                <a:ea typeface="Arial"/>
-                <a:cs typeface="Arial"/>
-                <a:sym typeface="Arial"/>
-              </a:rPr>
-              <a:t>  XXXXXXXX</a:t>
-            </a:r>
-            <a:endParaRPr sz="1400" b="0" i="0" u="none" strike="noStrike" cap="none" dirty="0">
-              <a:solidFill>
-                <a:srgbClr val="000000"/>
-              </a:solidFill>
-              <a:latin typeface="Arial"/>
-              <a:ea typeface="Arial"/>
-              <a:cs typeface="Arial"/>
-              <a:sym typeface="Arial"/>
-            </a:endParaRPr>
-          </a:p>
-          <a:p>
-            <a:pPr lvl="0">
-              <a:lnSpc>
-                <a:spcPct val="200000"/>
-              </a:lnSpc>
-              <a:buSzPts val="1400"/>
-            </a:pPr>
-            <a:r>
-              <a:rPr lang="fr-FR" dirty="0" err="1"/>
-              <a:t>Xxxxxxx</a:t>
-            </a:r>
-            <a:r>
-              <a:rPr lang="fr-FR" dirty="0"/>
-              <a:t>  XXXXXXXX</a:t>
-            </a:r>
-          </a:p>
-          <a:p>
-            <a:pPr>
-              <a:lnSpc>
-                <a:spcPct val="200000"/>
-              </a:lnSpc>
-              <a:buSzPts val="1400"/>
-            </a:pPr>
-            <a:r>
-              <a:rPr lang="fr-FR" dirty="0" err="1"/>
-              <a:t>Xxxxxxx</a:t>
-            </a:r>
-            <a:r>
-              <a:rPr lang="fr-FR" dirty="0"/>
-              <a:t>  XXXXXXXX</a:t>
-            </a:r>
-          </a:p>
-          <a:p>
-            <a:pPr>
-              <a:lnSpc>
-                <a:spcPct val="200000"/>
-              </a:lnSpc>
-              <a:buSzPts val="1400"/>
-            </a:pPr>
-            <a:r>
-              <a:rPr lang="fr-FR" dirty="0" err="1"/>
-              <a:t>Xxxxxxx</a:t>
-            </a:r>
-            <a:r>
-              <a:rPr lang="fr-FR" dirty="0"/>
-              <a:t>  XXXXXXXX</a:t>
-            </a:r>
-          </a:p>
-          <a:p>
-            <a:pPr lvl="0">
-              <a:lnSpc>
-                <a:spcPct val="200000"/>
-              </a:lnSpc>
-              <a:buSzPts val="1400"/>
-            </a:pPr>
-            <a:endParaRPr lang="fr-FR" dirty="0"/>
-          </a:p>
-        </p:txBody>
-      </p:sp>
-      <p:sp>
-        <p:nvSpPr>
-          <p:cNvPr id="62" name="Google Shape;62;p2"/>
-          <p:cNvSpPr txBox="1">
-            <a:spLocks noGrp="1"/>
-          </p:cNvSpPr>
-          <p:nvPr>
-            <p:ph type="title"/>
-          </p:nvPr>
-        </p:nvSpPr>
-        <p:spPr>
-          <a:xfrm>
-            <a:off x="390600" y="1558399"/>
-            <a:ext cx="2950300" cy="632068"/>
-          </a:xfrm>
-          <a:prstGeom prst="rect">
-            <a:avLst/>
-          </a:prstGeom>
-          <a:noFill/>
-          <a:ln>
-            <a:noFill/>
-          </a:ln>
-        </p:spPr>
-        <p:txBody>
-          <a:bodyPr spcFirstLastPara="1" wrap="square" lIns="91425" tIns="91425" rIns="91425" bIns="91425" anchor="t" anchorCtr="0">
-            <a:noAutofit/>
-          </a:bodyPr>
-          <a:lstStyle/>
-          <a:p>
-            <a:pPr marL="0" lvl="0" indent="0" algn="l" rtl="0">
-              <a:lnSpc>
-                <a:spcPct val="100000"/>
-              </a:lnSpc>
-              <a:spcBef>
-                <a:spcPts val="0"/>
-              </a:spcBef>
-              <a:spcAft>
-                <a:spcPts val="0"/>
-              </a:spcAft>
-              <a:buSzPts val="2800"/>
-              <a:buNone/>
-            </a:pPr>
-            <a:r>
-              <a:rPr lang="fr" sz="2400">
-                <a:solidFill>
-                  <a:srgbClr val="015955"/>
-                </a:solidFill>
-                <a:latin typeface="Inter"/>
-                <a:ea typeface="Inter"/>
-                <a:cs typeface="Inter"/>
-                <a:sym typeface="Inter"/>
-              </a:rPr>
-              <a:t>Group members</a:t>
-            </a:r>
-            <a:endParaRPr sz="2400">
-              <a:solidFill>
-                <a:srgbClr val="015955"/>
-              </a:solidFill>
-              <a:latin typeface="Inter"/>
-              <a:ea typeface="Inter"/>
-              <a:cs typeface="Inter"/>
-              <a:sym typeface="Inter"/>
-            </a:endParaRPr>
-          </a:p>
-        </p:txBody>
-      </p:sp>
-      <p:pic>
-        <p:nvPicPr>
-          <p:cNvPr id="63" name="Google Shape;63;p2"/>
-          <p:cNvPicPr preferRelativeResize="0"/>
-          <p:nvPr/>
-        </p:nvPicPr>
-        <p:blipFill rotWithShape="1">
-          <a:blip r:embed="rId3">
-            <a:alphaModFix/>
-          </a:blip>
-          <a:srcRect/>
-          <a:stretch/>
-        </p:blipFill>
-        <p:spPr>
-          <a:xfrm>
-            <a:off x="463375" y="482852"/>
-            <a:ext cx="576900" cy="385904"/>
-          </a:xfrm>
-          <a:prstGeom prst="rect">
-            <a:avLst/>
-          </a:prstGeom>
-          <a:noFill/>
-          <a:ln>
-            <a:noFill/>
-          </a:ln>
-        </p:spPr>
-      </p:pic>
-    </p:spTree>
-  </p:cSld>
-  <p:clrMapOvr>
-    <a:masterClrMapping/>
-  </p:clrMapOvr>
-</p:sld>
-</file>
-
-<file path=ppt/slides/slide3.xml><?xml version="1.0" encoding="utf-8"?>
-<p:sld xmlns:a="http://schemas.openxmlformats.org/drawingml/2006/main" xmlns:r="http://schemas.openxmlformats.org/officeDocument/2006/relationships" xmlns:p="http://schemas.openxmlformats.org/presentationml/2006/main">
-  <p:cSld>
-    <p:spTree>
-      <p:nvGrpSpPr>
-        <p:cNvPr id="1" name="Shape 68">
-          <a:extLst>
-            <a:ext uri="{FF2B5EF4-FFF2-40B4-BE49-F238E27FC236}">
-              <a16:creationId xmlns:a16="http://schemas.microsoft.com/office/drawing/2014/main" id="{C61C25B1-8526-F489-8EC8-46322447A69B}"/>
-            </a:ext>
-          </a:extLst>
-        </p:cNvPr>
-        <p:cNvGrpSpPr/>
-        <p:nvPr/>
-      </p:nvGrpSpPr>
-      <p:grpSpPr>
-        <a:xfrm>
-          <a:off x="0" y="0"/>
-          <a:ext cx="0" cy="0"/>
-          <a:chOff x="0" y="0"/>
-          <a:chExt cx="0" cy="0"/>
-        </a:xfrm>
-      </p:grpSpPr>
-      <p:sp>
-        <p:nvSpPr>
-          <p:cNvPr id="70" name="Google Shape;70;p3">
-            <a:extLst>
-              <a:ext uri="{FF2B5EF4-FFF2-40B4-BE49-F238E27FC236}">
-                <a16:creationId xmlns:a16="http://schemas.microsoft.com/office/drawing/2014/main" id="{6C332C7A-0C1B-7002-DD8F-E4EB26F3199D}"/>
-              </a:ext>
-            </a:extLst>
-          </p:cNvPr>
-          <p:cNvSpPr txBox="1">
-            <a:spLocks noGrp="1"/>
-          </p:cNvSpPr>
-          <p:nvPr>
-            <p:ph type="ctrTitle" idx="4294967295"/>
-          </p:nvPr>
-        </p:nvSpPr>
-        <p:spPr>
-          <a:xfrm>
-            <a:off x="1192664" y="403309"/>
-            <a:ext cx="5315100" cy="533100"/>
-          </a:xfrm>
-          <a:prstGeom prst="rect">
-            <a:avLst/>
-          </a:prstGeom>
-          <a:noFill/>
-          <a:ln>
-            <a:noFill/>
-          </a:ln>
-        </p:spPr>
-        <p:txBody>
-          <a:bodyPr spcFirstLastPara="1" wrap="square" lIns="91425" tIns="91425" rIns="91425" bIns="91425" anchor="t" anchorCtr="0">
-            <a:noAutofit/>
-          </a:bodyPr>
-          <a:lstStyle/>
-          <a:p>
-            <a:pPr marL="0" marR="0" lvl="0" indent="0" algn="l" rtl="0">
-              <a:lnSpc>
-                <a:spcPct val="100000"/>
-              </a:lnSpc>
-              <a:spcBef>
-                <a:spcPts val="0"/>
-              </a:spcBef>
-              <a:spcAft>
-                <a:spcPts val="0"/>
-              </a:spcAft>
-              <a:buClr>
-                <a:schemeClr val="dk1"/>
-              </a:buClr>
-              <a:buSzPts val="2800"/>
-              <a:buFont typeface="Arial"/>
-              <a:buNone/>
-            </a:pPr>
-            <a:r>
-              <a:rPr lang="fr" sz="2500" b="1" i="0" u="none" strike="noStrike" cap="none" dirty="0">
-                <a:solidFill>
-                  <a:srgbClr val="0E3449"/>
-                </a:solidFill>
-                <a:latin typeface="Inter SemiBold"/>
-                <a:ea typeface="Inter SemiBold"/>
-                <a:cs typeface="Inter SemiBold"/>
-                <a:sym typeface="Inter SemiBold"/>
-              </a:rPr>
-              <a:t>Pitch</a:t>
-            </a:r>
-            <a:endParaRPr sz="2500" b="1" i="0" u="none" strike="noStrike" cap="none" dirty="0">
-              <a:solidFill>
-                <a:srgbClr val="0E3449"/>
-              </a:solidFill>
-              <a:latin typeface="Inter SemiBold"/>
-              <a:ea typeface="Inter SemiBold"/>
-              <a:cs typeface="Inter SemiBold"/>
-              <a:sym typeface="Inter SemiBold"/>
-            </a:endParaRPr>
-          </a:p>
-        </p:txBody>
-      </p:sp>
-      <p:sp>
-        <p:nvSpPr>
-          <p:cNvPr id="71" name="Google Shape;71;p3">
-            <a:extLst>
-              <a:ext uri="{FF2B5EF4-FFF2-40B4-BE49-F238E27FC236}">
-                <a16:creationId xmlns:a16="http://schemas.microsoft.com/office/drawing/2014/main" id="{2535CC55-4646-912A-89CB-270E6E57968E}"/>
-              </a:ext>
-            </a:extLst>
-          </p:cNvPr>
-          <p:cNvSpPr/>
-          <p:nvPr/>
-        </p:nvSpPr>
-        <p:spPr>
-          <a:xfrm>
-            <a:off x="10225" y="4892025"/>
-            <a:ext cx="9144000" cy="251400"/>
-          </a:xfrm>
-          <a:prstGeom prst="rect">
-            <a:avLst/>
-          </a:prstGeom>
-          <a:solidFill>
-            <a:srgbClr val="C3FFFC"/>
-          </a:solidFill>
-          <a:ln>
-            <a:noFill/>
-          </a:ln>
-        </p:spPr>
-        <p:txBody>
-          <a:bodyPr spcFirstLastPara="1" wrap="square" lIns="91425" tIns="91425" rIns="91425" bIns="91425" anchor="ctr" anchorCtr="0">
-            <a:noAutofit/>
-          </a:bodyPr>
-          <a:lstStyle/>
-          <a:p>
-            <a:pPr marL="0" marR="0" lvl="0" indent="0" algn="l" rtl="0">
-              <a:lnSpc>
-                <a:spcPct val="100000"/>
-              </a:lnSpc>
-              <a:spcBef>
-                <a:spcPts val="0"/>
-              </a:spcBef>
-              <a:spcAft>
-                <a:spcPts val="0"/>
-              </a:spcAft>
-              <a:buClr>
-                <a:srgbClr val="000000"/>
-              </a:buClr>
-              <a:buSzPts val="1400"/>
-              <a:buFont typeface="Arial"/>
-              <a:buNone/>
-            </a:pPr>
-            <a:endParaRPr sz="1400" b="0" i="0" u="none" strike="noStrike" cap="none">
-              <a:solidFill>
-                <a:srgbClr val="000000"/>
-              </a:solidFill>
-              <a:latin typeface="Arial"/>
-              <a:ea typeface="Arial"/>
-              <a:cs typeface="Arial"/>
-              <a:sym typeface="Arial"/>
-            </a:endParaRPr>
-          </a:p>
-        </p:txBody>
-      </p:sp>
-      <p:pic>
-        <p:nvPicPr>
-          <p:cNvPr id="72" name="Google Shape;72;p3">
-            <a:extLst>
-              <a:ext uri="{FF2B5EF4-FFF2-40B4-BE49-F238E27FC236}">
-                <a16:creationId xmlns:a16="http://schemas.microsoft.com/office/drawing/2014/main" id="{B6E60877-CBAF-4172-8F34-67BAD279BAEB}"/>
-              </a:ext>
-            </a:extLst>
-          </p:cNvPr>
-          <p:cNvPicPr preferRelativeResize="0"/>
-          <p:nvPr/>
-        </p:nvPicPr>
-        <p:blipFill rotWithShape="1">
-          <a:blip r:embed="rId3">
-            <a:alphaModFix/>
-          </a:blip>
-          <a:srcRect/>
-          <a:stretch/>
-        </p:blipFill>
-        <p:spPr>
-          <a:xfrm>
-            <a:off x="463375" y="482852"/>
-            <a:ext cx="576900" cy="385904"/>
-          </a:xfrm>
-          <a:prstGeom prst="rect">
-            <a:avLst/>
-          </a:prstGeom>
-          <a:noFill/>
-          <a:ln>
-            <a:noFill/>
-          </a:ln>
-        </p:spPr>
-      </p:pic>
-      <p:sp>
-        <p:nvSpPr>
-          <p:cNvPr id="4" name="Google Shape;181;p8">
-            <a:extLst>
-              <a:ext uri="{FF2B5EF4-FFF2-40B4-BE49-F238E27FC236}">
-                <a16:creationId xmlns:a16="http://schemas.microsoft.com/office/drawing/2014/main" id="{0649B650-4A2A-7387-5E59-6EEF0B39EF13}"/>
-              </a:ext>
-            </a:extLst>
-          </p:cNvPr>
-          <p:cNvSpPr txBox="1">
-            <a:spLocks noGrp="1"/>
-          </p:cNvSpPr>
-          <p:nvPr>
-            <p:ph type="body" idx="1"/>
-          </p:nvPr>
-        </p:nvSpPr>
-        <p:spPr>
-          <a:xfrm>
-            <a:off x="311700" y="1155049"/>
-            <a:ext cx="8520600" cy="3585142"/>
-          </a:xfrm>
-          <a:prstGeom prst="rect">
-            <a:avLst/>
-          </a:prstGeom>
-          <a:noFill/>
-          <a:ln>
-            <a:noFill/>
-          </a:ln>
-        </p:spPr>
-        <p:txBody>
-          <a:bodyPr spcFirstLastPara="1" wrap="square" lIns="91425" tIns="91425" rIns="91425" bIns="91425" anchor="t" anchorCtr="0">
-            <a:noAutofit/>
-          </a:bodyPr>
-          <a:lstStyle/>
-          <a:p>
-            <a:pPr marL="114300" lvl="0" indent="0" algn="l" rtl="0">
-              <a:lnSpc>
-                <a:spcPct val="115000"/>
-              </a:lnSpc>
-              <a:spcBef>
-                <a:spcPts val="0"/>
-              </a:spcBef>
-              <a:spcAft>
-                <a:spcPts val="0"/>
-              </a:spcAft>
-              <a:buSzPts val="1800"/>
-              <a:buNone/>
-            </a:pPr>
-            <a:r>
-              <a:rPr lang="fr-FR" sz="1400" dirty="0" err="1"/>
-              <a:t>wwwww</a:t>
-            </a:r>
-            <a:endParaRPr sz="1400" dirty="0"/>
-          </a:p>
-        </p:txBody>
-      </p:sp>
-    </p:spTree>
-    <p:extLst>
-      <p:ext uri="{BB962C8B-B14F-4D97-AF65-F5344CB8AC3E}">
-        <p14:creationId xmlns:p14="http://schemas.microsoft.com/office/powerpoint/2010/main" val="406580661"/>
-      </p:ext>
-    </p:extLst>
-  </p:cSld>
-  <p:clrMapOvr>
-    <a:masterClrMapping/>
-  </p:clrMapOvr>
-</p:sld>
-</file>
-
-<file path=ppt/slides/slide4.xml><?xml version="1.0" encoding="utf-8"?>
-<p:sld xmlns:a="http://schemas.openxmlformats.org/drawingml/2006/main" xmlns:r="http://schemas.openxmlformats.org/officeDocument/2006/relationships" xmlns:p="http://schemas.openxmlformats.org/presentationml/2006/main">
-  <p:cSld>
-    <p:spTree>
-      <p:nvGrpSpPr>
-        <p:cNvPr id="1" name="Shape 95">
-          <a:extLst>
-            <a:ext uri="{FF2B5EF4-FFF2-40B4-BE49-F238E27FC236}">
-              <a16:creationId xmlns:a16="http://schemas.microsoft.com/office/drawing/2014/main" id="{102D340D-B8AB-12B1-1341-CA7D51F053B0}"/>
-            </a:ext>
-          </a:extLst>
-        </p:cNvPr>
-        <p:cNvGrpSpPr/>
-        <p:nvPr/>
-      </p:nvGrpSpPr>
-      <p:grpSpPr>
-        <a:xfrm>
-          <a:off x="0" y="0"/>
-          <a:ext cx="0" cy="0"/>
-          <a:chOff x="0" y="0"/>
-          <a:chExt cx="0" cy="0"/>
-        </a:xfrm>
-      </p:grpSpPr>
-      <p:sp>
-        <p:nvSpPr>
-          <p:cNvPr id="96" name="Google Shape;96;p5">
-            <a:extLst>
-              <a:ext uri="{FF2B5EF4-FFF2-40B4-BE49-F238E27FC236}">
-                <a16:creationId xmlns:a16="http://schemas.microsoft.com/office/drawing/2014/main" id="{E0E7B8E7-F933-D99A-FC55-A7E0AFDF3556}"/>
-              </a:ext>
-            </a:extLst>
-          </p:cNvPr>
-          <p:cNvSpPr txBox="1">
-            <a:spLocks noGrp="1"/>
-          </p:cNvSpPr>
-          <p:nvPr>
-            <p:ph type="ctrTitle" idx="4294967295"/>
-          </p:nvPr>
-        </p:nvSpPr>
-        <p:spPr>
-          <a:xfrm>
-            <a:off x="1192664" y="403309"/>
-            <a:ext cx="5315100" cy="533100"/>
-          </a:xfrm>
-          <a:prstGeom prst="rect">
-            <a:avLst/>
-          </a:prstGeom>
-          <a:noFill/>
-          <a:ln>
-            <a:noFill/>
-          </a:ln>
-        </p:spPr>
-        <p:txBody>
-          <a:bodyPr spcFirstLastPara="1" wrap="square" lIns="91425" tIns="91425" rIns="91425" bIns="91425" anchor="t" anchorCtr="0">
-            <a:noAutofit/>
-          </a:bodyPr>
-          <a:lstStyle/>
-          <a:p>
-            <a:pPr marL="0" marR="0" lvl="0" indent="0" algn="l" rtl="0">
-              <a:lnSpc>
-                <a:spcPct val="100000"/>
-              </a:lnSpc>
-              <a:spcBef>
-                <a:spcPts val="0"/>
-              </a:spcBef>
-              <a:spcAft>
-                <a:spcPts val="0"/>
-              </a:spcAft>
-              <a:buClr>
-                <a:schemeClr val="dk1"/>
-              </a:buClr>
-              <a:buSzPts val="2800"/>
-              <a:buFont typeface="Arial"/>
-              <a:buNone/>
-            </a:pPr>
-            <a:r>
-              <a:rPr lang="it-IT" sz="2500" b="1" i="0" u="none" strike="noStrike" cap="none" dirty="0">
-                <a:solidFill>
-                  <a:srgbClr val="0E3449"/>
-                </a:solidFill>
-                <a:latin typeface="Inter SemiBold"/>
-                <a:ea typeface="Inter SemiBold"/>
-                <a:cs typeface="Inter SemiBold"/>
-                <a:sym typeface="Inter SemiBold"/>
-              </a:rPr>
-              <a:t>Pipeline data</a:t>
-            </a:r>
-            <a:endParaRPr lang="it-IT" sz="2500" b="0" i="0" u="none" strike="noStrike" cap="none" dirty="0">
-              <a:solidFill>
-                <a:srgbClr val="0E3449"/>
-              </a:solidFill>
-              <a:latin typeface="Inter SemiBold"/>
-              <a:ea typeface="Inter SemiBold"/>
-              <a:cs typeface="Inter SemiBold"/>
-              <a:sym typeface="Inter SemiBold"/>
-            </a:endParaRPr>
-          </a:p>
-        </p:txBody>
-      </p:sp>
-      <p:pic>
-        <p:nvPicPr>
-          <p:cNvPr id="97" name="Google Shape;97;p5">
-            <a:extLst>
-              <a:ext uri="{FF2B5EF4-FFF2-40B4-BE49-F238E27FC236}">
-                <a16:creationId xmlns:a16="http://schemas.microsoft.com/office/drawing/2014/main" id="{A1784225-A032-0CBA-51D9-09FCED9F28E2}"/>
-              </a:ext>
-            </a:extLst>
-          </p:cNvPr>
-          <p:cNvPicPr preferRelativeResize="0"/>
-          <p:nvPr/>
-        </p:nvPicPr>
-        <p:blipFill rotWithShape="1">
-          <a:blip r:embed="rId3">
-            <a:alphaModFix/>
-          </a:blip>
-          <a:srcRect/>
-          <a:stretch/>
-        </p:blipFill>
-        <p:spPr>
-          <a:xfrm>
-            <a:off x="463375" y="482852"/>
-            <a:ext cx="576900" cy="385904"/>
-          </a:xfrm>
-          <a:prstGeom prst="rect">
-            <a:avLst/>
-          </a:prstGeom>
-          <a:noFill/>
-          <a:ln>
-            <a:noFill/>
-          </a:ln>
-        </p:spPr>
-      </p:pic>
-      <p:sp>
-        <p:nvSpPr>
-          <p:cNvPr id="98" name="Google Shape;98;p5">
-            <a:extLst>
-              <a:ext uri="{FF2B5EF4-FFF2-40B4-BE49-F238E27FC236}">
-                <a16:creationId xmlns:a16="http://schemas.microsoft.com/office/drawing/2014/main" id="{0302C705-EB34-55B3-983C-81DA8BD20273}"/>
-              </a:ext>
-            </a:extLst>
-          </p:cNvPr>
-          <p:cNvSpPr/>
-          <p:nvPr/>
-        </p:nvSpPr>
-        <p:spPr>
-          <a:xfrm>
-            <a:off x="10225" y="4892025"/>
-            <a:ext cx="9144000" cy="251400"/>
-          </a:xfrm>
-          <a:prstGeom prst="rect">
-            <a:avLst/>
-          </a:prstGeom>
-          <a:solidFill>
-            <a:srgbClr val="C3FFFC"/>
-          </a:solidFill>
-          <a:ln>
-            <a:noFill/>
-          </a:ln>
-        </p:spPr>
-        <p:txBody>
-          <a:bodyPr spcFirstLastPara="1" wrap="square" lIns="91425" tIns="91425" rIns="91425" bIns="91425" anchor="ctr" anchorCtr="0">
-            <a:noAutofit/>
-          </a:bodyPr>
-          <a:lstStyle/>
-          <a:p>
-            <a:pPr marL="0" marR="0" lvl="0" indent="0" algn="l" rtl="0">
-              <a:lnSpc>
-                <a:spcPct val="100000"/>
-              </a:lnSpc>
-              <a:spcBef>
-                <a:spcPts val="0"/>
-              </a:spcBef>
-              <a:spcAft>
-                <a:spcPts val="0"/>
-              </a:spcAft>
-              <a:buClr>
-                <a:srgbClr val="000000"/>
-              </a:buClr>
-              <a:buSzPts val="1400"/>
-              <a:buFont typeface="Arial"/>
-              <a:buNone/>
-            </a:pPr>
-            <a:endParaRPr sz="1400" b="0" i="0" u="none" strike="noStrike" cap="none">
-              <a:solidFill>
-                <a:srgbClr val="000000"/>
-              </a:solidFill>
-              <a:latin typeface="Arial"/>
-              <a:ea typeface="Arial"/>
-              <a:cs typeface="Arial"/>
-              <a:sym typeface="Arial"/>
-            </a:endParaRPr>
-          </a:p>
-        </p:txBody>
-      </p:sp>
-      <p:pic>
-        <p:nvPicPr>
-          <p:cNvPr id="3" name="Image 2">
-            <a:extLst>
-              <a:ext uri="{FF2B5EF4-FFF2-40B4-BE49-F238E27FC236}">
-                <a16:creationId xmlns:a16="http://schemas.microsoft.com/office/drawing/2014/main" id="{B2469126-D060-A3A0-24FE-3940B83EED58}"/>
-              </a:ext>
-            </a:extLst>
-          </p:cNvPr>
-          <p:cNvPicPr>
-            <a:picLocks noChangeAspect="1"/>
-          </p:cNvPicPr>
-          <p:nvPr/>
-        </p:nvPicPr>
-        <p:blipFill>
-          <a:blip r:embed="rId4"/>
-          <a:stretch>
-            <a:fillRect/>
-          </a:stretch>
-        </p:blipFill>
-        <p:spPr>
-          <a:xfrm>
-            <a:off x="1040275" y="868756"/>
-            <a:ext cx="7355393" cy="3933854"/>
-          </a:xfrm>
-          <a:prstGeom prst="rect">
-            <a:avLst/>
-          </a:prstGeom>
-        </p:spPr>
-      </p:pic>
-      <p:pic>
-        <p:nvPicPr>
-          <p:cNvPr id="1026" name="Picture 2">
-            <a:extLst>
-              <a:ext uri="{FF2B5EF4-FFF2-40B4-BE49-F238E27FC236}">
-                <a16:creationId xmlns:a16="http://schemas.microsoft.com/office/drawing/2014/main" id="{923FE2F2-F305-A7CE-975B-2A2BA912E4B7}"/>
-              </a:ext>
-            </a:extLst>
-          </p:cNvPr>
-          <p:cNvPicPr>
-            <a:picLocks noChangeAspect="1" noChangeArrowheads="1"/>
-          </p:cNvPicPr>
-          <p:nvPr/>
-        </p:nvPicPr>
-        <p:blipFill>
-          <a:blip r:embed="rId5">
-            <a:extLst>
-              <a:ext uri="{28A0092B-C50C-407E-A947-70E740481C1C}">
-                <a14:useLocalDpi xmlns:a14="http://schemas.microsoft.com/office/drawing/2010/main" val="0"/>
-              </a:ext>
-            </a:extLst>
-          </a:blip>
-          <a:srcRect/>
-          <a:stretch>
-            <a:fillRect/>
-          </a:stretch>
-        </p:blipFill>
-        <p:spPr bwMode="auto">
-          <a:xfrm>
-            <a:off x="9381968" y="3152805"/>
-            <a:ext cx="1080840" cy="1080840"/>
-          </a:xfrm>
-          <a:prstGeom prst="rect">
-            <a:avLst/>
-          </a:prstGeom>
-          <a:noFill/>
-          <a:extLst>
-            <a:ext uri="{909E8E84-426E-40DD-AFC4-6F175D3DCCD1}">
-              <a14:hiddenFill xmlns:a14="http://schemas.microsoft.com/office/drawing/2010/main">
-                <a:solidFill>
-                  <a:srgbClr val="FFFFFF"/>
-                </a:solidFill>
-              </a14:hiddenFill>
-            </a:ext>
-          </a:extLst>
-        </p:spPr>
-      </p:pic>
-      <p:pic>
-        <p:nvPicPr>
-          <p:cNvPr id="1028" name="Picture 4">
-            <a:extLst>
-              <a:ext uri="{FF2B5EF4-FFF2-40B4-BE49-F238E27FC236}">
-                <a16:creationId xmlns:a16="http://schemas.microsoft.com/office/drawing/2014/main" id="{D0C03EA7-EAD6-1A33-21AE-920B9121582F}"/>
-              </a:ext>
-            </a:extLst>
-          </p:cNvPr>
-          <p:cNvPicPr>
-            <a:picLocks noChangeAspect="1" noChangeArrowheads="1"/>
-          </p:cNvPicPr>
-          <p:nvPr/>
-        </p:nvPicPr>
-        <p:blipFill>
-          <a:blip r:embed="rId6">
-            <a:extLst>
-              <a:ext uri="{28A0092B-C50C-407E-A947-70E740481C1C}">
-                <a14:useLocalDpi xmlns:a14="http://schemas.microsoft.com/office/drawing/2010/main" val="0"/>
-              </a:ext>
-            </a:extLst>
-          </a:blip>
-          <a:srcRect/>
-          <a:stretch>
-            <a:fillRect/>
-          </a:stretch>
-        </p:blipFill>
-        <p:spPr bwMode="auto">
-          <a:xfrm>
-            <a:off x="9461911" y="2285310"/>
-            <a:ext cx="1470313" cy="840179"/>
-          </a:xfrm>
-          <a:prstGeom prst="rect">
-            <a:avLst/>
-          </a:prstGeom>
-          <a:noFill/>
-          <a:extLst>
-            <a:ext uri="{909E8E84-426E-40DD-AFC4-6F175D3DCCD1}">
-              <a14:hiddenFill xmlns:a14="http://schemas.microsoft.com/office/drawing/2010/main">
-                <a:solidFill>
-                  <a:srgbClr val="FFFFFF"/>
-                </a:solidFill>
-              </a14:hiddenFill>
-            </a:ext>
-          </a:extLst>
-        </p:spPr>
-      </p:pic>
-      <p:pic>
-        <p:nvPicPr>
-          <p:cNvPr id="1030" name="Picture 6">
-            <a:extLst>
-              <a:ext uri="{FF2B5EF4-FFF2-40B4-BE49-F238E27FC236}">
-                <a16:creationId xmlns:a16="http://schemas.microsoft.com/office/drawing/2014/main" id="{2941D76B-6840-C572-907F-F3680B66EBF7}"/>
-              </a:ext>
-            </a:extLst>
-          </p:cNvPr>
-          <p:cNvPicPr>
-            <a:picLocks noChangeAspect="1" noChangeArrowheads="1"/>
-          </p:cNvPicPr>
-          <p:nvPr/>
-        </p:nvPicPr>
-        <p:blipFill>
-          <a:blip r:embed="rId7">
-            <a:extLst>
-              <a:ext uri="{28A0092B-C50C-407E-A947-70E740481C1C}">
-                <a14:useLocalDpi xmlns:a14="http://schemas.microsoft.com/office/drawing/2010/main" val="0"/>
-              </a:ext>
-            </a:extLst>
-          </a:blip>
-          <a:srcRect/>
-          <a:stretch>
-            <a:fillRect/>
-          </a:stretch>
-        </p:blipFill>
-        <p:spPr bwMode="auto">
-          <a:xfrm>
-            <a:off x="9381968" y="1643023"/>
-            <a:ext cx="1008072" cy="736668"/>
-          </a:xfrm>
-          <a:prstGeom prst="rect">
-            <a:avLst/>
-          </a:prstGeom>
-          <a:noFill/>
-          <a:extLst>
-            <a:ext uri="{909E8E84-426E-40DD-AFC4-6F175D3DCCD1}">
-              <a14:hiddenFill xmlns:a14="http://schemas.microsoft.com/office/drawing/2010/main">
-                <a:solidFill>
-                  <a:srgbClr val="FFFFFF"/>
-                </a:solidFill>
-              </a14:hiddenFill>
-            </a:ext>
-          </a:extLst>
-        </p:spPr>
-      </p:pic>
-      <p:pic>
-        <p:nvPicPr>
-          <p:cNvPr id="1032" name="Picture 8">
-            <a:extLst>
-              <a:ext uri="{FF2B5EF4-FFF2-40B4-BE49-F238E27FC236}">
-                <a16:creationId xmlns:a16="http://schemas.microsoft.com/office/drawing/2014/main" id="{0AA62D0C-7533-F64F-5205-AC2C6EB164FE}"/>
-              </a:ext>
-            </a:extLst>
-          </p:cNvPr>
-          <p:cNvPicPr>
-            <a:picLocks noChangeAspect="1" noChangeArrowheads="1"/>
-          </p:cNvPicPr>
-          <p:nvPr/>
-        </p:nvPicPr>
-        <p:blipFill>
-          <a:blip r:embed="rId8">
-            <a:extLst>
-              <a:ext uri="{28A0092B-C50C-407E-A947-70E740481C1C}">
-                <a14:useLocalDpi xmlns:a14="http://schemas.microsoft.com/office/drawing/2010/main" val="0"/>
-              </a:ext>
-            </a:extLst>
-          </a:blip>
-          <a:srcRect/>
-          <a:stretch>
-            <a:fillRect/>
-          </a:stretch>
-        </p:blipFill>
-        <p:spPr bwMode="auto">
-          <a:xfrm>
-            <a:off x="9886004" y="1117302"/>
-            <a:ext cx="485958" cy="485958"/>
-          </a:xfrm>
-          <a:prstGeom prst="rect">
-            <a:avLst/>
-          </a:prstGeom>
-          <a:noFill/>
-          <a:extLst>
-            <a:ext uri="{909E8E84-426E-40DD-AFC4-6F175D3DCCD1}">
-              <a14:hiddenFill xmlns:a14="http://schemas.microsoft.com/office/drawing/2010/main">
-                <a:solidFill>
-                  <a:srgbClr val="FFFFFF"/>
-                </a:solidFill>
-              </a14:hiddenFill>
-            </a:ext>
-          </a:extLst>
-        </p:spPr>
-      </p:pic>
-      <p:pic>
-        <p:nvPicPr>
-          <p:cNvPr id="1034" name="Picture 10">
-            <a:extLst>
-              <a:ext uri="{FF2B5EF4-FFF2-40B4-BE49-F238E27FC236}">
-                <a16:creationId xmlns:a16="http://schemas.microsoft.com/office/drawing/2014/main" id="{748B16F9-6C53-91C1-4712-424BF6CE8989}"/>
-              </a:ext>
-            </a:extLst>
-          </p:cNvPr>
-          <p:cNvPicPr>
-            <a:picLocks noChangeAspect="1" noChangeArrowheads="1"/>
-          </p:cNvPicPr>
-          <p:nvPr/>
-        </p:nvPicPr>
-        <p:blipFill>
-          <a:blip r:embed="rId9">
-            <a:extLst>
-              <a:ext uri="{28A0092B-C50C-407E-A947-70E740481C1C}">
-                <a14:useLocalDpi xmlns:a14="http://schemas.microsoft.com/office/drawing/2010/main" val="0"/>
-              </a:ext>
-            </a:extLst>
-          </a:blip>
-          <a:srcRect/>
-          <a:stretch>
-            <a:fillRect/>
-          </a:stretch>
-        </p:blipFill>
-        <p:spPr bwMode="auto">
-          <a:xfrm>
-            <a:off x="9557987" y="499821"/>
-            <a:ext cx="656034" cy="656034"/>
-          </a:xfrm>
-          <a:prstGeom prst="rect">
-            <a:avLst/>
-          </a:prstGeom>
-          <a:noFill/>
-          <a:extLst>
-            <a:ext uri="{909E8E84-426E-40DD-AFC4-6F175D3DCCD1}">
-              <a14:hiddenFill xmlns:a14="http://schemas.microsoft.com/office/drawing/2010/main">
-                <a:solidFill>
-                  <a:srgbClr val="FFFFFF"/>
-                </a:solidFill>
-              </a14:hiddenFill>
-            </a:ext>
-          </a:extLst>
-        </p:spPr>
-      </p:pic>
-      <p:pic>
-        <p:nvPicPr>
-          <p:cNvPr id="1036" name="Picture 12">
-            <a:extLst>
-              <a:ext uri="{FF2B5EF4-FFF2-40B4-BE49-F238E27FC236}">
-                <a16:creationId xmlns:a16="http://schemas.microsoft.com/office/drawing/2014/main" id="{135630BC-F5F0-17C1-438A-A312C16997F8}"/>
-              </a:ext>
-            </a:extLst>
-          </p:cNvPr>
-          <p:cNvPicPr>
-            <a:picLocks noChangeAspect="1" noChangeArrowheads="1"/>
-          </p:cNvPicPr>
-          <p:nvPr/>
-        </p:nvPicPr>
-        <p:blipFill>
-          <a:blip r:embed="rId10">
-            <a:extLst>
-              <a:ext uri="{28A0092B-C50C-407E-A947-70E740481C1C}">
-                <a14:useLocalDpi xmlns:a14="http://schemas.microsoft.com/office/drawing/2010/main" val="0"/>
-              </a:ext>
-            </a:extLst>
-          </a:blip>
-          <a:srcRect/>
-          <a:stretch>
-            <a:fillRect/>
-          </a:stretch>
-        </p:blipFill>
-        <p:spPr bwMode="auto">
-          <a:xfrm>
-            <a:off x="9645557" y="-23982"/>
-            <a:ext cx="905699" cy="654116"/>
-          </a:xfrm>
-          <a:prstGeom prst="rect">
-            <a:avLst/>
-          </a:prstGeom>
-          <a:noFill/>
-          <a:extLst>
-            <a:ext uri="{909E8E84-426E-40DD-AFC4-6F175D3DCCD1}">
-              <a14:hiddenFill xmlns:a14="http://schemas.microsoft.com/office/drawing/2010/main">
-                <a:solidFill>
-                  <a:srgbClr val="FFFFFF"/>
-                </a:solidFill>
-              </a14:hiddenFill>
-            </a:ext>
-          </a:extLst>
-        </p:spPr>
-      </p:pic>
-      <p:pic>
-        <p:nvPicPr>
-          <p:cNvPr id="1038" name="Picture 14">
-            <a:extLst>
-              <a:ext uri="{FF2B5EF4-FFF2-40B4-BE49-F238E27FC236}">
-                <a16:creationId xmlns:a16="http://schemas.microsoft.com/office/drawing/2014/main" id="{1B3822DD-A0E9-A37F-0DE9-40781F1C3DF4}"/>
-              </a:ext>
-            </a:extLst>
-          </p:cNvPr>
-          <p:cNvPicPr>
-            <a:picLocks noChangeAspect="1" noChangeArrowheads="1"/>
-          </p:cNvPicPr>
-          <p:nvPr/>
-        </p:nvPicPr>
-        <p:blipFill>
-          <a:blip r:embed="rId11">
-            <a:extLst>
-              <a:ext uri="{28A0092B-C50C-407E-A947-70E740481C1C}">
-                <a14:useLocalDpi xmlns:a14="http://schemas.microsoft.com/office/drawing/2010/main" val="0"/>
-              </a:ext>
-            </a:extLst>
-          </a:blip>
-          <a:srcRect/>
-          <a:stretch>
-            <a:fillRect/>
-          </a:stretch>
-        </p:blipFill>
-        <p:spPr bwMode="auto">
-          <a:xfrm>
-            <a:off x="9179213" y="-560638"/>
-            <a:ext cx="1783953" cy="654116"/>
-          </a:xfrm>
-          <a:prstGeom prst="rect">
-            <a:avLst/>
-          </a:prstGeom>
-          <a:noFill/>
-          <a:extLst>
-            <a:ext uri="{909E8E84-426E-40DD-AFC4-6F175D3DCCD1}">
-              <a14:hiddenFill xmlns:a14="http://schemas.microsoft.com/office/drawing/2010/main">
-                <a:solidFill>
-                  <a:srgbClr val="FFFFFF"/>
-                </a:solidFill>
-              </a14:hiddenFill>
-            </a:ext>
-          </a:extLst>
-        </p:spPr>
-      </p:pic>
-    </p:spTree>
-    <p:extLst>
-      <p:ext uri="{BB962C8B-B14F-4D97-AF65-F5344CB8AC3E}">
-        <p14:creationId xmlns:p14="http://schemas.microsoft.com/office/powerpoint/2010/main" val="1821755839"/>
-      </p:ext>
-    </p:extLst>
-  </p:cSld>
-  <p:clrMapOvr>
-    <a:masterClrMapping/>
-  </p:clrMapOvr>
-</p:sld>
-</file>
-
-<file path=ppt/slides/slide5.xml><?xml version="1.0" encoding="utf-8"?>
-<p:sld xmlns:a="http://schemas.openxmlformats.org/drawingml/2006/main" xmlns:r="http://schemas.openxmlformats.org/officeDocument/2006/relationships" xmlns:p="http://schemas.openxmlformats.org/presentationml/2006/main">
-  <p:cSld>
-    <p:spTree>
-      <p:nvGrpSpPr>
-        <p:cNvPr id="1" name="Shape 177"/>
-        <p:cNvGrpSpPr/>
-        <p:nvPr/>
-      </p:nvGrpSpPr>
-      <p:grpSpPr>
-        <a:xfrm>
-          <a:off x="0" y="0"/>
-          <a:ext cx="0" cy="0"/>
-          <a:chOff x="0" y="0"/>
-          <a:chExt cx="0" cy="0"/>
-        </a:xfrm>
-      </p:grpSpPr>
-      <p:sp>
-        <p:nvSpPr>
-          <p:cNvPr id="178" name="Google Shape;178;p8"/>
-          <p:cNvSpPr txBox="1">
-            <a:spLocks noGrp="1"/>
-          </p:cNvSpPr>
-          <p:nvPr>
-            <p:ph type="ctrTitle" idx="4294967295"/>
-          </p:nvPr>
-        </p:nvSpPr>
-        <p:spPr>
-          <a:xfrm>
-            <a:off x="1192664" y="403309"/>
-            <a:ext cx="5315100" cy="533100"/>
-          </a:xfrm>
-          <a:prstGeom prst="rect">
-            <a:avLst/>
-          </a:prstGeom>
-          <a:noFill/>
-          <a:ln>
-            <a:noFill/>
-          </a:ln>
-        </p:spPr>
-        <p:txBody>
-          <a:bodyPr spcFirstLastPara="1" wrap="square" lIns="91425" tIns="91425" rIns="91425" bIns="91425" anchor="t" anchorCtr="0">
-            <a:noAutofit/>
-          </a:bodyPr>
-          <a:lstStyle/>
-          <a:p>
-            <a:r>
-              <a:rPr lang="fr-FR" sz="2500" b="1" dirty="0">
-                <a:solidFill>
-                  <a:srgbClr val="0E3449"/>
-                </a:solidFill>
-                <a:latin typeface="Inter SemiBold"/>
-                <a:ea typeface="Inter SemiBold"/>
-              </a:rPr>
-              <a:t>Synthèse finale</a:t>
-            </a:r>
-            <a:endParaRPr sz="2500" b="1" dirty="0">
-              <a:solidFill>
-                <a:srgbClr val="0E3449"/>
-              </a:solidFill>
-              <a:latin typeface="Inter SemiBold"/>
-              <a:ea typeface="Inter SemiBold"/>
-              <a:sym typeface="Inter SemiBold"/>
-            </a:endParaRPr>
-          </a:p>
-        </p:txBody>
-      </p:sp>
-      <p:pic>
-        <p:nvPicPr>
-          <p:cNvPr id="179" name="Google Shape;179;p8"/>
-          <p:cNvPicPr preferRelativeResize="0"/>
-          <p:nvPr/>
-        </p:nvPicPr>
-        <p:blipFill rotWithShape="1">
-          <a:blip r:embed="rId3">
-            <a:alphaModFix/>
-          </a:blip>
-          <a:srcRect/>
-          <a:stretch/>
-        </p:blipFill>
-        <p:spPr>
-          <a:xfrm>
-            <a:off x="463375" y="482852"/>
-            <a:ext cx="576900" cy="385904"/>
-          </a:xfrm>
-          <a:prstGeom prst="rect">
-            <a:avLst/>
-          </a:prstGeom>
-          <a:noFill/>
-          <a:ln>
-            <a:noFill/>
-          </a:ln>
-        </p:spPr>
-      </p:pic>
-      <p:sp>
-        <p:nvSpPr>
-          <p:cNvPr id="180" name="Google Shape;180;p8"/>
-          <p:cNvSpPr/>
-          <p:nvPr/>
-        </p:nvSpPr>
-        <p:spPr>
-          <a:xfrm>
-            <a:off x="10225" y="4892025"/>
-            <a:ext cx="9144000" cy="251400"/>
-          </a:xfrm>
-          <a:prstGeom prst="rect">
-            <a:avLst/>
-          </a:prstGeom>
-          <a:solidFill>
-            <a:srgbClr val="C3FFFC"/>
-          </a:solidFill>
-          <a:ln>
-            <a:noFill/>
-          </a:ln>
-        </p:spPr>
-        <p:txBody>
-          <a:bodyPr spcFirstLastPara="1" wrap="square" lIns="91425" tIns="91425" rIns="91425" bIns="91425" anchor="ctr" anchorCtr="0">
-            <a:noAutofit/>
-          </a:bodyPr>
-          <a:lstStyle/>
-          <a:p>
-            <a:pPr marL="0" marR="0" lvl="0" indent="0" algn="l" rtl="0">
-              <a:lnSpc>
-                <a:spcPct val="100000"/>
-              </a:lnSpc>
-              <a:spcBef>
-                <a:spcPts val="0"/>
-              </a:spcBef>
-              <a:spcAft>
-                <a:spcPts val="0"/>
-              </a:spcAft>
-              <a:buClr>
-                <a:srgbClr val="000000"/>
-              </a:buClr>
-              <a:buSzPts val="1400"/>
-              <a:buFont typeface="Arial"/>
-              <a:buNone/>
-            </a:pPr>
-            <a:endParaRPr sz="1400" b="0" i="0" u="none" strike="noStrike" cap="none">
-              <a:solidFill>
-                <a:srgbClr val="000000"/>
-              </a:solidFill>
-              <a:latin typeface="Arial"/>
-              <a:ea typeface="Arial"/>
-              <a:cs typeface="Arial"/>
-              <a:sym typeface="Arial"/>
-            </a:endParaRPr>
-          </a:p>
-        </p:txBody>
-      </p:sp>
-      <p:sp>
-        <p:nvSpPr>
-          <p:cNvPr id="181" name="Google Shape;181;p8"/>
-          <p:cNvSpPr txBox="1">
-            <a:spLocks noGrp="1"/>
-          </p:cNvSpPr>
-          <p:nvPr>
-            <p:ph type="body" idx="1"/>
-          </p:nvPr>
-        </p:nvSpPr>
-        <p:spPr>
-          <a:xfrm>
-            <a:off x="311700" y="1155049"/>
-            <a:ext cx="8520600" cy="3585142"/>
-          </a:xfrm>
-          <a:prstGeom prst="rect">
-            <a:avLst/>
-          </a:prstGeom>
-          <a:noFill/>
-          <a:ln>
-            <a:noFill/>
-          </a:ln>
-        </p:spPr>
-        <p:txBody>
-          <a:bodyPr spcFirstLastPara="1" wrap="square" lIns="91425" tIns="91425" rIns="91425" bIns="91425" anchor="t" anchorCtr="0">
-            <a:noAutofit/>
-          </a:bodyPr>
-          <a:lstStyle/>
-          <a:p>
-            <a:pPr marL="114300" lvl="0" indent="0" algn="l" rtl="0">
-              <a:lnSpc>
-                <a:spcPct val="115000"/>
-              </a:lnSpc>
-              <a:spcBef>
-                <a:spcPts val="0"/>
-              </a:spcBef>
-              <a:spcAft>
-                <a:spcPts val="0"/>
-              </a:spcAft>
-              <a:buSzPts val="1800"/>
-              <a:buNone/>
-            </a:pPr>
-            <a:r>
-              <a:rPr lang="fr-FR" sz="1400" dirty="0" err="1"/>
-              <a:t>wwwww</a:t>
-            </a:r>
-            <a:endParaRPr sz="1400" dirty="0"/>
-          </a:p>
-        </p:txBody>
-      </p:sp>
-    </p:spTree>
-  </p:cSld>
-  <p:clrMapOvr>
-    <a:masterClrMapping/>
-  </p:clrMapOvr>
-</p:sld>
-</file>
-
-<file path=ppt/slides/slide6.xml><?xml version="1.0" encoding="utf-8"?>
+<file path=ppt/slides/slide10.xml><?xml version="1.0" encoding="utf-8"?>
 <p:sld xmlns:a="http://schemas.openxmlformats.org/drawingml/2006/main" xmlns:r="http://schemas.openxmlformats.org/officeDocument/2006/relationships" xmlns:p="http://schemas.openxmlformats.org/presentationml/2006/main">
   <p:cSld>
     <p:spTree>
@@ -16722,7 +16203,7 @@
 </p:sld>
 </file>
 
-<file path=ppt/slides/slide7.xml><?xml version="1.0" encoding="utf-8"?>
+<file path=ppt/slides/slide11.xml><?xml version="1.0" encoding="utf-8"?>
 <p:sld xmlns:a="http://schemas.openxmlformats.org/drawingml/2006/main" xmlns:r="http://schemas.openxmlformats.org/officeDocument/2006/relationships" xmlns:p="http://schemas.openxmlformats.org/presentationml/2006/main">
   <p:cSld>
     <p:spTree>
@@ -17758,7 +17239,1037 @@
 </p:sld>
 </file>
 
-<file path=ppt/slides/slide8.xml><?xml version="1.0" encoding="utf-8"?>
+<file path=ppt/slides/slide12.xml><?xml version="1.0" encoding="utf-8"?>
+<p:sld xmlns:a="http://schemas.openxmlformats.org/drawingml/2006/main" xmlns:r="http://schemas.openxmlformats.org/officeDocument/2006/relationships" xmlns:p="http://schemas.openxmlformats.org/presentationml/2006/main">
+  <p:cSld>
+    <p:spTree>
+      <p:nvGrpSpPr>
+        <p:cNvPr id="1" name="Shape 95">
+          <a:extLst>
+            <a:ext uri="{FF2B5EF4-FFF2-40B4-BE49-F238E27FC236}">
+              <a16:creationId xmlns:a16="http://schemas.microsoft.com/office/drawing/2014/main" id="{A5502F99-93DB-8DFA-76CF-8058851E6BB9}"/>
+            </a:ext>
+          </a:extLst>
+        </p:cNvPr>
+        <p:cNvGrpSpPr/>
+        <p:nvPr/>
+      </p:nvGrpSpPr>
+      <p:grpSpPr>
+        <a:xfrm>
+          <a:off x="0" y="0"/>
+          <a:ext cx="0" cy="0"/>
+          <a:chOff x="0" y="0"/>
+          <a:chExt cx="0" cy="0"/>
+        </a:xfrm>
+      </p:grpSpPr>
+      <p:sp>
+        <p:nvSpPr>
+          <p:cNvPr id="96" name="Google Shape;96;p5">
+            <a:extLst>
+              <a:ext uri="{FF2B5EF4-FFF2-40B4-BE49-F238E27FC236}">
+                <a16:creationId xmlns:a16="http://schemas.microsoft.com/office/drawing/2014/main" id="{9496F4BA-6570-B121-53B0-E4B792AFAF9D}"/>
+              </a:ext>
+            </a:extLst>
+          </p:cNvPr>
+          <p:cNvSpPr txBox="1">
+            <a:spLocks noGrp="1"/>
+          </p:cNvSpPr>
+          <p:nvPr>
+            <p:ph type="ctrTitle" idx="4294967295"/>
+          </p:nvPr>
+        </p:nvSpPr>
+        <p:spPr>
+          <a:xfrm>
+            <a:off x="1192664" y="403309"/>
+            <a:ext cx="5315100" cy="533100"/>
+          </a:xfrm>
+          <a:prstGeom prst="rect">
+            <a:avLst/>
+          </a:prstGeom>
+          <a:noFill/>
+          <a:ln>
+            <a:noFill/>
+          </a:ln>
+        </p:spPr>
+        <p:txBody>
+          <a:bodyPr spcFirstLastPara="1" wrap="square" lIns="91425" tIns="91425" rIns="91425" bIns="91425" anchor="t" anchorCtr="0">
+            <a:noAutofit/>
+          </a:bodyPr>
+          <a:lstStyle/>
+          <a:p>
+            <a:pPr marL="0" marR="0" lvl="0" indent="0" algn="l" rtl="0">
+              <a:lnSpc>
+                <a:spcPct val="100000"/>
+              </a:lnSpc>
+              <a:spcBef>
+                <a:spcPts val="0"/>
+              </a:spcBef>
+              <a:spcAft>
+                <a:spcPts val="0"/>
+              </a:spcAft>
+              <a:buClr>
+                <a:schemeClr val="dk1"/>
+              </a:buClr>
+              <a:buSzPts val="2800"/>
+              <a:buFont typeface="Arial"/>
+              <a:buNone/>
+            </a:pPr>
+            <a:r>
+              <a:rPr lang="it-IT" sz="2500" b="1" i="0" u="none" strike="noStrike" cap="none" dirty="0">
+                <a:solidFill>
+                  <a:srgbClr val="0E3449"/>
+                </a:solidFill>
+                <a:latin typeface="Inter SemiBold"/>
+                <a:ea typeface="Inter SemiBold"/>
+                <a:cs typeface="Inter SemiBold"/>
+                <a:sym typeface="Inter SemiBold"/>
+              </a:rPr>
+              <a:t>Suivi de projet</a:t>
+            </a:r>
+            <a:endParaRPr lang="it-IT" sz="2500" b="0" i="0" u="none" strike="noStrike" cap="none" dirty="0">
+              <a:solidFill>
+                <a:srgbClr val="0E3449"/>
+              </a:solidFill>
+              <a:latin typeface="Inter SemiBold"/>
+              <a:ea typeface="Inter SemiBold"/>
+              <a:cs typeface="Inter SemiBold"/>
+              <a:sym typeface="Inter SemiBold"/>
+            </a:endParaRPr>
+          </a:p>
+        </p:txBody>
+      </p:sp>
+      <p:pic>
+        <p:nvPicPr>
+          <p:cNvPr id="97" name="Google Shape;97;p5">
+            <a:extLst>
+              <a:ext uri="{FF2B5EF4-FFF2-40B4-BE49-F238E27FC236}">
+                <a16:creationId xmlns:a16="http://schemas.microsoft.com/office/drawing/2014/main" id="{B5B75142-6FD9-DC97-8DE0-97A98A07E6A2}"/>
+              </a:ext>
+            </a:extLst>
+          </p:cNvPr>
+          <p:cNvPicPr preferRelativeResize="0"/>
+          <p:nvPr/>
+        </p:nvPicPr>
+        <p:blipFill rotWithShape="1">
+          <a:blip r:embed="rId3">
+            <a:alphaModFix/>
+          </a:blip>
+          <a:srcRect/>
+          <a:stretch/>
+        </p:blipFill>
+        <p:spPr>
+          <a:xfrm>
+            <a:off x="463375" y="482852"/>
+            <a:ext cx="576900" cy="385904"/>
+          </a:xfrm>
+          <a:prstGeom prst="rect">
+            <a:avLst/>
+          </a:prstGeom>
+          <a:noFill/>
+          <a:ln>
+            <a:noFill/>
+          </a:ln>
+        </p:spPr>
+      </p:pic>
+      <p:sp>
+        <p:nvSpPr>
+          <p:cNvPr id="98" name="Google Shape;98;p5">
+            <a:extLst>
+              <a:ext uri="{FF2B5EF4-FFF2-40B4-BE49-F238E27FC236}">
+                <a16:creationId xmlns:a16="http://schemas.microsoft.com/office/drawing/2014/main" id="{07D4AC0C-128C-68D9-2B41-BA0AF3958438}"/>
+              </a:ext>
+            </a:extLst>
+          </p:cNvPr>
+          <p:cNvSpPr/>
+          <p:nvPr/>
+        </p:nvSpPr>
+        <p:spPr>
+          <a:xfrm>
+            <a:off x="10225" y="4892025"/>
+            <a:ext cx="9144000" cy="251400"/>
+          </a:xfrm>
+          <a:prstGeom prst="rect">
+            <a:avLst/>
+          </a:prstGeom>
+          <a:solidFill>
+            <a:srgbClr val="C3FFFC"/>
+          </a:solidFill>
+          <a:ln>
+            <a:noFill/>
+          </a:ln>
+        </p:spPr>
+        <p:txBody>
+          <a:bodyPr spcFirstLastPara="1" wrap="square" lIns="91425" tIns="91425" rIns="91425" bIns="91425" anchor="ctr" anchorCtr="0">
+            <a:noAutofit/>
+          </a:bodyPr>
+          <a:lstStyle/>
+          <a:p>
+            <a:pPr marL="0" marR="0" lvl="0" indent="0" algn="l" rtl="0">
+              <a:lnSpc>
+                <a:spcPct val="100000"/>
+              </a:lnSpc>
+              <a:spcBef>
+                <a:spcPts val="0"/>
+              </a:spcBef>
+              <a:spcAft>
+                <a:spcPts val="0"/>
+              </a:spcAft>
+              <a:buClr>
+                <a:srgbClr val="000000"/>
+              </a:buClr>
+              <a:buSzPts val="1400"/>
+              <a:buFont typeface="Arial"/>
+              <a:buNone/>
+            </a:pPr>
+            <a:endParaRPr sz="1400" b="0" i="0" u="none" strike="noStrike" cap="none">
+              <a:solidFill>
+                <a:srgbClr val="000000"/>
+              </a:solidFill>
+              <a:latin typeface="Arial"/>
+              <a:ea typeface="Arial"/>
+              <a:cs typeface="Arial"/>
+              <a:sym typeface="Arial"/>
+            </a:endParaRPr>
+          </a:p>
+        </p:txBody>
+      </p:sp>
+      <p:graphicFrame>
+        <p:nvGraphicFramePr>
+          <p:cNvPr id="2" name="Tableau 1">
+            <a:extLst>
+              <a:ext uri="{FF2B5EF4-FFF2-40B4-BE49-F238E27FC236}">
+                <a16:creationId xmlns:a16="http://schemas.microsoft.com/office/drawing/2014/main" id="{5775F0AF-38B3-FEEF-E777-FA7976DF9346}"/>
+              </a:ext>
+            </a:extLst>
+          </p:cNvPr>
+          <p:cNvGraphicFramePr>
+            <a:graphicFrameLocks noGrp="1"/>
+          </p:cNvGraphicFramePr>
+          <p:nvPr/>
+        </p:nvGraphicFramePr>
+        <p:xfrm>
+          <a:off x="463375" y="2145111"/>
+          <a:ext cx="8283386" cy="2313730"/>
+        </p:xfrm>
+        <a:graphic>
+          <a:graphicData uri="http://schemas.openxmlformats.org/drawingml/2006/table">
+            <a:tbl>
+              <a:tblPr firstRow="1" bandRow="1">
+                <a:tableStyleId>{5C22544A-7EE6-4342-B048-85BDC9FD1C3A}</a:tableStyleId>
+              </a:tblPr>
+              <a:tblGrid>
+                <a:gridCol w="908225">
+                  <a:extLst>
+                    <a:ext uri="{9D8B030D-6E8A-4147-A177-3AD203B41FA5}">
+                      <a16:colId xmlns:a16="http://schemas.microsoft.com/office/drawing/2014/main" val="2306203329"/>
+                    </a:ext>
+                  </a:extLst>
+                </a:gridCol>
+                <a:gridCol w="3031958">
+                  <a:extLst>
+                    <a:ext uri="{9D8B030D-6E8A-4147-A177-3AD203B41FA5}">
+                      <a16:colId xmlns:a16="http://schemas.microsoft.com/office/drawing/2014/main" val="2541688145"/>
+                    </a:ext>
+                  </a:extLst>
+                </a:gridCol>
+                <a:gridCol w="2033256">
+                  <a:extLst>
+                    <a:ext uri="{9D8B030D-6E8A-4147-A177-3AD203B41FA5}">
+                      <a16:colId xmlns:a16="http://schemas.microsoft.com/office/drawing/2014/main" val="3557785877"/>
+                    </a:ext>
+                  </a:extLst>
+                </a:gridCol>
+                <a:gridCol w="2309947">
+                  <a:extLst>
+                    <a:ext uri="{9D8B030D-6E8A-4147-A177-3AD203B41FA5}">
+                      <a16:colId xmlns:a16="http://schemas.microsoft.com/office/drawing/2014/main" val="3224508020"/>
+                    </a:ext>
+                  </a:extLst>
+                </a:gridCol>
+              </a:tblGrid>
+              <a:tr h="226137">
+                <a:tc>
+                  <a:txBody>
+                    <a:bodyPr/>
+                    <a:lstStyle/>
+                    <a:p>
+                      <a:r>
+                        <a:rPr lang="fr-FR" sz="1000"/>
+                        <a:t>Type</a:t>
+                      </a:r>
+                    </a:p>
+                  </a:txBody>
+                  <a:tcPr/>
+                </a:tc>
+                <a:tc>
+                  <a:txBody>
+                    <a:bodyPr/>
+                    <a:lstStyle/>
+                    <a:p>
+                      <a:r>
+                        <a:rPr lang="fr-FR" sz="1000"/>
+                        <a:t>Description</a:t>
+                      </a:r>
+                    </a:p>
+                  </a:txBody>
+                  <a:tcPr/>
+                </a:tc>
+                <a:tc>
+                  <a:txBody>
+                    <a:bodyPr/>
+                    <a:lstStyle/>
+                    <a:p>
+                      <a:r>
+                        <a:rPr lang="fr-FR" sz="1000"/>
+                        <a:t>Volumétrie</a:t>
+                      </a:r>
+                    </a:p>
+                  </a:txBody>
+                  <a:tcPr/>
+                </a:tc>
+                <a:tc>
+                  <a:txBody>
+                    <a:bodyPr/>
+                    <a:lstStyle/>
+                    <a:p>
+                      <a:r>
+                        <a:rPr lang="fr-FR" sz="1000"/>
+                        <a:t>Lien</a:t>
+                      </a:r>
+                    </a:p>
+                  </a:txBody>
+                  <a:tcPr/>
+                </a:tc>
+                <a:extLst>
+                  <a:ext uri="{0D108BD9-81ED-4DB2-BD59-A6C34878D82A}">
+                    <a16:rowId xmlns:a16="http://schemas.microsoft.com/office/drawing/2014/main" val="1404536746"/>
+                  </a:ext>
+                </a:extLst>
+              </a:tr>
+              <a:tr h="476255">
+                <a:tc>
+                  <a:txBody>
+                    <a:bodyPr/>
+                    <a:lstStyle/>
+                    <a:p>
+                      <a:endParaRPr lang="fr-FR" sz="800" dirty="0"/>
+                    </a:p>
+                  </a:txBody>
+                  <a:tcPr anchor="ctr"/>
+                </a:tc>
+                <a:tc>
+                  <a:txBody>
+                    <a:bodyPr/>
+                    <a:lstStyle/>
+                    <a:p>
+                      <a:endParaRPr lang="fr-FR" sz="900" b="1" dirty="0"/>
+                    </a:p>
+                  </a:txBody>
+                  <a:tcPr anchor="ctr"/>
+                </a:tc>
+                <a:tc>
+                  <a:txBody>
+                    <a:bodyPr/>
+                    <a:lstStyle/>
+                    <a:p>
+                      <a:endParaRPr lang="fr-FR" sz="900" dirty="0"/>
+                    </a:p>
+                  </a:txBody>
+                  <a:tcPr anchor="ctr"/>
+                </a:tc>
+                <a:tc>
+                  <a:txBody>
+                    <a:bodyPr/>
+                    <a:lstStyle/>
+                    <a:p>
+                      <a:endParaRPr lang="fr-FR" sz="700" dirty="0"/>
+                    </a:p>
+                  </a:txBody>
+                  <a:tcPr anchor="ctr"/>
+                </a:tc>
+                <a:extLst>
+                  <a:ext uri="{0D108BD9-81ED-4DB2-BD59-A6C34878D82A}">
+                    <a16:rowId xmlns:a16="http://schemas.microsoft.com/office/drawing/2014/main" val="594868334"/>
+                  </a:ext>
+                </a:extLst>
+              </a:tr>
+              <a:tr h="476255">
+                <a:tc>
+                  <a:txBody>
+                    <a:bodyPr/>
+                    <a:lstStyle/>
+                    <a:p>
+                      <a:pPr marL="0" marR="0" lvl="0" indent="0" algn="l" defTabSz="914400" rtl="0" eaLnBrk="1" fontAlgn="auto" latinLnBrk="0" hangingPunct="1">
+                        <a:lnSpc>
+                          <a:spcPct val="100000"/>
+                        </a:lnSpc>
+                        <a:spcBef>
+                          <a:spcPts val="0"/>
+                        </a:spcBef>
+                        <a:spcAft>
+                          <a:spcPts val="0"/>
+                        </a:spcAft>
+                        <a:buClr>
+                          <a:srgbClr val="000000"/>
+                        </a:buClr>
+                        <a:buSzTx/>
+                        <a:buFont typeface="Arial"/>
+                        <a:buNone/>
+                        <a:tabLst/>
+                        <a:defRPr/>
+                      </a:pPr>
+                      <a:endParaRPr lang="fr-FR" sz="800" dirty="0"/>
+                    </a:p>
+                  </a:txBody>
+                  <a:tcPr anchor="ctr"/>
+                </a:tc>
+                <a:tc>
+                  <a:txBody>
+                    <a:bodyPr/>
+                    <a:lstStyle/>
+                    <a:p>
+                      <a:endParaRPr lang="fr-FR" sz="900" b="1" i="0" u="none" strike="noStrike" cap="none">
+                        <a:solidFill>
+                          <a:schemeClr val="dk1"/>
+                        </a:solidFill>
+                        <a:latin typeface="+mn-lt"/>
+                        <a:ea typeface="+mn-ea"/>
+                        <a:cs typeface="+mn-cs"/>
+                        <a:sym typeface="Arial"/>
+                      </a:endParaRPr>
+                    </a:p>
+                  </a:txBody>
+                  <a:tcPr anchor="ctr"/>
+                </a:tc>
+                <a:tc>
+                  <a:txBody>
+                    <a:bodyPr/>
+                    <a:lstStyle/>
+                    <a:p>
+                      <a:endParaRPr lang="fr-FR" sz="900" dirty="0"/>
+                    </a:p>
+                  </a:txBody>
+                  <a:tcPr anchor="ctr"/>
+                </a:tc>
+                <a:tc>
+                  <a:txBody>
+                    <a:bodyPr/>
+                    <a:lstStyle/>
+                    <a:p>
+                      <a:endParaRPr lang="fr-FR" sz="700" dirty="0"/>
+                    </a:p>
+                  </a:txBody>
+                  <a:tcPr anchor="ctr"/>
+                </a:tc>
+                <a:extLst>
+                  <a:ext uri="{0D108BD9-81ED-4DB2-BD59-A6C34878D82A}">
+                    <a16:rowId xmlns:a16="http://schemas.microsoft.com/office/drawing/2014/main" val="506933637"/>
+                  </a:ext>
+                </a:extLst>
+              </a:tr>
+              <a:tr h="558690">
+                <a:tc>
+                  <a:txBody>
+                    <a:bodyPr/>
+                    <a:lstStyle/>
+                    <a:p>
+                      <a:pPr marL="0" marR="0" lvl="0" indent="0" algn="l" defTabSz="914400" rtl="0" eaLnBrk="1" fontAlgn="auto" latinLnBrk="0" hangingPunct="1">
+                        <a:lnSpc>
+                          <a:spcPct val="100000"/>
+                        </a:lnSpc>
+                        <a:spcBef>
+                          <a:spcPts val="0"/>
+                        </a:spcBef>
+                        <a:spcAft>
+                          <a:spcPts val="0"/>
+                        </a:spcAft>
+                        <a:buClr>
+                          <a:srgbClr val="000000"/>
+                        </a:buClr>
+                        <a:buSzTx/>
+                        <a:buFont typeface="Arial"/>
+                        <a:buNone/>
+                        <a:tabLst/>
+                        <a:defRPr/>
+                      </a:pPr>
+                      <a:endParaRPr lang="fr-FR" sz="800"/>
+                    </a:p>
+                  </a:txBody>
+                  <a:tcPr anchor="ctr"/>
+                </a:tc>
+                <a:tc>
+                  <a:txBody>
+                    <a:bodyPr/>
+                    <a:lstStyle/>
+                    <a:p>
+                      <a:pPr marL="0" marR="0" lvl="0" indent="0" algn="l" defTabSz="914400" rtl="0" eaLnBrk="1" fontAlgn="auto" latinLnBrk="0" hangingPunct="1">
+                        <a:lnSpc>
+                          <a:spcPct val="100000"/>
+                        </a:lnSpc>
+                        <a:spcBef>
+                          <a:spcPts val="0"/>
+                        </a:spcBef>
+                        <a:spcAft>
+                          <a:spcPts val="0"/>
+                        </a:spcAft>
+                        <a:buClr>
+                          <a:srgbClr val="000000"/>
+                        </a:buClr>
+                        <a:buSzTx/>
+                        <a:buFont typeface="Arial"/>
+                        <a:buNone/>
+                        <a:tabLst/>
+                        <a:defRPr/>
+                      </a:pPr>
+                      <a:endParaRPr lang="fr-FR" sz="900" b="1"/>
+                    </a:p>
+                  </a:txBody>
+                  <a:tcPr anchor="ctr"/>
+                </a:tc>
+                <a:tc>
+                  <a:txBody>
+                    <a:bodyPr/>
+                    <a:lstStyle/>
+                    <a:p>
+                      <a:endParaRPr lang="fr-FR" sz="900"/>
+                    </a:p>
+                  </a:txBody>
+                  <a:tcPr anchor="ctr"/>
+                </a:tc>
+                <a:tc>
+                  <a:txBody>
+                    <a:bodyPr/>
+                    <a:lstStyle/>
+                    <a:p>
+                      <a:endParaRPr lang="fr-FR" sz="700" dirty="0"/>
+                    </a:p>
+                  </a:txBody>
+                  <a:tcPr anchor="ctr"/>
+                </a:tc>
+                <a:extLst>
+                  <a:ext uri="{0D108BD9-81ED-4DB2-BD59-A6C34878D82A}">
+                    <a16:rowId xmlns:a16="http://schemas.microsoft.com/office/drawing/2014/main" val="2477866597"/>
+                  </a:ext>
+                </a:extLst>
+              </a:tr>
+              <a:tr h="558690">
+                <a:tc>
+                  <a:txBody>
+                    <a:bodyPr/>
+                    <a:lstStyle/>
+                    <a:p>
+                      <a:pPr marL="0" marR="0" lvl="0" indent="0" algn="l" defTabSz="914400" rtl="0" eaLnBrk="1" fontAlgn="auto" latinLnBrk="0" hangingPunct="1">
+                        <a:lnSpc>
+                          <a:spcPct val="100000"/>
+                        </a:lnSpc>
+                        <a:spcBef>
+                          <a:spcPts val="0"/>
+                        </a:spcBef>
+                        <a:spcAft>
+                          <a:spcPts val="0"/>
+                        </a:spcAft>
+                        <a:buClr>
+                          <a:srgbClr val="000000"/>
+                        </a:buClr>
+                        <a:buSzTx/>
+                        <a:buFont typeface="Arial"/>
+                        <a:buNone/>
+                        <a:tabLst/>
+                        <a:defRPr/>
+                      </a:pPr>
+                      <a:endParaRPr lang="fr-FR" sz="800" dirty="0"/>
+                    </a:p>
+                  </a:txBody>
+                  <a:tcPr anchor="ctr"/>
+                </a:tc>
+                <a:tc>
+                  <a:txBody>
+                    <a:bodyPr/>
+                    <a:lstStyle/>
+                    <a:p>
+                      <a:pPr marL="0" marR="0" lvl="0" indent="0" algn="l" defTabSz="914400" rtl="0" eaLnBrk="1" fontAlgn="auto" latinLnBrk="0" hangingPunct="1">
+                        <a:lnSpc>
+                          <a:spcPct val="100000"/>
+                        </a:lnSpc>
+                        <a:spcBef>
+                          <a:spcPts val="0"/>
+                        </a:spcBef>
+                        <a:spcAft>
+                          <a:spcPts val="0"/>
+                        </a:spcAft>
+                        <a:buClr>
+                          <a:srgbClr val="000000"/>
+                        </a:buClr>
+                        <a:buSzTx/>
+                        <a:buFont typeface="Arial"/>
+                        <a:buNone/>
+                        <a:tabLst/>
+                        <a:defRPr/>
+                      </a:pPr>
+                      <a:endParaRPr lang="fr-FR" sz="900" b="1"/>
+                    </a:p>
+                  </a:txBody>
+                  <a:tcPr anchor="ctr"/>
+                </a:tc>
+                <a:tc>
+                  <a:txBody>
+                    <a:bodyPr/>
+                    <a:lstStyle/>
+                    <a:p>
+                      <a:endParaRPr lang="fr-FR" sz="900"/>
+                    </a:p>
+                  </a:txBody>
+                  <a:tcPr anchor="ctr"/>
+                </a:tc>
+                <a:tc>
+                  <a:txBody>
+                    <a:bodyPr/>
+                    <a:lstStyle/>
+                    <a:p>
+                      <a:endParaRPr lang="fr-FR" sz="700" dirty="0"/>
+                    </a:p>
+                  </a:txBody>
+                  <a:tcPr anchor="ctr"/>
+                </a:tc>
+                <a:extLst>
+                  <a:ext uri="{0D108BD9-81ED-4DB2-BD59-A6C34878D82A}">
+                    <a16:rowId xmlns:a16="http://schemas.microsoft.com/office/drawing/2014/main" val="2084688575"/>
+                  </a:ext>
+                </a:extLst>
+              </a:tr>
+            </a:tbl>
+          </a:graphicData>
+        </a:graphic>
+      </p:graphicFrame>
+      <p:sp>
+        <p:nvSpPr>
+          <p:cNvPr id="12" name="Google Shape;69;p3">
+            <a:extLst>
+              <a:ext uri="{FF2B5EF4-FFF2-40B4-BE49-F238E27FC236}">
+                <a16:creationId xmlns:a16="http://schemas.microsoft.com/office/drawing/2014/main" id="{740BA0CF-4FE4-694B-1E0A-549DC46AD2EB}"/>
+              </a:ext>
+            </a:extLst>
+          </p:cNvPr>
+          <p:cNvSpPr/>
+          <p:nvPr/>
+        </p:nvSpPr>
+        <p:spPr>
+          <a:xfrm>
+            <a:off x="463375" y="1232729"/>
+            <a:ext cx="8283386" cy="623043"/>
+          </a:xfrm>
+          <a:prstGeom prst="rect">
+            <a:avLst/>
+          </a:prstGeom>
+          <a:solidFill>
+            <a:schemeClr val="accent3">
+              <a:lumMod val="20000"/>
+              <a:lumOff val="80000"/>
+            </a:schemeClr>
+          </a:solidFill>
+          <a:ln>
+            <a:noFill/>
+          </a:ln>
+        </p:spPr>
+        <p:txBody>
+          <a:bodyPr spcFirstLastPara="1" wrap="square" lIns="91425" tIns="45700" rIns="91425" bIns="45700" anchor="ctr" anchorCtr="0">
+            <a:noAutofit/>
+          </a:bodyPr>
+          <a:lstStyle/>
+          <a:p>
+            <a:pPr marL="0" marR="0" lvl="0" indent="0" algn="ctr" rtl="0">
+              <a:lnSpc>
+                <a:spcPct val="100000"/>
+              </a:lnSpc>
+              <a:spcBef>
+                <a:spcPts val="0"/>
+              </a:spcBef>
+              <a:spcAft>
+                <a:spcPts val="0"/>
+              </a:spcAft>
+              <a:buClr>
+                <a:srgbClr val="000000"/>
+              </a:buClr>
+              <a:buSzPts val="1400"/>
+              <a:buFont typeface="Arial"/>
+              <a:buNone/>
+            </a:pPr>
+            <a:endParaRPr sz="1400" b="0" i="0" u="none" strike="noStrike" cap="none">
+              <a:solidFill>
+                <a:schemeClr val="lt1"/>
+              </a:solidFill>
+              <a:latin typeface="Arial"/>
+              <a:ea typeface="Arial"/>
+              <a:cs typeface="Arial"/>
+              <a:sym typeface="Arial"/>
+            </a:endParaRPr>
+          </a:p>
+        </p:txBody>
+      </p:sp>
+      <p:sp>
+        <p:nvSpPr>
+          <p:cNvPr id="13" name="Google Shape;73;p3">
+            <a:extLst>
+              <a:ext uri="{FF2B5EF4-FFF2-40B4-BE49-F238E27FC236}">
+                <a16:creationId xmlns:a16="http://schemas.microsoft.com/office/drawing/2014/main" id="{8F7E0CE5-A523-1A49-46A7-9DF1818C9F76}"/>
+              </a:ext>
+            </a:extLst>
+          </p:cNvPr>
+          <p:cNvSpPr txBox="1">
+            <a:spLocks/>
+          </p:cNvSpPr>
+          <p:nvPr/>
+        </p:nvSpPr>
+        <p:spPr>
+          <a:xfrm>
+            <a:off x="397239" y="1137125"/>
+            <a:ext cx="8466095" cy="385904"/>
+          </a:xfrm>
+          <a:prstGeom prst="rect">
+            <a:avLst/>
+          </a:prstGeom>
+          <a:noFill/>
+          <a:ln>
+            <a:noFill/>
+          </a:ln>
+        </p:spPr>
+        <p:txBody>
+          <a:bodyPr spcFirstLastPara="1" wrap="square" lIns="91425" tIns="91425" rIns="91425" bIns="91425" anchor="t" anchorCtr="0">
+            <a:noAutofit/>
+          </a:bodyPr>
+          <a:lstStyle>
+            <a:defPPr marR="0" lvl="0" algn="l" rtl="0">
+              <a:lnSpc>
+                <a:spcPct val="100000"/>
+              </a:lnSpc>
+              <a:spcBef>
+                <a:spcPts val="0"/>
+              </a:spcBef>
+              <a:spcAft>
+                <a:spcPts val="0"/>
+              </a:spcAft>
+            </a:defPPr>
+            <a:lvl1pPr marL="457200" marR="0" lvl="0" indent="-342900" algn="l" rtl="0">
+              <a:lnSpc>
+                <a:spcPct val="115000"/>
+              </a:lnSpc>
+              <a:spcBef>
+                <a:spcPts val="0"/>
+              </a:spcBef>
+              <a:spcAft>
+                <a:spcPts val="0"/>
+              </a:spcAft>
+              <a:buClr>
+                <a:schemeClr val="dk2"/>
+              </a:buClr>
+              <a:buSzPts val="1800"/>
+              <a:buFont typeface="Arial"/>
+              <a:buChar char="●"/>
+              <a:defRPr sz="1800" b="0" i="0" u="none" strike="noStrike" cap="none">
+                <a:solidFill>
+                  <a:schemeClr val="dk2"/>
+                </a:solidFill>
+                <a:latin typeface="Arial"/>
+                <a:ea typeface="Arial"/>
+                <a:cs typeface="Arial"/>
+                <a:sym typeface="Arial"/>
+              </a:defRPr>
+            </a:lvl1pPr>
+            <a:lvl2pPr marL="914400" marR="0" lvl="1" indent="-317500" algn="l" rtl="0">
+              <a:lnSpc>
+                <a:spcPct val="115000"/>
+              </a:lnSpc>
+              <a:spcBef>
+                <a:spcPts val="1600"/>
+              </a:spcBef>
+              <a:spcAft>
+                <a:spcPts val="0"/>
+              </a:spcAft>
+              <a:buClr>
+                <a:schemeClr val="dk2"/>
+              </a:buClr>
+              <a:buSzPts val="1400"/>
+              <a:buFont typeface="Arial"/>
+              <a:buChar char="○"/>
+              <a:defRPr sz="1400" b="0" i="0" u="none" strike="noStrike" cap="none">
+                <a:solidFill>
+                  <a:schemeClr val="dk2"/>
+                </a:solidFill>
+                <a:latin typeface="Arial"/>
+                <a:ea typeface="Arial"/>
+                <a:cs typeface="Arial"/>
+                <a:sym typeface="Arial"/>
+              </a:defRPr>
+            </a:lvl2pPr>
+            <a:lvl3pPr marL="1371600" marR="0" lvl="2" indent="-317500" algn="l" rtl="0">
+              <a:lnSpc>
+                <a:spcPct val="115000"/>
+              </a:lnSpc>
+              <a:spcBef>
+                <a:spcPts val="1600"/>
+              </a:spcBef>
+              <a:spcAft>
+                <a:spcPts val="0"/>
+              </a:spcAft>
+              <a:buClr>
+                <a:schemeClr val="dk2"/>
+              </a:buClr>
+              <a:buSzPts val="1400"/>
+              <a:buFont typeface="Arial"/>
+              <a:buChar char="■"/>
+              <a:defRPr sz="1400" b="0" i="0" u="none" strike="noStrike" cap="none">
+                <a:solidFill>
+                  <a:schemeClr val="dk2"/>
+                </a:solidFill>
+                <a:latin typeface="Arial"/>
+                <a:ea typeface="Arial"/>
+                <a:cs typeface="Arial"/>
+                <a:sym typeface="Arial"/>
+              </a:defRPr>
+            </a:lvl3pPr>
+            <a:lvl4pPr marL="1828800" marR="0" lvl="3" indent="-317500" algn="l" rtl="0">
+              <a:lnSpc>
+                <a:spcPct val="115000"/>
+              </a:lnSpc>
+              <a:spcBef>
+                <a:spcPts val="1600"/>
+              </a:spcBef>
+              <a:spcAft>
+                <a:spcPts val="0"/>
+              </a:spcAft>
+              <a:buClr>
+                <a:schemeClr val="dk2"/>
+              </a:buClr>
+              <a:buSzPts val="1400"/>
+              <a:buFont typeface="Arial"/>
+              <a:buChar char="●"/>
+              <a:defRPr sz="1400" b="0" i="0" u="none" strike="noStrike" cap="none">
+                <a:solidFill>
+                  <a:schemeClr val="dk2"/>
+                </a:solidFill>
+                <a:latin typeface="Arial"/>
+                <a:ea typeface="Arial"/>
+                <a:cs typeface="Arial"/>
+                <a:sym typeface="Arial"/>
+              </a:defRPr>
+            </a:lvl4pPr>
+            <a:lvl5pPr marL="2286000" marR="0" lvl="4" indent="-317500" algn="l" rtl="0">
+              <a:lnSpc>
+                <a:spcPct val="115000"/>
+              </a:lnSpc>
+              <a:spcBef>
+                <a:spcPts val="1600"/>
+              </a:spcBef>
+              <a:spcAft>
+                <a:spcPts val="0"/>
+              </a:spcAft>
+              <a:buClr>
+                <a:schemeClr val="dk2"/>
+              </a:buClr>
+              <a:buSzPts val="1400"/>
+              <a:buFont typeface="Arial"/>
+              <a:buChar char="○"/>
+              <a:defRPr sz="1400" b="0" i="0" u="none" strike="noStrike" cap="none">
+                <a:solidFill>
+                  <a:schemeClr val="dk2"/>
+                </a:solidFill>
+                <a:latin typeface="Arial"/>
+                <a:ea typeface="Arial"/>
+                <a:cs typeface="Arial"/>
+                <a:sym typeface="Arial"/>
+              </a:defRPr>
+            </a:lvl5pPr>
+            <a:lvl6pPr marL="2743200" marR="0" lvl="5" indent="-317500" algn="l" rtl="0">
+              <a:lnSpc>
+                <a:spcPct val="115000"/>
+              </a:lnSpc>
+              <a:spcBef>
+                <a:spcPts val="1600"/>
+              </a:spcBef>
+              <a:spcAft>
+                <a:spcPts val="0"/>
+              </a:spcAft>
+              <a:buClr>
+                <a:schemeClr val="dk2"/>
+              </a:buClr>
+              <a:buSzPts val="1400"/>
+              <a:buFont typeface="Arial"/>
+              <a:buChar char="■"/>
+              <a:defRPr sz="1400" b="0" i="0" u="none" strike="noStrike" cap="none">
+                <a:solidFill>
+                  <a:schemeClr val="dk2"/>
+                </a:solidFill>
+                <a:latin typeface="Arial"/>
+                <a:ea typeface="Arial"/>
+                <a:cs typeface="Arial"/>
+                <a:sym typeface="Arial"/>
+              </a:defRPr>
+            </a:lvl6pPr>
+            <a:lvl7pPr marL="3200400" marR="0" lvl="6" indent="-317500" algn="l" rtl="0">
+              <a:lnSpc>
+                <a:spcPct val="115000"/>
+              </a:lnSpc>
+              <a:spcBef>
+                <a:spcPts val="1600"/>
+              </a:spcBef>
+              <a:spcAft>
+                <a:spcPts val="0"/>
+              </a:spcAft>
+              <a:buClr>
+                <a:schemeClr val="dk2"/>
+              </a:buClr>
+              <a:buSzPts val="1400"/>
+              <a:buFont typeface="Arial"/>
+              <a:buChar char="●"/>
+              <a:defRPr sz="1400" b="0" i="0" u="none" strike="noStrike" cap="none">
+                <a:solidFill>
+                  <a:schemeClr val="dk2"/>
+                </a:solidFill>
+                <a:latin typeface="Arial"/>
+                <a:ea typeface="Arial"/>
+                <a:cs typeface="Arial"/>
+                <a:sym typeface="Arial"/>
+              </a:defRPr>
+            </a:lvl7pPr>
+            <a:lvl8pPr marL="3657600" marR="0" lvl="7" indent="-317500" algn="l" rtl="0">
+              <a:lnSpc>
+                <a:spcPct val="115000"/>
+              </a:lnSpc>
+              <a:spcBef>
+                <a:spcPts val="1600"/>
+              </a:spcBef>
+              <a:spcAft>
+                <a:spcPts val="0"/>
+              </a:spcAft>
+              <a:buClr>
+                <a:schemeClr val="dk2"/>
+              </a:buClr>
+              <a:buSzPts val="1400"/>
+              <a:buFont typeface="Arial"/>
+              <a:buChar char="○"/>
+              <a:defRPr sz="1400" b="0" i="0" u="none" strike="noStrike" cap="none">
+                <a:solidFill>
+                  <a:schemeClr val="dk2"/>
+                </a:solidFill>
+                <a:latin typeface="Arial"/>
+                <a:ea typeface="Arial"/>
+                <a:cs typeface="Arial"/>
+                <a:sym typeface="Arial"/>
+              </a:defRPr>
+            </a:lvl8pPr>
+            <a:lvl9pPr marL="4114800" marR="0" lvl="8" indent="-317500" algn="l" rtl="0">
+              <a:lnSpc>
+                <a:spcPct val="115000"/>
+              </a:lnSpc>
+              <a:spcBef>
+                <a:spcPts val="1600"/>
+              </a:spcBef>
+              <a:spcAft>
+                <a:spcPts val="1600"/>
+              </a:spcAft>
+              <a:buClr>
+                <a:schemeClr val="dk2"/>
+              </a:buClr>
+              <a:buSzPts val="1400"/>
+              <a:buFont typeface="Arial"/>
+              <a:buChar char="■"/>
+              <a:defRPr sz="1400" b="0" i="0" u="none" strike="noStrike" cap="none">
+                <a:solidFill>
+                  <a:schemeClr val="dk2"/>
+                </a:solidFill>
+                <a:latin typeface="Arial"/>
+                <a:ea typeface="Arial"/>
+                <a:cs typeface="Arial"/>
+                <a:sym typeface="Arial"/>
+              </a:defRPr>
+            </a:lvl9pPr>
+          </a:lstStyle>
+          <a:p>
+            <a:pPr>
+              <a:lnSpc>
+                <a:spcPct val="150000"/>
+              </a:lnSpc>
+              <a:buSzPct val="100000"/>
+            </a:pPr>
+            <a:endParaRPr lang="fr-FR" sz="1200" b="1" dirty="0"/>
+          </a:p>
+        </p:txBody>
+      </p:sp>
+      <p:sp>
+        <p:nvSpPr>
+          <p:cNvPr id="14" name="Ellipse 13">
+            <a:extLst>
+              <a:ext uri="{FF2B5EF4-FFF2-40B4-BE49-F238E27FC236}">
+                <a16:creationId xmlns:a16="http://schemas.microsoft.com/office/drawing/2014/main" id="{54AFD23F-A289-A5AF-3AE9-C30CBA50B293}"/>
+              </a:ext>
+            </a:extLst>
+          </p:cNvPr>
+          <p:cNvSpPr/>
+          <p:nvPr/>
+        </p:nvSpPr>
+        <p:spPr>
+          <a:xfrm>
+            <a:off x="280666" y="1116156"/>
+            <a:ext cx="233145" cy="233145"/>
+          </a:xfrm>
+          <a:prstGeom prst="ellipse">
+            <a:avLst/>
+          </a:prstGeom>
+          <a:solidFill>
+            <a:schemeClr val="bg1"/>
+          </a:solidFill>
+          <a:ln>
+            <a:solidFill>
+              <a:srgbClr val="C00000"/>
+            </a:solidFill>
+          </a:ln>
+        </p:spPr>
+        <p:style>
+          <a:lnRef idx="2">
+            <a:schemeClr val="accent1">
+              <a:shade val="15000"/>
+            </a:schemeClr>
+          </a:lnRef>
+          <a:fillRef idx="1">
+            <a:schemeClr val="accent1"/>
+          </a:fillRef>
+          <a:effectRef idx="0">
+            <a:schemeClr val="accent1"/>
+          </a:effectRef>
+          <a:fontRef idx="minor">
+            <a:schemeClr val="lt1"/>
+          </a:fontRef>
+        </p:style>
+        <p:txBody>
+          <a:bodyPr rtlCol="0" anchor="ctr"/>
+          <a:lstStyle/>
+          <a:p>
+            <a:pPr algn="ctr"/>
+            <a:r>
+              <a:rPr lang="fr-FR" sz="1200" b="1">
+                <a:solidFill>
+                  <a:srgbClr val="C00000"/>
+                </a:solidFill>
+              </a:rPr>
+              <a:t>!</a:t>
+            </a:r>
+          </a:p>
+        </p:txBody>
+      </p:sp>
+    </p:spTree>
+    <p:extLst>
+      <p:ext uri="{BB962C8B-B14F-4D97-AF65-F5344CB8AC3E}">
+        <p14:creationId xmlns:p14="http://schemas.microsoft.com/office/powerpoint/2010/main" val="4156271710"/>
+      </p:ext>
+    </p:extLst>
+  </p:cSld>
+  <p:clrMapOvr>
+    <a:masterClrMapping/>
+  </p:clrMapOvr>
+</p:sld>
+</file>
+
+<file path=ppt/slides/slide13.xml><?xml version="1.0" encoding="utf-8"?>
 <p:sld xmlns:a="http://schemas.openxmlformats.org/drawingml/2006/main" xmlns:r="http://schemas.openxmlformats.org/officeDocument/2006/relationships" xmlns:p="http://schemas.openxmlformats.org/presentationml/2006/main">
   <p:cSld>
     <p:bg>
@@ -17920,6 +18431,3254 @@
         </p:spPr>
       </p:pic>
     </p:spTree>
+  </p:cSld>
+  <p:clrMapOvr>
+    <a:masterClrMapping/>
+  </p:clrMapOvr>
+</p:sld>
+</file>
+
+<file path=ppt/slides/slide2.xml><?xml version="1.0" encoding="utf-8"?>
+<p:sld xmlns:a="http://schemas.openxmlformats.org/drawingml/2006/main" xmlns:r="http://schemas.openxmlformats.org/officeDocument/2006/relationships" xmlns:p="http://schemas.openxmlformats.org/presentationml/2006/main">
+  <p:cSld>
+    <p:spTree>
+      <p:nvGrpSpPr>
+        <p:cNvPr id="1" name="Shape 60"/>
+        <p:cNvGrpSpPr/>
+        <p:nvPr/>
+      </p:nvGrpSpPr>
+      <p:grpSpPr>
+        <a:xfrm>
+          <a:off x="0" y="0"/>
+          <a:ext cx="0" cy="0"/>
+          <a:chOff x="0" y="0"/>
+          <a:chExt cx="0" cy="0"/>
+        </a:xfrm>
+      </p:grpSpPr>
+      <p:sp>
+        <p:nvSpPr>
+          <p:cNvPr id="61" name="Google Shape;61;p2"/>
+          <p:cNvSpPr/>
+          <p:nvPr/>
+        </p:nvSpPr>
+        <p:spPr>
+          <a:xfrm>
+            <a:off x="5500" y="-17775"/>
+            <a:ext cx="3335400" cy="5161200"/>
+          </a:xfrm>
+          <a:prstGeom prst="rect">
+            <a:avLst/>
+          </a:prstGeom>
+          <a:solidFill>
+            <a:srgbClr val="C3FFFC"/>
+          </a:solidFill>
+          <a:ln>
+            <a:noFill/>
+          </a:ln>
+        </p:spPr>
+        <p:txBody>
+          <a:bodyPr spcFirstLastPara="1" wrap="square" lIns="91425" tIns="91425" rIns="91425" bIns="91425" anchor="ctr" anchorCtr="0">
+            <a:noAutofit/>
+          </a:bodyPr>
+          <a:lstStyle/>
+          <a:p>
+            <a:pPr marL="0" marR="0" lvl="0" indent="0" algn="l" rtl="0">
+              <a:lnSpc>
+                <a:spcPct val="200000"/>
+              </a:lnSpc>
+              <a:spcBef>
+                <a:spcPts val="0"/>
+              </a:spcBef>
+              <a:spcAft>
+                <a:spcPts val="0"/>
+              </a:spcAft>
+              <a:buClr>
+                <a:srgbClr val="000000"/>
+              </a:buClr>
+              <a:buSzPts val="1400"/>
+              <a:buFont typeface="Arial"/>
+              <a:buNone/>
+            </a:pPr>
+            <a:endParaRPr lang="fr-FR" sz="1400" b="0" i="0" u="none" strike="noStrike" cap="none" dirty="0">
+              <a:solidFill>
+                <a:srgbClr val="000000"/>
+              </a:solidFill>
+              <a:latin typeface="Arial"/>
+              <a:ea typeface="Arial"/>
+              <a:cs typeface="Arial"/>
+              <a:sym typeface="Arial"/>
+            </a:endParaRPr>
+          </a:p>
+          <a:p>
+            <a:pPr marL="0" marR="0" lvl="0" indent="0" algn="l" rtl="0">
+              <a:lnSpc>
+                <a:spcPct val="200000"/>
+              </a:lnSpc>
+              <a:spcBef>
+                <a:spcPts val="0"/>
+              </a:spcBef>
+              <a:spcAft>
+                <a:spcPts val="0"/>
+              </a:spcAft>
+              <a:buClr>
+                <a:srgbClr val="000000"/>
+              </a:buClr>
+              <a:buSzPts val="1400"/>
+              <a:buFont typeface="Arial"/>
+              <a:buNone/>
+            </a:pPr>
+            <a:endParaRPr lang="fr-FR" dirty="0"/>
+          </a:p>
+          <a:p>
+            <a:pPr marL="0" marR="0" lvl="0" indent="0" algn="l" rtl="0">
+              <a:lnSpc>
+                <a:spcPct val="200000"/>
+              </a:lnSpc>
+              <a:spcBef>
+                <a:spcPts val="0"/>
+              </a:spcBef>
+              <a:spcAft>
+                <a:spcPts val="0"/>
+              </a:spcAft>
+              <a:buClr>
+                <a:srgbClr val="000000"/>
+              </a:buClr>
+              <a:buSzPts val="1400"/>
+              <a:buFont typeface="Arial"/>
+              <a:buNone/>
+            </a:pPr>
+            <a:endParaRPr lang="fr-FR" sz="1400" b="0" i="0" u="none" strike="noStrike" cap="none" dirty="0">
+              <a:solidFill>
+                <a:srgbClr val="000000"/>
+              </a:solidFill>
+              <a:latin typeface="Arial"/>
+              <a:ea typeface="Arial"/>
+              <a:cs typeface="Arial"/>
+              <a:sym typeface="Arial"/>
+            </a:endParaRPr>
+          </a:p>
+          <a:p>
+            <a:pPr marL="0" marR="0" lvl="0" indent="0" algn="l" rtl="0">
+              <a:lnSpc>
+                <a:spcPct val="200000"/>
+              </a:lnSpc>
+              <a:spcBef>
+                <a:spcPts val="0"/>
+              </a:spcBef>
+              <a:spcAft>
+                <a:spcPts val="0"/>
+              </a:spcAft>
+              <a:buClr>
+                <a:srgbClr val="000000"/>
+              </a:buClr>
+              <a:buSzPts val="1400"/>
+              <a:buFont typeface="Arial"/>
+              <a:buNone/>
+            </a:pPr>
+            <a:r>
+              <a:rPr lang="fr-FR" sz="1400" b="0" i="0" u="none" strike="noStrike" cap="none" dirty="0" err="1">
+                <a:solidFill>
+                  <a:srgbClr val="000000"/>
+                </a:solidFill>
+                <a:latin typeface="Arial"/>
+                <a:ea typeface="Arial"/>
+                <a:cs typeface="Arial"/>
+                <a:sym typeface="Arial"/>
+              </a:rPr>
+              <a:t>Xxxxxxx</a:t>
+            </a:r>
+            <a:r>
+              <a:rPr lang="fr-FR" sz="1400" b="0" i="0" u="none" strike="noStrike" cap="none" dirty="0">
+                <a:solidFill>
+                  <a:srgbClr val="000000"/>
+                </a:solidFill>
+                <a:latin typeface="Arial"/>
+                <a:ea typeface="Arial"/>
+                <a:cs typeface="Arial"/>
+                <a:sym typeface="Arial"/>
+              </a:rPr>
+              <a:t>  XXXXXXXX</a:t>
+            </a:r>
+            <a:endParaRPr sz="1400" b="0" i="0" u="none" strike="noStrike" cap="none" dirty="0">
+              <a:solidFill>
+                <a:srgbClr val="000000"/>
+              </a:solidFill>
+              <a:latin typeface="Arial"/>
+              <a:ea typeface="Arial"/>
+              <a:cs typeface="Arial"/>
+              <a:sym typeface="Arial"/>
+            </a:endParaRPr>
+          </a:p>
+          <a:p>
+            <a:pPr lvl="0">
+              <a:lnSpc>
+                <a:spcPct val="200000"/>
+              </a:lnSpc>
+              <a:buSzPts val="1400"/>
+            </a:pPr>
+            <a:r>
+              <a:rPr lang="fr-FR" dirty="0" err="1"/>
+              <a:t>Xxxxxxx</a:t>
+            </a:r>
+            <a:r>
+              <a:rPr lang="fr-FR" dirty="0"/>
+              <a:t>  XXXXXXXX</a:t>
+            </a:r>
+          </a:p>
+          <a:p>
+            <a:pPr>
+              <a:lnSpc>
+                <a:spcPct val="200000"/>
+              </a:lnSpc>
+              <a:buSzPts val="1400"/>
+            </a:pPr>
+            <a:r>
+              <a:rPr lang="fr-FR" dirty="0" err="1"/>
+              <a:t>Xxxxxxx</a:t>
+            </a:r>
+            <a:r>
+              <a:rPr lang="fr-FR" dirty="0"/>
+              <a:t>  XXXXXXXX</a:t>
+            </a:r>
+          </a:p>
+          <a:p>
+            <a:pPr>
+              <a:lnSpc>
+                <a:spcPct val="200000"/>
+              </a:lnSpc>
+              <a:buSzPts val="1400"/>
+            </a:pPr>
+            <a:r>
+              <a:rPr lang="fr-FR" dirty="0" err="1"/>
+              <a:t>Xxxxxxx</a:t>
+            </a:r>
+            <a:r>
+              <a:rPr lang="fr-FR" dirty="0"/>
+              <a:t>  XXXXXXXX</a:t>
+            </a:r>
+          </a:p>
+          <a:p>
+            <a:pPr lvl="0">
+              <a:lnSpc>
+                <a:spcPct val="200000"/>
+              </a:lnSpc>
+              <a:buSzPts val="1400"/>
+            </a:pPr>
+            <a:endParaRPr lang="fr-FR" dirty="0"/>
+          </a:p>
+        </p:txBody>
+      </p:sp>
+      <p:sp>
+        <p:nvSpPr>
+          <p:cNvPr id="62" name="Google Shape;62;p2"/>
+          <p:cNvSpPr txBox="1">
+            <a:spLocks noGrp="1"/>
+          </p:cNvSpPr>
+          <p:nvPr>
+            <p:ph type="title"/>
+          </p:nvPr>
+        </p:nvSpPr>
+        <p:spPr>
+          <a:xfrm>
+            <a:off x="390600" y="1558399"/>
+            <a:ext cx="2950300" cy="632068"/>
+          </a:xfrm>
+          <a:prstGeom prst="rect">
+            <a:avLst/>
+          </a:prstGeom>
+          <a:noFill/>
+          <a:ln>
+            <a:noFill/>
+          </a:ln>
+        </p:spPr>
+        <p:txBody>
+          <a:bodyPr spcFirstLastPara="1" wrap="square" lIns="91425" tIns="91425" rIns="91425" bIns="91425" anchor="t" anchorCtr="0">
+            <a:noAutofit/>
+          </a:bodyPr>
+          <a:lstStyle/>
+          <a:p>
+            <a:pPr marL="0" lvl="0" indent="0" algn="l" rtl="0">
+              <a:lnSpc>
+                <a:spcPct val="100000"/>
+              </a:lnSpc>
+              <a:spcBef>
+                <a:spcPts val="0"/>
+              </a:spcBef>
+              <a:spcAft>
+                <a:spcPts val="0"/>
+              </a:spcAft>
+              <a:buSzPts val="2800"/>
+              <a:buNone/>
+            </a:pPr>
+            <a:r>
+              <a:rPr lang="fr" sz="2400">
+                <a:solidFill>
+                  <a:srgbClr val="015955"/>
+                </a:solidFill>
+                <a:latin typeface="Inter"/>
+                <a:ea typeface="Inter"/>
+                <a:cs typeface="Inter"/>
+                <a:sym typeface="Inter"/>
+              </a:rPr>
+              <a:t>Group members</a:t>
+            </a:r>
+            <a:endParaRPr sz="2400">
+              <a:solidFill>
+                <a:srgbClr val="015955"/>
+              </a:solidFill>
+              <a:latin typeface="Inter"/>
+              <a:ea typeface="Inter"/>
+              <a:cs typeface="Inter"/>
+              <a:sym typeface="Inter"/>
+            </a:endParaRPr>
+          </a:p>
+        </p:txBody>
+      </p:sp>
+      <p:pic>
+        <p:nvPicPr>
+          <p:cNvPr id="63" name="Google Shape;63;p2"/>
+          <p:cNvPicPr preferRelativeResize="0"/>
+          <p:nvPr/>
+        </p:nvPicPr>
+        <p:blipFill rotWithShape="1">
+          <a:blip r:embed="rId3">
+            <a:alphaModFix/>
+          </a:blip>
+          <a:srcRect/>
+          <a:stretch/>
+        </p:blipFill>
+        <p:spPr>
+          <a:xfrm>
+            <a:off x="463375" y="482852"/>
+            <a:ext cx="576900" cy="385904"/>
+          </a:xfrm>
+          <a:prstGeom prst="rect">
+            <a:avLst/>
+          </a:prstGeom>
+          <a:noFill/>
+          <a:ln>
+            <a:noFill/>
+          </a:ln>
+        </p:spPr>
+      </p:pic>
+    </p:spTree>
+  </p:cSld>
+  <p:clrMapOvr>
+    <a:masterClrMapping/>
+  </p:clrMapOvr>
+</p:sld>
+</file>
+
+<file path=ppt/slides/slide3.xml><?xml version="1.0" encoding="utf-8"?>
+<p:sld xmlns:a="http://schemas.openxmlformats.org/drawingml/2006/main" xmlns:r="http://schemas.openxmlformats.org/officeDocument/2006/relationships" xmlns:p="http://schemas.openxmlformats.org/presentationml/2006/main">
+  <p:cSld>
+    <p:spTree>
+      <p:nvGrpSpPr>
+        <p:cNvPr id="1" name="Shape 68">
+          <a:extLst>
+            <a:ext uri="{FF2B5EF4-FFF2-40B4-BE49-F238E27FC236}">
+              <a16:creationId xmlns:a16="http://schemas.microsoft.com/office/drawing/2014/main" id="{C61C25B1-8526-F489-8EC8-46322447A69B}"/>
+            </a:ext>
+          </a:extLst>
+        </p:cNvPr>
+        <p:cNvGrpSpPr/>
+        <p:nvPr/>
+      </p:nvGrpSpPr>
+      <p:grpSpPr>
+        <a:xfrm>
+          <a:off x="0" y="0"/>
+          <a:ext cx="0" cy="0"/>
+          <a:chOff x="0" y="0"/>
+          <a:chExt cx="0" cy="0"/>
+        </a:xfrm>
+      </p:grpSpPr>
+      <p:sp>
+        <p:nvSpPr>
+          <p:cNvPr id="70" name="Google Shape;70;p3">
+            <a:extLst>
+              <a:ext uri="{FF2B5EF4-FFF2-40B4-BE49-F238E27FC236}">
+                <a16:creationId xmlns:a16="http://schemas.microsoft.com/office/drawing/2014/main" id="{6C332C7A-0C1B-7002-DD8F-E4EB26F3199D}"/>
+              </a:ext>
+            </a:extLst>
+          </p:cNvPr>
+          <p:cNvSpPr txBox="1">
+            <a:spLocks noGrp="1"/>
+          </p:cNvSpPr>
+          <p:nvPr>
+            <p:ph type="ctrTitle" idx="4294967295"/>
+          </p:nvPr>
+        </p:nvSpPr>
+        <p:spPr>
+          <a:xfrm>
+            <a:off x="1192664" y="403309"/>
+            <a:ext cx="5315100" cy="533100"/>
+          </a:xfrm>
+          <a:prstGeom prst="rect">
+            <a:avLst/>
+          </a:prstGeom>
+          <a:noFill/>
+          <a:ln>
+            <a:noFill/>
+          </a:ln>
+        </p:spPr>
+        <p:txBody>
+          <a:bodyPr spcFirstLastPara="1" wrap="square" lIns="91425" tIns="91425" rIns="91425" bIns="91425" anchor="t" anchorCtr="0">
+            <a:noAutofit/>
+          </a:bodyPr>
+          <a:lstStyle/>
+          <a:p>
+            <a:pPr lvl="0"/>
+            <a:r>
+              <a:rPr lang="fr-FR" sz="2500" b="1" dirty="0">
+                <a:solidFill>
+                  <a:srgbClr val="0E3449"/>
+                </a:solidFill>
+                <a:latin typeface="Inter SemiBold"/>
+                <a:ea typeface="Inter SemiBold"/>
+                <a:cs typeface="Inter SemiBold"/>
+                <a:sym typeface="Inter SemiBold"/>
+              </a:rPr>
+              <a:t>Contexte et problématique</a:t>
+            </a:r>
+            <a:endParaRPr sz="2500" b="1" i="0" u="none" strike="noStrike" cap="none" dirty="0">
+              <a:solidFill>
+                <a:srgbClr val="0E3449"/>
+              </a:solidFill>
+              <a:latin typeface="Inter SemiBold"/>
+              <a:ea typeface="Inter SemiBold"/>
+              <a:cs typeface="Inter SemiBold"/>
+              <a:sym typeface="Inter SemiBold"/>
+            </a:endParaRPr>
+          </a:p>
+        </p:txBody>
+      </p:sp>
+      <p:sp>
+        <p:nvSpPr>
+          <p:cNvPr id="71" name="Google Shape;71;p3">
+            <a:extLst>
+              <a:ext uri="{FF2B5EF4-FFF2-40B4-BE49-F238E27FC236}">
+                <a16:creationId xmlns:a16="http://schemas.microsoft.com/office/drawing/2014/main" id="{2535CC55-4646-912A-89CB-270E6E57968E}"/>
+              </a:ext>
+            </a:extLst>
+          </p:cNvPr>
+          <p:cNvSpPr/>
+          <p:nvPr/>
+        </p:nvSpPr>
+        <p:spPr>
+          <a:xfrm>
+            <a:off x="10225" y="4892025"/>
+            <a:ext cx="9144000" cy="251400"/>
+          </a:xfrm>
+          <a:prstGeom prst="rect">
+            <a:avLst/>
+          </a:prstGeom>
+          <a:solidFill>
+            <a:srgbClr val="C3FFFC"/>
+          </a:solidFill>
+          <a:ln>
+            <a:noFill/>
+          </a:ln>
+        </p:spPr>
+        <p:txBody>
+          <a:bodyPr spcFirstLastPara="1" wrap="square" lIns="91425" tIns="91425" rIns="91425" bIns="91425" anchor="ctr" anchorCtr="0">
+            <a:noAutofit/>
+          </a:bodyPr>
+          <a:lstStyle/>
+          <a:p>
+            <a:pPr marL="0" marR="0" lvl="0" indent="0" algn="l" rtl="0">
+              <a:lnSpc>
+                <a:spcPct val="100000"/>
+              </a:lnSpc>
+              <a:spcBef>
+                <a:spcPts val="0"/>
+              </a:spcBef>
+              <a:spcAft>
+                <a:spcPts val="0"/>
+              </a:spcAft>
+              <a:buClr>
+                <a:srgbClr val="000000"/>
+              </a:buClr>
+              <a:buSzPts val="1400"/>
+              <a:buFont typeface="Arial"/>
+              <a:buNone/>
+            </a:pPr>
+            <a:endParaRPr sz="1400" b="0" i="0" u="none" strike="noStrike" cap="none">
+              <a:solidFill>
+                <a:srgbClr val="000000"/>
+              </a:solidFill>
+              <a:latin typeface="Arial"/>
+              <a:ea typeface="Arial"/>
+              <a:cs typeface="Arial"/>
+              <a:sym typeface="Arial"/>
+            </a:endParaRPr>
+          </a:p>
+        </p:txBody>
+      </p:sp>
+      <p:pic>
+        <p:nvPicPr>
+          <p:cNvPr id="72" name="Google Shape;72;p3">
+            <a:extLst>
+              <a:ext uri="{FF2B5EF4-FFF2-40B4-BE49-F238E27FC236}">
+                <a16:creationId xmlns:a16="http://schemas.microsoft.com/office/drawing/2014/main" id="{B6E60877-CBAF-4172-8F34-67BAD279BAEB}"/>
+              </a:ext>
+            </a:extLst>
+          </p:cNvPr>
+          <p:cNvPicPr preferRelativeResize="0"/>
+          <p:nvPr/>
+        </p:nvPicPr>
+        <p:blipFill rotWithShape="1">
+          <a:blip r:embed="rId3">
+            <a:alphaModFix/>
+          </a:blip>
+          <a:srcRect/>
+          <a:stretch/>
+        </p:blipFill>
+        <p:spPr>
+          <a:xfrm>
+            <a:off x="463375" y="482852"/>
+            <a:ext cx="576900" cy="385904"/>
+          </a:xfrm>
+          <a:prstGeom prst="rect">
+            <a:avLst/>
+          </a:prstGeom>
+          <a:noFill/>
+          <a:ln>
+            <a:noFill/>
+          </a:ln>
+        </p:spPr>
+      </p:pic>
+      <p:sp>
+        <p:nvSpPr>
+          <p:cNvPr id="4" name="Google Shape;181;p8">
+            <a:extLst>
+              <a:ext uri="{FF2B5EF4-FFF2-40B4-BE49-F238E27FC236}">
+                <a16:creationId xmlns:a16="http://schemas.microsoft.com/office/drawing/2014/main" id="{0649B650-4A2A-7387-5E59-6EEF0B39EF13}"/>
+              </a:ext>
+            </a:extLst>
+          </p:cNvPr>
+          <p:cNvSpPr txBox="1">
+            <a:spLocks noGrp="1"/>
+          </p:cNvSpPr>
+          <p:nvPr>
+            <p:ph type="body" idx="1"/>
+          </p:nvPr>
+        </p:nvSpPr>
+        <p:spPr>
+          <a:xfrm>
+            <a:off x="311700" y="1155049"/>
+            <a:ext cx="8520600" cy="3585142"/>
+          </a:xfrm>
+          <a:prstGeom prst="rect">
+            <a:avLst/>
+          </a:prstGeom>
+          <a:noFill/>
+          <a:ln>
+            <a:noFill/>
+          </a:ln>
+        </p:spPr>
+        <p:txBody>
+          <a:bodyPr spcFirstLastPara="1" wrap="square" lIns="91425" tIns="91425" rIns="91425" bIns="91425" anchor="t" anchorCtr="0">
+            <a:noAutofit/>
+          </a:bodyPr>
+          <a:lstStyle/>
+          <a:p>
+            <a:pPr marL="114300" lvl="0" indent="0" algn="l" rtl="0">
+              <a:lnSpc>
+                <a:spcPct val="115000"/>
+              </a:lnSpc>
+              <a:spcBef>
+                <a:spcPts val="0"/>
+              </a:spcBef>
+              <a:spcAft>
+                <a:spcPts val="0"/>
+              </a:spcAft>
+              <a:buSzPts val="1800"/>
+              <a:buNone/>
+            </a:pPr>
+            <a:r>
+              <a:rPr lang="fr-FR" sz="1400" dirty="0" err="1"/>
+              <a:t>wwwww</a:t>
+            </a:r>
+            <a:endParaRPr sz="1400" dirty="0"/>
+          </a:p>
+        </p:txBody>
+      </p:sp>
+    </p:spTree>
+    <p:extLst>
+      <p:ext uri="{BB962C8B-B14F-4D97-AF65-F5344CB8AC3E}">
+        <p14:creationId xmlns:p14="http://schemas.microsoft.com/office/powerpoint/2010/main" val="406580661"/>
+      </p:ext>
+    </p:extLst>
+  </p:cSld>
+  <p:clrMapOvr>
+    <a:masterClrMapping/>
+  </p:clrMapOvr>
+</p:sld>
+</file>
+
+<file path=ppt/slides/slide4.xml><?xml version="1.0" encoding="utf-8"?>
+<p:sld xmlns:a="http://schemas.openxmlformats.org/drawingml/2006/main" xmlns:r="http://schemas.openxmlformats.org/officeDocument/2006/relationships" xmlns:p="http://schemas.openxmlformats.org/presentationml/2006/main">
+  <p:cSld>
+    <p:spTree>
+      <p:nvGrpSpPr>
+        <p:cNvPr id="1" name="Shape 68">
+          <a:extLst>
+            <a:ext uri="{FF2B5EF4-FFF2-40B4-BE49-F238E27FC236}">
+              <a16:creationId xmlns:a16="http://schemas.microsoft.com/office/drawing/2014/main" id="{FEA26B75-6D5D-BB94-F6A1-A3488326FA68}"/>
+            </a:ext>
+          </a:extLst>
+        </p:cNvPr>
+        <p:cNvGrpSpPr/>
+        <p:nvPr/>
+      </p:nvGrpSpPr>
+      <p:grpSpPr>
+        <a:xfrm>
+          <a:off x="0" y="0"/>
+          <a:ext cx="0" cy="0"/>
+          <a:chOff x="0" y="0"/>
+          <a:chExt cx="0" cy="0"/>
+        </a:xfrm>
+      </p:grpSpPr>
+      <p:sp>
+        <p:nvSpPr>
+          <p:cNvPr id="70" name="Google Shape;70;p3">
+            <a:extLst>
+              <a:ext uri="{FF2B5EF4-FFF2-40B4-BE49-F238E27FC236}">
+                <a16:creationId xmlns:a16="http://schemas.microsoft.com/office/drawing/2014/main" id="{1CDDF2B5-8696-D966-7AE7-2D1548853B07}"/>
+              </a:ext>
+            </a:extLst>
+          </p:cNvPr>
+          <p:cNvSpPr txBox="1">
+            <a:spLocks noGrp="1"/>
+          </p:cNvSpPr>
+          <p:nvPr>
+            <p:ph type="ctrTitle" idx="4294967295"/>
+          </p:nvPr>
+        </p:nvSpPr>
+        <p:spPr>
+          <a:xfrm>
+            <a:off x="1192664" y="403309"/>
+            <a:ext cx="5315100" cy="533100"/>
+          </a:xfrm>
+          <a:prstGeom prst="rect">
+            <a:avLst/>
+          </a:prstGeom>
+          <a:noFill/>
+          <a:ln>
+            <a:noFill/>
+          </a:ln>
+        </p:spPr>
+        <p:txBody>
+          <a:bodyPr spcFirstLastPara="1" wrap="square" lIns="91425" tIns="91425" rIns="91425" bIns="91425" anchor="t" anchorCtr="0">
+            <a:noAutofit/>
+          </a:bodyPr>
+          <a:lstStyle/>
+          <a:p>
+            <a:pPr marL="0" marR="0" lvl="0" indent="0" algn="l" rtl="0">
+              <a:lnSpc>
+                <a:spcPct val="100000"/>
+              </a:lnSpc>
+              <a:spcBef>
+                <a:spcPts val="0"/>
+              </a:spcBef>
+              <a:spcAft>
+                <a:spcPts val="0"/>
+              </a:spcAft>
+              <a:buClr>
+                <a:schemeClr val="dk1"/>
+              </a:buClr>
+              <a:buSzPts val="2800"/>
+              <a:buFont typeface="Arial"/>
+              <a:buNone/>
+            </a:pPr>
+            <a:r>
+              <a:rPr lang="fr" sz="2500" b="1" i="0" u="none" strike="noStrike" cap="none" dirty="0">
+                <a:solidFill>
+                  <a:srgbClr val="0E3449"/>
+                </a:solidFill>
+                <a:latin typeface="Inter SemiBold"/>
+                <a:ea typeface="Inter SemiBold"/>
+                <a:cs typeface="Inter SemiBold"/>
+                <a:sym typeface="Inter SemiBold"/>
+              </a:rPr>
+              <a:t>Pitch</a:t>
+            </a:r>
+            <a:endParaRPr sz="2500" b="1" i="0" u="none" strike="noStrike" cap="none" dirty="0">
+              <a:solidFill>
+                <a:srgbClr val="0E3449"/>
+              </a:solidFill>
+              <a:latin typeface="Inter SemiBold"/>
+              <a:ea typeface="Inter SemiBold"/>
+              <a:cs typeface="Inter SemiBold"/>
+              <a:sym typeface="Inter SemiBold"/>
+            </a:endParaRPr>
+          </a:p>
+        </p:txBody>
+      </p:sp>
+      <p:sp>
+        <p:nvSpPr>
+          <p:cNvPr id="71" name="Google Shape;71;p3">
+            <a:extLst>
+              <a:ext uri="{FF2B5EF4-FFF2-40B4-BE49-F238E27FC236}">
+                <a16:creationId xmlns:a16="http://schemas.microsoft.com/office/drawing/2014/main" id="{D8CA7496-B59C-707A-FC90-789017213A15}"/>
+              </a:ext>
+            </a:extLst>
+          </p:cNvPr>
+          <p:cNvSpPr/>
+          <p:nvPr/>
+        </p:nvSpPr>
+        <p:spPr>
+          <a:xfrm>
+            <a:off x="10225" y="4892025"/>
+            <a:ext cx="9144000" cy="251400"/>
+          </a:xfrm>
+          <a:prstGeom prst="rect">
+            <a:avLst/>
+          </a:prstGeom>
+          <a:solidFill>
+            <a:srgbClr val="C3FFFC"/>
+          </a:solidFill>
+          <a:ln>
+            <a:noFill/>
+          </a:ln>
+        </p:spPr>
+        <p:txBody>
+          <a:bodyPr spcFirstLastPara="1" wrap="square" lIns="91425" tIns="91425" rIns="91425" bIns="91425" anchor="ctr" anchorCtr="0">
+            <a:noAutofit/>
+          </a:bodyPr>
+          <a:lstStyle/>
+          <a:p>
+            <a:pPr marL="0" marR="0" lvl="0" indent="0" algn="l" rtl="0">
+              <a:lnSpc>
+                <a:spcPct val="100000"/>
+              </a:lnSpc>
+              <a:spcBef>
+                <a:spcPts val="0"/>
+              </a:spcBef>
+              <a:spcAft>
+                <a:spcPts val="0"/>
+              </a:spcAft>
+              <a:buClr>
+                <a:srgbClr val="000000"/>
+              </a:buClr>
+              <a:buSzPts val="1400"/>
+              <a:buFont typeface="Arial"/>
+              <a:buNone/>
+            </a:pPr>
+            <a:endParaRPr sz="1400" b="0" i="0" u="none" strike="noStrike" cap="none">
+              <a:solidFill>
+                <a:srgbClr val="000000"/>
+              </a:solidFill>
+              <a:latin typeface="Arial"/>
+              <a:ea typeface="Arial"/>
+              <a:cs typeface="Arial"/>
+              <a:sym typeface="Arial"/>
+            </a:endParaRPr>
+          </a:p>
+        </p:txBody>
+      </p:sp>
+      <p:pic>
+        <p:nvPicPr>
+          <p:cNvPr id="72" name="Google Shape;72;p3">
+            <a:extLst>
+              <a:ext uri="{FF2B5EF4-FFF2-40B4-BE49-F238E27FC236}">
+                <a16:creationId xmlns:a16="http://schemas.microsoft.com/office/drawing/2014/main" id="{ACC83965-6890-A658-58A4-16BD142F9628}"/>
+              </a:ext>
+            </a:extLst>
+          </p:cNvPr>
+          <p:cNvPicPr preferRelativeResize="0"/>
+          <p:nvPr/>
+        </p:nvPicPr>
+        <p:blipFill rotWithShape="1">
+          <a:blip r:embed="rId3">
+            <a:alphaModFix/>
+          </a:blip>
+          <a:srcRect/>
+          <a:stretch/>
+        </p:blipFill>
+        <p:spPr>
+          <a:xfrm>
+            <a:off x="463375" y="482852"/>
+            <a:ext cx="576900" cy="385904"/>
+          </a:xfrm>
+          <a:prstGeom prst="rect">
+            <a:avLst/>
+          </a:prstGeom>
+          <a:noFill/>
+          <a:ln>
+            <a:noFill/>
+          </a:ln>
+        </p:spPr>
+      </p:pic>
+      <p:sp>
+        <p:nvSpPr>
+          <p:cNvPr id="4" name="Google Shape;181;p8">
+            <a:extLst>
+              <a:ext uri="{FF2B5EF4-FFF2-40B4-BE49-F238E27FC236}">
+                <a16:creationId xmlns:a16="http://schemas.microsoft.com/office/drawing/2014/main" id="{A5620247-49B7-3C5A-F47B-760300A2EB3C}"/>
+              </a:ext>
+            </a:extLst>
+          </p:cNvPr>
+          <p:cNvSpPr txBox="1">
+            <a:spLocks noGrp="1"/>
+          </p:cNvSpPr>
+          <p:nvPr>
+            <p:ph type="body" idx="1"/>
+          </p:nvPr>
+        </p:nvSpPr>
+        <p:spPr>
+          <a:xfrm>
+            <a:off x="311700" y="1155049"/>
+            <a:ext cx="8520600" cy="3585142"/>
+          </a:xfrm>
+          <a:prstGeom prst="rect">
+            <a:avLst/>
+          </a:prstGeom>
+          <a:noFill/>
+          <a:ln>
+            <a:noFill/>
+          </a:ln>
+        </p:spPr>
+        <p:txBody>
+          <a:bodyPr spcFirstLastPara="1" wrap="square" lIns="91425" tIns="91425" rIns="91425" bIns="91425" anchor="t" anchorCtr="0">
+            <a:noAutofit/>
+          </a:bodyPr>
+          <a:lstStyle/>
+          <a:p>
+            <a:pPr marL="114300" lvl="0" indent="0" algn="l" rtl="0">
+              <a:lnSpc>
+                <a:spcPct val="115000"/>
+              </a:lnSpc>
+              <a:spcBef>
+                <a:spcPts val="0"/>
+              </a:spcBef>
+              <a:spcAft>
+                <a:spcPts val="0"/>
+              </a:spcAft>
+              <a:buSzPts val="1800"/>
+              <a:buNone/>
+            </a:pPr>
+            <a:r>
+              <a:rPr lang="fr-FR" sz="1400" dirty="0" err="1"/>
+              <a:t>wwwww</a:t>
+            </a:r>
+            <a:endParaRPr sz="1400" dirty="0"/>
+          </a:p>
+        </p:txBody>
+      </p:sp>
+    </p:spTree>
+    <p:extLst>
+      <p:ext uri="{BB962C8B-B14F-4D97-AF65-F5344CB8AC3E}">
+        <p14:creationId xmlns:p14="http://schemas.microsoft.com/office/powerpoint/2010/main" val="3647836335"/>
+      </p:ext>
+    </p:extLst>
+  </p:cSld>
+  <p:clrMapOvr>
+    <a:masterClrMapping/>
+  </p:clrMapOvr>
+</p:sld>
+</file>
+
+<file path=ppt/slides/slide5.xml><?xml version="1.0" encoding="utf-8"?>
+<p:sld xmlns:a="http://schemas.openxmlformats.org/drawingml/2006/main" xmlns:r="http://schemas.openxmlformats.org/officeDocument/2006/relationships" xmlns:p="http://schemas.openxmlformats.org/presentationml/2006/main">
+  <p:cSld>
+    <p:spTree>
+      <p:nvGrpSpPr>
+        <p:cNvPr id="1" name="Shape 95">
+          <a:extLst>
+            <a:ext uri="{FF2B5EF4-FFF2-40B4-BE49-F238E27FC236}">
+              <a16:creationId xmlns:a16="http://schemas.microsoft.com/office/drawing/2014/main" id="{102D340D-B8AB-12B1-1341-CA7D51F053B0}"/>
+            </a:ext>
+          </a:extLst>
+        </p:cNvPr>
+        <p:cNvGrpSpPr/>
+        <p:nvPr/>
+      </p:nvGrpSpPr>
+      <p:grpSpPr>
+        <a:xfrm>
+          <a:off x="0" y="0"/>
+          <a:ext cx="0" cy="0"/>
+          <a:chOff x="0" y="0"/>
+          <a:chExt cx="0" cy="0"/>
+        </a:xfrm>
+      </p:grpSpPr>
+      <p:sp>
+        <p:nvSpPr>
+          <p:cNvPr id="96" name="Google Shape;96;p5">
+            <a:extLst>
+              <a:ext uri="{FF2B5EF4-FFF2-40B4-BE49-F238E27FC236}">
+                <a16:creationId xmlns:a16="http://schemas.microsoft.com/office/drawing/2014/main" id="{E0E7B8E7-F933-D99A-FC55-A7E0AFDF3556}"/>
+              </a:ext>
+            </a:extLst>
+          </p:cNvPr>
+          <p:cNvSpPr txBox="1">
+            <a:spLocks noGrp="1"/>
+          </p:cNvSpPr>
+          <p:nvPr>
+            <p:ph type="ctrTitle" idx="4294967295"/>
+          </p:nvPr>
+        </p:nvSpPr>
+        <p:spPr>
+          <a:xfrm>
+            <a:off x="1192664" y="403309"/>
+            <a:ext cx="5315100" cy="533100"/>
+          </a:xfrm>
+          <a:prstGeom prst="rect">
+            <a:avLst/>
+          </a:prstGeom>
+          <a:noFill/>
+          <a:ln>
+            <a:noFill/>
+          </a:ln>
+        </p:spPr>
+        <p:txBody>
+          <a:bodyPr spcFirstLastPara="1" wrap="square" lIns="91425" tIns="91425" rIns="91425" bIns="91425" anchor="t" anchorCtr="0">
+            <a:noAutofit/>
+          </a:bodyPr>
+          <a:lstStyle/>
+          <a:p>
+            <a:pPr lvl="0"/>
+            <a:r>
+              <a:rPr lang="it-IT" sz="2500" b="1" dirty="0">
+                <a:solidFill>
+                  <a:srgbClr val="0E3449"/>
+                </a:solidFill>
+                <a:latin typeface="Inter SemiBold"/>
+                <a:ea typeface="Inter SemiBold"/>
+                <a:cs typeface="Inter SemiBold"/>
+                <a:sym typeface="Inter SemiBold"/>
+              </a:rPr>
+              <a:t>Process et pipeline data</a:t>
+            </a:r>
+            <a:endParaRPr lang="it-IT" sz="2500" b="0" i="0" u="none" strike="noStrike" cap="none" dirty="0">
+              <a:solidFill>
+                <a:srgbClr val="0E3449"/>
+              </a:solidFill>
+              <a:latin typeface="Inter SemiBold"/>
+              <a:ea typeface="Inter SemiBold"/>
+              <a:cs typeface="Inter SemiBold"/>
+              <a:sym typeface="Inter SemiBold"/>
+            </a:endParaRPr>
+          </a:p>
+        </p:txBody>
+      </p:sp>
+      <p:pic>
+        <p:nvPicPr>
+          <p:cNvPr id="97" name="Google Shape;97;p5">
+            <a:extLst>
+              <a:ext uri="{FF2B5EF4-FFF2-40B4-BE49-F238E27FC236}">
+                <a16:creationId xmlns:a16="http://schemas.microsoft.com/office/drawing/2014/main" id="{A1784225-A032-0CBA-51D9-09FCED9F28E2}"/>
+              </a:ext>
+            </a:extLst>
+          </p:cNvPr>
+          <p:cNvPicPr preferRelativeResize="0"/>
+          <p:nvPr/>
+        </p:nvPicPr>
+        <p:blipFill rotWithShape="1">
+          <a:blip r:embed="rId3">
+            <a:alphaModFix/>
+          </a:blip>
+          <a:srcRect/>
+          <a:stretch/>
+        </p:blipFill>
+        <p:spPr>
+          <a:xfrm>
+            <a:off x="463375" y="482852"/>
+            <a:ext cx="576900" cy="385904"/>
+          </a:xfrm>
+          <a:prstGeom prst="rect">
+            <a:avLst/>
+          </a:prstGeom>
+          <a:noFill/>
+          <a:ln>
+            <a:noFill/>
+          </a:ln>
+        </p:spPr>
+      </p:pic>
+      <p:sp>
+        <p:nvSpPr>
+          <p:cNvPr id="98" name="Google Shape;98;p5">
+            <a:extLst>
+              <a:ext uri="{FF2B5EF4-FFF2-40B4-BE49-F238E27FC236}">
+                <a16:creationId xmlns:a16="http://schemas.microsoft.com/office/drawing/2014/main" id="{0302C705-EB34-55B3-983C-81DA8BD20273}"/>
+              </a:ext>
+            </a:extLst>
+          </p:cNvPr>
+          <p:cNvSpPr/>
+          <p:nvPr/>
+        </p:nvSpPr>
+        <p:spPr>
+          <a:xfrm>
+            <a:off x="10225" y="4892025"/>
+            <a:ext cx="9144000" cy="251400"/>
+          </a:xfrm>
+          <a:prstGeom prst="rect">
+            <a:avLst/>
+          </a:prstGeom>
+          <a:solidFill>
+            <a:srgbClr val="C3FFFC"/>
+          </a:solidFill>
+          <a:ln>
+            <a:noFill/>
+          </a:ln>
+        </p:spPr>
+        <p:txBody>
+          <a:bodyPr spcFirstLastPara="1" wrap="square" lIns="91425" tIns="91425" rIns="91425" bIns="91425" anchor="ctr" anchorCtr="0">
+            <a:noAutofit/>
+          </a:bodyPr>
+          <a:lstStyle/>
+          <a:p>
+            <a:pPr marL="0" marR="0" lvl="0" indent="0" algn="l" rtl="0">
+              <a:lnSpc>
+                <a:spcPct val="100000"/>
+              </a:lnSpc>
+              <a:spcBef>
+                <a:spcPts val="0"/>
+              </a:spcBef>
+              <a:spcAft>
+                <a:spcPts val="0"/>
+              </a:spcAft>
+              <a:buClr>
+                <a:srgbClr val="000000"/>
+              </a:buClr>
+              <a:buSzPts val="1400"/>
+              <a:buFont typeface="Arial"/>
+              <a:buNone/>
+            </a:pPr>
+            <a:endParaRPr sz="1400" b="0" i="0" u="none" strike="noStrike" cap="none">
+              <a:solidFill>
+                <a:srgbClr val="000000"/>
+              </a:solidFill>
+              <a:latin typeface="Arial"/>
+              <a:ea typeface="Arial"/>
+              <a:cs typeface="Arial"/>
+              <a:sym typeface="Arial"/>
+            </a:endParaRPr>
+          </a:p>
+        </p:txBody>
+      </p:sp>
+      <p:pic>
+        <p:nvPicPr>
+          <p:cNvPr id="3" name="Image 2">
+            <a:extLst>
+              <a:ext uri="{FF2B5EF4-FFF2-40B4-BE49-F238E27FC236}">
+                <a16:creationId xmlns:a16="http://schemas.microsoft.com/office/drawing/2014/main" id="{B2469126-D060-A3A0-24FE-3940B83EED58}"/>
+              </a:ext>
+            </a:extLst>
+          </p:cNvPr>
+          <p:cNvPicPr>
+            <a:picLocks noChangeAspect="1"/>
+          </p:cNvPicPr>
+          <p:nvPr/>
+        </p:nvPicPr>
+        <p:blipFill>
+          <a:blip r:embed="rId4"/>
+          <a:stretch>
+            <a:fillRect/>
+          </a:stretch>
+        </p:blipFill>
+        <p:spPr>
+          <a:xfrm>
+            <a:off x="1192664" y="868756"/>
+            <a:ext cx="7355393" cy="3933854"/>
+          </a:xfrm>
+          <a:prstGeom prst="rect">
+            <a:avLst/>
+          </a:prstGeom>
+        </p:spPr>
+      </p:pic>
+      <p:pic>
+        <p:nvPicPr>
+          <p:cNvPr id="1026" name="Picture 2">
+            <a:extLst>
+              <a:ext uri="{FF2B5EF4-FFF2-40B4-BE49-F238E27FC236}">
+                <a16:creationId xmlns:a16="http://schemas.microsoft.com/office/drawing/2014/main" id="{923FE2F2-F305-A7CE-975B-2A2BA912E4B7}"/>
+              </a:ext>
+            </a:extLst>
+          </p:cNvPr>
+          <p:cNvPicPr>
+            <a:picLocks noChangeAspect="1" noChangeArrowheads="1"/>
+          </p:cNvPicPr>
+          <p:nvPr/>
+        </p:nvPicPr>
+        <p:blipFill>
+          <a:blip r:embed="rId5">
+            <a:extLst>
+              <a:ext uri="{28A0092B-C50C-407E-A947-70E740481C1C}">
+                <a14:useLocalDpi xmlns:a14="http://schemas.microsoft.com/office/drawing/2010/main" val="0"/>
+              </a:ext>
+            </a:extLst>
+          </a:blip>
+          <a:srcRect/>
+          <a:stretch>
+            <a:fillRect/>
+          </a:stretch>
+        </p:blipFill>
+        <p:spPr bwMode="auto">
+          <a:xfrm>
+            <a:off x="9381968" y="3152805"/>
+            <a:ext cx="1080840" cy="1080840"/>
+          </a:xfrm>
+          <a:prstGeom prst="rect">
+            <a:avLst/>
+          </a:prstGeom>
+          <a:noFill/>
+          <a:extLst>
+            <a:ext uri="{909E8E84-426E-40DD-AFC4-6F175D3DCCD1}">
+              <a14:hiddenFill xmlns:a14="http://schemas.microsoft.com/office/drawing/2010/main">
+                <a:solidFill>
+                  <a:srgbClr val="FFFFFF"/>
+                </a:solidFill>
+              </a14:hiddenFill>
+            </a:ext>
+          </a:extLst>
+        </p:spPr>
+      </p:pic>
+      <p:pic>
+        <p:nvPicPr>
+          <p:cNvPr id="1028" name="Picture 4">
+            <a:extLst>
+              <a:ext uri="{FF2B5EF4-FFF2-40B4-BE49-F238E27FC236}">
+                <a16:creationId xmlns:a16="http://schemas.microsoft.com/office/drawing/2014/main" id="{D0C03EA7-EAD6-1A33-21AE-920B9121582F}"/>
+              </a:ext>
+            </a:extLst>
+          </p:cNvPr>
+          <p:cNvPicPr>
+            <a:picLocks noChangeAspect="1" noChangeArrowheads="1"/>
+          </p:cNvPicPr>
+          <p:nvPr/>
+        </p:nvPicPr>
+        <p:blipFill>
+          <a:blip r:embed="rId6">
+            <a:extLst>
+              <a:ext uri="{28A0092B-C50C-407E-A947-70E740481C1C}">
+                <a14:useLocalDpi xmlns:a14="http://schemas.microsoft.com/office/drawing/2010/main" val="0"/>
+              </a:ext>
+            </a:extLst>
+          </a:blip>
+          <a:srcRect/>
+          <a:stretch>
+            <a:fillRect/>
+          </a:stretch>
+        </p:blipFill>
+        <p:spPr bwMode="auto">
+          <a:xfrm>
+            <a:off x="9461911" y="2285310"/>
+            <a:ext cx="1470313" cy="840179"/>
+          </a:xfrm>
+          <a:prstGeom prst="rect">
+            <a:avLst/>
+          </a:prstGeom>
+          <a:noFill/>
+          <a:extLst>
+            <a:ext uri="{909E8E84-426E-40DD-AFC4-6F175D3DCCD1}">
+              <a14:hiddenFill xmlns:a14="http://schemas.microsoft.com/office/drawing/2010/main">
+                <a:solidFill>
+                  <a:srgbClr val="FFFFFF"/>
+                </a:solidFill>
+              </a14:hiddenFill>
+            </a:ext>
+          </a:extLst>
+        </p:spPr>
+      </p:pic>
+      <p:pic>
+        <p:nvPicPr>
+          <p:cNvPr id="1030" name="Picture 6">
+            <a:extLst>
+              <a:ext uri="{FF2B5EF4-FFF2-40B4-BE49-F238E27FC236}">
+                <a16:creationId xmlns:a16="http://schemas.microsoft.com/office/drawing/2014/main" id="{2941D76B-6840-C572-907F-F3680B66EBF7}"/>
+              </a:ext>
+            </a:extLst>
+          </p:cNvPr>
+          <p:cNvPicPr>
+            <a:picLocks noChangeAspect="1" noChangeArrowheads="1"/>
+          </p:cNvPicPr>
+          <p:nvPr/>
+        </p:nvPicPr>
+        <p:blipFill>
+          <a:blip r:embed="rId7">
+            <a:extLst>
+              <a:ext uri="{28A0092B-C50C-407E-A947-70E740481C1C}">
+                <a14:useLocalDpi xmlns:a14="http://schemas.microsoft.com/office/drawing/2010/main" val="0"/>
+              </a:ext>
+            </a:extLst>
+          </a:blip>
+          <a:srcRect/>
+          <a:stretch>
+            <a:fillRect/>
+          </a:stretch>
+        </p:blipFill>
+        <p:spPr bwMode="auto">
+          <a:xfrm>
+            <a:off x="9381968" y="1643023"/>
+            <a:ext cx="1008072" cy="736668"/>
+          </a:xfrm>
+          <a:prstGeom prst="rect">
+            <a:avLst/>
+          </a:prstGeom>
+          <a:noFill/>
+          <a:extLst>
+            <a:ext uri="{909E8E84-426E-40DD-AFC4-6F175D3DCCD1}">
+              <a14:hiddenFill xmlns:a14="http://schemas.microsoft.com/office/drawing/2010/main">
+                <a:solidFill>
+                  <a:srgbClr val="FFFFFF"/>
+                </a:solidFill>
+              </a14:hiddenFill>
+            </a:ext>
+          </a:extLst>
+        </p:spPr>
+      </p:pic>
+      <p:pic>
+        <p:nvPicPr>
+          <p:cNvPr id="1032" name="Picture 8">
+            <a:extLst>
+              <a:ext uri="{FF2B5EF4-FFF2-40B4-BE49-F238E27FC236}">
+                <a16:creationId xmlns:a16="http://schemas.microsoft.com/office/drawing/2014/main" id="{0AA62D0C-7533-F64F-5205-AC2C6EB164FE}"/>
+              </a:ext>
+            </a:extLst>
+          </p:cNvPr>
+          <p:cNvPicPr>
+            <a:picLocks noChangeAspect="1" noChangeArrowheads="1"/>
+          </p:cNvPicPr>
+          <p:nvPr/>
+        </p:nvPicPr>
+        <p:blipFill>
+          <a:blip r:embed="rId8">
+            <a:extLst>
+              <a:ext uri="{28A0092B-C50C-407E-A947-70E740481C1C}">
+                <a14:useLocalDpi xmlns:a14="http://schemas.microsoft.com/office/drawing/2010/main" val="0"/>
+              </a:ext>
+            </a:extLst>
+          </a:blip>
+          <a:srcRect/>
+          <a:stretch>
+            <a:fillRect/>
+          </a:stretch>
+        </p:blipFill>
+        <p:spPr bwMode="auto">
+          <a:xfrm>
+            <a:off x="9886004" y="1117302"/>
+            <a:ext cx="485958" cy="485958"/>
+          </a:xfrm>
+          <a:prstGeom prst="rect">
+            <a:avLst/>
+          </a:prstGeom>
+          <a:noFill/>
+          <a:extLst>
+            <a:ext uri="{909E8E84-426E-40DD-AFC4-6F175D3DCCD1}">
+              <a14:hiddenFill xmlns:a14="http://schemas.microsoft.com/office/drawing/2010/main">
+                <a:solidFill>
+                  <a:srgbClr val="FFFFFF"/>
+                </a:solidFill>
+              </a14:hiddenFill>
+            </a:ext>
+          </a:extLst>
+        </p:spPr>
+      </p:pic>
+      <p:pic>
+        <p:nvPicPr>
+          <p:cNvPr id="1034" name="Picture 10">
+            <a:extLst>
+              <a:ext uri="{FF2B5EF4-FFF2-40B4-BE49-F238E27FC236}">
+                <a16:creationId xmlns:a16="http://schemas.microsoft.com/office/drawing/2014/main" id="{748B16F9-6C53-91C1-4712-424BF6CE8989}"/>
+              </a:ext>
+            </a:extLst>
+          </p:cNvPr>
+          <p:cNvPicPr>
+            <a:picLocks noChangeAspect="1" noChangeArrowheads="1"/>
+          </p:cNvPicPr>
+          <p:nvPr/>
+        </p:nvPicPr>
+        <p:blipFill>
+          <a:blip r:embed="rId9">
+            <a:extLst>
+              <a:ext uri="{28A0092B-C50C-407E-A947-70E740481C1C}">
+                <a14:useLocalDpi xmlns:a14="http://schemas.microsoft.com/office/drawing/2010/main" val="0"/>
+              </a:ext>
+            </a:extLst>
+          </a:blip>
+          <a:srcRect/>
+          <a:stretch>
+            <a:fillRect/>
+          </a:stretch>
+        </p:blipFill>
+        <p:spPr bwMode="auto">
+          <a:xfrm>
+            <a:off x="9557987" y="499821"/>
+            <a:ext cx="656034" cy="656034"/>
+          </a:xfrm>
+          <a:prstGeom prst="rect">
+            <a:avLst/>
+          </a:prstGeom>
+          <a:noFill/>
+          <a:extLst>
+            <a:ext uri="{909E8E84-426E-40DD-AFC4-6F175D3DCCD1}">
+              <a14:hiddenFill xmlns:a14="http://schemas.microsoft.com/office/drawing/2010/main">
+                <a:solidFill>
+                  <a:srgbClr val="FFFFFF"/>
+                </a:solidFill>
+              </a14:hiddenFill>
+            </a:ext>
+          </a:extLst>
+        </p:spPr>
+      </p:pic>
+      <p:pic>
+        <p:nvPicPr>
+          <p:cNvPr id="1036" name="Picture 12">
+            <a:extLst>
+              <a:ext uri="{FF2B5EF4-FFF2-40B4-BE49-F238E27FC236}">
+                <a16:creationId xmlns:a16="http://schemas.microsoft.com/office/drawing/2014/main" id="{135630BC-F5F0-17C1-438A-A312C16997F8}"/>
+              </a:ext>
+            </a:extLst>
+          </p:cNvPr>
+          <p:cNvPicPr>
+            <a:picLocks noChangeAspect="1" noChangeArrowheads="1"/>
+          </p:cNvPicPr>
+          <p:nvPr/>
+        </p:nvPicPr>
+        <p:blipFill>
+          <a:blip r:embed="rId10">
+            <a:extLst>
+              <a:ext uri="{28A0092B-C50C-407E-A947-70E740481C1C}">
+                <a14:useLocalDpi xmlns:a14="http://schemas.microsoft.com/office/drawing/2010/main" val="0"/>
+              </a:ext>
+            </a:extLst>
+          </a:blip>
+          <a:srcRect/>
+          <a:stretch>
+            <a:fillRect/>
+          </a:stretch>
+        </p:blipFill>
+        <p:spPr bwMode="auto">
+          <a:xfrm>
+            <a:off x="9645557" y="-23982"/>
+            <a:ext cx="905699" cy="654116"/>
+          </a:xfrm>
+          <a:prstGeom prst="rect">
+            <a:avLst/>
+          </a:prstGeom>
+          <a:noFill/>
+          <a:extLst>
+            <a:ext uri="{909E8E84-426E-40DD-AFC4-6F175D3DCCD1}">
+              <a14:hiddenFill xmlns:a14="http://schemas.microsoft.com/office/drawing/2010/main">
+                <a:solidFill>
+                  <a:srgbClr val="FFFFFF"/>
+                </a:solidFill>
+              </a14:hiddenFill>
+            </a:ext>
+          </a:extLst>
+        </p:spPr>
+      </p:pic>
+      <p:pic>
+        <p:nvPicPr>
+          <p:cNvPr id="1038" name="Picture 14">
+            <a:extLst>
+              <a:ext uri="{FF2B5EF4-FFF2-40B4-BE49-F238E27FC236}">
+                <a16:creationId xmlns:a16="http://schemas.microsoft.com/office/drawing/2014/main" id="{1B3822DD-A0E9-A37F-0DE9-40781F1C3DF4}"/>
+              </a:ext>
+            </a:extLst>
+          </p:cNvPr>
+          <p:cNvPicPr>
+            <a:picLocks noChangeAspect="1" noChangeArrowheads="1"/>
+          </p:cNvPicPr>
+          <p:nvPr/>
+        </p:nvPicPr>
+        <p:blipFill>
+          <a:blip r:embed="rId11">
+            <a:extLst>
+              <a:ext uri="{28A0092B-C50C-407E-A947-70E740481C1C}">
+                <a14:useLocalDpi xmlns:a14="http://schemas.microsoft.com/office/drawing/2010/main" val="0"/>
+              </a:ext>
+            </a:extLst>
+          </a:blip>
+          <a:srcRect/>
+          <a:stretch>
+            <a:fillRect/>
+          </a:stretch>
+        </p:blipFill>
+        <p:spPr bwMode="auto">
+          <a:xfrm>
+            <a:off x="9179213" y="-560638"/>
+            <a:ext cx="1783953" cy="654116"/>
+          </a:xfrm>
+          <a:prstGeom prst="rect">
+            <a:avLst/>
+          </a:prstGeom>
+          <a:noFill/>
+          <a:extLst>
+            <a:ext uri="{909E8E84-426E-40DD-AFC4-6F175D3DCCD1}">
+              <a14:hiddenFill xmlns:a14="http://schemas.microsoft.com/office/drawing/2010/main">
+                <a:solidFill>
+                  <a:srgbClr val="FFFFFF"/>
+                </a:solidFill>
+              </a14:hiddenFill>
+            </a:ext>
+          </a:extLst>
+        </p:spPr>
+      </p:pic>
+    </p:spTree>
+    <p:extLst>
+      <p:ext uri="{BB962C8B-B14F-4D97-AF65-F5344CB8AC3E}">
+        <p14:creationId xmlns:p14="http://schemas.microsoft.com/office/powerpoint/2010/main" val="1821755839"/>
+      </p:ext>
+    </p:extLst>
+  </p:cSld>
+  <p:clrMapOvr>
+    <a:masterClrMapping/>
+  </p:clrMapOvr>
+</p:sld>
+</file>
+
+<file path=ppt/slides/slide6.xml><?xml version="1.0" encoding="utf-8"?>
+<p:sld xmlns:a="http://schemas.openxmlformats.org/drawingml/2006/main" xmlns:r="http://schemas.openxmlformats.org/officeDocument/2006/relationships" xmlns:p="http://schemas.openxmlformats.org/presentationml/2006/main">
+  <p:cSld>
+    <p:spTree>
+      <p:nvGrpSpPr>
+        <p:cNvPr id="1" name="Shape 177"/>
+        <p:cNvGrpSpPr/>
+        <p:nvPr/>
+      </p:nvGrpSpPr>
+      <p:grpSpPr>
+        <a:xfrm>
+          <a:off x="0" y="0"/>
+          <a:ext cx="0" cy="0"/>
+          <a:chOff x="0" y="0"/>
+          <a:chExt cx="0" cy="0"/>
+        </a:xfrm>
+      </p:grpSpPr>
+      <p:sp>
+        <p:nvSpPr>
+          <p:cNvPr id="178" name="Google Shape;178;p8"/>
+          <p:cNvSpPr txBox="1">
+            <a:spLocks noGrp="1"/>
+          </p:cNvSpPr>
+          <p:nvPr>
+            <p:ph type="ctrTitle" idx="4294967295"/>
+          </p:nvPr>
+        </p:nvSpPr>
+        <p:spPr>
+          <a:xfrm>
+            <a:off x="1192664" y="403309"/>
+            <a:ext cx="5315100" cy="533100"/>
+          </a:xfrm>
+          <a:prstGeom prst="rect">
+            <a:avLst/>
+          </a:prstGeom>
+          <a:noFill/>
+          <a:ln>
+            <a:noFill/>
+          </a:ln>
+        </p:spPr>
+        <p:txBody>
+          <a:bodyPr spcFirstLastPara="1" wrap="square" lIns="91425" tIns="91425" rIns="91425" bIns="91425" anchor="t" anchorCtr="0">
+            <a:noAutofit/>
+          </a:bodyPr>
+          <a:lstStyle/>
+          <a:p>
+            <a:r>
+              <a:rPr lang="fr-FR" sz="2500" b="1" dirty="0">
+                <a:solidFill>
+                  <a:srgbClr val="0E3449"/>
+                </a:solidFill>
+                <a:latin typeface="Inter SemiBold"/>
+                <a:ea typeface="Inter SemiBold"/>
+              </a:rPr>
+              <a:t>Synthèse analyse descriptive</a:t>
+            </a:r>
+            <a:endParaRPr sz="2500" b="1" dirty="0">
+              <a:solidFill>
+                <a:srgbClr val="0E3449"/>
+              </a:solidFill>
+              <a:latin typeface="Inter SemiBold"/>
+              <a:ea typeface="Inter SemiBold"/>
+              <a:sym typeface="Inter SemiBold"/>
+            </a:endParaRPr>
+          </a:p>
+        </p:txBody>
+      </p:sp>
+      <p:pic>
+        <p:nvPicPr>
+          <p:cNvPr id="179" name="Google Shape;179;p8"/>
+          <p:cNvPicPr preferRelativeResize="0"/>
+          <p:nvPr/>
+        </p:nvPicPr>
+        <p:blipFill rotWithShape="1">
+          <a:blip r:embed="rId3">
+            <a:alphaModFix/>
+          </a:blip>
+          <a:srcRect/>
+          <a:stretch/>
+        </p:blipFill>
+        <p:spPr>
+          <a:xfrm>
+            <a:off x="463375" y="482852"/>
+            <a:ext cx="576900" cy="385904"/>
+          </a:xfrm>
+          <a:prstGeom prst="rect">
+            <a:avLst/>
+          </a:prstGeom>
+          <a:noFill/>
+          <a:ln>
+            <a:noFill/>
+          </a:ln>
+        </p:spPr>
+      </p:pic>
+      <p:sp>
+        <p:nvSpPr>
+          <p:cNvPr id="180" name="Google Shape;180;p8"/>
+          <p:cNvSpPr/>
+          <p:nvPr/>
+        </p:nvSpPr>
+        <p:spPr>
+          <a:xfrm>
+            <a:off x="10225" y="4892025"/>
+            <a:ext cx="9144000" cy="251400"/>
+          </a:xfrm>
+          <a:prstGeom prst="rect">
+            <a:avLst/>
+          </a:prstGeom>
+          <a:solidFill>
+            <a:srgbClr val="C3FFFC"/>
+          </a:solidFill>
+          <a:ln>
+            <a:noFill/>
+          </a:ln>
+        </p:spPr>
+        <p:txBody>
+          <a:bodyPr spcFirstLastPara="1" wrap="square" lIns="91425" tIns="91425" rIns="91425" bIns="91425" anchor="ctr" anchorCtr="0">
+            <a:noAutofit/>
+          </a:bodyPr>
+          <a:lstStyle/>
+          <a:p>
+            <a:pPr marL="0" marR="0" lvl="0" indent="0" algn="l" rtl="0">
+              <a:lnSpc>
+                <a:spcPct val="100000"/>
+              </a:lnSpc>
+              <a:spcBef>
+                <a:spcPts val="0"/>
+              </a:spcBef>
+              <a:spcAft>
+                <a:spcPts val="0"/>
+              </a:spcAft>
+              <a:buClr>
+                <a:srgbClr val="000000"/>
+              </a:buClr>
+              <a:buSzPts val="1400"/>
+              <a:buFont typeface="Arial"/>
+              <a:buNone/>
+            </a:pPr>
+            <a:endParaRPr sz="1400" b="0" i="0" u="none" strike="noStrike" cap="none">
+              <a:solidFill>
+                <a:srgbClr val="000000"/>
+              </a:solidFill>
+              <a:latin typeface="Arial"/>
+              <a:ea typeface="Arial"/>
+              <a:cs typeface="Arial"/>
+              <a:sym typeface="Arial"/>
+            </a:endParaRPr>
+          </a:p>
+        </p:txBody>
+      </p:sp>
+      <p:sp>
+        <p:nvSpPr>
+          <p:cNvPr id="181" name="Google Shape;181;p8"/>
+          <p:cNvSpPr txBox="1">
+            <a:spLocks noGrp="1"/>
+          </p:cNvSpPr>
+          <p:nvPr>
+            <p:ph type="body" idx="1"/>
+          </p:nvPr>
+        </p:nvSpPr>
+        <p:spPr>
+          <a:xfrm>
+            <a:off x="311700" y="1155049"/>
+            <a:ext cx="8520600" cy="3585142"/>
+          </a:xfrm>
+          <a:prstGeom prst="rect">
+            <a:avLst/>
+          </a:prstGeom>
+          <a:noFill/>
+          <a:ln>
+            <a:noFill/>
+          </a:ln>
+        </p:spPr>
+        <p:txBody>
+          <a:bodyPr spcFirstLastPara="1" wrap="square" lIns="91425" tIns="91425" rIns="91425" bIns="91425" anchor="t" anchorCtr="0">
+            <a:noAutofit/>
+          </a:bodyPr>
+          <a:lstStyle/>
+          <a:p>
+            <a:pPr marL="114300" lvl="0" indent="0" algn="l" rtl="0">
+              <a:lnSpc>
+                <a:spcPct val="115000"/>
+              </a:lnSpc>
+              <a:spcBef>
+                <a:spcPts val="0"/>
+              </a:spcBef>
+              <a:spcAft>
+                <a:spcPts val="0"/>
+              </a:spcAft>
+              <a:buSzPts val="1800"/>
+              <a:buNone/>
+            </a:pPr>
+            <a:r>
+              <a:rPr lang="fr-FR" sz="1400" dirty="0" err="1"/>
+              <a:t>wwwww</a:t>
+            </a:r>
+            <a:endParaRPr sz="1400" dirty="0"/>
+          </a:p>
+        </p:txBody>
+      </p:sp>
+      <p:sp>
+        <p:nvSpPr>
+          <p:cNvPr id="2" name="Google Shape;178;p8">
+            <a:extLst>
+              <a:ext uri="{FF2B5EF4-FFF2-40B4-BE49-F238E27FC236}">
+                <a16:creationId xmlns:a16="http://schemas.microsoft.com/office/drawing/2014/main" id="{A8AF3C33-4A88-5872-EAED-84B597DDCB98}"/>
+              </a:ext>
+            </a:extLst>
+          </p:cNvPr>
+          <p:cNvSpPr txBox="1">
+            <a:spLocks/>
+          </p:cNvSpPr>
+          <p:nvPr/>
+        </p:nvSpPr>
+        <p:spPr>
+          <a:xfrm>
+            <a:off x="1192664" y="779179"/>
+            <a:ext cx="5315100" cy="375870"/>
+          </a:xfrm>
+          <a:prstGeom prst="rect">
+            <a:avLst/>
+          </a:prstGeom>
+          <a:noFill/>
+          <a:ln>
+            <a:noFill/>
+          </a:ln>
+        </p:spPr>
+        <p:txBody>
+          <a:bodyPr spcFirstLastPara="1" wrap="square" lIns="91425" tIns="91425" rIns="91425" bIns="91425" anchor="t" anchorCtr="0">
+            <a:noAutofit/>
+          </a:bodyPr>
+          <a:lstStyle>
+            <a:defPPr marR="0" lvl="0" algn="l" rtl="0">
+              <a:lnSpc>
+                <a:spcPct val="100000"/>
+              </a:lnSpc>
+              <a:spcBef>
+                <a:spcPts val="0"/>
+              </a:spcBef>
+              <a:spcAft>
+                <a:spcPts val="0"/>
+              </a:spcAft>
+            </a:defPPr>
+            <a:lvl1pPr marR="0" lvl="0" algn="l" rtl="0">
+              <a:lnSpc>
+                <a:spcPct val="100000"/>
+              </a:lnSpc>
+              <a:spcBef>
+                <a:spcPts val="0"/>
+              </a:spcBef>
+              <a:spcAft>
+                <a:spcPts val="0"/>
+              </a:spcAft>
+              <a:buClr>
+                <a:schemeClr val="dk1"/>
+              </a:buClr>
+              <a:buSzPts val="2800"/>
+              <a:buFont typeface="Arial"/>
+              <a:buNone/>
+              <a:defRPr sz="2800" b="0" i="0" u="none" strike="noStrike" cap="none">
+                <a:solidFill>
+                  <a:schemeClr val="dk1"/>
+                </a:solidFill>
+                <a:latin typeface="Arial"/>
+                <a:ea typeface="Arial"/>
+                <a:cs typeface="Arial"/>
+                <a:sym typeface="Arial"/>
+              </a:defRPr>
+            </a:lvl1pPr>
+            <a:lvl2pPr marR="0" lvl="1" algn="l" rtl="0">
+              <a:lnSpc>
+                <a:spcPct val="100000"/>
+              </a:lnSpc>
+              <a:spcBef>
+                <a:spcPts val="0"/>
+              </a:spcBef>
+              <a:spcAft>
+                <a:spcPts val="0"/>
+              </a:spcAft>
+              <a:buClr>
+                <a:schemeClr val="dk1"/>
+              </a:buClr>
+              <a:buSzPts val="2800"/>
+              <a:buFont typeface="Arial"/>
+              <a:buNone/>
+              <a:defRPr sz="2800" b="0" i="0" u="none" strike="noStrike" cap="none">
+                <a:solidFill>
+                  <a:schemeClr val="dk1"/>
+                </a:solidFill>
+                <a:latin typeface="Arial"/>
+                <a:ea typeface="Arial"/>
+                <a:cs typeface="Arial"/>
+                <a:sym typeface="Arial"/>
+              </a:defRPr>
+            </a:lvl2pPr>
+            <a:lvl3pPr marR="0" lvl="2" algn="l" rtl="0">
+              <a:lnSpc>
+                <a:spcPct val="100000"/>
+              </a:lnSpc>
+              <a:spcBef>
+                <a:spcPts val="0"/>
+              </a:spcBef>
+              <a:spcAft>
+                <a:spcPts val="0"/>
+              </a:spcAft>
+              <a:buClr>
+                <a:schemeClr val="dk1"/>
+              </a:buClr>
+              <a:buSzPts val="2800"/>
+              <a:buFont typeface="Arial"/>
+              <a:buNone/>
+              <a:defRPr sz="2800" b="0" i="0" u="none" strike="noStrike" cap="none">
+                <a:solidFill>
+                  <a:schemeClr val="dk1"/>
+                </a:solidFill>
+                <a:latin typeface="Arial"/>
+                <a:ea typeface="Arial"/>
+                <a:cs typeface="Arial"/>
+                <a:sym typeface="Arial"/>
+              </a:defRPr>
+            </a:lvl3pPr>
+            <a:lvl4pPr marR="0" lvl="3" algn="l" rtl="0">
+              <a:lnSpc>
+                <a:spcPct val="100000"/>
+              </a:lnSpc>
+              <a:spcBef>
+                <a:spcPts val="0"/>
+              </a:spcBef>
+              <a:spcAft>
+                <a:spcPts val="0"/>
+              </a:spcAft>
+              <a:buClr>
+                <a:schemeClr val="dk1"/>
+              </a:buClr>
+              <a:buSzPts val="2800"/>
+              <a:buFont typeface="Arial"/>
+              <a:buNone/>
+              <a:defRPr sz="2800" b="0" i="0" u="none" strike="noStrike" cap="none">
+                <a:solidFill>
+                  <a:schemeClr val="dk1"/>
+                </a:solidFill>
+                <a:latin typeface="Arial"/>
+                <a:ea typeface="Arial"/>
+                <a:cs typeface="Arial"/>
+                <a:sym typeface="Arial"/>
+              </a:defRPr>
+            </a:lvl4pPr>
+            <a:lvl5pPr marR="0" lvl="4" algn="l" rtl="0">
+              <a:lnSpc>
+                <a:spcPct val="100000"/>
+              </a:lnSpc>
+              <a:spcBef>
+                <a:spcPts val="0"/>
+              </a:spcBef>
+              <a:spcAft>
+                <a:spcPts val="0"/>
+              </a:spcAft>
+              <a:buClr>
+                <a:schemeClr val="dk1"/>
+              </a:buClr>
+              <a:buSzPts val="2800"/>
+              <a:buFont typeface="Arial"/>
+              <a:buNone/>
+              <a:defRPr sz="2800" b="0" i="0" u="none" strike="noStrike" cap="none">
+                <a:solidFill>
+                  <a:schemeClr val="dk1"/>
+                </a:solidFill>
+                <a:latin typeface="Arial"/>
+                <a:ea typeface="Arial"/>
+                <a:cs typeface="Arial"/>
+                <a:sym typeface="Arial"/>
+              </a:defRPr>
+            </a:lvl5pPr>
+            <a:lvl6pPr marR="0" lvl="5" algn="l" rtl="0">
+              <a:lnSpc>
+                <a:spcPct val="100000"/>
+              </a:lnSpc>
+              <a:spcBef>
+                <a:spcPts val="0"/>
+              </a:spcBef>
+              <a:spcAft>
+                <a:spcPts val="0"/>
+              </a:spcAft>
+              <a:buClr>
+                <a:schemeClr val="dk1"/>
+              </a:buClr>
+              <a:buSzPts val="2800"/>
+              <a:buFont typeface="Arial"/>
+              <a:buNone/>
+              <a:defRPr sz="2800" b="0" i="0" u="none" strike="noStrike" cap="none">
+                <a:solidFill>
+                  <a:schemeClr val="dk1"/>
+                </a:solidFill>
+                <a:latin typeface="Arial"/>
+                <a:ea typeface="Arial"/>
+                <a:cs typeface="Arial"/>
+                <a:sym typeface="Arial"/>
+              </a:defRPr>
+            </a:lvl6pPr>
+            <a:lvl7pPr marR="0" lvl="6" algn="l" rtl="0">
+              <a:lnSpc>
+                <a:spcPct val="100000"/>
+              </a:lnSpc>
+              <a:spcBef>
+                <a:spcPts val="0"/>
+              </a:spcBef>
+              <a:spcAft>
+                <a:spcPts val="0"/>
+              </a:spcAft>
+              <a:buClr>
+                <a:schemeClr val="dk1"/>
+              </a:buClr>
+              <a:buSzPts val="2800"/>
+              <a:buFont typeface="Arial"/>
+              <a:buNone/>
+              <a:defRPr sz="2800" b="0" i="0" u="none" strike="noStrike" cap="none">
+                <a:solidFill>
+                  <a:schemeClr val="dk1"/>
+                </a:solidFill>
+                <a:latin typeface="Arial"/>
+                <a:ea typeface="Arial"/>
+                <a:cs typeface="Arial"/>
+                <a:sym typeface="Arial"/>
+              </a:defRPr>
+            </a:lvl7pPr>
+            <a:lvl8pPr marR="0" lvl="7" algn="l" rtl="0">
+              <a:lnSpc>
+                <a:spcPct val="100000"/>
+              </a:lnSpc>
+              <a:spcBef>
+                <a:spcPts val="0"/>
+              </a:spcBef>
+              <a:spcAft>
+                <a:spcPts val="0"/>
+              </a:spcAft>
+              <a:buClr>
+                <a:schemeClr val="dk1"/>
+              </a:buClr>
+              <a:buSzPts val="2800"/>
+              <a:buFont typeface="Arial"/>
+              <a:buNone/>
+              <a:defRPr sz="2800" b="0" i="0" u="none" strike="noStrike" cap="none">
+                <a:solidFill>
+                  <a:schemeClr val="dk1"/>
+                </a:solidFill>
+                <a:latin typeface="Arial"/>
+                <a:ea typeface="Arial"/>
+                <a:cs typeface="Arial"/>
+                <a:sym typeface="Arial"/>
+              </a:defRPr>
+            </a:lvl8pPr>
+            <a:lvl9pPr marR="0" lvl="8" algn="l" rtl="0">
+              <a:lnSpc>
+                <a:spcPct val="100000"/>
+              </a:lnSpc>
+              <a:spcBef>
+                <a:spcPts val="0"/>
+              </a:spcBef>
+              <a:spcAft>
+                <a:spcPts val="0"/>
+              </a:spcAft>
+              <a:buClr>
+                <a:schemeClr val="dk1"/>
+              </a:buClr>
+              <a:buSzPts val="2800"/>
+              <a:buFont typeface="Arial"/>
+              <a:buNone/>
+              <a:defRPr sz="2800" b="0" i="0" u="none" strike="noStrike" cap="none">
+                <a:solidFill>
+                  <a:schemeClr val="dk1"/>
+                </a:solidFill>
+                <a:latin typeface="Arial"/>
+                <a:ea typeface="Arial"/>
+                <a:cs typeface="Arial"/>
+                <a:sym typeface="Arial"/>
+              </a:defRPr>
+            </a:lvl9pPr>
+          </a:lstStyle>
+          <a:p>
+            <a:r>
+              <a:rPr lang="fr-FR" sz="1400" dirty="0">
+                <a:solidFill>
+                  <a:srgbClr val="0E3449"/>
+                </a:solidFill>
+                <a:latin typeface="Inter SemiBold"/>
+                <a:ea typeface="Inter SemiBold"/>
+              </a:rPr>
+              <a:t>National vs Rhône-Alpes</a:t>
+            </a:r>
+            <a:endParaRPr lang="fr-FR" sz="1400" dirty="0">
+              <a:solidFill>
+                <a:srgbClr val="0E3449"/>
+              </a:solidFill>
+              <a:latin typeface="Inter SemiBold"/>
+              <a:ea typeface="Inter SemiBold"/>
+              <a:sym typeface="Inter SemiBold"/>
+            </a:endParaRPr>
+          </a:p>
+        </p:txBody>
+      </p:sp>
+    </p:spTree>
+  </p:cSld>
+  <p:clrMapOvr>
+    <a:masterClrMapping/>
+  </p:clrMapOvr>
+</p:sld>
+</file>
+
+<file path=ppt/slides/slide7.xml><?xml version="1.0" encoding="utf-8"?>
+<p:sld xmlns:a="http://schemas.openxmlformats.org/drawingml/2006/main" xmlns:r="http://schemas.openxmlformats.org/officeDocument/2006/relationships" xmlns:p="http://schemas.openxmlformats.org/presentationml/2006/main">
+  <p:cSld>
+    <p:spTree>
+      <p:nvGrpSpPr>
+        <p:cNvPr id="1" name="Shape 177">
+          <a:extLst>
+            <a:ext uri="{FF2B5EF4-FFF2-40B4-BE49-F238E27FC236}">
+              <a16:creationId xmlns:a16="http://schemas.microsoft.com/office/drawing/2014/main" id="{651C4B41-11A2-44F8-130A-2E0FA85249A7}"/>
+            </a:ext>
+          </a:extLst>
+        </p:cNvPr>
+        <p:cNvGrpSpPr/>
+        <p:nvPr/>
+      </p:nvGrpSpPr>
+      <p:grpSpPr>
+        <a:xfrm>
+          <a:off x="0" y="0"/>
+          <a:ext cx="0" cy="0"/>
+          <a:chOff x="0" y="0"/>
+          <a:chExt cx="0" cy="0"/>
+        </a:xfrm>
+      </p:grpSpPr>
+      <p:sp>
+        <p:nvSpPr>
+          <p:cNvPr id="178" name="Google Shape;178;p8">
+            <a:extLst>
+              <a:ext uri="{FF2B5EF4-FFF2-40B4-BE49-F238E27FC236}">
+                <a16:creationId xmlns:a16="http://schemas.microsoft.com/office/drawing/2014/main" id="{834EF362-0DAC-26BA-DE49-3126B33E851C}"/>
+              </a:ext>
+            </a:extLst>
+          </p:cNvPr>
+          <p:cNvSpPr txBox="1">
+            <a:spLocks noGrp="1"/>
+          </p:cNvSpPr>
+          <p:nvPr>
+            <p:ph type="ctrTitle" idx="4294967295"/>
+          </p:nvPr>
+        </p:nvSpPr>
+        <p:spPr>
+          <a:xfrm>
+            <a:off x="1192664" y="403309"/>
+            <a:ext cx="5315100" cy="533100"/>
+          </a:xfrm>
+          <a:prstGeom prst="rect">
+            <a:avLst/>
+          </a:prstGeom>
+          <a:noFill/>
+          <a:ln>
+            <a:noFill/>
+          </a:ln>
+        </p:spPr>
+        <p:txBody>
+          <a:bodyPr spcFirstLastPara="1" wrap="square" lIns="91425" tIns="91425" rIns="91425" bIns="91425" anchor="t" anchorCtr="0">
+            <a:noAutofit/>
+          </a:bodyPr>
+          <a:lstStyle/>
+          <a:p>
+            <a:r>
+              <a:rPr lang="fr-FR" sz="2500" b="1" dirty="0">
+                <a:solidFill>
+                  <a:srgbClr val="0E3449"/>
+                </a:solidFill>
+                <a:latin typeface="Inter SemiBold"/>
+                <a:ea typeface="Inter SemiBold"/>
+              </a:rPr>
+              <a:t>Synthèse analyse descriptive</a:t>
+            </a:r>
+            <a:endParaRPr sz="2500" b="1" dirty="0">
+              <a:solidFill>
+                <a:srgbClr val="0E3449"/>
+              </a:solidFill>
+              <a:latin typeface="Inter SemiBold"/>
+              <a:ea typeface="Inter SemiBold"/>
+              <a:sym typeface="Inter SemiBold"/>
+            </a:endParaRPr>
+          </a:p>
+        </p:txBody>
+      </p:sp>
+      <p:pic>
+        <p:nvPicPr>
+          <p:cNvPr id="179" name="Google Shape;179;p8">
+            <a:extLst>
+              <a:ext uri="{FF2B5EF4-FFF2-40B4-BE49-F238E27FC236}">
+                <a16:creationId xmlns:a16="http://schemas.microsoft.com/office/drawing/2014/main" id="{8A80DC4D-7389-7D6B-512A-CD526060F7B7}"/>
+              </a:ext>
+            </a:extLst>
+          </p:cNvPr>
+          <p:cNvPicPr preferRelativeResize="0"/>
+          <p:nvPr/>
+        </p:nvPicPr>
+        <p:blipFill rotWithShape="1">
+          <a:blip r:embed="rId3">
+            <a:alphaModFix/>
+          </a:blip>
+          <a:srcRect/>
+          <a:stretch/>
+        </p:blipFill>
+        <p:spPr>
+          <a:xfrm>
+            <a:off x="463375" y="482852"/>
+            <a:ext cx="576900" cy="385904"/>
+          </a:xfrm>
+          <a:prstGeom prst="rect">
+            <a:avLst/>
+          </a:prstGeom>
+          <a:noFill/>
+          <a:ln>
+            <a:noFill/>
+          </a:ln>
+        </p:spPr>
+      </p:pic>
+      <p:sp>
+        <p:nvSpPr>
+          <p:cNvPr id="180" name="Google Shape;180;p8">
+            <a:extLst>
+              <a:ext uri="{FF2B5EF4-FFF2-40B4-BE49-F238E27FC236}">
+                <a16:creationId xmlns:a16="http://schemas.microsoft.com/office/drawing/2014/main" id="{EBA25A46-D404-8762-7027-760E3E380D1F}"/>
+              </a:ext>
+            </a:extLst>
+          </p:cNvPr>
+          <p:cNvSpPr/>
+          <p:nvPr/>
+        </p:nvSpPr>
+        <p:spPr>
+          <a:xfrm>
+            <a:off x="10225" y="4892025"/>
+            <a:ext cx="9144000" cy="251400"/>
+          </a:xfrm>
+          <a:prstGeom prst="rect">
+            <a:avLst/>
+          </a:prstGeom>
+          <a:solidFill>
+            <a:srgbClr val="C3FFFC"/>
+          </a:solidFill>
+          <a:ln>
+            <a:noFill/>
+          </a:ln>
+        </p:spPr>
+        <p:txBody>
+          <a:bodyPr spcFirstLastPara="1" wrap="square" lIns="91425" tIns="91425" rIns="91425" bIns="91425" anchor="ctr" anchorCtr="0">
+            <a:noAutofit/>
+          </a:bodyPr>
+          <a:lstStyle/>
+          <a:p>
+            <a:pPr marL="0" marR="0" lvl="0" indent="0" algn="l" rtl="0">
+              <a:lnSpc>
+                <a:spcPct val="100000"/>
+              </a:lnSpc>
+              <a:spcBef>
+                <a:spcPts val="0"/>
+              </a:spcBef>
+              <a:spcAft>
+                <a:spcPts val="0"/>
+              </a:spcAft>
+              <a:buClr>
+                <a:srgbClr val="000000"/>
+              </a:buClr>
+              <a:buSzPts val="1400"/>
+              <a:buFont typeface="Arial"/>
+              <a:buNone/>
+            </a:pPr>
+            <a:endParaRPr sz="1400" b="0" i="0" u="none" strike="noStrike" cap="none">
+              <a:solidFill>
+                <a:srgbClr val="000000"/>
+              </a:solidFill>
+              <a:latin typeface="Arial"/>
+              <a:ea typeface="Arial"/>
+              <a:cs typeface="Arial"/>
+              <a:sym typeface="Arial"/>
+            </a:endParaRPr>
+          </a:p>
+        </p:txBody>
+      </p:sp>
+      <p:sp>
+        <p:nvSpPr>
+          <p:cNvPr id="181" name="Google Shape;181;p8">
+            <a:extLst>
+              <a:ext uri="{FF2B5EF4-FFF2-40B4-BE49-F238E27FC236}">
+                <a16:creationId xmlns:a16="http://schemas.microsoft.com/office/drawing/2014/main" id="{5B35C8BD-B301-3C0E-2AF6-DBB412DE249A}"/>
+              </a:ext>
+            </a:extLst>
+          </p:cNvPr>
+          <p:cNvSpPr txBox="1">
+            <a:spLocks noGrp="1"/>
+          </p:cNvSpPr>
+          <p:nvPr>
+            <p:ph type="body" idx="1"/>
+          </p:nvPr>
+        </p:nvSpPr>
+        <p:spPr>
+          <a:xfrm>
+            <a:off x="311700" y="1155049"/>
+            <a:ext cx="8520600" cy="3585142"/>
+          </a:xfrm>
+          <a:prstGeom prst="rect">
+            <a:avLst/>
+          </a:prstGeom>
+          <a:noFill/>
+          <a:ln>
+            <a:noFill/>
+          </a:ln>
+        </p:spPr>
+        <p:txBody>
+          <a:bodyPr spcFirstLastPara="1" wrap="square" lIns="91425" tIns="91425" rIns="91425" bIns="91425" anchor="t" anchorCtr="0">
+            <a:noAutofit/>
+          </a:bodyPr>
+          <a:lstStyle/>
+          <a:p>
+            <a:pPr marL="114300" lvl="0" indent="0" algn="l" rtl="0">
+              <a:lnSpc>
+                <a:spcPct val="115000"/>
+              </a:lnSpc>
+              <a:spcBef>
+                <a:spcPts val="0"/>
+              </a:spcBef>
+              <a:spcAft>
+                <a:spcPts val="0"/>
+              </a:spcAft>
+              <a:buSzPts val="1800"/>
+              <a:buNone/>
+            </a:pPr>
+            <a:r>
+              <a:rPr lang="fr-FR" sz="1400" dirty="0" err="1"/>
+              <a:t>wwwww</a:t>
+            </a:r>
+            <a:endParaRPr sz="1400" dirty="0"/>
+          </a:p>
+        </p:txBody>
+      </p:sp>
+      <p:sp>
+        <p:nvSpPr>
+          <p:cNvPr id="2" name="Google Shape;178;p8">
+            <a:extLst>
+              <a:ext uri="{FF2B5EF4-FFF2-40B4-BE49-F238E27FC236}">
+                <a16:creationId xmlns:a16="http://schemas.microsoft.com/office/drawing/2014/main" id="{EBF06A3A-1FD1-62CC-FA82-868DA8F80F0D}"/>
+              </a:ext>
+            </a:extLst>
+          </p:cNvPr>
+          <p:cNvSpPr txBox="1">
+            <a:spLocks/>
+          </p:cNvSpPr>
+          <p:nvPr/>
+        </p:nvSpPr>
+        <p:spPr>
+          <a:xfrm>
+            <a:off x="1192664" y="779179"/>
+            <a:ext cx="5315100" cy="375870"/>
+          </a:xfrm>
+          <a:prstGeom prst="rect">
+            <a:avLst/>
+          </a:prstGeom>
+          <a:noFill/>
+          <a:ln>
+            <a:noFill/>
+          </a:ln>
+        </p:spPr>
+        <p:txBody>
+          <a:bodyPr spcFirstLastPara="1" wrap="square" lIns="91425" tIns="91425" rIns="91425" bIns="91425" anchor="t" anchorCtr="0">
+            <a:noAutofit/>
+          </a:bodyPr>
+          <a:lstStyle>
+            <a:defPPr marR="0" lvl="0" algn="l" rtl="0">
+              <a:lnSpc>
+                <a:spcPct val="100000"/>
+              </a:lnSpc>
+              <a:spcBef>
+                <a:spcPts val="0"/>
+              </a:spcBef>
+              <a:spcAft>
+                <a:spcPts val="0"/>
+              </a:spcAft>
+            </a:defPPr>
+            <a:lvl1pPr marR="0" lvl="0" algn="l" rtl="0">
+              <a:lnSpc>
+                <a:spcPct val="100000"/>
+              </a:lnSpc>
+              <a:spcBef>
+                <a:spcPts val="0"/>
+              </a:spcBef>
+              <a:spcAft>
+                <a:spcPts val="0"/>
+              </a:spcAft>
+              <a:buClr>
+                <a:schemeClr val="dk1"/>
+              </a:buClr>
+              <a:buSzPts val="2800"/>
+              <a:buFont typeface="Arial"/>
+              <a:buNone/>
+              <a:defRPr sz="2800" b="0" i="0" u="none" strike="noStrike" cap="none">
+                <a:solidFill>
+                  <a:schemeClr val="dk1"/>
+                </a:solidFill>
+                <a:latin typeface="Arial"/>
+                <a:ea typeface="Arial"/>
+                <a:cs typeface="Arial"/>
+                <a:sym typeface="Arial"/>
+              </a:defRPr>
+            </a:lvl1pPr>
+            <a:lvl2pPr marR="0" lvl="1" algn="l" rtl="0">
+              <a:lnSpc>
+                <a:spcPct val="100000"/>
+              </a:lnSpc>
+              <a:spcBef>
+                <a:spcPts val="0"/>
+              </a:spcBef>
+              <a:spcAft>
+                <a:spcPts val="0"/>
+              </a:spcAft>
+              <a:buClr>
+                <a:schemeClr val="dk1"/>
+              </a:buClr>
+              <a:buSzPts val="2800"/>
+              <a:buFont typeface="Arial"/>
+              <a:buNone/>
+              <a:defRPr sz="2800" b="0" i="0" u="none" strike="noStrike" cap="none">
+                <a:solidFill>
+                  <a:schemeClr val="dk1"/>
+                </a:solidFill>
+                <a:latin typeface="Arial"/>
+                <a:ea typeface="Arial"/>
+                <a:cs typeface="Arial"/>
+                <a:sym typeface="Arial"/>
+              </a:defRPr>
+            </a:lvl2pPr>
+            <a:lvl3pPr marR="0" lvl="2" algn="l" rtl="0">
+              <a:lnSpc>
+                <a:spcPct val="100000"/>
+              </a:lnSpc>
+              <a:spcBef>
+                <a:spcPts val="0"/>
+              </a:spcBef>
+              <a:spcAft>
+                <a:spcPts val="0"/>
+              </a:spcAft>
+              <a:buClr>
+                <a:schemeClr val="dk1"/>
+              </a:buClr>
+              <a:buSzPts val="2800"/>
+              <a:buFont typeface="Arial"/>
+              <a:buNone/>
+              <a:defRPr sz="2800" b="0" i="0" u="none" strike="noStrike" cap="none">
+                <a:solidFill>
+                  <a:schemeClr val="dk1"/>
+                </a:solidFill>
+                <a:latin typeface="Arial"/>
+                <a:ea typeface="Arial"/>
+                <a:cs typeface="Arial"/>
+                <a:sym typeface="Arial"/>
+              </a:defRPr>
+            </a:lvl3pPr>
+            <a:lvl4pPr marR="0" lvl="3" algn="l" rtl="0">
+              <a:lnSpc>
+                <a:spcPct val="100000"/>
+              </a:lnSpc>
+              <a:spcBef>
+                <a:spcPts val="0"/>
+              </a:spcBef>
+              <a:spcAft>
+                <a:spcPts val="0"/>
+              </a:spcAft>
+              <a:buClr>
+                <a:schemeClr val="dk1"/>
+              </a:buClr>
+              <a:buSzPts val="2800"/>
+              <a:buFont typeface="Arial"/>
+              <a:buNone/>
+              <a:defRPr sz="2800" b="0" i="0" u="none" strike="noStrike" cap="none">
+                <a:solidFill>
+                  <a:schemeClr val="dk1"/>
+                </a:solidFill>
+                <a:latin typeface="Arial"/>
+                <a:ea typeface="Arial"/>
+                <a:cs typeface="Arial"/>
+                <a:sym typeface="Arial"/>
+              </a:defRPr>
+            </a:lvl4pPr>
+            <a:lvl5pPr marR="0" lvl="4" algn="l" rtl="0">
+              <a:lnSpc>
+                <a:spcPct val="100000"/>
+              </a:lnSpc>
+              <a:spcBef>
+                <a:spcPts val="0"/>
+              </a:spcBef>
+              <a:spcAft>
+                <a:spcPts val="0"/>
+              </a:spcAft>
+              <a:buClr>
+                <a:schemeClr val="dk1"/>
+              </a:buClr>
+              <a:buSzPts val="2800"/>
+              <a:buFont typeface="Arial"/>
+              <a:buNone/>
+              <a:defRPr sz="2800" b="0" i="0" u="none" strike="noStrike" cap="none">
+                <a:solidFill>
+                  <a:schemeClr val="dk1"/>
+                </a:solidFill>
+                <a:latin typeface="Arial"/>
+                <a:ea typeface="Arial"/>
+                <a:cs typeface="Arial"/>
+                <a:sym typeface="Arial"/>
+              </a:defRPr>
+            </a:lvl5pPr>
+            <a:lvl6pPr marR="0" lvl="5" algn="l" rtl="0">
+              <a:lnSpc>
+                <a:spcPct val="100000"/>
+              </a:lnSpc>
+              <a:spcBef>
+                <a:spcPts val="0"/>
+              </a:spcBef>
+              <a:spcAft>
+                <a:spcPts val="0"/>
+              </a:spcAft>
+              <a:buClr>
+                <a:schemeClr val="dk1"/>
+              </a:buClr>
+              <a:buSzPts val="2800"/>
+              <a:buFont typeface="Arial"/>
+              <a:buNone/>
+              <a:defRPr sz="2800" b="0" i="0" u="none" strike="noStrike" cap="none">
+                <a:solidFill>
+                  <a:schemeClr val="dk1"/>
+                </a:solidFill>
+                <a:latin typeface="Arial"/>
+                <a:ea typeface="Arial"/>
+                <a:cs typeface="Arial"/>
+                <a:sym typeface="Arial"/>
+              </a:defRPr>
+            </a:lvl6pPr>
+            <a:lvl7pPr marR="0" lvl="6" algn="l" rtl="0">
+              <a:lnSpc>
+                <a:spcPct val="100000"/>
+              </a:lnSpc>
+              <a:spcBef>
+                <a:spcPts val="0"/>
+              </a:spcBef>
+              <a:spcAft>
+                <a:spcPts val="0"/>
+              </a:spcAft>
+              <a:buClr>
+                <a:schemeClr val="dk1"/>
+              </a:buClr>
+              <a:buSzPts val="2800"/>
+              <a:buFont typeface="Arial"/>
+              <a:buNone/>
+              <a:defRPr sz="2800" b="0" i="0" u="none" strike="noStrike" cap="none">
+                <a:solidFill>
+                  <a:schemeClr val="dk1"/>
+                </a:solidFill>
+                <a:latin typeface="Arial"/>
+                <a:ea typeface="Arial"/>
+                <a:cs typeface="Arial"/>
+                <a:sym typeface="Arial"/>
+              </a:defRPr>
+            </a:lvl7pPr>
+            <a:lvl8pPr marR="0" lvl="7" algn="l" rtl="0">
+              <a:lnSpc>
+                <a:spcPct val="100000"/>
+              </a:lnSpc>
+              <a:spcBef>
+                <a:spcPts val="0"/>
+              </a:spcBef>
+              <a:spcAft>
+                <a:spcPts val="0"/>
+              </a:spcAft>
+              <a:buClr>
+                <a:schemeClr val="dk1"/>
+              </a:buClr>
+              <a:buSzPts val="2800"/>
+              <a:buFont typeface="Arial"/>
+              <a:buNone/>
+              <a:defRPr sz="2800" b="0" i="0" u="none" strike="noStrike" cap="none">
+                <a:solidFill>
+                  <a:schemeClr val="dk1"/>
+                </a:solidFill>
+                <a:latin typeface="Arial"/>
+                <a:ea typeface="Arial"/>
+                <a:cs typeface="Arial"/>
+                <a:sym typeface="Arial"/>
+              </a:defRPr>
+            </a:lvl8pPr>
+            <a:lvl9pPr marR="0" lvl="8" algn="l" rtl="0">
+              <a:lnSpc>
+                <a:spcPct val="100000"/>
+              </a:lnSpc>
+              <a:spcBef>
+                <a:spcPts val="0"/>
+              </a:spcBef>
+              <a:spcAft>
+                <a:spcPts val="0"/>
+              </a:spcAft>
+              <a:buClr>
+                <a:schemeClr val="dk1"/>
+              </a:buClr>
+              <a:buSzPts val="2800"/>
+              <a:buFont typeface="Arial"/>
+              <a:buNone/>
+              <a:defRPr sz="2800" b="0" i="0" u="none" strike="noStrike" cap="none">
+                <a:solidFill>
+                  <a:schemeClr val="dk1"/>
+                </a:solidFill>
+                <a:latin typeface="Arial"/>
+                <a:ea typeface="Arial"/>
+                <a:cs typeface="Arial"/>
+                <a:sym typeface="Arial"/>
+              </a:defRPr>
+            </a:lvl9pPr>
+          </a:lstStyle>
+          <a:p>
+            <a:r>
+              <a:rPr lang="fr-FR" sz="1400" dirty="0">
+                <a:solidFill>
+                  <a:srgbClr val="0E3449"/>
+                </a:solidFill>
+                <a:latin typeface="Inter SemiBold"/>
+                <a:ea typeface="Inter SemiBold"/>
+              </a:rPr>
+              <a:t>Facteurs déterminants</a:t>
+            </a:r>
+            <a:endParaRPr lang="fr-FR" sz="1400" dirty="0">
+              <a:solidFill>
+                <a:srgbClr val="0E3449"/>
+              </a:solidFill>
+              <a:latin typeface="Inter SemiBold"/>
+              <a:ea typeface="Inter SemiBold"/>
+              <a:sym typeface="Inter SemiBold"/>
+            </a:endParaRPr>
+          </a:p>
+        </p:txBody>
+      </p:sp>
+    </p:spTree>
+    <p:extLst>
+      <p:ext uri="{BB962C8B-B14F-4D97-AF65-F5344CB8AC3E}">
+        <p14:creationId xmlns:p14="http://schemas.microsoft.com/office/powerpoint/2010/main" val="2290935718"/>
+      </p:ext>
+    </p:extLst>
+  </p:cSld>
+  <p:clrMapOvr>
+    <a:masterClrMapping/>
+  </p:clrMapOvr>
+</p:sld>
+</file>
+
+<file path=ppt/slides/slide8.xml><?xml version="1.0" encoding="utf-8"?>
+<p:sld xmlns:a="http://schemas.openxmlformats.org/drawingml/2006/main" xmlns:r="http://schemas.openxmlformats.org/officeDocument/2006/relationships" xmlns:p="http://schemas.openxmlformats.org/presentationml/2006/main">
+  <p:cSld>
+    <p:spTree>
+      <p:nvGrpSpPr>
+        <p:cNvPr id="1" name="Shape 177">
+          <a:extLst>
+            <a:ext uri="{FF2B5EF4-FFF2-40B4-BE49-F238E27FC236}">
+              <a16:creationId xmlns:a16="http://schemas.microsoft.com/office/drawing/2014/main" id="{C0DE9A44-9CF9-E733-9B6A-0F7633CFBC85}"/>
+            </a:ext>
+          </a:extLst>
+        </p:cNvPr>
+        <p:cNvGrpSpPr/>
+        <p:nvPr/>
+      </p:nvGrpSpPr>
+      <p:grpSpPr>
+        <a:xfrm>
+          <a:off x="0" y="0"/>
+          <a:ext cx="0" cy="0"/>
+          <a:chOff x="0" y="0"/>
+          <a:chExt cx="0" cy="0"/>
+        </a:xfrm>
+      </p:grpSpPr>
+      <p:sp>
+        <p:nvSpPr>
+          <p:cNvPr id="178" name="Google Shape;178;p8">
+            <a:extLst>
+              <a:ext uri="{FF2B5EF4-FFF2-40B4-BE49-F238E27FC236}">
+                <a16:creationId xmlns:a16="http://schemas.microsoft.com/office/drawing/2014/main" id="{1DE246AA-5B17-33A5-5EF2-125E8EA81EFC}"/>
+              </a:ext>
+            </a:extLst>
+          </p:cNvPr>
+          <p:cNvSpPr txBox="1">
+            <a:spLocks noGrp="1"/>
+          </p:cNvSpPr>
+          <p:nvPr>
+            <p:ph type="ctrTitle" idx="4294967295"/>
+          </p:nvPr>
+        </p:nvSpPr>
+        <p:spPr>
+          <a:xfrm>
+            <a:off x="1192664" y="403309"/>
+            <a:ext cx="5315100" cy="533100"/>
+          </a:xfrm>
+          <a:prstGeom prst="rect">
+            <a:avLst/>
+          </a:prstGeom>
+          <a:noFill/>
+          <a:ln>
+            <a:noFill/>
+          </a:ln>
+        </p:spPr>
+        <p:txBody>
+          <a:bodyPr spcFirstLastPara="1" wrap="square" lIns="91425" tIns="91425" rIns="91425" bIns="91425" anchor="t" anchorCtr="0">
+            <a:noAutofit/>
+          </a:bodyPr>
+          <a:lstStyle/>
+          <a:p>
+            <a:r>
+              <a:rPr lang="fr-FR" sz="2500" b="1" dirty="0">
+                <a:solidFill>
+                  <a:srgbClr val="0E3449"/>
+                </a:solidFill>
+                <a:latin typeface="Inter SemiBold"/>
+                <a:ea typeface="Inter SemiBold"/>
+              </a:rPr>
+              <a:t>Résultats du modèle</a:t>
+            </a:r>
+            <a:endParaRPr sz="2500" b="1" dirty="0">
+              <a:solidFill>
+                <a:srgbClr val="0E3449"/>
+              </a:solidFill>
+              <a:latin typeface="Inter SemiBold"/>
+              <a:ea typeface="Inter SemiBold"/>
+              <a:sym typeface="Inter SemiBold"/>
+            </a:endParaRPr>
+          </a:p>
+        </p:txBody>
+      </p:sp>
+      <p:pic>
+        <p:nvPicPr>
+          <p:cNvPr id="179" name="Google Shape;179;p8">
+            <a:extLst>
+              <a:ext uri="{FF2B5EF4-FFF2-40B4-BE49-F238E27FC236}">
+                <a16:creationId xmlns:a16="http://schemas.microsoft.com/office/drawing/2014/main" id="{9E380506-1D6F-31B2-517B-D06D18BF62B0}"/>
+              </a:ext>
+            </a:extLst>
+          </p:cNvPr>
+          <p:cNvPicPr preferRelativeResize="0"/>
+          <p:nvPr/>
+        </p:nvPicPr>
+        <p:blipFill rotWithShape="1">
+          <a:blip r:embed="rId3">
+            <a:alphaModFix/>
+          </a:blip>
+          <a:srcRect/>
+          <a:stretch/>
+        </p:blipFill>
+        <p:spPr>
+          <a:xfrm>
+            <a:off x="463375" y="482852"/>
+            <a:ext cx="576900" cy="385904"/>
+          </a:xfrm>
+          <a:prstGeom prst="rect">
+            <a:avLst/>
+          </a:prstGeom>
+          <a:noFill/>
+          <a:ln>
+            <a:noFill/>
+          </a:ln>
+        </p:spPr>
+      </p:pic>
+      <p:sp>
+        <p:nvSpPr>
+          <p:cNvPr id="180" name="Google Shape;180;p8">
+            <a:extLst>
+              <a:ext uri="{FF2B5EF4-FFF2-40B4-BE49-F238E27FC236}">
+                <a16:creationId xmlns:a16="http://schemas.microsoft.com/office/drawing/2014/main" id="{B33B5780-2AE1-5BF1-2FBD-D258D73D14AD}"/>
+              </a:ext>
+            </a:extLst>
+          </p:cNvPr>
+          <p:cNvSpPr/>
+          <p:nvPr/>
+        </p:nvSpPr>
+        <p:spPr>
+          <a:xfrm>
+            <a:off x="10225" y="4892025"/>
+            <a:ext cx="9144000" cy="251400"/>
+          </a:xfrm>
+          <a:prstGeom prst="rect">
+            <a:avLst/>
+          </a:prstGeom>
+          <a:solidFill>
+            <a:srgbClr val="C3FFFC"/>
+          </a:solidFill>
+          <a:ln>
+            <a:noFill/>
+          </a:ln>
+        </p:spPr>
+        <p:txBody>
+          <a:bodyPr spcFirstLastPara="1" wrap="square" lIns="91425" tIns="91425" rIns="91425" bIns="91425" anchor="ctr" anchorCtr="0">
+            <a:noAutofit/>
+          </a:bodyPr>
+          <a:lstStyle/>
+          <a:p>
+            <a:pPr marL="0" marR="0" lvl="0" indent="0" algn="l" rtl="0">
+              <a:lnSpc>
+                <a:spcPct val="100000"/>
+              </a:lnSpc>
+              <a:spcBef>
+                <a:spcPts val="0"/>
+              </a:spcBef>
+              <a:spcAft>
+                <a:spcPts val="0"/>
+              </a:spcAft>
+              <a:buClr>
+                <a:srgbClr val="000000"/>
+              </a:buClr>
+              <a:buSzPts val="1400"/>
+              <a:buFont typeface="Arial"/>
+              <a:buNone/>
+            </a:pPr>
+            <a:endParaRPr sz="1400" b="0" i="0" u="none" strike="noStrike" cap="none">
+              <a:solidFill>
+                <a:srgbClr val="000000"/>
+              </a:solidFill>
+              <a:latin typeface="Arial"/>
+              <a:ea typeface="Arial"/>
+              <a:cs typeface="Arial"/>
+              <a:sym typeface="Arial"/>
+            </a:endParaRPr>
+          </a:p>
+        </p:txBody>
+      </p:sp>
+      <p:sp>
+        <p:nvSpPr>
+          <p:cNvPr id="181" name="Google Shape;181;p8">
+            <a:extLst>
+              <a:ext uri="{FF2B5EF4-FFF2-40B4-BE49-F238E27FC236}">
+                <a16:creationId xmlns:a16="http://schemas.microsoft.com/office/drawing/2014/main" id="{8D7506E9-F193-B7D8-1AC3-28B8647B8462}"/>
+              </a:ext>
+            </a:extLst>
+          </p:cNvPr>
+          <p:cNvSpPr txBox="1">
+            <a:spLocks noGrp="1"/>
+          </p:cNvSpPr>
+          <p:nvPr>
+            <p:ph type="body" idx="1"/>
+          </p:nvPr>
+        </p:nvSpPr>
+        <p:spPr>
+          <a:xfrm>
+            <a:off x="311700" y="1155049"/>
+            <a:ext cx="8520600" cy="3585142"/>
+          </a:xfrm>
+          <a:prstGeom prst="rect">
+            <a:avLst/>
+          </a:prstGeom>
+          <a:noFill/>
+          <a:ln>
+            <a:noFill/>
+          </a:ln>
+        </p:spPr>
+        <p:txBody>
+          <a:bodyPr spcFirstLastPara="1" wrap="square" lIns="91425" tIns="91425" rIns="91425" bIns="91425" anchor="t" anchorCtr="0">
+            <a:noAutofit/>
+          </a:bodyPr>
+          <a:lstStyle/>
+          <a:p>
+            <a:pPr marL="114300" lvl="0" indent="0" algn="l" rtl="0">
+              <a:lnSpc>
+                <a:spcPct val="115000"/>
+              </a:lnSpc>
+              <a:spcBef>
+                <a:spcPts val="0"/>
+              </a:spcBef>
+              <a:spcAft>
+                <a:spcPts val="0"/>
+              </a:spcAft>
+              <a:buSzPts val="1800"/>
+              <a:buNone/>
+            </a:pPr>
+            <a:r>
+              <a:rPr lang="fr-FR" sz="1400" dirty="0" err="1"/>
+              <a:t>wwwww</a:t>
+            </a:r>
+            <a:endParaRPr sz="1400" dirty="0"/>
+          </a:p>
+        </p:txBody>
+      </p:sp>
+      <p:sp>
+        <p:nvSpPr>
+          <p:cNvPr id="2" name="Google Shape;178;p8">
+            <a:extLst>
+              <a:ext uri="{FF2B5EF4-FFF2-40B4-BE49-F238E27FC236}">
+                <a16:creationId xmlns:a16="http://schemas.microsoft.com/office/drawing/2014/main" id="{010F41C2-7624-67DE-B008-1F392C11A870}"/>
+              </a:ext>
+            </a:extLst>
+          </p:cNvPr>
+          <p:cNvSpPr txBox="1">
+            <a:spLocks/>
+          </p:cNvSpPr>
+          <p:nvPr/>
+        </p:nvSpPr>
+        <p:spPr>
+          <a:xfrm>
+            <a:off x="1192664" y="779179"/>
+            <a:ext cx="5315100" cy="375870"/>
+          </a:xfrm>
+          <a:prstGeom prst="rect">
+            <a:avLst/>
+          </a:prstGeom>
+          <a:noFill/>
+          <a:ln>
+            <a:noFill/>
+          </a:ln>
+        </p:spPr>
+        <p:txBody>
+          <a:bodyPr spcFirstLastPara="1" wrap="square" lIns="91425" tIns="91425" rIns="91425" bIns="91425" anchor="t" anchorCtr="0">
+            <a:noAutofit/>
+          </a:bodyPr>
+          <a:lstStyle>
+            <a:defPPr marR="0" lvl="0" algn="l" rtl="0">
+              <a:lnSpc>
+                <a:spcPct val="100000"/>
+              </a:lnSpc>
+              <a:spcBef>
+                <a:spcPts val="0"/>
+              </a:spcBef>
+              <a:spcAft>
+                <a:spcPts val="0"/>
+              </a:spcAft>
+            </a:defPPr>
+            <a:lvl1pPr marR="0" lvl="0" algn="l" rtl="0">
+              <a:lnSpc>
+                <a:spcPct val="100000"/>
+              </a:lnSpc>
+              <a:spcBef>
+                <a:spcPts val="0"/>
+              </a:spcBef>
+              <a:spcAft>
+                <a:spcPts val="0"/>
+              </a:spcAft>
+              <a:buClr>
+                <a:schemeClr val="dk1"/>
+              </a:buClr>
+              <a:buSzPts val="2800"/>
+              <a:buFont typeface="Arial"/>
+              <a:buNone/>
+              <a:defRPr sz="2800" b="0" i="0" u="none" strike="noStrike" cap="none">
+                <a:solidFill>
+                  <a:schemeClr val="dk1"/>
+                </a:solidFill>
+                <a:latin typeface="Arial"/>
+                <a:ea typeface="Arial"/>
+                <a:cs typeface="Arial"/>
+                <a:sym typeface="Arial"/>
+              </a:defRPr>
+            </a:lvl1pPr>
+            <a:lvl2pPr marR="0" lvl="1" algn="l" rtl="0">
+              <a:lnSpc>
+                <a:spcPct val="100000"/>
+              </a:lnSpc>
+              <a:spcBef>
+                <a:spcPts val="0"/>
+              </a:spcBef>
+              <a:spcAft>
+                <a:spcPts val="0"/>
+              </a:spcAft>
+              <a:buClr>
+                <a:schemeClr val="dk1"/>
+              </a:buClr>
+              <a:buSzPts val="2800"/>
+              <a:buFont typeface="Arial"/>
+              <a:buNone/>
+              <a:defRPr sz="2800" b="0" i="0" u="none" strike="noStrike" cap="none">
+                <a:solidFill>
+                  <a:schemeClr val="dk1"/>
+                </a:solidFill>
+                <a:latin typeface="Arial"/>
+                <a:ea typeface="Arial"/>
+                <a:cs typeface="Arial"/>
+                <a:sym typeface="Arial"/>
+              </a:defRPr>
+            </a:lvl2pPr>
+            <a:lvl3pPr marR="0" lvl="2" algn="l" rtl="0">
+              <a:lnSpc>
+                <a:spcPct val="100000"/>
+              </a:lnSpc>
+              <a:spcBef>
+                <a:spcPts val="0"/>
+              </a:spcBef>
+              <a:spcAft>
+                <a:spcPts val="0"/>
+              </a:spcAft>
+              <a:buClr>
+                <a:schemeClr val="dk1"/>
+              </a:buClr>
+              <a:buSzPts val="2800"/>
+              <a:buFont typeface="Arial"/>
+              <a:buNone/>
+              <a:defRPr sz="2800" b="0" i="0" u="none" strike="noStrike" cap="none">
+                <a:solidFill>
+                  <a:schemeClr val="dk1"/>
+                </a:solidFill>
+                <a:latin typeface="Arial"/>
+                <a:ea typeface="Arial"/>
+                <a:cs typeface="Arial"/>
+                <a:sym typeface="Arial"/>
+              </a:defRPr>
+            </a:lvl3pPr>
+            <a:lvl4pPr marR="0" lvl="3" algn="l" rtl="0">
+              <a:lnSpc>
+                <a:spcPct val="100000"/>
+              </a:lnSpc>
+              <a:spcBef>
+                <a:spcPts val="0"/>
+              </a:spcBef>
+              <a:spcAft>
+                <a:spcPts val="0"/>
+              </a:spcAft>
+              <a:buClr>
+                <a:schemeClr val="dk1"/>
+              </a:buClr>
+              <a:buSzPts val="2800"/>
+              <a:buFont typeface="Arial"/>
+              <a:buNone/>
+              <a:defRPr sz="2800" b="0" i="0" u="none" strike="noStrike" cap="none">
+                <a:solidFill>
+                  <a:schemeClr val="dk1"/>
+                </a:solidFill>
+                <a:latin typeface="Arial"/>
+                <a:ea typeface="Arial"/>
+                <a:cs typeface="Arial"/>
+                <a:sym typeface="Arial"/>
+              </a:defRPr>
+            </a:lvl4pPr>
+            <a:lvl5pPr marR="0" lvl="4" algn="l" rtl="0">
+              <a:lnSpc>
+                <a:spcPct val="100000"/>
+              </a:lnSpc>
+              <a:spcBef>
+                <a:spcPts val="0"/>
+              </a:spcBef>
+              <a:spcAft>
+                <a:spcPts val="0"/>
+              </a:spcAft>
+              <a:buClr>
+                <a:schemeClr val="dk1"/>
+              </a:buClr>
+              <a:buSzPts val="2800"/>
+              <a:buFont typeface="Arial"/>
+              <a:buNone/>
+              <a:defRPr sz="2800" b="0" i="0" u="none" strike="noStrike" cap="none">
+                <a:solidFill>
+                  <a:schemeClr val="dk1"/>
+                </a:solidFill>
+                <a:latin typeface="Arial"/>
+                <a:ea typeface="Arial"/>
+                <a:cs typeface="Arial"/>
+                <a:sym typeface="Arial"/>
+              </a:defRPr>
+            </a:lvl5pPr>
+            <a:lvl6pPr marR="0" lvl="5" algn="l" rtl="0">
+              <a:lnSpc>
+                <a:spcPct val="100000"/>
+              </a:lnSpc>
+              <a:spcBef>
+                <a:spcPts val="0"/>
+              </a:spcBef>
+              <a:spcAft>
+                <a:spcPts val="0"/>
+              </a:spcAft>
+              <a:buClr>
+                <a:schemeClr val="dk1"/>
+              </a:buClr>
+              <a:buSzPts val="2800"/>
+              <a:buFont typeface="Arial"/>
+              <a:buNone/>
+              <a:defRPr sz="2800" b="0" i="0" u="none" strike="noStrike" cap="none">
+                <a:solidFill>
+                  <a:schemeClr val="dk1"/>
+                </a:solidFill>
+                <a:latin typeface="Arial"/>
+                <a:ea typeface="Arial"/>
+                <a:cs typeface="Arial"/>
+                <a:sym typeface="Arial"/>
+              </a:defRPr>
+            </a:lvl6pPr>
+            <a:lvl7pPr marR="0" lvl="6" algn="l" rtl="0">
+              <a:lnSpc>
+                <a:spcPct val="100000"/>
+              </a:lnSpc>
+              <a:spcBef>
+                <a:spcPts val="0"/>
+              </a:spcBef>
+              <a:spcAft>
+                <a:spcPts val="0"/>
+              </a:spcAft>
+              <a:buClr>
+                <a:schemeClr val="dk1"/>
+              </a:buClr>
+              <a:buSzPts val="2800"/>
+              <a:buFont typeface="Arial"/>
+              <a:buNone/>
+              <a:defRPr sz="2800" b="0" i="0" u="none" strike="noStrike" cap="none">
+                <a:solidFill>
+                  <a:schemeClr val="dk1"/>
+                </a:solidFill>
+                <a:latin typeface="Arial"/>
+                <a:ea typeface="Arial"/>
+                <a:cs typeface="Arial"/>
+                <a:sym typeface="Arial"/>
+              </a:defRPr>
+            </a:lvl7pPr>
+            <a:lvl8pPr marR="0" lvl="7" algn="l" rtl="0">
+              <a:lnSpc>
+                <a:spcPct val="100000"/>
+              </a:lnSpc>
+              <a:spcBef>
+                <a:spcPts val="0"/>
+              </a:spcBef>
+              <a:spcAft>
+                <a:spcPts val="0"/>
+              </a:spcAft>
+              <a:buClr>
+                <a:schemeClr val="dk1"/>
+              </a:buClr>
+              <a:buSzPts val="2800"/>
+              <a:buFont typeface="Arial"/>
+              <a:buNone/>
+              <a:defRPr sz="2800" b="0" i="0" u="none" strike="noStrike" cap="none">
+                <a:solidFill>
+                  <a:schemeClr val="dk1"/>
+                </a:solidFill>
+                <a:latin typeface="Arial"/>
+                <a:ea typeface="Arial"/>
+                <a:cs typeface="Arial"/>
+                <a:sym typeface="Arial"/>
+              </a:defRPr>
+            </a:lvl8pPr>
+            <a:lvl9pPr marR="0" lvl="8" algn="l" rtl="0">
+              <a:lnSpc>
+                <a:spcPct val="100000"/>
+              </a:lnSpc>
+              <a:spcBef>
+                <a:spcPts val="0"/>
+              </a:spcBef>
+              <a:spcAft>
+                <a:spcPts val="0"/>
+              </a:spcAft>
+              <a:buClr>
+                <a:schemeClr val="dk1"/>
+              </a:buClr>
+              <a:buSzPts val="2800"/>
+              <a:buFont typeface="Arial"/>
+              <a:buNone/>
+              <a:defRPr sz="2800" b="0" i="0" u="none" strike="noStrike" cap="none">
+                <a:solidFill>
+                  <a:schemeClr val="dk1"/>
+                </a:solidFill>
+                <a:latin typeface="Arial"/>
+                <a:ea typeface="Arial"/>
+                <a:cs typeface="Arial"/>
+                <a:sym typeface="Arial"/>
+              </a:defRPr>
+            </a:lvl9pPr>
+          </a:lstStyle>
+          <a:p>
+            <a:r>
+              <a:rPr lang="fr-FR" sz="1400" dirty="0">
+                <a:solidFill>
+                  <a:srgbClr val="0E3449"/>
+                </a:solidFill>
+                <a:latin typeface="Inter SemiBold"/>
+                <a:ea typeface="Inter SemiBold"/>
+              </a:rPr>
+              <a:t>Prévision sur 3 jours</a:t>
+            </a:r>
+            <a:endParaRPr lang="fr-FR" sz="1400" dirty="0">
+              <a:solidFill>
+                <a:srgbClr val="0E3449"/>
+              </a:solidFill>
+              <a:latin typeface="Inter SemiBold"/>
+              <a:ea typeface="Inter SemiBold"/>
+              <a:sym typeface="Inter SemiBold"/>
+            </a:endParaRPr>
+          </a:p>
+        </p:txBody>
+      </p:sp>
+    </p:spTree>
+    <p:extLst>
+      <p:ext uri="{BB962C8B-B14F-4D97-AF65-F5344CB8AC3E}">
+        <p14:creationId xmlns:p14="http://schemas.microsoft.com/office/powerpoint/2010/main" val="3332770"/>
+      </p:ext>
+    </p:extLst>
+  </p:cSld>
+  <p:clrMapOvr>
+    <a:masterClrMapping/>
+  </p:clrMapOvr>
+</p:sld>
+</file>
+
+<file path=ppt/slides/slide9.xml><?xml version="1.0" encoding="utf-8"?>
+<p:sld xmlns:a="http://schemas.openxmlformats.org/drawingml/2006/main" xmlns:r="http://schemas.openxmlformats.org/officeDocument/2006/relationships" xmlns:p="http://schemas.openxmlformats.org/presentationml/2006/main">
+  <p:cSld>
+    <p:spTree>
+      <p:nvGrpSpPr>
+        <p:cNvPr id="1" name="Shape 68">
+          <a:extLst>
+            <a:ext uri="{FF2B5EF4-FFF2-40B4-BE49-F238E27FC236}">
+              <a16:creationId xmlns:a16="http://schemas.microsoft.com/office/drawing/2014/main" id="{58A036A3-12A3-0876-F8C4-16DF8EB015C1}"/>
+            </a:ext>
+          </a:extLst>
+        </p:cNvPr>
+        <p:cNvGrpSpPr/>
+        <p:nvPr/>
+      </p:nvGrpSpPr>
+      <p:grpSpPr>
+        <a:xfrm>
+          <a:off x="0" y="0"/>
+          <a:ext cx="0" cy="0"/>
+          <a:chOff x="0" y="0"/>
+          <a:chExt cx="0" cy="0"/>
+        </a:xfrm>
+      </p:grpSpPr>
+      <p:sp>
+        <p:nvSpPr>
+          <p:cNvPr id="70" name="Google Shape;70;p3">
+            <a:extLst>
+              <a:ext uri="{FF2B5EF4-FFF2-40B4-BE49-F238E27FC236}">
+                <a16:creationId xmlns:a16="http://schemas.microsoft.com/office/drawing/2014/main" id="{C70766F9-707C-9B0E-5A17-F03AA1792E9A}"/>
+              </a:ext>
+            </a:extLst>
+          </p:cNvPr>
+          <p:cNvSpPr txBox="1">
+            <a:spLocks noGrp="1"/>
+          </p:cNvSpPr>
+          <p:nvPr>
+            <p:ph type="ctrTitle" idx="4294967295"/>
+          </p:nvPr>
+        </p:nvSpPr>
+        <p:spPr>
+          <a:xfrm>
+            <a:off x="1192664" y="403309"/>
+            <a:ext cx="5315100" cy="533100"/>
+          </a:xfrm>
+          <a:prstGeom prst="rect">
+            <a:avLst/>
+          </a:prstGeom>
+          <a:noFill/>
+          <a:ln>
+            <a:noFill/>
+          </a:ln>
+        </p:spPr>
+        <p:txBody>
+          <a:bodyPr spcFirstLastPara="1" wrap="square" lIns="91425" tIns="91425" rIns="91425" bIns="91425" anchor="t" anchorCtr="0">
+            <a:noAutofit/>
+          </a:bodyPr>
+          <a:lstStyle/>
+          <a:p>
+            <a:pPr marL="0" marR="0" lvl="0" indent="0" algn="l" rtl="0">
+              <a:lnSpc>
+                <a:spcPct val="100000"/>
+              </a:lnSpc>
+              <a:spcBef>
+                <a:spcPts val="0"/>
+              </a:spcBef>
+              <a:spcAft>
+                <a:spcPts val="0"/>
+              </a:spcAft>
+              <a:buClr>
+                <a:schemeClr val="dk1"/>
+              </a:buClr>
+              <a:buSzPts val="2800"/>
+              <a:buFont typeface="Arial"/>
+              <a:buNone/>
+            </a:pPr>
+            <a:r>
+              <a:rPr lang="fr-FR" sz="2500" b="1" i="0" u="none" strike="noStrike" cap="none" dirty="0">
+                <a:solidFill>
+                  <a:srgbClr val="0E3449"/>
+                </a:solidFill>
+                <a:latin typeface="Inter SemiBold"/>
+                <a:ea typeface="Inter SemiBold"/>
+                <a:cs typeface="Inter SemiBold"/>
+                <a:sym typeface="Inter SemiBold"/>
+              </a:rPr>
+              <a:t>Valeur ajoutée et perspectives</a:t>
+            </a:r>
+            <a:endParaRPr sz="2500" b="1" i="0" u="none" strike="noStrike" cap="none" dirty="0">
+              <a:solidFill>
+                <a:srgbClr val="0E3449"/>
+              </a:solidFill>
+              <a:latin typeface="Inter SemiBold"/>
+              <a:ea typeface="Inter SemiBold"/>
+              <a:cs typeface="Inter SemiBold"/>
+              <a:sym typeface="Inter SemiBold"/>
+            </a:endParaRPr>
+          </a:p>
+        </p:txBody>
+      </p:sp>
+      <p:sp>
+        <p:nvSpPr>
+          <p:cNvPr id="71" name="Google Shape;71;p3">
+            <a:extLst>
+              <a:ext uri="{FF2B5EF4-FFF2-40B4-BE49-F238E27FC236}">
+                <a16:creationId xmlns:a16="http://schemas.microsoft.com/office/drawing/2014/main" id="{0D254382-3C85-366A-BCB7-C959FDC33EDB}"/>
+              </a:ext>
+            </a:extLst>
+          </p:cNvPr>
+          <p:cNvSpPr/>
+          <p:nvPr/>
+        </p:nvSpPr>
+        <p:spPr>
+          <a:xfrm>
+            <a:off x="10225" y="4892025"/>
+            <a:ext cx="9144000" cy="251400"/>
+          </a:xfrm>
+          <a:prstGeom prst="rect">
+            <a:avLst/>
+          </a:prstGeom>
+          <a:solidFill>
+            <a:srgbClr val="C3FFFC"/>
+          </a:solidFill>
+          <a:ln>
+            <a:noFill/>
+          </a:ln>
+        </p:spPr>
+        <p:txBody>
+          <a:bodyPr spcFirstLastPara="1" wrap="square" lIns="91425" tIns="91425" rIns="91425" bIns="91425" anchor="ctr" anchorCtr="0">
+            <a:noAutofit/>
+          </a:bodyPr>
+          <a:lstStyle/>
+          <a:p>
+            <a:pPr marL="0" marR="0" lvl="0" indent="0" algn="l" rtl="0">
+              <a:lnSpc>
+                <a:spcPct val="100000"/>
+              </a:lnSpc>
+              <a:spcBef>
+                <a:spcPts val="0"/>
+              </a:spcBef>
+              <a:spcAft>
+                <a:spcPts val="0"/>
+              </a:spcAft>
+              <a:buClr>
+                <a:srgbClr val="000000"/>
+              </a:buClr>
+              <a:buSzPts val="1400"/>
+              <a:buFont typeface="Arial"/>
+              <a:buNone/>
+            </a:pPr>
+            <a:endParaRPr sz="1400" b="0" i="0" u="none" strike="noStrike" cap="none">
+              <a:solidFill>
+                <a:srgbClr val="000000"/>
+              </a:solidFill>
+              <a:latin typeface="Arial"/>
+              <a:ea typeface="Arial"/>
+              <a:cs typeface="Arial"/>
+              <a:sym typeface="Arial"/>
+            </a:endParaRPr>
+          </a:p>
+        </p:txBody>
+      </p:sp>
+      <p:pic>
+        <p:nvPicPr>
+          <p:cNvPr id="72" name="Google Shape;72;p3">
+            <a:extLst>
+              <a:ext uri="{FF2B5EF4-FFF2-40B4-BE49-F238E27FC236}">
+                <a16:creationId xmlns:a16="http://schemas.microsoft.com/office/drawing/2014/main" id="{AAA56D5A-3C19-B942-63B4-B096D6200852}"/>
+              </a:ext>
+            </a:extLst>
+          </p:cNvPr>
+          <p:cNvPicPr preferRelativeResize="0"/>
+          <p:nvPr/>
+        </p:nvPicPr>
+        <p:blipFill rotWithShape="1">
+          <a:blip r:embed="rId3">
+            <a:alphaModFix/>
+          </a:blip>
+          <a:srcRect/>
+          <a:stretch/>
+        </p:blipFill>
+        <p:spPr>
+          <a:xfrm>
+            <a:off x="463375" y="482852"/>
+            <a:ext cx="576900" cy="385904"/>
+          </a:xfrm>
+          <a:prstGeom prst="rect">
+            <a:avLst/>
+          </a:prstGeom>
+          <a:noFill/>
+          <a:ln>
+            <a:noFill/>
+          </a:ln>
+        </p:spPr>
+      </p:pic>
+      <p:sp>
+        <p:nvSpPr>
+          <p:cNvPr id="4" name="Google Shape;181;p8">
+            <a:extLst>
+              <a:ext uri="{FF2B5EF4-FFF2-40B4-BE49-F238E27FC236}">
+                <a16:creationId xmlns:a16="http://schemas.microsoft.com/office/drawing/2014/main" id="{CDF36CC3-8438-C6F0-3E01-EC79EEB762E1}"/>
+              </a:ext>
+            </a:extLst>
+          </p:cNvPr>
+          <p:cNvSpPr txBox="1">
+            <a:spLocks noGrp="1"/>
+          </p:cNvSpPr>
+          <p:nvPr>
+            <p:ph type="body" idx="1"/>
+          </p:nvPr>
+        </p:nvSpPr>
+        <p:spPr>
+          <a:xfrm>
+            <a:off x="311700" y="1155049"/>
+            <a:ext cx="8520600" cy="3585142"/>
+          </a:xfrm>
+          <a:prstGeom prst="rect">
+            <a:avLst/>
+          </a:prstGeom>
+          <a:noFill/>
+          <a:ln>
+            <a:noFill/>
+          </a:ln>
+        </p:spPr>
+        <p:txBody>
+          <a:bodyPr spcFirstLastPara="1" wrap="square" lIns="91425" tIns="91425" rIns="91425" bIns="91425" anchor="t" anchorCtr="0">
+            <a:noAutofit/>
+          </a:bodyPr>
+          <a:lstStyle/>
+          <a:p>
+            <a:pPr marL="114300" lvl="0" indent="0" algn="l" rtl="0">
+              <a:lnSpc>
+                <a:spcPct val="115000"/>
+              </a:lnSpc>
+              <a:spcBef>
+                <a:spcPts val="0"/>
+              </a:spcBef>
+              <a:spcAft>
+                <a:spcPts val="0"/>
+              </a:spcAft>
+              <a:buSzPts val="1800"/>
+              <a:buNone/>
+            </a:pPr>
+            <a:r>
+              <a:rPr lang="fr-FR" sz="1400" dirty="0" err="1"/>
+              <a:t>wwwww</a:t>
+            </a:r>
+            <a:endParaRPr sz="1400" dirty="0"/>
+          </a:p>
+        </p:txBody>
+      </p:sp>
+    </p:spTree>
+    <p:extLst>
+      <p:ext uri="{BB962C8B-B14F-4D97-AF65-F5344CB8AC3E}">
+        <p14:creationId xmlns:p14="http://schemas.microsoft.com/office/powerpoint/2010/main" val="3315518580"/>
+      </p:ext>
+    </p:extLst>
   </p:cSld>
   <p:clrMapOvr>
     <a:masterClrMapping/>
